--- a/lecons/USA/Population Geography/20_USA_POP_L16_Carrying_Capacity.pptx
+++ b/lecons/USA/Population Geography/20_USA_POP_L16_Carrying_Capacity.pptx
@@ -59,9 +59,12 @@
     <p:sldId id="307" r:id="rId53"/>
     <p:sldId id="308" r:id="rId54"/>
     <p:sldId id="309" r:id="rId55"/>
+    <p:sldId id="310" r:id="rId56"/>
+    <p:sldId id="311" r:id="rId57"/>
+    <p:sldId id="312" r:id="rId58"/>
   </p:sldIdLst>
   <p:notesMasterIdLst>
-    <p:notesMasterId r:id="rId56"/>
+    <p:notesMasterId r:id="rId59"/>
   </p:notesMasterIdLst>
   <p:sldSz cx="12192000" cy="6858000"/>
   <p:notesSz cx="6858000" cy="12192000"/>
@@ -643,7 +646,7 @@
           <a:p>
             <a:r>
               <a:rPr lang="en-US" dirty="0"/>
-              <a:t>Question 1: What is the problem in the situation? Think for a moment, then raise your hand to answer.</a:t>
+              <a:t>Take your time to copy this part; we will continue together.</a:t>
             </a:r>
             <a:endParaRPr lang="en-US" dirty="0"/>
           </a:p>
@@ -731,7 +734,7 @@
           <a:p>
             <a:r>
               <a:rPr lang="en-US" dirty="0"/>
-              <a:t>Good. The land cannot support all the people and animals.</a:t>
+              <a:t>Listen carefully to this situation from real life. A Fulani herdsman near Garoua has pasture for 50 cattle. In the rainy season the grass is plentiful and his animals are fat, so he buys 50 more. Soon the grass is eaten down to the bare soil, the ground becomes hard and dusty, and his 100 animals become thin and weak. His son asks: "Why did the herd suffer when it became bigger, and how many animals can the land really feed?" Think about it, because I am going to ask you some questions.</a:t>
             </a:r>
             <a:endParaRPr lang="en-US" dirty="0"/>
           </a:p>
@@ -819,7 +822,7 @@
           <a:p>
             <a:r>
               <a:rPr lang="en-US" dirty="0"/>
-              <a:t>Question 2: What is the limit called? Think for a moment, then raise your hand to answer.</a:t>
+              <a:t>Question 1: What is the problem in the situation? Think for a moment, then raise your hand to answer.</a:t>
             </a:r>
             <a:endParaRPr lang="en-US" dirty="0"/>
           </a:p>
@@ -907,7 +910,7 @@
           <a:p>
             <a:r>
               <a:rPr lang="en-US" dirty="0"/>
-              <a:t>Good. The carrying capacity.</a:t>
+              <a:t>Good. The herdsman exceeded the number of animals the land can support.</a:t>
             </a:r>
             <a:endParaRPr lang="en-US" dirty="0"/>
           </a:p>
@@ -995,7 +998,7 @@
           <a:p>
             <a:r>
               <a:rPr lang="en-US" dirty="0"/>
-              <a:t>Question 3: How can it be raised? Think for a moment, then raise your hand to answer.</a:t>
+              <a:t>Question 2: What is this limit called? Think for a moment, then raise your hand to answer.</a:t>
             </a:r>
             <a:endParaRPr lang="en-US" dirty="0"/>
           </a:p>
@@ -1083,7 +1086,7 @@
           <a:p>
             <a:r>
               <a:rPr lang="en-US" dirty="0"/>
-              <a:t>Good. By better technology, like irrigation and improved pastures.</a:t>
+              <a:t>Good. The carrying capacity.</a:t>
             </a:r>
             <a:endParaRPr lang="en-US" dirty="0"/>
           </a:p>
@@ -1171,7 +1174,7 @@
           <a:p>
             <a:r>
               <a:rPr lang="en-US" dirty="0"/>
-              <a:t>From this situation, the action we are working towards in this lesson is the following: raise the carrying capacity of our land through sustainable techniques.</a:t>
+              <a:t>Question 3: What happened to the land? Think for a moment, then raise your hand to answer.</a:t>
             </a:r>
             <a:endParaRPr lang="en-US" dirty="0"/>
           </a:p>
@@ -1259,7 +1262,7 @@
           <a:p>
             <a:r>
               <a:rPr lang="en-US" dirty="0"/>
-              <a:t>Why is this lesson important for you? This lesson helps us to understand the limits of land and how to raise them.</a:t>
+              <a:t>Good. It was degraded: bare, hard and dusty soil.</a:t>
             </a:r>
             <a:endParaRPr lang="en-US" dirty="0"/>
           </a:p>
@@ -1347,7 +1350,7 @@
           <a:p>
             <a:r>
               <a:rPr lang="en-US" dirty="0"/>
-              <a:t>Activity 1. Look carefully at this diagram: growth towards carrying capacity. Observe every detail before I ask the question.</a:t>
+              <a:t>From this situation, the action we are working towards in this lesson is the following: keep herds and farming within the carrying capacity of the land, and rotate pastures.</a:t>
             </a:r>
             <a:endParaRPr lang="en-US" dirty="0"/>
           </a:p>
@@ -1435,7 +1438,7 @@
           <a:p>
             <a:r>
               <a:rPr lang="en-US" dirty="0"/>
-              <a:t>Here is the question for Activity 1: What happens when a population overshoots its carrying capacity? Take one minute to think and write your answer in your rough notebook.</a:t>
+              <a:t>Why is this lesson important for you? This lesson helps us to understand the limits of the environment and the need to balance population and resources.</a:t>
             </a:r>
             <a:endParaRPr lang="en-US" dirty="0"/>
           </a:p>
@@ -1611,7 +1614,7 @@
           <a:p>
             <a:r>
               <a:rPr lang="en-US" dirty="0"/>
-              <a:t>Let us check the answer together. Resources are damaged and the population crashes.</a:t>
+              <a:t>Activity 1. Look carefully at this diagram: too many animals on a pasture. Observe every detail before I ask the question.</a:t>
             </a:r>
             <a:endParaRPr lang="en-US" dirty="0"/>
           </a:p>
@@ -1699,7 +1702,7 @@
           <a:p>
             <a:r>
               <a:rPr lang="en-US" dirty="0"/>
-              <a:t>Activity 2. Look carefully at this picture: cattle grazing. Observe every detail before I ask the question.</a:t>
+              <a:t>Here is the question for Activity 1: What happens when the number of cattle exceeds the carrying capacity? Take one minute to think and write your answer in your rough notebook.</a:t>
             </a:r>
             <a:endParaRPr lang="en-US" dirty="0"/>
           </a:p>
@@ -1787,7 +1790,7 @@
           <a:p>
             <a:r>
               <a:rPr lang="en-US" dirty="0"/>
-              <a:t>Here is the question for Activity 2: What happens to pasture if there are too many cattle? Take one minute to think and write your answer in your rough notebook.</a:t>
+              <a:t>Let us check the answer together. The grass disappears, the soil is eroded and the animals become weak.</a:t>
             </a:r>
             <a:endParaRPr lang="en-US" dirty="0"/>
           </a:p>
@@ -1875,7 +1878,7 @@
           <a:p>
             <a:r>
               <a:rPr lang="en-US" dirty="0"/>
-              <a:t>Let us check the answer together. It is overgrazed and the soil erodes.</a:t>
+              <a:t>Activity 2. Look carefully at this picture: three ways of adjusting. Observe every detail before I ask the question.</a:t>
             </a:r>
             <a:endParaRPr lang="en-US" dirty="0"/>
           </a:p>
@@ -1963,7 +1966,7 @@
           <a:p>
             <a:r>
               <a:rPr lang="en-US" dirty="0"/>
-              <a:t>Activity 3. Look carefully at this picture: irrigated fields. Observe every detail before I ask the question.</a:t>
+              <a:t>Here is the question for Activity 2: What happens to growth on an S-curve near the carrying capacity? Take one minute to think and write your answer in your rough notebook.</a:t>
             </a:r>
             <a:endParaRPr lang="en-US" dirty="0"/>
           </a:p>
@@ -2051,7 +2054,7 @@
           <a:p>
             <a:r>
               <a:rPr lang="en-US" dirty="0"/>
-              <a:t>Here is the question for Activity 3: How does irrigation raise carrying capacity? Take one minute to think and write your answer in your rough notebook.</a:t>
+              <a:t>Let us check the answer together. It slows down and the population becomes stable.</a:t>
             </a:r>
             <a:endParaRPr lang="en-US" dirty="0"/>
           </a:p>
@@ -2139,7 +2142,7 @@
           <a:p>
             <a:r>
               <a:rPr lang="en-US" dirty="0"/>
-              <a:t>Let us check the answer together. It allows more crops per year on the same land.</a:t>
+              <a:t>Activity 3. Look carefully at this diagram: the S-curve and the J-curve. Observe every detail before I ask the question.</a:t>
             </a:r>
             <a:endParaRPr lang="en-US" dirty="0"/>
           </a:p>
@@ -2227,7 +2230,7 @@
           <a:p>
             <a:r>
               <a:rPr lang="en-US" dirty="0"/>
-              <a:t>Activity 4. Look carefully at this diagram: overgrazed land. Observe every detail before I ask the question.</a:t>
+              <a:t>Here is the question for Activity 3: What happens after the J-curve overshoots the carrying capacity? Take one minute to think and write your answer in your rough notebook.</a:t>
             </a:r>
             <a:endParaRPr lang="en-US" dirty="0"/>
           </a:p>
@@ -2315,7 +2318,7 @@
           <a:p>
             <a:r>
               <a:rPr lang="en-US" dirty="0"/>
-              <a:t>Here is the question for Activity 4: Give two other ways to adjust to carrying capacity. Take one minute to think and write your answer in your rough notebook.</a:t>
+              <a:t>Let us check the answer together. The population crashes, then may oscillate.</a:t>
             </a:r>
             <a:endParaRPr lang="en-US" dirty="0"/>
           </a:p>
@@ -2403,7 +2406,7 @@
           <a:p>
             <a:r>
               <a:rPr lang="en-US" dirty="0"/>
-              <a:t>Let us check the answer together. Reduce herd size, migrate, or import food (also family planning).</a:t>
+              <a:t>Activity 4. Look carefully at this picture: three population-resource regimes. Observe every detail before I ask the question.</a:t>
             </a:r>
             <a:endParaRPr lang="en-US" dirty="0"/>
           </a:p>
@@ -2491,7 +2494,7 @@
           <a:p>
             <a:r>
               <a:rPr lang="en-US" dirty="0"/>
-              <a:t>Our topic is Population Growth and Resources, and the sub-topic is Population and Resource Relationships. The key notions we shall use today are: carrying capacity, overshoot, resource, technology, population-resource regime. At the end, you should be able to do this: learners are able to explain carrying capacity and how societies adjust to it.</a:t>
+              <a:t>Our topic is Population Growth and Resources, and the sub-topic is Population and Resource Relationships. The key notions we shall use today are: carrying capacity, S-curve (logistic growth), J-curve, overshoot, oscillation, instantaneous adjustment, overpopulation, sustainable and underpopulation regimes. At the end, you should be able to do this: learners are able to explain carrying capacity and the ways populations adjust to it, and apply them to overgrazing around Garoua.</a:t>
             </a:r>
             <a:endParaRPr lang="en-US" dirty="0"/>
           </a:p>
@@ -2579,7 +2582,7 @@
           <a:p>
             <a:r>
               <a:rPr lang="en-US" dirty="0"/>
-              <a:t>Activity 5. Look carefully at this diagram: population-resource regimes. Observe every detail before I ask the question.</a:t>
+              <a:t>Here is the question for Activity 4: In which regime are resources not fully used? Take one minute to think and write your answer in your rough notebook.</a:t>
             </a:r>
             <a:endParaRPr lang="en-US" dirty="0"/>
           </a:p>
@@ -2667,7 +2670,7 @@
           <a:p>
             <a:r>
               <a:rPr lang="en-US" dirty="0"/>
-              <a:t>Here is the question for Activity 5: Which regime has few people and rich resources but low technology? Take one minute to think and write your answer in your rough notebook.</a:t>
+              <a:t>Let us check the answer together. Underpopulation.</a:t>
             </a:r>
             <a:endParaRPr lang="en-US" dirty="0"/>
           </a:p>
@@ -2755,7 +2758,7 @@
           <a:p>
             <a:r>
               <a:rPr lang="en-US" dirty="0"/>
-              <a:t>Let us check the answer together. The Brazilian type (Congo, Gabon).</a:t>
+              <a:t>Activity 5. Look carefully at this picture: drought in the Sahel. Observe every detail before I ask the question.</a:t>
             </a:r>
             <a:endParaRPr lang="en-US" dirty="0"/>
           </a:p>
@@ -2843,7 +2846,7 @@
           <a:p>
             <a:r>
               <a:rPr lang="en-US" dirty="0"/>
-              <a:t>Now we are going to copy the board summary. Write the title and the headings neatly in your notebooks. I will give you enough time for each slide, so do not rush.</a:t>
+              <a:t>Here is the question for Activity 5: Why are parts of the Sahel said to be overpopulated? Take one minute to think and write your answer in your rough notebook.</a:t>
             </a:r>
             <a:endParaRPr lang="en-US" dirty="0"/>
           </a:p>
@@ -2931,7 +2934,7 @@
           <a:p>
             <a:r>
               <a:rPr lang="en-US" dirty="0"/>
-              <a:t>Let us copy Meaning of Carrying Capacity. Carrying capacity can be understood as follows. On this slide we have Carrying capacity. Write each point on a new line, with the key term first, and explain it in your own words when we revise. When you finish, we go to the next slide.</a:t>
+              <a:t>Let us check the answer together. Too many people and animals for the land lead to desertification and food shortages.</a:t>
             </a:r>
             <a:endParaRPr lang="en-US" dirty="0"/>
           </a:p>
@@ -3019,7 +3022,7 @@
           <a:p>
             <a:r>
               <a:rPr lang="en-US" dirty="0"/>
-              <a:t>We continue with Meaning of Carrying Capacity. On this slide we have Overshoot. Write each point on a new line, with the key term first, and explain it in your own words when we revise.</a:t>
+              <a:t>Now we are going to copy the board summary. Write the title and the headings neatly in your notebooks. I will give you enough time for each slide, so do not rush.</a:t>
             </a:r>
             <a:endParaRPr lang="en-US" dirty="0"/>
           </a:p>
@@ -3107,7 +3110,7 @@
           <a:p>
             <a:r>
               <a:rPr lang="en-US" dirty="0"/>
-              <a:t>Now draw this illustration in your notebook: carrying capacity. Give it a title and label it clearly.</a:t>
+              <a:t>Let us copy the definitions. The key terms of this lesson are defined as follows. On this slide we have Carrying capacity (K). Write each point on a new line, with the key term first, and explain it in your own words when we revise. When you finish, we go to the next slide.</a:t>
             </a:r>
             <a:endParaRPr lang="en-US" dirty="0"/>
           </a:p>
@@ -3195,7 +3198,7 @@
           <a:p>
             <a:r>
               <a:rPr lang="en-US" dirty="0"/>
-              <a:t>Let us copy Ways of Adjusting Resources to Carrying Capacity. People adjust to carrying capacity in the following ways. On this slide we have Raising resources. Write each point on a new line, with the key term first, and explain it in your own words when we revise. When you finish, we go to the next slide.</a:t>
+              <a:t>We continue with the definitions. On this slide we have Overshoot and Oscillation. Write each point on a new line, with the key term first, and explain it in your own words when we revise.</a:t>
             </a:r>
             <a:endParaRPr lang="en-US" dirty="0"/>
           </a:p>
@@ -3283,7 +3286,7 @@
           <a:p>
             <a:r>
               <a:rPr lang="en-US" dirty="0"/>
-              <a:t>We continue with Ways of Adjusting Resources to Carrying Capacity. On this slide we have Reducing demand and Trade and conservation. Write each point on a new line, with the key term first, and explain it in your own words when we revise.</a:t>
+              <a:t>Let us copy Meaning of Carrying Capacity. Carrying capacity is presented as follows. Copy the point on Limit on the left, then draw the diagram on the right: too many animals. Give it a title and label it clearly.</a:t>
             </a:r>
             <a:endParaRPr lang="en-US" dirty="0"/>
           </a:p>
@@ -3371,7 +3374,7 @@
           <a:p>
             <a:r>
               <a:rPr lang="en-US" dirty="0"/>
-              <a:t>Let us copy Population–Resources Regimes. Zelinsky identified the following regimes. On this slide we have U.S. type (technological source area). Write each point on a new line, with the key term first, and explain it in your own words when we revise. When you finish, we go to the next slide.</a:t>
+              <a:t>We continue with Meaning of Carrying Capacity. On this slide we have Example and Human populations. Write each point on a new line, with the key term first, and explain it in your own words when we revise.</a:t>
             </a:r>
             <a:endParaRPr lang="en-US" dirty="0"/>
           </a:p>
@@ -3459,7 +3462,7 @@
           <a:p>
             <a:r>
               <a:rPr lang="en-US" dirty="0"/>
-              <a:t>Before we start the new lesson, let us correct the homework I gave you at the end of Lesson 15: Types of Migration. The question was: Make a table of push and pull factors for a migrant from your village to a town. Take out your exercise books.</a:t>
+              <a:t>Before we start the new lesson, let us correct the homework I gave you at the end of Lesson 15: Types of Migration. The question was: Define carrying capacity. Take out your exercise books.</a:t>
             </a:r>
             <a:endParaRPr lang="en-US" dirty="0"/>
           </a:p>
@@ -3547,7 +3550,7 @@
           <a:p>
             <a:r>
               <a:rPr lang="en-US" dirty="0"/>
-              <a:t>We continue with Population–Resources Regimes. On this slide we have European and Egyptian types. Write each point on a new line, with the key term first, and explain it in your own words when we revise. When you finish, we go to the next slide.</a:t>
+              <a:t>Let us copy Ways of Adjusting to Carrying Capacity. Populations adjust to carrying capacity in the following ways. Copy the point on Progressive adjustment (S-curve) on the left, then draw the diagram on the right: three ways of adjusting. Give it a title and label it clearly.</a:t>
             </a:r>
             <a:endParaRPr lang="en-US" dirty="0"/>
           </a:p>
@@ -3635,7 +3638,7 @@
           <a:p>
             <a:r>
               <a:rPr lang="en-US" dirty="0"/>
-              <a:t>We continue with Population–Resources Regimes. On this slide we have Brazilian and Arctic-desert types. Write each point on a new line, with the key term first, and explain it in your own words when we revise.</a:t>
+              <a:t>Copy the point on Overshoot and oscillation (J-curve) on the left, then draw the diagram on the right: the S-curve and the J-curve. Give it a title and label it clearly.</a:t>
             </a:r>
             <a:endParaRPr lang="en-US" dirty="0"/>
           </a:p>
@@ -3723,7 +3726,7 @@
           <a:p>
             <a:r>
               <a:rPr lang="en-US" dirty="0"/>
-              <a:t>Now draw this illustration in your notebook: population–resources regimes. Give it a title and label it clearly.</a:t>
+              <a:t>We continue with Ways of Adjusting to Carrying Capacity. On this slide we have Boom and bust and Instantaneous adjustment. Write each point on a new line, with the key term first, and explain it in your own words when we revise.</a:t>
             </a:r>
             <a:endParaRPr lang="en-US" dirty="0"/>
           </a:p>
@@ -3811,7 +3814,7 @@
           <a:p>
             <a:r>
               <a:rPr lang="en-US" dirty="0"/>
-              <a:t>Now let us check what you have understood. Question 1: Define carrying capacity. Answer in your exercise book.</a:t>
+              <a:t>Let us copy Population-Resource Regimes. The population-resource regimes are the following. Copy the point on Overpopulation regime on the left, then draw the diagram on the right: three regimes. Give it a title and label it clearly.</a:t>
             </a:r>
             <a:endParaRPr lang="en-US" dirty="0"/>
           </a:p>
@@ -3899,7 +3902,7 @@
           <a:p>
             <a:r>
               <a:rPr lang="en-US" dirty="0"/>
-              <a:t>The expected answer is: the largest population an area can support without damage. If you got it right, well done.</a:t>
+              <a:t>Copy the point on Sustainable regime on the left, then draw the diagram on the right: drought in the Sahel. Give it a title and label it clearly.</a:t>
             </a:r>
             <a:endParaRPr lang="en-US" dirty="0"/>
           </a:p>
@@ -3987,7 +3990,7 @@
           <a:p>
             <a:r>
               <a:rPr lang="en-US" dirty="0"/>
-              <a:t>Now let us check what you have understood. Question 2: Give two ways to raise carrying capacity. Answer in your exercise book.</a:t>
+              <a:t>We continue with Population-Resource Regimes. On this slide we have Underpopulation regime. Write each point on a new line, with the key term first, and explain it in your own words when we revise.</a:t>
             </a:r>
             <a:endParaRPr lang="en-US" dirty="0"/>
           </a:p>
@@ -4075,7 +4078,7 @@
           <a:p>
             <a:r>
               <a:rPr lang="en-US" dirty="0"/>
-              <a:t>The expected answer is: irrigation and fertiliser (also new crops, technology, trade). If you got it right, well done.</a:t>
+              <a:t>Now let us check what you have understood. Question 1: Distinguish between the S-curve and the J-curve. Answer in your exercise book.</a:t>
             </a:r>
             <a:endParaRPr lang="en-US" dirty="0"/>
           </a:p>
@@ -4163,7 +4166,7 @@
           <a:p>
             <a:r>
               <a:rPr lang="en-US" dirty="0"/>
-              <a:t>For those who need more practice, fill in the blanks in your exercise book. The answers are: number 1, overshoot; number 2, raises; number 3, Egyptian.</a:t>
+              <a:t>The expected answer is: on the S-curve growth slows and stabilises at the carrying capacity; on the J-curve growth overshoots it and then crashes. If you got it right, well done.</a:t>
             </a:r>
             <a:endParaRPr lang="en-US" dirty="0"/>
           </a:p>
@@ -4251,7 +4254,7 @@
           <a:p>
             <a:r>
               <a:rPr lang="en-US" dirty="0"/>
-              <a:t>For your homework: Explain how carrying capacity could be raised in your area. We shall correct it at the beginning of our next lesson.</a:t>
+              <a:t>Now let us check what you have understood. Question 2: Which curve is more stable, and why? Answer in your exercise book.</a:t>
             </a:r>
             <a:endParaRPr lang="en-US" dirty="0"/>
           </a:p>
@@ -4339,7 +4342,7 @@
           <a:p>
             <a:r>
               <a:rPr lang="en-US" dirty="0"/>
-              <a:t>Our next lesson will be on Lesson 17: Overpopulation, Underpopulation and Optimum Population. Thank you for your attention, and see you next time.</a:t>
+              <a:t>The expected answer is: the S-curve, because the population adjusts to its resources without destroying them. If you got it right, well done.</a:t>
             </a:r>
             <a:endParaRPr lang="en-US" dirty="0"/>
           </a:p>
@@ -4427,7 +4430,7 @@
           <a:p>
             <a:r>
               <a:rPr lang="en-US" dirty="0"/>
-              <a:t>Here is a good answer. Push factors (village): poverty, lack of jobs, poor schools and hospitals, small farms. Pull factors (town): jobs, schools, hospitals, electricity, entertainment. Compare it with your own answer and correct your work in red.</a:t>
+              <a:t>Here is a good answer. Carrying capacity is the maximum number of people (or animals) an environment can support for a long time without being damaged. Compare it with your own answer and correct your work in red.</a:t>
             </a:r>
             <a:endParaRPr lang="en-US" dirty="0"/>
           </a:p>
@@ -4515,7 +4518,7 @@
           <a:p>
             <a:r>
               <a:rPr lang="en-US" dirty="0"/>
-              <a:t>Let us play the bilingual game. I say a word in English, and you give me the French word. Then we do the reverse.</a:t>
+              <a:t>For those who need more practice, fill in the blanks in your exercise book. The answers are: number 1, carrying; number 2, S; number 3, sustainable.</a:t>
             </a:r>
             <a:endParaRPr lang="en-US" dirty="0"/>
           </a:p>
@@ -4603,7 +4606,7 @@
           <a:p>
             <a:r>
               <a:rPr lang="en-US" dirty="0"/>
-              <a:t>I record this information in the official logbook of the class after the lesson.</a:t>
+              <a:t>For your homework: Give one indicator of overpopulation. We shall correct it at the beginning of our next lesson.</a:t>
             </a:r>
             <a:endParaRPr lang="en-US" dirty="0"/>
           </a:p>
@@ -4691,7 +4694,7 @@
           <a:p>
             <a:r>
               <a:rPr lang="en-US" dirty="0"/>
-              <a:t>I complete the second page of the logbook: the matter taught, the evaluation, the homework and the attendance.</a:t>
+              <a:t>Our next lesson will be on Lesson 17: Overpopulation, Underpopulation and Optimum Population. Thank you for your attention, and see you next time.</a:t>
             </a:r>
             <a:endParaRPr lang="en-US" dirty="0"/>
           </a:p>
@@ -4779,7 +4782,7 @@
           <a:p>
             <a:r>
               <a:rPr lang="en-US" dirty="0"/>
-              <a:t>This slide is for me, the teacher: it gives the timing of the lesson and what to do if the projector is not available.</a:t>
+              <a:t>Let us play the bilingual game. I say a word in English, and you give me the French word. Then we do the reverse.</a:t>
             </a:r>
             <a:endParaRPr lang="en-US" dirty="0"/>
           </a:p>
@@ -4867,7 +4870,7 @@
           <a:p>
             <a:r>
               <a:rPr lang="en-US" dirty="0"/>
-              <a:t>These are the references and picture credits used to prepare this lesson.</a:t>
+              <a:t>I record this information in the official logbook of the class after the lesson.</a:t>
             </a:r>
             <a:endParaRPr lang="en-US" dirty="0"/>
           </a:p>
@@ -4891,6 +4894,270 @@
             <a:fld id="{F7021451-1387-4CA6-816F-3879F97B5CBC}" type="slidenum">
               <a:rPr lang="en-US"/>
               <a:t>54</a:t>
+            </a:fld>
+            <a:endParaRPr lang="en-US"/>
+          </a:p>
+        </p:txBody>
+      </p:sp>
+    </p:spTree>
+    <p:extLst>
+      <p:ext uri="{BB962C8B-B14F-4D97-AF65-F5344CB8AC3E}">
+        <p14:creationId xmlns:p14="http://schemas.microsoft.com/office/powerpoint/2010/main" val="1024086991"/>
+      </p:ext>
+    </p:extLst>
+  </p:cSld>
+  <p:clrMapOvr>
+    <a:masterClrMapping/>
+  </p:clrMapOvr>
+</p:notes>
+</file>
+
+<file path=ppt/notesSlides/notesSlide55.xml><?xml version="1.0" encoding="utf-8"?>
+<p:notes xmlns:a="http://schemas.openxmlformats.org/drawingml/2006/main" xmlns:r="http://schemas.openxmlformats.org/officeDocument/2006/relationships" xmlns:p="http://schemas.openxmlformats.org/presentationml/2006/main">
+  <p:cSld>
+    <p:spTree>
+      <p:nvGrpSpPr>
+        <p:cNvPr id="1" name=""/>
+        <p:cNvGrpSpPr/>
+        <p:nvPr/>
+      </p:nvGrpSpPr>
+      <p:grpSpPr>
+        <a:xfrm>
+          <a:off x="0" y="0"/>
+          <a:ext cx="0" cy="0"/>
+          <a:chOff x="0" y="0"/>
+          <a:chExt cx="0" cy="0"/>
+        </a:xfrm>
+      </p:grpSpPr>
+      <p:sp>
+        <p:nvSpPr>
+          <p:cNvPr id="2" name="Slide Image Placeholder 1"/>
+          <p:cNvSpPr>
+            <a:spLocks noGrp="1" noRot="1" noChangeAspect="1"/>
+          </p:cNvSpPr>
+          <p:nvPr>
+            <p:ph type="sldImg"/>
+          </p:nvPr>
+        </p:nvSpPr>
+        <p:spPr/>
+      </p:sp>
+      <p:sp>
+        <p:nvSpPr>
+          <p:cNvPr id="3" name="Notes Placeholder 2"/>
+          <p:cNvSpPr>
+            <a:spLocks noGrp="1"/>
+          </p:cNvSpPr>
+          <p:nvPr>
+            <p:ph type="body" idx="1"/>
+          </p:nvPr>
+        </p:nvSpPr>
+        <p:spPr/>
+        <p:txBody>
+          <a:bodyPr/>
+          <a:lstStyle/>
+          <a:p>
+            <a:r>
+              <a:rPr lang="en-US" dirty="0"/>
+              <a:t>I complete the second page of the logbook: the matter taught, the evaluation, the homework and the attendance.</a:t>
+            </a:r>
+            <a:endParaRPr lang="en-US" dirty="0"/>
+          </a:p>
+        </p:txBody>
+      </p:sp>
+      <p:sp>
+        <p:nvSpPr>
+          <p:cNvPr id="4" name="Slide Number Placeholder 3"/>
+          <p:cNvSpPr>
+            <a:spLocks noGrp="1"/>
+          </p:cNvSpPr>
+          <p:nvPr>
+            <p:ph type="sldNum" sz="quarter" idx="10"/>
+          </p:nvPr>
+        </p:nvSpPr>
+        <p:spPr/>
+        <p:txBody>
+          <a:bodyPr/>
+          <a:lstStyle/>
+          <a:p>
+            <a:fld id="{F7021451-1387-4CA6-816F-3879F97B5CBC}" type="slidenum">
+              <a:rPr lang="en-US"/>
+              <a:t>55</a:t>
+            </a:fld>
+            <a:endParaRPr lang="en-US"/>
+          </a:p>
+        </p:txBody>
+      </p:sp>
+    </p:spTree>
+    <p:extLst>
+      <p:ext uri="{BB962C8B-B14F-4D97-AF65-F5344CB8AC3E}">
+        <p14:creationId xmlns:p14="http://schemas.microsoft.com/office/powerpoint/2010/main" val="1024086991"/>
+      </p:ext>
+    </p:extLst>
+  </p:cSld>
+  <p:clrMapOvr>
+    <a:masterClrMapping/>
+  </p:clrMapOvr>
+</p:notes>
+</file>
+
+<file path=ppt/notesSlides/notesSlide56.xml><?xml version="1.0" encoding="utf-8"?>
+<p:notes xmlns:a="http://schemas.openxmlformats.org/drawingml/2006/main" xmlns:r="http://schemas.openxmlformats.org/officeDocument/2006/relationships" xmlns:p="http://schemas.openxmlformats.org/presentationml/2006/main">
+  <p:cSld>
+    <p:spTree>
+      <p:nvGrpSpPr>
+        <p:cNvPr id="1" name=""/>
+        <p:cNvGrpSpPr/>
+        <p:nvPr/>
+      </p:nvGrpSpPr>
+      <p:grpSpPr>
+        <a:xfrm>
+          <a:off x="0" y="0"/>
+          <a:ext cx="0" cy="0"/>
+          <a:chOff x="0" y="0"/>
+          <a:chExt cx="0" cy="0"/>
+        </a:xfrm>
+      </p:grpSpPr>
+      <p:sp>
+        <p:nvSpPr>
+          <p:cNvPr id="2" name="Slide Image Placeholder 1"/>
+          <p:cNvSpPr>
+            <a:spLocks noGrp="1" noRot="1" noChangeAspect="1"/>
+          </p:cNvSpPr>
+          <p:nvPr>
+            <p:ph type="sldImg"/>
+          </p:nvPr>
+        </p:nvSpPr>
+        <p:spPr/>
+      </p:sp>
+      <p:sp>
+        <p:nvSpPr>
+          <p:cNvPr id="3" name="Notes Placeholder 2"/>
+          <p:cNvSpPr>
+            <a:spLocks noGrp="1"/>
+          </p:cNvSpPr>
+          <p:nvPr>
+            <p:ph type="body" idx="1"/>
+          </p:nvPr>
+        </p:nvSpPr>
+        <p:spPr/>
+        <p:txBody>
+          <a:bodyPr/>
+          <a:lstStyle/>
+          <a:p>
+            <a:r>
+              <a:rPr lang="en-US" dirty="0"/>
+              <a:t>This slide is for me, the teacher: it gives the timing of the lesson and what to do if the projector is not available.</a:t>
+            </a:r>
+            <a:endParaRPr lang="en-US" dirty="0"/>
+          </a:p>
+        </p:txBody>
+      </p:sp>
+      <p:sp>
+        <p:nvSpPr>
+          <p:cNvPr id="4" name="Slide Number Placeholder 3"/>
+          <p:cNvSpPr>
+            <a:spLocks noGrp="1"/>
+          </p:cNvSpPr>
+          <p:nvPr>
+            <p:ph type="sldNum" sz="quarter" idx="10"/>
+          </p:nvPr>
+        </p:nvSpPr>
+        <p:spPr/>
+        <p:txBody>
+          <a:bodyPr/>
+          <a:lstStyle/>
+          <a:p>
+            <a:fld id="{F7021451-1387-4CA6-816F-3879F97B5CBC}" type="slidenum">
+              <a:rPr lang="en-US"/>
+              <a:t>56</a:t>
+            </a:fld>
+            <a:endParaRPr lang="en-US"/>
+          </a:p>
+        </p:txBody>
+      </p:sp>
+    </p:spTree>
+    <p:extLst>
+      <p:ext uri="{BB962C8B-B14F-4D97-AF65-F5344CB8AC3E}">
+        <p14:creationId xmlns:p14="http://schemas.microsoft.com/office/powerpoint/2010/main" val="1024086991"/>
+      </p:ext>
+    </p:extLst>
+  </p:cSld>
+  <p:clrMapOvr>
+    <a:masterClrMapping/>
+  </p:clrMapOvr>
+</p:notes>
+</file>
+
+<file path=ppt/notesSlides/notesSlide57.xml><?xml version="1.0" encoding="utf-8"?>
+<p:notes xmlns:a="http://schemas.openxmlformats.org/drawingml/2006/main" xmlns:r="http://schemas.openxmlformats.org/officeDocument/2006/relationships" xmlns:p="http://schemas.openxmlformats.org/presentationml/2006/main">
+  <p:cSld>
+    <p:spTree>
+      <p:nvGrpSpPr>
+        <p:cNvPr id="1" name=""/>
+        <p:cNvGrpSpPr/>
+        <p:nvPr/>
+      </p:nvGrpSpPr>
+      <p:grpSpPr>
+        <a:xfrm>
+          <a:off x="0" y="0"/>
+          <a:ext cx="0" cy="0"/>
+          <a:chOff x="0" y="0"/>
+          <a:chExt cx="0" cy="0"/>
+        </a:xfrm>
+      </p:grpSpPr>
+      <p:sp>
+        <p:nvSpPr>
+          <p:cNvPr id="2" name="Slide Image Placeholder 1"/>
+          <p:cNvSpPr>
+            <a:spLocks noGrp="1" noRot="1" noChangeAspect="1"/>
+          </p:cNvSpPr>
+          <p:nvPr>
+            <p:ph type="sldImg"/>
+          </p:nvPr>
+        </p:nvSpPr>
+        <p:spPr/>
+      </p:sp>
+      <p:sp>
+        <p:nvSpPr>
+          <p:cNvPr id="3" name="Notes Placeholder 2"/>
+          <p:cNvSpPr>
+            <a:spLocks noGrp="1"/>
+          </p:cNvSpPr>
+          <p:nvPr>
+            <p:ph type="body" idx="1"/>
+          </p:nvPr>
+        </p:nvSpPr>
+        <p:spPr/>
+        <p:txBody>
+          <a:bodyPr/>
+          <a:lstStyle/>
+          <a:p>
+            <a:r>
+              <a:rPr lang="en-US" dirty="0"/>
+              <a:t>These are the references and picture credits used to prepare this lesson.</a:t>
+            </a:r>
+            <a:endParaRPr lang="en-US" dirty="0"/>
+          </a:p>
+        </p:txBody>
+      </p:sp>
+      <p:sp>
+        <p:nvSpPr>
+          <p:cNvPr id="4" name="Slide Number Placeholder 3"/>
+          <p:cNvSpPr>
+            <a:spLocks noGrp="1"/>
+          </p:cNvSpPr>
+          <p:nvPr>
+            <p:ph type="sldNum" sz="quarter" idx="10"/>
+          </p:nvPr>
+        </p:nvSpPr>
+        <p:spPr/>
+        <p:txBody>
+          <a:bodyPr/>
+          <a:lstStyle/>
+          <a:p>
+            <a:fld id="{F7021451-1387-4CA6-816F-3879F97B5CBC}" type="slidenum">
+              <a:rPr lang="en-US"/>
+              <a:t>57</a:t>
             </a:fld>
             <a:endParaRPr lang="en-US"/>
           </a:p>
@@ -5043,7 +5310,7 @@
           <a:p>
             <a:r>
               <a:rPr lang="en-US" dirty="0"/>
-              <a:t>By the end of this lesson, you should be able to do three things. Number 1: define carrying capacity. Number 2: explain ways of raising carrying capacity. Number 3: describe population-resource regimes.</a:t>
+              <a:t>Take your time to copy this part; we will continue together.</a:t>
             </a:r>
             <a:endParaRPr lang="en-US" dirty="0"/>
           </a:p>
@@ -5131,7 +5398,7 @@
           <a:p>
             <a:r>
               <a:rPr lang="en-US" dirty="0"/>
-              <a:t>Let us first remember what you already know. Population is growing fast in LEDCs. Overgrazing damages land. Keep this in mind, because we shall build on it today.</a:t>
+              <a:t>By the end of this lesson, you should be able to do five things. Number 1: define carrying capacity. Number 2: describe the S-curve of progressive adjustment. Number 3: describe the J-curve of overshoot and oscillation. Number 4: describe instantaneous adjustment. Number 5: describe the three population-resource regimes.</a:t>
             </a:r>
             <a:endParaRPr lang="en-US" dirty="0"/>
           </a:p>
@@ -5219,7 +5486,7 @@
           <a:p>
             <a:r>
               <a:rPr lang="en-US" dirty="0"/>
-              <a:t>Listen carefully to this situation from real life. In parts of the Far North, herds and families have increased, but the grass and water have not. After a dry year, cattle die and some families leave for the south. Think about it, because I am going to ask you some questions.</a:t>
+              <a:t>Let us first remember what you already know. Rural-rural migration moves herders to new pastures. Overgrazing destroys grass. Resources are limited. Keep this in mind, because we shall build on it today.</a:t>
             </a:r>
             <a:endParaRPr lang="en-US" dirty="0"/>
           </a:p>
@@ -6599,7 +6866,7 @@
         <p:spPr>
           <a:xfrm>
             <a:off x="0" y="658368"/>
-            <a:ext cx="5120640" cy="5833872"/>
+            <a:ext cx="1463040" cy="5833872"/>
           </a:xfrm>
           <a:prstGeom prst="rect">
             <a:avLst/>
@@ -6614,8 +6881,8 @@
         </p:nvSpPr>
         <p:spPr>
           <a:xfrm>
-            <a:off x="5349240" y="1005840"/>
-            <a:ext cx="6522415" cy="731520"/>
+            <a:off x="1691640" y="1005840"/>
+            <a:ext cx="10180015" cy="731520"/>
           </a:xfrm>
           <a:prstGeom prst="rect">
             <a:avLst/>
@@ -6641,7 +6908,7 @@
                 <a:ea typeface="Times New Roman" pitchFamily="34" charset="-122"/>
                 <a:cs typeface="Times New Roman" pitchFamily="34" charset="-120"/>
               </a:rPr>
-              <a:t>Situation: Question 1</a:t>
+              <a:t>Situation in Real Life</a:t>
             </a:r>
             <a:endParaRPr lang="en-US" sz="3600" dirty="0"/>
           </a:p>
@@ -6655,8 +6922,8 @@
         </p:nvSpPr>
         <p:spPr>
           <a:xfrm>
-            <a:off x="5349240" y="1783080"/>
-            <a:ext cx="6522415" cy="4663440"/>
+            <a:off x="1691640" y="1783080"/>
+            <a:ext cx="10180015" cy="4663440"/>
           </a:xfrm>
           <a:prstGeom prst="rect">
             <a:avLst/>
@@ -6683,7 +6950,47 @@
                 <a:ea typeface="Times New Roman" pitchFamily="34" charset="-122"/>
                 <a:cs typeface="Times New Roman" pitchFamily="34" charset="-120"/>
               </a:rPr>
-              <a:t>What is the problem in the situation?</a:t>
+              <a:t>A Fulani herdsman near Garoua has pasture for 50 cattle.</a:t>
+            </a:r>
+            <a:endParaRPr lang="en-US" sz="4000" dirty="0"/>
+          </a:p>
+          <a:p>
+            <a:pPr algn="l" indent="0" marL="0">
+              <a:spcAft>
+                <a:spcPts val="800"/>
+              </a:spcAft>
+              <a:buNone/>
+            </a:pPr>
+            <a:r>
+              <a:rPr lang="en-US" sz="4000" dirty="0">
+                <a:solidFill>
+                  <a:srgbClr val="111111"/>
+                </a:solidFill>
+                <a:latin typeface="Times New Roman" pitchFamily="34" charset="0"/>
+                <a:ea typeface="Times New Roman" pitchFamily="34" charset="-122"/>
+                <a:cs typeface="Times New Roman" pitchFamily="34" charset="-120"/>
+              </a:rPr>
+              <a:t>In the rainy season the grass is plentiful and his animals are fat, so he buys 50 more.</a:t>
+            </a:r>
+            <a:endParaRPr lang="en-US" sz="4000" dirty="0"/>
+          </a:p>
+          <a:p>
+            <a:pPr algn="l" indent="0" marL="0">
+              <a:spcAft>
+                <a:spcPts val="800"/>
+              </a:spcAft>
+              <a:buNone/>
+            </a:pPr>
+            <a:r>
+              <a:rPr lang="en-US" sz="4000" dirty="0">
+                <a:solidFill>
+                  <a:srgbClr val="111111"/>
+                </a:solidFill>
+                <a:latin typeface="Times New Roman" pitchFamily="34" charset="0"/>
+                <a:ea typeface="Times New Roman" pitchFamily="34" charset="-122"/>
+                <a:cs typeface="Times New Roman" pitchFamily="34" charset="-120"/>
+              </a:rPr>
+              <a:t>Soon the grass is eaten down to the bare soil, the ground becomes hard and dusty, and his 100 animals become thin and weak.</a:t>
             </a:r>
             <a:endParaRPr lang="en-US" sz="4000" dirty="0"/>
           </a:p>
@@ -6860,7 +7167,7 @@
                 <a:ea typeface="Times New Roman" pitchFamily="34" charset="-122"/>
                 <a:cs typeface="Times New Roman" pitchFamily="34" charset="-120"/>
               </a:rPr>
-              <a:t>Answer</a:t>
+              <a:t>Situation in Real Life (continued)</a:t>
             </a:r>
             <a:endParaRPr lang="en-US" sz="3600" dirty="0"/>
           </a:p>
@@ -6902,7 +7209,7 @@
                 <a:ea typeface="Times New Roman" pitchFamily="34" charset="-122"/>
                 <a:cs typeface="Times New Roman" pitchFamily="34" charset="-120"/>
               </a:rPr>
-              <a:t>The land cannot support all the people and animals.</a:t>
+              <a:t>His son asks: "Why did the herd suffer when it became bigger, and how many animals can the land really feed?"</a:t>
             </a:r>
             <a:endParaRPr lang="en-US" sz="4000" dirty="0"/>
           </a:p>
@@ -7079,7 +7386,7 @@
                 <a:ea typeface="Times New Roman" pitchFamily="34" charset="-122"/>
                 <a:cs typeface="Times New Roman" pitchFamily="34" charset="-120"/>
               </a:rPr>
-              <a:t>Situation: Question 2</a:t>
+              <a:t>Situation: Question 1</a:t>
             </a:r>
             <a:endParaRPr lang="en-US" sz="3600" dirty="0"/>
           </a:p>
@@ -7121,7 +7428,7 @@
                 <a:ea typeface="Times New Roman" pitchFamily="34" charset="-122"/>
                 <a:cs typeface="Times New Roman" pitchFamily="34" charset="-120"/>
               </a:rPr>
-              <a:t>What is the limit called?</a:t>
+              <a:t>What is the problem in the situation?</a:t>
             </a:r>
             <a:endParaRPr lang="en-US" sz="4000" dirty="0"/>
           </a:p>
@@ -7340,7 +7647,7 @@
                 <a:ea typeface="Times New Roman" pitchFamily="34" charset="-122"/>
                 <a:cs typeface="Times New Roman" pitchFamily="34" charset="-120"/>
               </a:rPr>
-              <a:t>The carrying capacity.</a:t>
+              <a:t>The herdsman exceeded the number of animals the land can support.</a:t>
             </a:r>
             <a:endParaRPr lang="en-US" sz="4000" dirty="0"/>
           </a:p>
@@ -7517,7 +7824,7 @@
                 <a:ea typeface="Times New Roman" pitchFamily="34" charset="-122"/>
                 <a:cs typeface="Times New Roman" pitchFamily="34" charset="-120"/>
               </a:rPr>
-              <a:t>Situation: Question 3</a:t>
+              <a:t>Situation: Question 2</a:t>
             </a:r>
             <a:endParaRPr lang="en-US" sz="3600" dirty="0"/>
           </a:p>
@@ -7559,7 +7866,7 @@
                 <a:ea typeface="Times New Roman" pitchFamily="34" charset="-122"/>
                 <a:cs typeface="Times New Roman" pitchFamily="34" charset="-120"/>
               </a:rPr>
-              <a:t>How can it be raised?</a:t>
+              <a:t>What is this limit called?</a:t>
             </a:r>
             <a:endParaRPr lang="en-US" sz="4000" dirty="0"/>
           </a:p>
@@ -7736,7 +8043,7 @@
                 <a:ea typeface="Times New Roman" pitchFamily="34" charset="-122"/>
                 <a:cs typeface="Times New Roman" pitchFamily="34" charset="-120"/>
               </a:rPr>
-              <a:t>Possible Answer</a:t>
+              <a:t>Answer</a:t>
             </a:r>
             <a:endParaRPr lang="en-US" sz="3600" dirty="0"/>
           </a:p>
@@ -7778,7 +8085,7 @@
                 <a:ea typeface="Times New Roman" pitchFamily="34" charset="-122"/>
                 <a:cs typeface="Times New Roman" pitchFamily="34" charset="-120"/>
               </a:rPr>
-              <a:t>By better technology, like irrigation and improved pastures.</a:t>
+              <a:t>The carrying capacity.</a:t>
             </a:r>
             <a:endParaRPr lang="en-US" sz="4000" dirty="0"/>
           </a:p>
@@ -7890,7 +8197,7 @@
                 <a:ea typeface="Calibri" pitchFamily="34" charset="-122"/>
                 <a:cs typeface="Calibri" pitchFamily="34" charset="-120"/>
               </a:rPr>
-              <a:t>ACTION TO TAKE</a:t>
+              <a:t>REAL-LIFE SITUATION</a:t>
             </a:r>
             <a:endParaRPr lang="en-US" sz="1400" dirty="0"/>
           </a:p>
@@ -7955,7 +8262,7 @@
                 <a:ea typeface="Times New Roman" pitchFamily="34" charset="-122"/>
                 <a:cs typeface="Times New Roman" pitchFamily="34" charset="-120"/>
               </a:rPr>
-              <a:t>Action to Take</a:t>
+              <a:t>Situation: Question 3</a:t>
             </a:r>
             <a:endParaRPr lang="en-US" sz="3600" dirty="0"/>
           </a:p>
@@ -7997,7 +8304,7 @@
                 <a:ea typeface="Times New Roman" pitchFamily="34" charset="-122"/>
                 <a:cs typeface="Times New Roman" pitchFamily="34" charset="-120"/>
               </a:rPr>
-              <a:t>Raise the carrying capacity of our land through sustainable techniques.</a:t>
+              <a:t>What happened to the land?</a:t>
             </a:r>
             <a:endParaRPr lang="en-US" sz="4000" dirty="0"/>
           </a:p>
@@ -8109,7 +8416,7 @@
                 <a:ea typeface="Calibri" pitchFamily="34" charset="-122"/>
                 <a:cs typeface="Calibri" pitchFamily="34" charset="-120"/>
               </a:rPr>
-              <a:t>JUSTIFICATION</a:t>
+              <a:t>REAL-LIFE SITUATION</a:t>
             </a:r>
             <a:endParaRPr lang="en-US" sz="1400" dirty="0"/>
           </a:p>
@@ -8174,7 +8481,7 @@
                 <a:ea typeface="Times New Roman" pitchFamily="34" charset="-122"/>
                 <a:cs typeface="Times New Roman" pitchFamily="34" charset="-120"/>
               </a:rPr>
-              <a:t>Justification of the Lesson</a:t>
+              <a:t>Possible Answer</a:t>
             </a:r>
             <a:endParaRPr lang="en-US" sz="3600" dirty="0"/>
           </a:p>
@@ -8216,7 +8523,7 @@
                 <a:ea typeface="Times New Roman" pitchFamily="34" charset="-122"/>
                 <a:cs typeface="Times New Roman" pitchFamily="34" charset="-120"/>
               </a:rPr>
-              <a:t>This lesson helps us to understand the limits of land and how to raise them.</a:t>
+              <a:t>It was degraded: bare, hard and dusty soil.</a:t>
             </a:r>
             <a:endParaRPr lang="en-US" sz="4000" dirty="0"/>
           </a:p>
@@ -8328,54 +8635,15 @@
                 <a:ea typeface="Calibri" pitchFamily="34" charset="-122"/>
                 <a:cs typeface="Calibri" pitchFamily="34" charset="-120"/>
               </a:rPr>
-              <a:t>1. MEANING</a:t>
+              <a:t>ACTION TO TAKE</a:t>
             </a:r>
             <a:endParaRPr lang="en-US" sz="1400" dirty="0"/>
-          </a:p>
-        </p:txBody>
-      </p:sp>
-      <p:sp>
-        <p:nvSpPr>
-          <p:cNvPr id="3" name="Text 1"/>
-          <p:cNvSpPr/>
-          <p:nvPr/>
-        </p:nvSpPr>
-        <p:spPr>
-          <a:xfrm>
-            <a:off x="457200" y="1005840"/>
-            <a:ext cx="11277295" cy="731520"/>
-          </a:xfrm>
-          <a:prstGeom prst="rect">
-            <a:avLst/>
-          </a:prstGeom>
-          <a:noFill/>
-          <a:ln/>
-        </p:spPr>
-        <p:txBody>
-          <a:bodyPr wrap="square" lIns="0" tIns="0" rIns="0" bIns="0" rtlCol="0" anchor="ctr"/>
-          <a:lstStyle/>
-          <a:p>
-            <a:pPr algn="ctr" indent="0" marL="0">
-              <a:buNone/>
-            </a:pPr>
-            <a:r>
-              <a:rPr lang="en-US" sz="3600" b="1" dirty="0">
-                <a:solidFill>
-                  <a:srgbClr val="990011"/>
-                </a:solidFill>
-                <a:latin typeface="Times New Roman" pitchFamily="34" charset="0"/>
-                <a:ea typeface="Times New Roman" pitchFamily="34" charset="-122"/>
-                <a:cs typeface="Times New Roman" pitchFamily="34" charset="-120"/>
-              </a:rPr>
-              <a:t>Activity 1</a:t>
-            </a:r>
-            <a:endParaRPr lang="en-US" sz="3600" dirty="0"/>
           </a:p>
         </p:txBody>
       </p:sp>
       <p:pic>
         <p:nvPicPr>
-          <p:cNvPr id="4" name="Image 0" descr="/home/claude/f4/img/v2/carrying_big.png">    </p:cNvPr>
+          <p:cNvPr id="3" name="Image 0" descr="/home/claude/f4/img/minesec_sheet.png">    </p:cNvPr>
           <p:cNvPicPr>
             <a:picLocks noChangeAspect="1"/>
           </p:cNvPicPr>
@@ -8389,8 +8657,8 @@
         </p:blipFill>
         <p:spPr>
           <a:xfrm>
-            <a:off x="1215564" y="1783080"/>
-            <a:ext cx="9760567" cy="4270248"/>
+            <a:off x="0" y="658368"/>
+            <a:ext cx="5120640" cy="5833872"/>
           </a:xfrm>
           <a:prstGeom prst="rect">
             <a:avLst/>
@@ -8399,14 +8667,14 @@
       </p:pic>
       <p:sp>
         <p:nvSpPr>
-          <p:cNvPr id="5" name="Text 2"/>
+          <p:cNvPr id="4" name="Text 1"/>
           <p:cNvSpPr/>
           <p:nvPr/>
         </p:nvSpPr>
         <p:spPr>
           <a:xfrm>
-            <a:off x="457200" y="6089904"/>
-            <a:ext cx="11277295" cy="347472"/>
+            <a:off x="5349240" y="1005840"/>
+            <a:ext cx="6522415" cy="731520"/>
           </a:xfrm>
           <a:prstGeom prst="rect">
             <a:avLst/>
@@ -8415,24 +8683,68 @@
           <a:ln/>
         </p:spPr>
         <p:txBody>
-          <a:bodyPr wrap="square" lIns="0" tIns="0" rIns="0" bIns="0" rtlCol="0" anchor="ctr"/>
+          <a:bodyPr wrap="square" lIns="0" tIns="0" rIns="0" bIns="0" rtlCol="0" anchor="ctr">
+            <a:normAutofit/>
+          </a:bodyPr>
           <a:lstStyle/>
           <a:p>
             <a:pPr algn="ctr" indent="0" marL="0">
               <a:buNone/>
             </a:pPr>
             <a:r>
-              <a:rPr lang="en-US" sz="1800" i="1" dirty="0">
-                <a:solidFill>
-                  <a:srgbClr val="555555"/>
+              <a:rPr lang="en-US" sz="3600" b="1" dirty="0">
+                <a:solidFill>
+                  <a:srgbClr val="990011"/>
                 </a:solidFill>
                 <a:latin typeface="Times New Roman" pitchFamily="34" charset="0"/>
                 <a:ea typeface="Times New Roman" pitchFamily="34" charset="-122"/>
                 <a:cs typeface="Times New Roman" pitchFamily="34" charset="-120"/>
               </a:rPr>
-              <a:t>Growth towards carrying capacity.</a:t>
-            </a:r>
-            <a:endParaRPr lang="en-US" sz="1800" dirty="0"/>
+              <a:t>Action to Take</a:t>
+            </a:r>
+            <a:endParaRPr lang="en-US" sz="3600" dirty="0"/>
+          </a:p>
+        </p:txBody>
+      </p:sp>
+      <p:sp>
+        <p:nvSpPr>
+          <p:cNvPr id="5" name="Text 2"/>
+          <p:cNvSpPr/>
+          <p:nvPr/>
+        </p:nvSpPr>
+        <p:spPr>
+          <a:xfrm>
+            <a:off x="5349240" y="1783080"/>
+            <a:ext cx="6522415" cy="4663440"/>
+          </a:xfrm>
+          <a:prstGeom prst="rect">
+            <a:avLst/>
+          </a:prstGeom>
+          <a:noFill/>
+          <a:ln/>
+        </p:spPr>
+        <p:txBody>
+          <a:bodyPr wrap="square" lIns="0" tIns="0" rIns="0" bIns="0" rtlCol="0" anchor="t"/>
+          <a:lstStyle/>
+          <a:p>
+            <a:pPr algn="l" indent="0" marL="0">
+              <a:spcAft>
+                <a:spcPts val="800"/>
+              </a:spcAft>
+              <a:buNone/>
+            </a:pPr>
+            <a:r>
+              <a:rPr lang="en-US" sz="4000" dirty="0">
+                <a:solidFill>
+                  <a:srgbClr val="111111"/>
+                </a:solidFill>
+                <a:latin typeface="Times New Roman" pitchFamily="34" charset="0"/>
+                <a:ea typeface="Times New Roman" pitchFamily="34" charset="-122"/>
+                <a:cs typeface="Times New Roman" pitchFamily="34" charset="-120"/>
+              </a:rPr>
+              <a:t>Keep herds and farming within the carrying capacity of the land, and rotate pastures.</a:t>
+            </a:r>
+            <a:endParaRPr lang="en-US" sz="4000" dirty="0"/>
           </a:p>
         </p:txBody>
       </p:sp>
@@ -8542,7 +8854,7 @@
                 <a:ea typeface="Calibri" pitchFamily="34" charset="-122"/>
                 <a:cs typeface="Calibri" pitchFamily="34" charset="-120"/>
               </a:rPr>
-              <a:t>1. MEANING</a:t>
+              <a:t>JUSTIFICATION</a:t>
             </a:r>
             <a:endParaRPr lang="en-US" sz="1400" dirty="0"/>
           </a:p>
@@ -8607,7 +8919,7 @@
                 <a:ea typeface="Times New Roman" pitchFamily="34" charset="-122"/>
                 <a:cs typeface="Times New Roman" pitchFamily="34" charset="-120"/>
               </a:rPr>
-              <a:t>Activity 1: Question</a:t>
+              <a:t>Justification of the Lesson</a:t>
             </a:r>
             <a:endParaRPr lang="en-US" sz="3600" dirty="0"/>
           </a:p>
@@ -8649,7 +8961,7 @@
                 <a:ea typeface="Times New Roman" pitchFamily="34" charset="-122"/>
                 <a:cs typeface="Times New Roman" pitchFamily="34" charset="-120"/>
               </a:rPr>
-              <a:t>What happens when a population overshoots its carrying capacity?</a:t>
+              <a:t>This lesson helps us to understand the limits of the environment and the need to balance population and resources.</a:t>
             </a:r>
             <a:endParaRPr lang="en-US" sz="4000" dirty="0"/>
           </a:p>
@@ -9362,9 +9674,48 @@
           </a:p>
         </p:txBody>
       </p:sp>
+      <p:sp>
+        <p:nvSpPr>
+          <p:cNvPr id="3" name="Text 1"/>
+          <p:cNvSpPr/>
+          <p:nvPr/>
+        </p:nvSpPr>
+        <p:spPr>
+          <a:xfrm>
+            <a:off x="457200" y="1005840"/>
+            <a:ext cx="11277295" cy="731520"/>
+          </a:xfrm>
+          <a:prstGeom prst="rect">
+            <a:avLst/>
+          </a:prstGeom>
+          <a:noFill/>
+          <a:ln/>
+        </p:spPr>
+        <p:txBody>
+          <a:bodyPr wrap="square" lIns="0" tIns="0" rIns="0" bIns="0" rtlCol="0" anchor="ctr"/>
+          <a:lstStyle/>
+          <a:p>
+            <a:pPr algn="ctr" indent="0" marL="0">
+              <a:buNone/>
+            </a:pPr>
+            <a:r>
+              <a:rPr lang="en-US" sz="3600" b="1" dirty="0">
+                <a:solidFill>
+                  <a:srgbClr val="990011"/>
+                </a:solidFill>
+                <a:latin typeface="Times New Roman" pitchFamily="34" charset="0"/>
+                <a:ea typeface="Times New Roman" pitchFamily="34" charset="-122"/>
+                <a:cs typeface="Times New Roman" pitchFamily="34" charset="-120"/>
+              </a:rPr>
+              <a:t>Activity 1</a:t>
+            </a:r>
+            <a:endParaRPr lang="en-US" sz="3600" dirty="0"/>
+          </a:p>
+        </p:txBody>
+      </p:sp>
       <p:pic>
         <p:nvPicPr>
-          <p:cNvPr id="3" name="Image 0" descr="/home/claude/f4/img/minesec_sheet.png">    </p:cNvPr>
+          <p:cNvPr id="4" name="Image 0" descr="/home/claude/f4/img/v2/overgrazing_big.png">    </p:cNvPr>
           <p:cNvPicPr>
             <a:picLocks noChangeAspect="1"/>
           </p:cNvPicPr>
@@ -9378,8 +9729,8 @@
         </p:blipFill>
         <p:spPr>
           <a:xfrm>
-            <a:off x="0" y="658368"/>
-            <a:ext cx="5120640" cy="5833872"/>
+            <a:off x="629930" y="1783080"/>
+            <a:ext cx="10931835" cy="4270248"/>
           </a:xfrm>
           <a:prstGeom prst="rect">
             <a:avLst/>
@@ -9388,14 +9739,14 @@
       </p:pic>
       <p:sp>
         <p:nvSpPr>
-          <p:cNvPr id="4" name="Text 1"/>
+          <p:cNvPr id="5" name="Text 2"/>
           <p:cNvSpPr/>
           <p:nvPr/>
         </p:nvSpPr>
         <p:spPr>
           <a:xfrm>
-            <a:off x="5349240" y="1005840"/>
-            <a:ext cx="6522415" cy="731520"/>
+            <a:off x="457200" y="6089904"/>
+            <a:ext cx="11277295" cy="347472"/>
           </a:xfrm>
           <a:prstGeom prst="rect">
             <a:avLst/>
@@ -9404,68 +9755,24 @@
           <a:ln/>
         </p:spPr>
         <p:txBody>
-          <a:bodyPr wrap="square" lIns="0" tIns="0" rIns="0" bIns="0" rtlCol="0" anchor="ctr">
-            <a:normAutofit/>
-          </a:bodyPr>
+          <a:bodyPr wrap="square" lIns="0" tIns="0" rIns="0" bIns="0" rtlCol="0" anchor="ctr"/>
           <a:lstStyle/>
           <a:p>
             <a:pPr algn="ctr" indent="0" marL="0">
               <a:buNone/>
             </a:pPr>
             <a:r>
-              <a:rPr lang="en-US" sz="3600" b="1" dirty="0">
-                <a:solidFill>
-                  <a:srgbClr val="990011"/>
+              <a:rPr lang="en-US" sz="1800" i="1" dirty="0">
+                <a:solidFill>
+                  <a:srgbClr val="555555"/>
                 </a:solidFill>
                 <a:latin typeface="Times New Roman" pitchFamily="34" charset="0"/>
                 <a:ea typeface="Times New Roman" pitchFamily="34" charset="-122"/>
                 <a:cs typeface="Times New Roman" pitchFamily="34" charset="-120"/>
               </a:rPr>
-              <a:t>Activity 1: Answer</a:t>
-            </a:r>
-            <a:endParaRPr lang="en-US" sz="3600" dirty="0"/>
-          </a:p>
-        </p:txBody>
-      </p:sp>
-      <p:sp>
-        <p:nvSpPr>
-          <p:cNvPr id="5" name="Text 2"/>
-          <p:cNvSpPr/>
-          <p:nvPr/>
-        </p:nvSpPr>
-        <p:spPr>
-          <a:xfrm>
-            <a:off x="5349240" y="1783080"/>
-            <a:ext cx="6522415" cy="4663440"/>
-          </a:xfrm>
-          <a:prstGeom prst="rect">
-            <a:avLst/>
-          </a:prstGeom>
-          <a:noFill/>
-          <a:ln/>
-        </p:spPr>
-        <p:txBody>
-          <a:bodyPr wrap="square" lIns="0" tIns="0" rIns="0" bIns="0" rtlCol="0" anchor="t"/>
-          <a:lstStyle/>
-          <a:p>
-            <a:pPr algn="l" indent="0" marL="0">
-              <a:spcAft>
-                <a:spcPts val="800"/>
-              </a:spcAft>
-              <a:buNone/>
-            </a:pPr>
-            <a:r>
-              <a:rPr lang="en-US" sz="4000" dirty="0">
-                <a:solidFill>
-                  <a:srgbClr val="111111"/>
-                </a:solidFill>
-                <a:latin typeface="Times New Roman" pitchFamily="34" charset="0"/>
-                <a:ea typeface="Times New Roman" pitchFamily="34" charset="-122"/>
-                <a:cs typeface="Times New Roman" pitchFamily="34" charset="-120"/>
-              </a:rPr>
-              <a:t>Resources are damaged and the population crashes.</a:t>
-            </a:r>
-            <a:endParaRPr lang="en-US" sz="4000" dirty="0"/>
+              <a:t>Too many animals on a pasture.</a:t>
+            </a:r>
+            <a:endParaRPr lang="en-US" sz="1800" dirty="0"/>
           </a:p>
         </p:txBody>
       </p:sp>
@@ -9581,48 +9888,9 @@
           </a:p>
         </p:txBody>
       </p:sp>
-      <p:sp>
-        <p:nvSpPr>
-          <p:cNvPr id="3" name="Text 1"/>
-          <p:cNvSpPr/>
-          <p:nvPr/>
-        </p:nvSpPr>
-        <p:spPr>
-          <a:xfrm>
-            <a:off x="457200" y="1005840"/>
-            <a:ext cx="11277295" cy="731520"/>
-          </a:xfrm>
-          <a:prstGeom prst="rect">
-            <a:avLst/>
-          </a:prstGeom>
-          <a:noFill/>
-          <a:ln/>
-        </p:spPr>
-        <p:txBody>
-          <a:bodyPr wrap="square" lIns="0" tIns="0" rIns="0" bIns="0" rtlCol="0" anchor="ctr"/>
-          <a:lstStyle/>
-          <a:p>
-            <a:pPr algn="ctr" indent="0" marL="0">
-              <a:buNone/>
-            </a:pPr>
-            <a:r>
-              <a:rPr lang="en-US" sz="3600" b="1" dirty="0">
-                <a:solidFill>
-                  <a:srgbClr val="990011"/>
-                </a:solidFill>
-                <a:latin typeface="Times New Roman" pitchFamily="34" charset="0"/>
-                <a:ea typeface="Times New Roman" pitchFamily="34" charset="-122"/>
-                <a:cs typeface="Times New Roman" pitchFamily="34" charset="-120"/>
-              </a:rPr>
-              <a:t>Activity 2</a:t>
-            </a:r>
-            <a:endParaRPr lang="en-US" sz="3600" dirty="0"/>
-          </a:p>
-        </p:txBody>
-      </p:sp>
       <p:pic>
         <p:nvPicPr>
-          <p:cNvPr id="4" name="Image 0" descr="/home/claude/f4/img/v2/f2t_cattle.jpg">    </p:cNvPr>
+          <p:cNvPr id="3" name="Image 0" descr="/home/claude/f4/img/minesec_sheet.png">    </p:cNvPr>
           <p:cNvPicPr>
             <a:picLocks noChangeAspect="1"/>
           </p:cNvPicPr>
@@ -9636,8 +9904,8 @@
         </p:blipFill>
         <p:spPr>
           <a:xfrm>
-            <a:off x="2250369" y="1783080"/>
-            <a:ext cx="7690957" cy="4270248"/>
+            <a:off x="0" y="658368"/>
+            <a:ext cx="5120640" cy="5833872"/>
           </a:xfrm>
           <a:prstGeom prst="rect">
             <a:avLst/>
@@ -9646,14 +9914,14 @@
       </p:pic>
       <p:sp>
         <p:nvSpPr>
-          <p:cNvPr id="5" name="Text 2"/>
+          <p:cNvPr id="4" name="Text 1"/>
           <p:cNvSpPr/>
           <p:nvPr/>
         </p:nvSpPr>
         <p:spPr>
           <a:xfrm>
-            <a:off x="457200" y="6089904"/>
-            <a:ext cx="11277295" cy="347472"/>
+            <a:off x="5349240" y="1005840"/>
+            <a:ext cx="6522415" cy="731520"/>
           </a:xfrm>
           <a:prstGeom prst="rect">
             <a:avLst/>
@@ -9662,24 +9930,68 @@
           <a:ln/>
         </p:spPr>
         <p:txBody>
-          <a:bodyPr wrap="square" lIns="0" tIns="0" rIns="0" bIns="0" rtlCol="0" anchor="ctr"/>
+          <a:bodyPr wrap="square" lIns="0" tIns="0" rIns="0" bIns="0" rtlCol="0" anchor="ctr">
+            <a:normAutofit/>
+          </a:bodyPr>
           <a:lstStyle/>
           <a:p>
             <a:pPr algn="ctr" indent="0" marL="0">
               <a:buNone/>
             </a:pPr>
             <a:r>
-              <a:rPr lang="en-US" sz="1800" i="1" dirty="0">
-                <a:solidFill>
-                  <a:srgbClr val="555555"/>
+              <a:rPr lang="en-US" sz="3600" b="1" dirty="0">
+                <a:solidFill>
+                  <a:srgbClr val="990011"/>
                 </a:solidFill>
                 <a:latin typeface="Times New Roman" pitchFamily="34" charset="0"/>
                 <a:ea typeface="Times New Roman" pitchFamily="34" charset="-122"/>
                 <a:cs typeface="Times New Roman" pitchFamily="34" charset="-120"/>
               </a:rPr>
-              <a:t>Cattle grazing.</a:t>
-            </a:r>
-            <a:endParaRPr lang="en-US" sz="1800" dirty="0"/>
+              <a:t>Activity 1: Question</a:t>
+            </a:r>
+            <a:endParaRPr lang="en-US" sz="3600" dirty="0"/>
+          </a:p>
+        </p:txBody>
+      </p:sp>
+      <p:sp>
+        <p:nvSpPr>
+          <p:cNvPr id="5" name="Text 2"/>
+          <p:cNvSpPr/>
+          <p:nvPr/>
+        </p:nvSpPr>
+        <p:spPr>
+          <a:xfrm>
+            <a:off x="5349240" y="1783080"/>
+            <a:ext cx="6522415" cy="4663440"/>
+          </a:xfrm>
+          <a:prstGeom prst="rect">
+            <a:avLst/>
+          </a:prstGeom>
+          <a:noFill/>
+          <a:ln/>
+        </p:spPr>
+        <p:txBody>
+          <a:bodyPr wrap="square" lIns="0" tIns="0" rIns="0" bIns="0" rtlCol="0" anchor="t"/>
+          <a:lstStyle/>
+          <a:p>
+            <a:pPr algn="l" indent="0" marL="0">
+              <a:spcAft>
+                <a:spcPts val="800"/>
+              </a:spcAft>
+              <a:buNone/>
+            </a:pPr>
+            <a:r>
+              <a:rPr lang="en-US" sz="4000" dirty="0">
+                <a:solidFill>
+                  <a:srgbClr val="111111"/>
+                </a:solidFill>
+                <a:latin typeface="Times New Roman" pitchFamily="34" charset="0"/>
+                <a:ea typeface="Times New Roman" pitchFamily="34" charset="-122"/>
+                <a:cs typeface="Times New Roman" pitchFamily="34" charset="-120"/>
+              </a:rPr>
+              <a:t>What happens when the number of cattle exceeds the carrying capacity?</a:t>
+            </a:r>
+            <a:endParaRPr lang="en-US" sz="4000" dirty="0"/>
           </a:p>
         </p:txBody>
       </p:sp>
@@ -9854,7 +10166,7 @@
                 <a:ea typeface="Times New Roman" pitchFamily="34" charset="-122"/>
                 <a:cs typeface="Times New Roman" pitchFamily="34" charset="-120"/>
               </a:rPr>
-              <a:t>Activity 2: Question</a:t>
+              <a:t>Activity 1: Answer</a:t>
             </a:r>
             <a:endParaRPr lang="en-US" sz="3600" dirty="0"/>
           </a:p>
@@ -9896,7 +10208,7 @@
                 <a:ea typeface="Times New Roman" pitchFamily="34" charset="-122"/>
                 <a:cs typeface="Times New Roman" pitchFamily="34" charset="-120"/>
               </a:rPr>
-              <a:t>What happens to pasture if there are too many cattle?</a:t>
+              <a:t>The grass disappears, the soil is eroded and the animals become weak.</a:t>
             </a:r>
             <a:endParaRPr lang="en-US" sz="4000" dirty="0"/>
           </a:p>
@@ -10008,15 +10320,54 @@
                 <a:ea typeface="Calibri" pitchFamily="34" charset="-122"/>
                 <a:cs typeface="Calibri" pitchFamily="34" charset="-120"/>
               </a:rPr>
-              <a:t>1. MEANING</a:t>
+              <a:t>2. S-CURVE</a:t>
             </a:r>
             <a:endParaRPr lang="en-US" sz="1400" dirty="0"/>
+          </a:p>
+        </p:txBody>
+      </p:sp>
+      <p:sp>
+        <p:nvSpPr>
+          <p:cNvPr id="3" name="Text 1"/>
+          <p:cNvSpPr/>
+          <p:nvPr/>
+        </p:nvSpPr>
+        <p:spPr>
+          <a:xfrm>
+            <a:off x="457200" y="1005840"/>
+            <a:ext cx="11277295" cy="731520"/>
+          </a:xfrm>
+          <a:prstGeom prst="rect">
+            <a:avLst/>
+          </a:prstGeom>
+          <a:noFill/>
+          <a:ln/>
+        </p:spPr>
+        <p:txBody>
+          <a:bodyPr wrap="square" lIns="0" tIns="0" rIns="0" bIns="0" rtlCol="0" anchor="ctr"/>
+          <a:lstStyle/>
+          <a:p>
+            <a:pPr algn="ctr" indent="0" marL="0">
+              <a:buNone/>
+            </a:pPr>
+            <a:r>
+              <a:rPr lang="en-US" sz="3600" b="1" dirty="0">
+                <a:solidFill>
+                  <a:srgbClr val="990011"/>
+                </a:solidFill>
+                <a:latin typeface="Times New Roman" pitchFamily="34" charset="0"/>
+                <a:ea typeface="Times New Roman" pitchFamily="34" charset="-122"/>
+                <a:cs typeface="Times New Roman" pitchFamily="34" charset="-120"/>
+              </a:rPr>
+              <a:t>Activity 2</a:t>
+            </a:r>
+            <a:endParaRPr lang="en-US" sz="3600" dirty="0"/>
           </a:p>
         </p:txBody>
       </p:sp>
       <p:pic>
         <p:nvPicPr>
-          <p:cNvPr id="3" name="Image 0" descr="/home/claude/f4/img/minesec_sheet.png">    </p:cNvPr>
+          <p:cNvPr id="4" name="Image 0" descr="/home/claude/f4/img/v2/pop2_curves.png">    </p:cNvPr>
           <p:cNvPicPr>
             <a:picLocks noChangeAspect="1"/>
           </p:cNvPicPr>
@@ -10030,8 +10381,8 @@
         </p:blipFill>
         <p:spPr>
           <a:xfrm>
-            <a:off x="0" y="658368"/>
-            <a:ext cx="5120640" cy="5833872"/>
+            <a:off x="629930" y="1783080"/>
+            <a:ext cx="10931835" cy="4270248"/>
           </a:xfrm>
           <a:prstGeom prst="rect">
             <a:avLst/>
@@ -10040,14 +10391,14 @@
       </p:pic>
       <p:sp>
         <p:nvSpPr>
-          <p:cNvPr id="4" name="Text 1"/>
+          <p:cNvPr id="5" name="Text 2"/>
           <p:cNvSpPr/>
           <p:nvPr/>
         </p:nvSpPr>
         <p:spPr>
           <a:xfrm>
-            <a:off x="5349240" y="1005840"/>
-            <a:ext cx="6522415" cy="731520"/>
+            <a:off x="457200" y="6089904"/>
+            <a:ext cx="11277295" cy="347472"/>
           </a:xfrm>
           <a:prstGeom prst="rect">
             <a:avLst/>
@@ -10056,68 +10407,24 @@
           <a:ln/>
         </p:spPr>
         <p:txBody>
-          <a:bodyPr wrap="square" lIns="0" tIns="0" rIns="0" bIns="0" rtlCol="0" anchor="ctr">
-            <a:normAutofit/>
-          </a:bodyPr>
+          <a:bodyPr wrap="square" lIns="0" tIns="0" rIns="0" bIns="0" rtlCol="0" anchor="ctr"/>
           <a:lstStyle/>
           <a:p>
             <a:pPr algn="ctr" indent="0" marL="0">
               <a:buNone/>
             </a:pPr>
             <a:r>
-              <a:rPr lang="en-US" sz="3600" b="1" dirty="0">
-                <a:solidFill>
-                  <a:srgbClr val="990011"/>
+              <a:rPr lang="en-US" sz="1800" i="1" dirty="0">
+                <a:solidFill>
+                  <a:srgbClr val="555555"/>
                 </a:solidFill>
                 <a:latin typeface="Times New Roman" pitchFamily="34" charset="0"/>
                 <a:ea typeface="Times New Roman" pitchFamily="34" charset="-122"/>
                 <a:cs typeface="Times New Roman" pitchFamily="34" charset="-120"/>
               </a:rPr>
-              <a:t>Activity 2: Answer</a:t>
-            </a:r>
-            <a:endParaRPr lang="en-US" sz="3600" dirty="0"/>
-          </a:p>
-        </p:txBody>
-      </p:sp>
-      <p:sp>
-        <p:nvSpPr>
-          <p:cNvPr id="5" name="Text 2"/>
-          <p:cNvSpPr/>
-          <p:nvPr/>
-        </p:nvSpPr>
-        <p:spPr>
-          <a:xfrm>
-            <a:off x="5349240" y="1783080"/>
-            <a:ext cx="6522415" cy="4663440"/>
-          </a:xfrm>
-          <a:prstGeom prst="rect">
-            <a:avLst/>
-          </a:prstGeom>
-          <a:noFill/>
-          <a:ln/>
-        </p:spPr>
-        <p:txBody>
-          <a:bodyPr wrap="square" lIns="0" tIns="0" rIns="0" bIns="0" rtlCol="0" anchor="t"/>
-          <a:lstStyle/>
-          <a:p>
-            <a:pPr algn="l" indent="0" marL="0">
-              <a:spcAft>
-                <a:spcPts val="800"/>
-              </a:spcAft>
-              <a:buNone/>
-            </a:pPr>
-            <a:r>
-              <a:rPr lang="en-US" sz="4000" dirty="0">
-                <a:solidFill>
-                  <a:srgbClr val="111111"/>
-                </a:solidFill>
-                <a:latin typeface="Times New Roman" pitchFamily="34" charset="0"/>
-                <a:ea typeface="Times New Roman" pitchFamily="34" charset="-122"/>
-                <a:cs typeface="Times New Roman" pitchFamily="34" charset="-120"/>
-              </a:rPr>
-              <a:t>It is overgrazed and the soil erodes.</a:t>
-            </a:r>
-            <a:endParaRPr lang="en-US" sz="4000" dirty="0"/>
+              <a:t>Three ways of adjusting.</a:t>
+            </a:r>
+            <a:endParaRPr lang="en-US" sz="1800" dirty="0"/>
           </a:p>
         </p:txBody>
       </p:sp>
@@ -10227,54 +10534,15 @@
                 <a:ea typeface="Calibri" pitchFamily="34" charset="-122"/>
                 <a:cs typeface="Calibri" pitchFamily="34" charset="-120"/>
               </a:rPr>
-              <a:t>2. ADJUSTING: TECHNOLOGY</a:t>
+              <a:t>2. S-CURVE</a:t>
             </a:r>
             <a:endParaRPr lang="en-US" sz="1400" dirty="0"/>
-          </a:p>
-        </p:txBody>
-      </p:sp>
-      <p:sp>
-        <p:nvSpPr>
-          <p:cNvPr id="3" name="Text 1"/>
-          <p:cNvSpPr/>
-          <p:nvPr/>
-        </p:nvSpPr>
-        <p:spPr>
-          <a:xfrm>
-            <a:off x="457200" y="1005840"/>
-            <a:ext cx="11277295" cy="731520"/>
-          </a:xfrm>
-          <a:prstGeom prst="rect">
-            <a:avLst/>
-          </a:prstGeom>
-          <a:noFill/>
-          <a:ln/>
-        </p:spPr>
-        <p:txBody>
-          <a:bodyPr wrap="square" lIns="0" tIns="0" rIns="0" bIns="0" rtlCol="0" anchor="ctr"/>
-          <a:lstStyle/>
-          <a:p>
-            <a:pPr algn="ctr" indent="0" marL="0">
-              <a:buNone/>
-            </a:pPr>
-            <a:r>
-              <a:rPr lang="en-US" sz="3600" b="1" dirty="0">
-                <a:solidFill>
-                  <a:srgbClr val="990011"/>
-                </a:solidFill>
-                <a:latin typeface="Times New Roman" pitchFamily="34" charset="0"/>
-                <a:ea typeface="Times New Roman" pitchFamily="34" charset="-122"/>
-                <a:cs typeface="Times New Roman" pitchFamily="34" charset="-120"/>
-              </a:rPr>
-              <a:t>Activity 3</a:t>
-            </a:r>
-            <a:endParaRPr lang="en-US" sz="3600" dirty="0"/>
           </a:p>
         </p:txBody>
       </p:sp>
       <p:pic>
         <p:nvPicPr>
-          <p:cNvPr id="4" name="Image 0" descr="/home/claude/f4/img/v2/f2t_pivot.jpg">    </p:cNvPr>
+          <p:cNvPr id="3" name="Image 0" descr="/home/claude/f4/img/minesec_sheet.png">    </p:cNvPr>
           <p:cNvPicPr>
             <a:picLocks noChangeAspect="1"/>
           </p:cNvPicPr>
@@ -10288,8 +10556,8 @@
         </p:blipFill>
         <p:spPr>
           <a:xfrm>
-            <a:off x="2246610" y="1783080"/>
-            <a:ext cx="7698475" cy="4270248"/>
+            <a:off x="0" y="658368"/>
+            <a:ext cx="5120640" cy="5833872"/>
           </a:xfrm>
           <a:prstGeom prst="rect">
             <a:avLst/>
@@ -10298,14 +10566,14 @@
       </p:pic>
       <p:sp>
         <p:nvSpPr>
-          <p:cNvPr id="5" name="Text 2"/>
+          <p:cNvPr id="4" name="Text 1"/>
           <p:cNvSpPr/>
           <p:nvPr/>
         </p:nvSpPr>
         <p:spPr>
           <a:xfrm>
-            <a:off x="457200" y="6089904"/>
-            <a:ext cx="11277295" cy="347472"/>
+            <a:off x="5349240" y="1005840"/>
+            <a:ext cx="6522415" cy="731520"/>
           </a:xfrm>
           <a:prstGeom prst="rect">
             <a:avLst/>
@@ -10314,24 +10582,68 @@
           <a:ln/>
         </p:spPr>
         <p:txBody>
-          <a:bodyPr wrap="square" lIns="0" tIns="0" rIns="0" bIns="0" rtlCol="0" anchor="ctr"/>
+          <a:bodyPr wrap="square" lIns="0" tIns="0" rIns="0" bIns="0" rtlCol="0" anchor="ctr">
+            <a:normAutofit/>
+          </a:bodyPr>
           <a:lstStyle/>
           <a:p>
             <a:pPr algn="ctr" indent="0" marL="0">
               <a:buNone/>
             </a:pPr>
             <a:r>
-              <a:rPr lang="en-US" sz="1800" i="1" dirty="0">
-                <a:solidFill>
-                  <a:srgbClr val="555555"/>
+              <a:rPr lang="en-US" sz="3600" b="1" dirty="0">
+                <a:solidFill>
+                  <a:srgbClr val="990011"/>
                 </a:solidFill>
                 <a:latin typeface="Times New Roman" pitchFamily="34" charset="0"/>
                 <a:ea typeface="Times New Roman" pitchFamily="34" charset="-122"/>
                 <a:cs typeface="Times New Roman" pitchFamily="34" charset="-120"/>
               </a:rPr>
-              <a:t>Irrigated fields.</a:t>
-            </a:r>
-            <a:endParaRPr lang="en-US" sz="1800" dirty="0"/>
+              <a:t>Activity 2: Question</a:t>
+            </a:r>
+            <a:endParaRPr lang="en-US" sz="3600" dirty="0"/>
+          </a:p>
+        </p:txBody>
+      </p:sp>
+      <p:sp>
+        <p:nvSpPr>
+          <p:cNvPr id="5" name="Text 2"/>
+          <p:cNvSpPr/>
+          <p:nvPr/>
+        </p:nvSpPr>
+        <p:spPr>
+          <a:xfrm>
+            <a:off x="5349240" y="1783080"/>
+            <a:ext cx="6522415" cy="4663440"/>
+          </a:xfrm>
+          <a:prstGeom prst="rect">
+            <a:avLst/>
+          </a:prstGeom>
+          <a:noFill/>
+          <a:ln/>
+        </p:spPr>
+        <p:txBody>
+          <a:bodyPr wrap="square" lIns="0" tIns="0" rIns="0" bIns="0" rtlCol="0" anchor="t"/>
+          <a:lstStyle/>
+          <a:p>
+            <a:pPr algn="l" indent="0" marL="0">
+              <a:spcAft>
+                <a:spcPts val="800"/>
+              </a:spcAft>
+              <a:buNone/>
+            </a:pPr>
+            <a:r>
+              <a:rPr lang="en-US" sz="4000" dirty="0">
+                <a:solidFill>
+                  <a:srgbClr val="111111"/>
+                </a:solidFill>
+                <a:latin typeface="Times New Roman" pitchFamily="34" charset="0"/>
+                <a:ea typeface="Times New Roman" pitchFamily="34" charset="-122"/>
+                <a:cs typeface="Times New Roman" pitchFamily="34" charset="-120"/>
+              </a:rPr>
+              <a:t>What happens to growth on an S-curve near the carrying capacity?</a:t>
+            </a:r>
+            <a:endParaRPr lang="en-US" sz="4000" dirty="0"/>
           </a:p>
         </p:txBody>
       </p:sp>
@@ -10441,7 +10753,7 @@
                 <a:ea typeface="Calibri" pitchFamily="34" charset="-122"/>
                 <a:cs typeface="Calibri" pitchFamily="34" charset="-120"/>
               </a:rPr>
-              <a:t>2. ADJUSTING: TECHNOLOGY</a:t>
+              <a:t>2. S-CURVE</a:t>
             </a:r>
             <a:endParaRPr lang="en-US" sz="1400" dirty="0"/>
           </a:p>
@@ -10506,7 +10818,7 @@
                 <a:ea typeface="Times New Roman" pitchFamily="34" charset="-122"/>
                 <a:cs typeface="Times New Roman" pitchFamily="34" charset="-120"/>
               </a:rPr>
-              <a:t>Activity 3: Question</a:t>
+              <a:t>Activity 2: Answer</a:t>
             </a:r>
             <a:endParaRPr lang="en-US" sz="3600" dirty="0"/>
           </a:p>
@@ -10548,7 +10860,7 @@
                 <a:ea typeface="Times New Roman" pitchFamily="34" charset="-122"/>
                 <a:cs typeface="Times New Roman" pitchFamily="34" charset="-120"/>
               </a:rPr>
-              <a:t>How does irrigation raise carrying capacity?</a:t>
+              <a:t>It slows down and the population becomes stable.</a:t>
             </a:r>
             <a:endParaRPr lang="en-US" sz="4000" dirty="0"/>
           </a:p>
@@ -10660,15 +10972,54 @@
                 <a:ea typeface="Calibri" pitchFamily="34" charset="-122"/>
                 <a:cs typeface="Calibri" pitchFamily="34" charset="-120"/>
               </a:rPr>
-              <a:t>2. ADJUSTING: TECHNOLOGY</a:t>
+              <a:t>2. J-CURVE</a:t>
             </a:r>
             <a:endParaRPr lang="en-US" sz="1400" dirty="0"/>
+          </a:p>
+        </p:txBody>
+      </p:sp>
+      <p:sp>
+        <p:nvSpPr>
+          <p:cNvPr id="3" name="Text 1"/>
+          <p:cNvSpPr/>
+          <p:nvPr/>
+        </p:nvSpPr>
+        <p:spPr>
+          <a:xfrm>
+            <a:off x="457200" y="1005840"/>
+            <a:ext cx="11277295" cy="731520"/>
+          </a:xfrm>
+          <a:prstGeom prst="rect">
+            <a:avLst/>
+          </a:prstGeom>
+          <a:noFill/>
+          <a:ln/>
+        </p:spPr>
+        <p:txBody>
+          <a:bodyPr wrap="square" lIns="0" tIns="0" rIns="0" bIns="0" rtlCol="0" anchor="ctr"/>
+          <a:lstStyle/>
+          <a:p>
+            <a:pPr algn="ctr" indent="0" marL="0">
+              <a:buNone/>
+            </a:pPr>
+            <a:r>
+              <a:rPr lang="en-US" sz="3600" b="1" dirty="0">
+                <a:solidFill>
+                  <a:srgbClr val="990011"/>
+                </a:solidFill>
+                <a:latin typeface="Times New Roman" pitchFamily="34" charset="0"/>
+                <a:ea typeface="Times New Roman" pitchFamily="34" charset="-122"/>
+                <a:cs typeface="Times New Roman" pitchFamily="34" charset="-120"/>
+              </a:rPr>
+              <a:t>Activity 3</a:t>
+            </a:r>
+            <a:endParaRPr lang="en-US" sz="3600" dirty="0"/>
           </a:p>
         </p:txBody>
       </p:sp>
       <p:pic>
         <p:nvPicPr>
-          <p:cNvPr id="3" name="Image 0" descr="/home/claude/f4/img/minesec_sheet.png">    </p:cNvPr>
+          <p:cNvPr id="4" name="Image 0" descr="/home/claude/f4/img/v2/carrying_big.png">    </p:cNvPr>
           <p:cNvPicPr>
             <a:picLocks noChangeAspect="1"/>
           </p:cNvPicPr>
@@ -10682,8 +11033,8 @@
         </p:blipFill>
         <p:spPr>
           <a:xfrm>
-            <a:off x="0" y="658368"/>
-            <a:ext cx="5120640" cy="5833872"/>
+            <a:off x="1215564" y="1783080"/>
+            <a:ext cx="9760567" cy="4270248"/>
           </a:xfrm>
           <a:prstGeom prst="rect">
             <a:avLst/>
@@ -10692,14 +11043,14 @@
       </p:pic>
       <p:sp>
         <p:nvSpPr>
-          <p:cNvPr id="4" name="Text 1"/>
+          <p:cNvPr id="5" name="Text 2"/>
           <p:cNvSpPr/>
           <p:nvPr/>
         </p:nvSpPr>
         <p:spPr>
           <a:xfrm>
-            <a:off x="5349240" y="1005840"/>
-            <a:ext cx="6522415" cy="731520"/>
+            <a:off x="457200" y="6089904"/>
+            <a:ext cx="11277295" cy="347472"/>
           </a:xfrm>
           <a:prstGeom prst="rect">
             <a:avLst/>
@@ -10708,68 +11059,24 @@
           <a:ln/>
         </p:spPr>
         <p:txBody>
-          <a:bodyPr wrap="square" lIns="0" tIns="0" rIns="0" bIns="0" rtlCol="0" anchor="ctr">
-            <a:normAutofit/>
-          </a:bodyPr>
+          <a:bodyPr wrap="square" lIns="0" tIns="0" rIns="0" bIns="0" rtlCol="0" anchor="ctr"/>
           <a:lstStyle/>
           <a:p>
             <a:pPr algn="ctr" indent="0" marL="0">
               <a:buNone/>
             </a:pPr>
             <a:r>
-              <a:rPr lang="en-US" sz="3600" b="1" dirty="0">
-                <a:solidFill>
-                  <a:srgbClr val="990011"/>
+              <a:rPr lang="en-US" sz="1800" i="1" dirty="0">
+                <a:solidFill>
+                  <a:srgbClr val="555555"/>
                 </a:solidFill>
                 <a:latin typeface="Times New Roman" pitchFamily="34" charset="0"/>
                 <a:ea typeface="Times New Roman" pitchFamily="34" charset="-122"/>
                 <a:cs typeface="Times New Roman" pitchFamily="34" charset="-120"/>
               </a:rPr>
-              <a:t>Activity 3: Answer</a:t>
-            </a:r>
-            <a:endParaRPr lang="en-US" sz="3600" dirty="0"/>
-          </a:p>
-        </p:txBody>
-      </p:sp>
-      <p:sp>
-        <p:nvSpPr>
-          <p:cNvPr id="5" name="Text 2"/>
-          <p:cNvSpPr/>
-          <p:nvPr/>
-        </p:nvSpPr>
-        <p:spPr>
-          <a:xfrm>
-            <a:off x="5349240" y="1783080"/>
-            <a:ext cx="6522415" cy="4663440"/>
-          </a:xfrm>
-          <a:prstGeom prst="rect">
-            <a:avLst/>
-          </a:prstGeom>
-          <a:noFill/>
-          <a:ln/>
-        </p:spPr>
-        <p:txBody>
-          <a:bodyPr wrap="square" lIns="0" tIns="0" rIns="0" bIns="0" rtlCol="0" anchor="t"/>
-          <a:lstStyle/>
-          <a:p>
-            <a:pPr algn="l" indent="0" marL="0">
-              <a:spcAft>
-                <a:spcPts val="800"/>
-              </a:spcAft>
-              <a:buNone/>
-            </a:pPr>
-            <a:r>
-              <a:rPr lang="en-US" sz="4000" dirty="0">
-                <a:solidFill>
-                  <a:srgbClr val="111111"/>
-                </a:solidFill>
-                <a:latin typeface="Times New Roman" pitchFamily="34" charset="0"/>
-                <a:ea typeface="Times New Roman" pitchFamily="34" charset="-122"/>
-                <a:cs typeface="Times New Roman" pitchFamily="34" charset="-120"/>
-              </a:rPr>
-              <a:t>It allows more crops per year on the same land.</a:t>
-            </a:r>
-            <a:endParaRPr lang="en-US" sz="4000" dirty="0"/>
+              <a:t>The S-curve and the J-curve.</a:t>
+            </a:r>
+            <a:endParaRPr lang="en-US" sz="1800" dirty="0"/>
           </a:p>
         </p:txBody>
       </p:sp>
@@ -10879,54 +11186,15 @@
                 <a:ea typeface="Calibri" pitchFamily="34" charset="-122"/>
                 <a:cs typeface="Calibri" pitchFamily="34" charset="-120"/>
               </a:rPr>
-              <a:t>2. ADJUSTING: OTHER WAYS</a:t>
+              <a:t>2. J-CURVE</a:t>
             </a:r>
             <a:endParaRPr lang="en-US" sz="1400" dirty="0"/>
-          </a:p>
-        </p:txBody>
-      </p:sp>
-      <p:sp>
-        <p:nvSpPr>
-          <p:cNvPr id="3" name="Text 1"/>
-          <p:cNvSpPr/>
-          <p:nvPr/>
-        </p:nvSpPr>
-        <p:spPr>
-          <a:xfrm>
-            <a:off x="457200" y="1005840"/>
-            <a:ext cx="11277295" cy="731520"/>
-          </a:xfrm>
-          <a:prstGeom prst="rect">
-            <a:avLst/>
-          </a:prstGeom>
-          <a:noFill/>
-          <a:ln/>
-        </p:spPr>
-        <p:txBody>
-          <a:bodyPr wrap="square" lIns="0" tIns="0" rIns="0" bIns="0" rtlCol="0" anchor="ctr"/>
-          <a:lstStyle/>
-          <a:p>
-            <a:pPr algn="ctr" indent="0" marL="0">
-              <a:buNone/>
-            </a:pPr>
-            <a:r>
-              <a:rPr lang="en-US" sz="3600" b="1" dirty="0">
-                <a:solidFill>
-                  <a:srgbClr val="990011"/>
-                </a:solidFill>
-                <a:latin typeface="Times New Roman" pitchFamily="34" charset="0"/>
-                <a:ea typeface="Times New Roman" pitchFamily="34" charset="-122"/>
-                <a:cs typeface="Times New Roman" pitchFamily="34" charset="-120"/>
-              </a:rPr>
-              <a:t>Activity 4</a:t>
-            </a:r>
-            <a:endParaRPr lang="en-US" sz="3600" dirty="0"/>
           </a:p>
         </p:txBody>
       </p:sp>
       <p:pic>
         <p:nvPicPr>
-          <p:cNvPr id="4" name="Image 0" descr="/home/claude/f4/img/v2/overgrazing_big.png">    </p:cNvPr>
+          <p:cNvPr id="3" name="Image 0" descr="/home/claude/f4/img/minesec_sheet.png">    </p:cNvPr>
           <p:cNvPicPr>
             <a:picLocks noChangeAspect="1"/>
           </p:cNvPicPr>
@@ -10940,8 +11208,8 @@
         </p:blipFill>
         <p:spPr>
           <a:xfrm>
-            <a:off x="629930" y="1783080"/>
-            <a:ext cx="10931835" cy="4270248"/>
+            <a:off x="0" y="658368"/>
+            <a:ext cx="5120640" cy="5833872"/>
           </a:xfrm>
           <a:prstGeom prst="rect">
             <a:avLst/>
@@ -10950,14 +11218,14 @@
       </p:pic>
       <p:sp>
         <p:nvSpPr>
-          <p:cNvPr id="5" name="Text 2"/>
+          <p:cNvPr id="4" name="Text 1"/>
           <p:cNvSpPr/>
           <p:nvPr/>
         </p:nvSpPr>
         <p:spPr>
           <a:xfrm>
-            <a:off x="457200" y="6089904"/>
-            <a:ext cx="11277295" cy="347472"/>
+            <a:off x="5349240" y="1005840"/>
+            <a:ext cx="6522415" cy="731520"/>
           </a:xfrm>
           <a:prstGeom prst="rect">
             <a:avLst/>
@@ -10966,24 +11234,68 @@
           <a:ln/>
         </p:spPr>
         <p:txBody>
-          <a:bodyPr wrap="square" lIns="0" tIns="0" rIns="0" bIns="0" rtlCol="0" anchor="ctr"/>
+          <a:bodyPr wrap="square" lIns="0" tIns="0" rIns="0" bIns="0" rtlCol="0" anchor="ctr">
+            <a:normAutofit/>
+          </a:bodyPr>
           <a:lstStyle/>
           <a:p>
             <a:pPr algn="ctr" indent="0" marL="0">
               <a:buNone/>
             </a:pPr>
             <a:r>
-              <a:rPr lang="en-US" sz="1800" i="1" dirty="0">
-                <a:solidFill>
-                  <a:srgbClr val="555555"/>
+              <a:rPr lang="en-US" sz="3600" b="1" dirty="0">
+                <a:solidFill>
+                  <a:srgbClr val="990011"/>
                 </a:solidFill>
                 <a:latin typeface="Times New Roman" pitchFamily="34" charset="0"/>
                 <a:ea typeface="Times New Roman" pitchFamily="34" charset="-122"/>
                 <a:cs typeface="Times New Roman" pitchFamily="34" charset="-120"/>
               </a:rPr>
-              <a:t>Overgrazed land.</a:t>
-            </a:r>
-            <a:endParaRPr lang="en-US" sz="1800" dirty="0"/>
+              <a:t>Activity 3: Question</a:t>
+            </a:r>
+            <a:endParaRPr lang="en-US" sz="3600" dirty="0"/>
+          </a:p>
+        </p:txBody>
+      </p:sp>
+      <p:sp>
+        <p:nvSpPr>
+          <p:cNvPr id="5" name="Text 2"/>
+          <p:cNvSpPr/>
+          <p:nvPr/>
+        </p:nvSpPr>
+        <p:spPr>
+          <a:xfrm>
+            <a:off x="5349240" y="1783080"/>
+            <a:ext cx="6522415" cy="4663440"/>
+          </a:xfrm>
+          <a:prstGeom prst="rect">
+            <a:avLst/>
+          </a:prstGeom>
+          <a:noFill/>
+          <a:ln/>
+        </p:spPr>
+        <p:txBody>
+          <a:bodyPr wrap="square" lIns="0" tIns="0" rIns="0" bIns="0" rtlCol="0" anchor="t"/>
+          <a:lstStyle/>
+          <a:p>
+            <a:pPr algn="l" indent="0" marL="0">
+              <a:spcAft>
+                <a:spcPts val="800"/>
+              </a:spcAft>
+              <a:buNone/>
+            </a:pPr>
+            <a:r>
+              <a:rPr lang="en-US" sz="4000" dirty="0">
+                <a:solidFill>
+                  <a:srgbClr val="111111"/>
+                </a:solidFill>
+                <a:latin typeface="Times New Roman" pitchFamily="34" charset="0"/>
+                <a:ea typeface="Times New Roman" pitchFamily="34" charset="-122"/>
+                <a:cs typeface="Times New Roman" pitchFamily="34" charset="-120"/>
+              </a:rPr>
+              <a:t>What happens after the J-curve overshoots the carrying capacity?</a:t>
+            </a:r>
+            <a:endParaRPr lang="en-US" sz="4000" dirty="0"/>
           </a:p>
         </p:txBody>
       </p:sp>
@@ -11093,7 +11405,7 @@
                 <a:ea typeface="Calibri" pitchFamily="34" charset="-122"/>
                 <a:cs typeface="Calibri" pitchFamily="34" charset="-120"/>
               </a:rPr>
-              <a:t>2. ADJUSTING: OTHER WAYS</a:t>
+              <a:t>2. J-CURVE</a:t>
             </a:r>
             <a:endParaRPr lang="en-US" sz="1400" dirty="0"/>
           </a:p>
@@ -11158,7 +11470,7 @@
                 <a:ea typeface="Times New Roman" pitchFamily="34" charset="-122"/>
                 <a:cs typeface="Times New Roman" pitchFamily="34" charset="-120"/>
               </a:rPr>
-              <a:t>Activity 4: Question</a:t>
+              <a:t>Activity 3: Answer</a:t>
             </a:r>
             <a:endParaRPr lang="en-US" sz="3600" dirty="0"/>
           </a:p>
@@ -11200,7 +11512,7 @@
                 <a:ea typeface="Times New Roman" pitchFamily="34" charset="-122"/>
                 <a:cs typeface="Times New Roman" pitchFamily="34" charset="-120"/>
               </a:rPr>
-              <a:t>Give two other ways to adjust to carrying capacity.</a:t>
+              <a:t>The population crashes, then may oscillate.</a:t>
             </a:r>
             <a:endParaRPr lang="en-US" sz="4000" dirty="0"/>
           </a:p>
@@ -11312,15 +11624,54 @@
                 <a:ea typeface="Calibri" pitchFamily="34" charset="-122"/>
                 <a:cs typeface="Calibri" pitchFamily="34" charset="-120"/>
               </a:rPr>
-              <a:t>2. ADJUSTING: OTHER WAYS</a:t>
+              <a:t>3. REGIMES</a:t>
             </a:r>
             <a:endParaRPr lang="en-US" sz="1400" dirty="0"/>
+          </a:p>
+        </p:txBody>
+      </p:sp>
+      <p:sp>
+        <p:nvSpPr>
+          <p:cNvPr id="3" name="Text 1"/>
+          <p:cNvSpPr/>
+          <p:nvPr/>
+        </p:nvSpPr>
+        <p:spPr>
+          <a:xfrm>
+            <a:off x="457200" y="1005840"/>
+            <a:ext cx="11277295" cy="731520"/>
+          </a:xfrm>
+          <a:prstGeom prst="rect">
+            <a:avLst/>
+          </a:prstGeom>
+          <a:noFill/>
+          <a:ln/>
+        </p:spPr>
+        <p:txBody>
+          <a:bodyPr wrap="square" lIns="0" tIns="0" rIns="0" bIns="0" rtlCol="0" anchor="ctr"/>
+          <a:lstStyle/>
+          <a:p>
+            <a:pPr algn="ctr" indent="0" marL="0">
+              <a:buNone/>
+            </a:pPr>
+            <a:r>
+              <a:rPr lang="en-US" sz="3600" b="1" dirty="0">
+                <a:solidFill>
+                  <a:srgbClr val="990011"/>
+                </a:solidFill>
+                <a:latin typeface="Times New Roman" pitchFamily="34" charset="0"/>
+                <a:ea typeface="Times New Roman" pitchFamily="34" charset="-122"/>
+                <a:cs typeface="Times New Roman" pitchFamily="34" charset="-120"/>
+              </a:rPr>
+              <a:t>Activity 4</a:t>
+            </a:r>
+            <a:endParaRPr lang="en-US" sz="3600" dirty="0"/>
           </a:p>
         </p:txBody>
       </p:sp>
       <p:pic>
         <p:nvPicPr>
-          <p:cNvPr id="3" name="Image 0" descr="/home/claude/f4/img/minesec_sheet.png">    </p:cNvPr>
+          <p:cNvPr id="4" name="Image 0" descr="/home/claude/f4/img/v2/pop2_regimes3.png">    </p:cNvPr>
           <p:cNvPicPr>
             <a:picLocks noChangeAspect="1"/>
           </p:cNvPicPr>
@@ -11334,8 +11685,8 @@
         </p:blipFill>
         <p:spPr>
           <a:xfrm>
-            <a:off x="0" y="658368"/>
-            <a:ext cx="5120640" cy="5833872"/>
+            <a:off x="629930" y="1783080"/>
+            <a:ext cx="10931835" cy="4270248"/>
           </a:xfrm>
           <a:prstGeom prst="rect">
             <a:avLst/>
@@ -11344,14 +11695,14 @@
       </p:pic>
       <p:sp>
         <p:nvSpPr>
-          <p:cNvPr id="4" name="Text 1"/>
+          <p:cNvPr id="5" name="Text 2"/>
           <p:cNvSpPr/>
           <p:nvPr/>
         </p:nvSpPr>
         <p:spPr>
           <a:xfrm>
-            <a:off x="5349240" y="1005840"/>
-            <a:ext cx="6522415" cy="731520"/>
+            <a:off x="457200" y="6089904"/>
+            <a:ext cx="11277295" cy="347472"/>
           </a:xfrm>
           <a:prstGeom prst="rect">
             <a:avLst/>
@@ -11360,68 +11711,24 @@
           <a:ln/>
         </p:spPr>
         <p:txBody>
-          <a:bodyPr wrap="square" lIns="0" tIns="0" rIns="0" bIns="0" rtlCol="0" anchor="ctr">
-            <a:normAutofit/>
-          </a:bodyPr>
+          <a:bodyPr wrap="square" lIns="0" tIns="0" rIns="0" bIns="0" rtlCol="0" anchor="ctr"/>
           <a:lstStyle/>
           <a:p>
             <a:pPr algn="ctr" indent="0" marL="0">
               <a:buNone/>
             </a:pPr>
             <a:r>
-              <a:rPr lang="en-US" sz="3600" b="1" dirty="0">
-                <a:solidFill>
-                  <a:srgbClr val="990011"/>
+              <a:rPr lang="en-US" sz="1800" i="1" dirty="0">
+                <a:solidFill>
+                  <a:srgbClr val="555555"/>
                 </a:solidFill>
                 <a:latin typeface="Times New Roman" pitchFamily="34" charset="0"/>
                 <a:ea typeface="Times New Roman" pitchFamily="34" charset="-122"/>
                 <a:cs typeface="Times New Roman" pitchFamily="34" charset="-120"/>
               </a:rPr>
-              <a:t>Activity 4: Answer</a:t>
-            </a:r>
-            <a:endParaRPr lang="en-US" sz="3600" dirty="0"/>
-          </a:p>
-        </p:txBody>
-      </p:sp>
-      <p:sp>
-        <p:nvSpPr>
-          <p:cNvPr id="5" name="Text 2"/>
-          <p:cNvSpPr/>
-          <p:nvPr/>
-        </p:nvSpPr>
-        <p:spPr>
-          <a:xfrm>
-            <a:off x="5349240" y="1783080"/>
-            <a:ext cx="6522415" cy="4663440"/>
-          </a:xfrm>
-          <a:prstGeom prst="rect">
-            <a:avLst/>
-          </a:prstGeom>
-          <a:noFill/>
-          <a:ln/>
-        </p:spPr>
-        <p:txBody>
-          <a:bodyPr wrap="square" lIns="0" tIns="0" rIns="0" bIns="0" rtlCol="0" anchor="t"/>
-          <a:lstStyle/>
-          <a:p>
-            <a:pPr algn="l" indent="0" marL="0">
-              <a:spcAft>
-                <a:spcPts val="800"/>
-              </a:spcAft>
-              <a:buNone/>
-            </a:pPr>
-            <a:r>
-              <a:rPr lang="en-US" sz="4000" dirty="0">
-                <a:solidFill>
-                  <a:srgbClr val="111111"/>
-                </a:solidFill>
-                <a:latin typeface="Times New Roman" pitchFamily="34" charset="0"/>
-                <a:ea typeface="Times New Roman" pitchFamily="34" charset="-122"/>
-                <a:cs typeface="Times New Roman" pitchFamily="34" charset="-120"/>
-              </a:rPr>
-              <a:t>Reduce herd size, migrate, or import food (also family planning).</a:t>
-            </a:r>
-            <a:endParaRPr lang="en-US" sz="4000" dirty="0"/>
+              <a:t>Three population-resource regimes.</a:t>
+            </a:r>
+            <a:endParaRPr lang="en-US" sz="1800" dirty="0"/>
           </a:p>
         </p:txBody>
       </p:sp>
@@ -12102,7 +12409,7 @@
                           <a:ea typeface="Calibri" pitchFamily="34" charset="-122"/>
                           <a:cs typeface="Calibri" pitchFamily="34" charset="-120"/>
                         </a:rPr>
-                        <a:t>Carrying capacity, overshoot, resource, technology, population-resource regime.</a:t>
+                        <a:t>Carrying capacity, S-curve (logistic growth), J-curve, overshoot, oscillation, instantaneous adjustment, overpopulation, sustainable and underpopulation regimes.</a:t>
                       </a:r>
                       <a:endParaRPr lang="en-US" sz="1700" dirty="0">
                         <a:latin typeface="Calibri" charset="0"/>
@@ -12240,7 +12547,7 @@
                           <a:ea typeface="Calibri" pitchFamily="34" charset="-122"/>
                           <a:cs typeface="Calibri" pitchFamily="34" charset="-120"/>
                         </a:rPr>
-                        <a:t>Meaning; ways of adjusting resources to carrying capacity; population-resource regimes.</a:t>
+                        <a:t>Meaning of carrying capacity; ways of adjusting to it (S-curve, J-curve, instantaneous adjustment); population-resource regimes (overpopulation, sustainable, underpopulation).</a:t>
                       </a:r>
                       <a:endParaRPr lang="en-US" sz="1700" dirty="0">
                         <a:latin typeface="Calibri" charset="0"/>
@@ -12378,7 +12685,7 @@
                           <a:ea typeface="Calibri" pitchFamily="34" charset="-122"/>
                           <a:cs typeface="Calibri" pitchFamily="34" charset="-120"/>
                         </a:rPr>
-                        <a:t>Learners are able to explain carrying capacity and how societies adjust to it.</a:t>
+                        <a:t>Learners are able to explain carrying capacity and the ways populations adjust to it, and apply them to overgrazing around Garoua.</a:t>
                       </a:r>
                       <a:endParaRPr lang="en-US" sz="1700" dirty="0">
                         <a:latin typeface="Calibri" charset="0"/>
@@ -12540,54 +12847,15 @@
                 <a:ea typeface="Calibri" pitchFamily="34" charset="-122"/>
                 <a:cs typeface="Calibri" pitchFamily="34" charset="-120"/>
               </a:rPr>
-              <a:t>3. POPULATION–RESOURCES REGIMES</a:t>
+              <a:t>3. REGIMES</a:t>
             </a:r>
             <a:endParaRPr lang="en-US" sz="1400" dirty="0"/>
-          </a:p>
-        </p:txBody>
-      </p:sp>
-      <p:sp>
-        <p:nvSpPr>
-          <p:cNvPr id="3" name="Text 1"/>
-          <p:cNvSpPr/>
-          <p:nvPr/>
-        </p:nvSpPr>
-        <p:spPr>
-          <a:xfrm>
-            <a:off x="457200" y="1005840"/>
-            <a:ext cx="11277295" cy="731520"/>
-          </a:xfrm>
-          <a:prstGeom prst="rect">
-            <a:avLst/>
-          </a:prstGeom>
-          <a:noFill/>
-          <a:ln/>
-        </p:spPr>
-        <p:txBody>
-          <a:bodyPr wrap="square" lIns="0" tIns="0" rIns="0" bIns="0" rtlCol="0" anchor="ctr"/>
-          <a:lstStyle/>
-          <a:p>
-            <a:pPr algn="ctr" indent="0" marL="0">
-              <a:buNone/>
-            </a:pPr>
-            <a:r>
-              <a:rPr lang="en-US" sz="3600" b="1" dirty="0">
-                <a:solidFill>
-                  <a:srgbClr val="990011"/>
-                </a:solidFill>
-                <a:latin typeface="Times New Roman" pitchFamily="34" charset="0"/>
-                <a:ea typeface="Times New Roman" pitchFamily="34" charset="-122"/>
-                <a:cs typeface="Times New Roman" pitchFamily="34" charset="-120"/>
-              </a:rPr>
-              <a:t>Activity 5</a:t>
-            </a:r>
-            <a:endParaRPr lang="en-US" sz="3600" dirty="0"/>
           </a:p>
         </p:txBody>
       </p:sp>
       <p:pic>
         <p:nvPicPr>
-          <p:cNvPr id="4" name="Image 0" descr="/home/claude/f4/img/v2/regimes_big.png">    </p:cNvPr>
+          <p:cNvPr id="3" name="Image 0" descr="/home/claude/f4/img/minesec_sheet.png">    </p:cNvPr>
           <p:cNvPicPr>
             <a:picLocks noChangeAspect="1"/>
           </p:cNvPicPr>
@@ -12601,8 +12869,8 @@
         </p:blipFill>
         <p:spPr>
           <a:xfrm>
-            <a:off x="629930" y="1783080"/>
-            <a:ext cx="10931835" cy="4270248"/>
+            <a:off x="0" y="658368"/>
+            <a:ext cx="5120640" cy="5833872"/>
           </a:xfrm>
           <a:prstGeom prst="rect">
             <a:avLst/>
@@ -12611,14 +12879,14 @@
       </p:pic>
       <p:sp>
         <p:nvSpPr>
-          <p:cNvPr id="5" name="Text 2"/>
+          <p:cNvPr id="4" name="Text 1"/>
           <p:cNvSpPr/>
           <p:nvPr/>
         </p:nvSpPr>
         <p:spPr>
           <a:xfrm>
-            <a:off x="457200" y="6089904"/>
-            <a:ext cx="11277295" cy="347472"/>
+            <a:off x="5349240" y="1005840"/>
+            <a:ext cx="6522415" cy="731520"/>
           </a:xfrm>
           <a:prstGeom prst="rect">
             <a:avLst/>
@@ -12627,24 +12895,68 @@
           <a:ln/>
         </p:spPr>
         <p:txBody>
-          <a:bodyPr wrap="square" lIns="0" tIns="0" rIns="0" bIns="0" rtlCol="0" anchor="ctr"/>
+          <a:bodyPr wrap="square" lIns="0" tIns="0" rIns="0" bIns="0" rtlCol="0" anchor="ctr">
+            <a:normAutofit/>
+          </a:bodyPr>
           <a:lstStyle/>
           <a:p>
             <a:pPr algn="ctr" indent="0" marL="0">
               <a:buNone/>
             </a:pPr>
             <a:r>
-              <a:rPr lang="en-US" sz="1800" i="1" dirty="0">
-                <a:solidFill>
-                  <a:srgbClr val="555555"/>
+              <a:rPr lang="en-US" sz="3600" b="1" dirty="0">
+                <a:solidFill>
+                  <a:srgbClr val="990011"/>
                 </a:solidFill>
                 <a:latin typeface="Times New Roman" pitchFamily="34" charset="0"/>
                 <a:ea typeface="Times New Roman" pitchFamily="34" charset="-122"/>
                 <a:cs typeface="Times New Roman" pitchFamily="34" charset="-120"/>
               </a:rPr>
-              <a:t>Population-resource regimes.</a:t>
-            </a:r>
-            <a:endParaRPr lang="en-US" sz="1800" dirty="0"/>
+              <a:t>Activity 4: Question</a:t>
+            </a:r>
+            <a:endParaRPr lang="en-US" sz="3600" dirty="0"/>
+          </a:p>
+        </p:txBody>
+      </p:sp>
+      <p:sp>
+        <p:nvSpPr>
+          <p:cNvPr id="5" name="Text 2"/>
+          <p:cNvSpPr/>
+          <p:nvPr/>
+        </p:nvSpPr>
+        <p:spPr>
+          <a:xfrm>
+            <a:off x="5349240" y="1783080"/>
+            <a:ext cx="6522415" cy="4663440"/>
+          </a:xfrm>
+          <a:prstGeom prst="rect">
+            <a:avLst/>
+          </a:prstGeom>
+          <a:noFill/>
+          <a:ln/>
+        </p:spPr>
+        <p:txBody>
+          <a:bodyPr wrap="square" lIns="0" tIns="0" rIns="0" bIns="0" rtlCol="0" anchor="t"/>
+          <a:lstStyle/>
+          <a:p>
+            <a:pPr algn="l" indent="0" marL="0">
+              <a:spcAft>
+                <a:spcPts val="800"/>
+              </a:spcAft>
+              <a:buNone/>
+            </a:pPr>
+            <a:r>
+              <a:rPr lang="en-US" sz="4000" dirty="0">
+                <a:solidFill>
+                  <a:srgbClr val="111111"/>
+                </a:solidFill>
+                <a:latin typeface="Times New Roman" pitchFamily="34" charset="0"/>
+                <a:ea typeface="Times New Roman" pitchFamily="34" charset="-122"/>
+                <a:cs typeface="Times New Roman" pitchFamily="34" charset="-120"/>
+              </a:rPr>
+              <a:t>In which regime are resources not fully used?</a:t>
+            </a:r>
+            <a:endParaRPr lang="en-US" sz="4000" dirty="0"/>
           </a:p>
         </p:txBody>
       </p:sp>
@@ -12754,7 +13066,7 @@
                 <a:ea typeface="Calibri" pitchFamily="34" charset="-122"/>
                 <a:cs typeface="Calibri" pitchFamily="34" charset="-120"/>
               </a:rPr>
-              <a:t>3. POPULATION–RESOURCES REGIMES</a:t>
+              <a:t>3. REGIMES</a:t>
             </a:r>
             <a:endParaRPr lang="en-US" sz="1400" dirty="0"/>
           </a:p>
@@ -12819,7 +13131,7 @@
                 <a:ea typeface="Times New Roman" pitchFamily="34" charset="-122"/>
                 <a:cs typeface="Times New Roman" pitchFamily="34" charset="-120"/>
               </a:rPr>
-              <a:t>Activity 5: Question</a:t>
+              <a:t>Activity 4: Answer</a:t>
             </a:r>
             <a:endParaRPr lang="en-US" sz="3600" dirty="0"/>
           </a:p>
@@ -12861,7 +13173,7 @@
                 <a:ea typeface="Times New Roman" pitchFamily="34" charset="-122"/>
                 <a:cs typeface="Times New Roman" pitchFamily="34" charset="-120"/>
               </a:rPr>
-              <a:t>Which regime has few people and rich resources but low technology?</a:t>
+              <a:t>Underpopulation.</a:t>
             </a:r>
             <a:endParaRPr lang="en-US" sz="4000" dirty="0"/>
           </a:p>
@@ -12973,15 +13285,54 @@
                 <a:ea typeface="Calibri" pitchFamily="34" charset="-122"/>
                 <a:cs typeface="Calibri" pitchFamily="34" charset="-120"/>
               </a:rPr>
-              <a:t>3. POPULATION–RESOURCES REGIMES</a:t>
+              <a:t>3. REGIMES</a:t>
             </a:r>
             <a:endParaRPr lang="en-US" sz="1400" dirty="0"/>
+          </a:p>
+        </p:txBody>
+      </p:sp>
+      <p:sp>
+        <p:nvSpPr>
+          <p:cNvPr id="3" name="Text 1"/>
+          <p:cNvSpPr/>
+          <p:nvPr/>
+        </p:nvSpPr>
+        <p:spPr>
+          <a:xfrm>
+            <a:off x="457200" y="1005840"/>
+            <a:ext cx="11277295" cy="731520"/>
+          </a:xfrm>
+          <a:prstGeom prst="rect">
+            <a:avLst/>
+          </a:prstGeom>
+          <a:noFill/>
+          <a:ln/>
+        </p:spPr>
+        <p:txBody>
+          <a:bodyPr wrap="square" lIns="0" tIns="0" rIns="0" bIns="0" rtlCol="0" anchor="ctr"/>
+          <a:lstStyle/>
+          <a:p>
+            <a:pPr algn="ctr" indent="0" marL="0">
+              <a:buNone/>
+            </a:pPr>
+            <a:r>
+              <a:rPr lang="en-US" sz="3600" b="1" dirty="0">
+                <a:solidFill>
+                  <a:srgbClr val="990011"/>
+                </a:solidFill>
+                <a:latin typeface="Times New Roman" pitchFamily="34" charset="0"/>
+                <a:ea typeface="Times New Roman" pitchFamily="34" charset="-122"/>
+                <a:cs typeface="Times New Roman" pitchFamily="34" charset="-120"/>
+              </a:rPr>
+              <a:t>Activity 5</a:t>
+            </a:r>
+            <a:endParaRPr lang="en-US" sz="3600" dirty="0"/>
           </a:p>
         </p:txBody>
       </p:sp>
       <p:pic>
         <p:nvPicPr>
-          <p:cNvPr id="3" name="Image 0" descr="/home/claude/f4/img/minesec_sheet.png">    </p:cNvPr>
+          <p:cNvPr id="4" name="Image 0" descr="/home/claude/f4/img/v2/f2t_drought.jpg">    </p:cNvPr>
           <p:cNvPicPr>
             <a:picLocks noChangeAspect="1"/>
           </p:cNvPicPr>
@@ -12995,8 +13346,8 @@
         </p:blipFill>
         <p:spPr>
           <a:xfrm>
-            <a:off x="0" y="658368"/>
-            <a:ext cx="5120640" cy="5833872"/>
+            <a:off x="2246610" y="1783080"/>
+            <a:ext cx="7698475" cy="4270248"/>
           </a:xfrm>
           <a:prstGeom prst="rect">
             <a:avLst/>
@@ -13005,14 +13356,14 @@
       </p:pic>
       <p:sp>
         <p:nvSpPr>
-          <p:cNvPr id="4" name="Text 1"/>
+          <p:cNvPr id="5" name="Text 2"/>
           <p:cNvSpPr/>
           <p:nvPr/>
         </p:nvSpPr>
         <p:spPr>
           <a:xfrm>
-            <a:off x="5349240" y="1005840"/>
-            <a:ext cx="6522415" cy="731520"/>
+            <a:off x="457200" y="6089904"/>
+            <a:ext cx="11277295" cy="347472"/>
           </a:xfrm>
           <a:prstGeom prst="rect">
             <a:avLst/>
@@ -13021,68 +13372,24 @@
           <a:ln/>
         </p:spPr>
         <p:txBody>
-          <a:bodyPr wrap="square" lIns="0" tIns="0" rIns="0" bIns="0" rtlCol="0" anchor="ctr">
-            <a:normAutofit/>
-          </a:bodyPr>
+          <a:bodyPr wrap="square" lIns="0" tIns="0" rIns="0" bIns="0" rtlCol="0" anchor="ctr"/>
           <a:lstStyle/>
           <a:p>
             <a:pPr algn="ctr" indent="0" marL="0">
               <a:buNone/>
             </a:pPr>
             <a:r>
-              <a:rPr lang="en-US" sz="3600" b="1" dirty="0">
-                <a:solidFill>
-                  <a:srgbClr val="990011"/>
+              <a:rPr lang="en-US" sz="1800" i="1" dirty="0">
+                <a:solidFill>
+                  <a:srgbClr val="555555"/>
                 </a:solidFill>
                 <a:latin typeface="Times New Roman" pitchFamily="34" charset="0"/>
                 <a:ea typeface="Times New Roman" pitchFamily="34" charset="-122"/>
                 <a:cs typeface="Times New Roman" pitchFamily="34" charset="-120"/>
               </a:rPr>
-              <a:t>Activity 5: Answer</a:t>
-            </a:r>
-            <a:endParaRPr lang="en-US" sz="3600" dirty="0"/>
-          </a:p>
-        </p:txBody>
-      </p:sp>
-      <p:sp>
-        <p:nvSpPr>
-          <p:cNvPr id="5" name="Text 2"/>
-          <p:cNvSpPr/>
-          <p:nvPr/>
-        </p:nvSpPr>
-        <p:spPr>
-          <a:xfrm>
-            <a:off x="5349240" y="1783080"/>
-            <a:ext cx="6522415" cy="4663440"/>
-          </a:xfrm>
-          <a:prstGeom prst="rect">
-            <a:avLst/>
-          </a:prstGeom>
-          <a:noFill/>
-          <a:ln/>
-        </p:spPr>
-        <p:txBody>
-          <a:bodyPr wrap="square" lIns="0" tIns="0" rIns="0" bIns="0" rtlCol="0" anchor="t"/>
-          <a:lstStyle/>
-          <a:p>
-            <a:pPr algn="l" indent="0" marL="0">
-              <a:spcAft>
-                <a:spcPts val="800"/>
-              </a:spcAft>
-              <a:buNone/>
-            </a:pPr>
-            <a:r>
-              <a:rPr lang="en-US" sz="4000" dirty="0">
-                <a:solidFill>
-                  <a:srgbClr val="111111"/>
-                </a:solidFill>
-                <a:latin typeface="Times New Roman" pitchFamily="34" charset="0"/>
-                <a:ea typeface="Times New Roman" pitchFamily="34" charset="-122"/>
-                <a:cs typeface="Times New Roman" pitchFamily="34" charset="-120"/>
-              </a:rPr>
-              <a:t>The Brazilian type (Congo, Gabon).</a:t>
-            </a:r>
-            <a:endParaRPr lang="en-US" sz="4000" dirty="0"/>
+              <a:t>Drought in the Sahel.</a:t>
+            </a:r>
+            <a:endParaRPr lang="en-US" sz="1800" dirty="0"/>
           </a:p>
         </p:txBody>
       </p:sp>
@@ -13192,7 +13499,7 @@
                 <a:ea typeface="Calibri" pitchFamily="34" charset="-122"/>
                 <a:cs typeface="Calibri" pitchFamily="34" charset="-120"/>
               </a:rPr>
-              <a:t>BOARD SUMMARY</a:t>
+              <a:t>3. REGIMES</a:t>
             </a:r>
             <a:endParaRPr lang="en-US" sz="1400" dirty="0"/>
           </a:p>
@@ -13257,7 +13564,7 @@
                 <a:ea typeface="Times New Roman" pitchFamily="34" charset="-122"/>
                 <a:cs typeface="Times New Roman" pitchFamily="34" charset="-120"/>
               </a:rPr>
-              <a:t>Board Summary</a:t>
+              <a:t>Activity 5: Question</a:t>
             </a:r>
             <a:endParaRPr lang="en-US" sz="3600" dirty="0"/>
           </a:p>
@@ -13291,7 +13598,7 @@
               <a:buNone/>
             </a:pPr>
             <a:r>
-              <a:rPr lang="en-US" sz="4000" b="1" dirty="0">
+              <a:rPr lang="en-US" sz="4000" dirty="0">
                 <a:solidFill>
                   <a:srgbClr val="111111"/>
                 </a:solidFill>
@@ -13299,47 +13606,7 @@
                 <a:ea typeface="Times New Roman" pitchFamily="34" charset="-122"/>
                 <a:cs typeface="Times New Roman" pitchFamily="34" charset="-120"/>
               </a:rPr>
-              <a:t>Topic: Population Growth and Resources</a:t>
-            </a:r>
-            <a:endParaRPr lang="en-US" sz="4000" dirty="0"/>
-          </a:p>
-          <a:p>
-            <a:pPr algn="l" indent="0" marL="0">
-              <a:spcAft>
-                <a:spcPts val="800"/>
-              </a:spcAft>
-              <a:buNone/>
-            </a:pPr>
-            <a:r>
-              <a:rPr lang="en-US" sz="4000" b="1" dirty="0">
-                <a:solidFill>
-                  <a:srgbClr val="111111"/>
-                </a:solidFill>
-                <a:latin typeface="Times New Roman" pitchFamily="34" charset="0"/>
-                <a:ea typeface="Times New Roman" pitchFamily="34" charset="-122"/>
-                <a:cs typeface="Times New Roman" pitchFamily="34" charset="-120"/>
-              </a:rPr>
-              <a:t>Sub-topic: Population and Resource Relationships</a:t>
-            </a:r>
-            <a:endParaRPr lang="en-US" sz="4000" dirty="0"/>
-          </a:p>
-          <a:p>
-            <a:pPr algn="l" indent="0" marL="0">
-              <a:spcAft>
-                <a:spcPts val="800"/>
-              </a:spcAft>
-              <a:buNone/>
-            </a:pPr>
-            <a:r>
-              <a:rPr lang="en-US" sz="4000" b="1" dirty="0">
-                <a:solidFill>
-                  <a:srgbClr val="990011"/>
-                </a:solidFill>
-                <a:latin typeface="Times New Roman" pitchFamily="34" charset="0"/>
-                <a:ea typeface="Times New Roman" pitchFamily="34" charset="-122"/>
-                <a:cs typeface="Times New Roman" pitchFamily="34" charset="-120"/>
-              </a:rPr>
-              <a:t>Lesson 16: Carrying Capacity</a:t>
+              <a:t>Why are parts of the Sahel said to be overpopulated?</a:t>
             </a:r>
             <a:endParaRPr lang="en-US" sz="4000" dirty="0"/>
           </a:p>
@@ -13451,7 +13718,7 @@
                 <a:ea typeface="Calibri" pitchFamily="34" charset="-122"/>
                 <a:cs typeface="Calibri" pitchFamily="34" charset="-120"/>
               </a:rPr>
-              <a:t>BOARD SUMMARY</a:t>
+              <a:t>3. REGIMES</a:t>
             </a:r>
             <a:endParaRPr lang="en-US" sz="1400" dirty="0"/>
           </a:p>
@@ -13474,7 +13741,7 @@
         <p:spPr>
           <a:xfrm>
             <a:off x="0" y="658368"/>
-            <a:ext cx="3840480" cy="5833872"/>
+            <a:ext cx="5120640" cy="5833872"/>
           </a:xfrm>
           <a:prstGeom prst="rect">
             <a:avLst/>
@@ -13489,8 +13756,8 @@
         </p:nvSpPr>
         <p:spPr>
           <a:xfrm>
-            <a:off x="4069080" y="1005840"/>
-            <a:ext cx="7802575" cy="731520"/>
+            <a:off x="5349240" y="1005840"/>
+            <a:ext cx="6522415" cy="731520"/>
           </a:xfrm>
           <a:prstGeom prst="rect">
             <a:avLst/>
@@ -13516,7 +13783,7 @@
                 <a:ea typeface="Times New Roman" pitchFamily="34" charset="-122"/>
                 <a:cs typeface="Times New Roman" pitchFamily="34" charset="-120"/>
               </a:rPr>
-              <a:t>1. Meaning of Carrying Capacity</a:t>
+              <a:t>Activity 5: Answer</a:t>
             </a:r>
             <a:endParaRPr lang="en-US" sz="3600" dirty="0"/>
           </a:p>
@@ -13530,8 +13797,8 @@
         </p:nvSpPr>
         <p:spPr>
           <a:xfrm>
-            <a:off x="4069080" y="1783080"/>
-            <a:ext cx="7802575" cy="4663440"/>
+            <a:off x="5349240" y="1783080"/>
+            <a:ext cx="6522415" cy="4663440"/>
           </a:xfrm>
           <a:prstGeom prst="rect">
             <a:avLst/>
@@ -13550,7 +13817,7 @@
               <a:buNone/>
             </a:pPr>
             <a:r>
-              <a:rPr lang="en-US" sz="4000" i="1" dirty="0">
+              <a:rPr lang="en-US" sz="4000" dirty="0">
                 <a:solidFill>
                   <a:srgbClr val="111111"/>
                 </a:solidFill>
@@ -13558,44 +13825,7 @@
                 <a:ea typeface="Times New Roman" pitchFamily="34" charset="-122"/>
                 <a:cs typeface="Times New Roman" pitchFamily="34" charset="-120"/>
               </a:rPr>
-              <a:t>Carrying capacity can be understood as follows:</a:t>
-            </a:r>
-            <a:endParaRPr lang="en-US" sz="4000" dirty="0"/>
-          </a:p>
-          <a:p>
-            <a:pPr algn="l" indent="0" marL="0">
-              <a:spcAft>
-                <a:spcPts val="800"/>
-              </a:spcAft>
-              <a:buNone/>
-            </a:pPr>
-            <a:r>
-              <a:rPr lang="en-US" sz="4000" b="1" dirty="0">
-                <a:solidFill>
-                  <a:srgbClr val="111111"/>
-                </a:solidFill>
-                <a:latin typeface="Times New Roman" pitchFamily="34" charset="0"/>
-                <a:ea typeface="Times New Roman" pitchFamily="34" charset="-122"/>
-                <a:cs typeface="Times New Roman" pitchFamily="34" charset="-120"/>
-              </a:rPr>
-              <a:t>Carrying capacity: </a:t>
-            </a:r>
-            <a:pPr algn="l" indent="0" marL="0">
-              <a:spcAft>
-                <a:spcPts val="800"/>
-              </a:spcAft>
-              <a:buNone/>
-            </a:pPr>
-            <a:r>
-              <a:rPr lang="en-US" sz="4000" dirty="0">
-                <a:solidFill>
-                  <a:srgbClr val="111111"/>
-                </a:solidFill>
-                <a:latin typeface="Times New Roman" pitchFamily="34" charset="0"/>
-                <a:ea typeface="Times New Roman" pitchFamily="34" charset="-122"/>
-                <a:cs typeface="Times New Roman" pitchFamily="34" charset="-120"/>
-              </a:rPr>
-              <a:t>It is the maximum number of people (or animals) that an area can support with its resources without damaging the environment.</a:t>
+              <a:t>Too many people and animals for the land lead to desertification and food shortages.</a:t>
             </a:r>
             <a:endParaRPr lang="en-US" sz="4000" dirty="0"/>
           </a:p>
@@ -13772,7 +14002,7 @@
                 <a:ea typeface="Times New Roman" pitchFamily="34" charset="-122"/>
                 <a:cs typeface="Times New Roman" pitchFamily="34" charset="-120"/>
               </a:rPr>
-              <a:t>1. Meaning of Carrying Capacity (continued)</a:t>
+              <a:t>Board Summary</a:t>
             </a:r>
             <a:endParaRPr lang="en-US" sz="3600" dirty="0"/>
           </a:p>
@@ -13814,8 +14044,11 @@
                 <a:ea typeface="Times New Roman" pitchFamily="34" charset="-122"/>
                 <a:cs typeface="Times New Roman" pitchFamily="34" charset="-120"/>
               </a:rPr>
-              <a:t>Overshoot: </a:t>
-            </a:r>
+              <a:t>Topic: Population Growth and Resources</a:t>
+            </a:r>
+            <a:endParaRPr lang="en-US" sz="4000" dirty="0"/>
+          </a:p>
+          <a:p>
             <a:pPr algn="l" indent="0" marL="0">
               <a:spcAft>
                 <a:spcPts val="800"/>
@@ -13823,7 +14056,7 @@
               <a:buNone/>
             </a:pPr>
             <a:r>
-              <a:rPr lang="en-US" sz="4000" dirty="0">
+              <a:rPr lang="en-US" sz="4000" b="1" dirty="0">
                 <a:solidFill>
                   <a:srgbClr val="111111"/>
                 </a:solidFill>
@@ -13831,7 +14064,27 @@
                 <a:ea typeface="Times New Roman" pitchFamily="34" charset="-122"/>
                 <a:cs typeface="Times New Roman" pitchFamily="34" charset="-120"/>
               </a:rPr>
-              <a:t>When the population goes beyond the carrying capacity, resources are overused. Overgrazing, soil erosion and famine follow.</a:t>
+              <a:t>Sub-topic: Population and Resource Relationships</a:t>
+            </a:r>
+            <a:endParaRPr lang="en-US" sz="4000" dirty="0"/>
+          </a:p>
+          <a:p>
+            <a:pPr algn="l" indent="0" marL="0">
+              <a:spcAft>
+                <a:spcPts val="800"/>
+              </a:spcAft>
+              <a:buNone/>
+            </a:pPr>
+            <a:r>
+              <a:rPr lang="en-US" sz="4000" b="1" dirty="0">
+                <a:solidFill>
+                  <a:srgbClr val="990011"/>
+                </a:solidFill>
+                <a:latin typeface="Times New Roman" pitchFamily="34" charset="0"/>
+                <a:ea typeface="Times New Roman" pitchFamily="34" charset="-122"/>
+                <a:cs typeface="Times New Roman" pitchFamily="34" charset="-120"/>
+              </a:rPr>
+              <a:t>Lesson 16: Carrying Capacity</a:t>
             </a:r>
             <a:endParaRPr lang="en-US" sz="4000" dirty="0"/>
           </a:p>
@@ -13949,48 +14202,9 @@
           </a:p>
         </p:txBody>
       </p:sp>
-      <p:sp>
-        <p:nvSpPr>
-          <p:cNvPr id="3" name="Text 1"/>
-          <p:cNvSpPr/>
-          <p:nvPr/>
-        </p:nvSpPr>
-        <p:spPr>
-          <a:xfrm>
-            <a:off x="457200" y="1005840"/>
-            <a:ext cx="11277295" cy="731520"/>
-          </a:xfrm>
-          <a:prstGeom prst="rect">
-            <a:avLst/>
-          </a:prstGeom>
-          <a:noFill/>
-          <a:ln/>
-        </p:spPr>
-        <p:txBody>
-          <a:bodyPr wrap="square" lIns="0" tIns="0" rIns="0" bIns="0" rtlCol="0" anchor="ctr"/>
-          <a:lstStyle/>
-          <a:p>
-            <a:pPr algn="ctr" indent="0" marL="0">
-              <a:buNone/>
-            </a:pPr>
-            <a:r>
-              <a:rPr lang="en-US" sz="3600" b="1" dirty="0">
-                <a:solidFill>
-                  <a:srgbClr val="990011"/>
-                </a:solidFill>
-                <a:latin typeface="Times New Roman" pitchFamily="34" charset="0"/>
-                <a:ea typeface="Times New Roman" pitchFamily="34" charset="-122"/>
-                <a:cs typeface="Times New Roman" pitchFamily="34" charset="-120"/>
-              </a:rPr>
-              <a:t>1. Meaning of Carrying Capacity</a:t>
-            </a:r>
-            <a:endParaRPr lang="en-US" sz="3600" dirty="0"/>
-          </a:p>
-        </p:txBody>
-      </p:sp>
       <p:pic>
         <p:nvPicPr>
-          <p:cNvPr id="4" name="Image 0" descr="/home/claude/f4/img/v2/carrying_big.png">    </p:cNvPr>
+          <p:cNvPr id="3" name="Image 0" descr="/home/claude/f4/img/minesec_sheet.png">    </p:cNvPr>
           <p:cNvPicPr>
             <a:picLocks noChangeAspect="1"/>
           </p:cNvPicPr>
@@ -14004,8 +14218,8 @@
         </p:blipFill>
         <p:spPr>
           <a:xfrm>
-            <a:off x="1215564" y="1783080"/>
-            <a:ext cx="9760567" cy="4270248"/>
+            <a:off x="0" y="658368"/>
+            <a:ext cx="3840480" cy="5833872"/>
           </a:xfrm>
           <a:prstGeom prst="rect">
             <a:avLst/>
@@ -14014,14 +14228,14 @@
       </p:pic>
       <p:sp>
         <p:nvSpPr>
-          <p:cNvPr id="5" name="Text 2"/>
+          <p:cNvPr id="4" name="Text 1"/>
           <p:cNvSpPr/>
           <p:nvPr/>
         </p:nvSpPr>
         <p:spPr>
           <a:xfrm>
-            <a:off x="457200" y="6089904"/>
-            <a:ext cx="11277295" cy="347472"/>
+            <a:off x="4069080" y="1005840"/>
+            <a:ext cx="7802575" cy="731520"/>
           </a:xfrm>
           <a:prstGeom prst="rect">
             <a:avLst/>
@@ -14030,24 +14244,105 @@
           <a:ln/>
         </p:spPr>
         <p:txBody>
-          <a:bodyPr wrap="square" lIns="0" tIns="0" rIns="0" bIns="0" rtlCol="0" anchor="ctr"/>
+          <a:bodyPr wrap="square" lIns="0" tIns="0" rIns="0" bIns="0" rtlCol="0" anchor="ctr">
+            <a:normAutofit/>
+          </a:bodyPr>
           <a:lstStyle/>
           <a:p>
             <a:pPr algn="ctr" indent="0" marL="0">
               <a:buNone/>
             </a:pPr>
             <a:r>
-              <a:rPr lang="en-US" sz="1800" i="1" dirty="0">
-                <a:solidFill>
-                  <a:srgbClr val="555555"/>
+              <a:rPr lang="en-US" sz="3600" b="1" dirty="0">
+                <a:solidFill>
+                  <a:srgbClr val="990011"/>
                 </a:solidFill>
                 <a:latin typeface="Times New Roman" pitchFamily="34" charset="0"/>
                 <a:ea typeface="Times New Roman" pitchFamily="34" charset="-122"/>
                 <a:cs typeface="Times New Roman" pitchFamily="34" charset="-120"/>
               </a:rPr>
-              <a:t>Illustration: carrying capacity</a:t>
-            </a:r>
-            <a:endParaRPr lang="en-US" sz="1800" dirty="0"/>
+              <a:t>DEFINITIONS</a:t>
+            </a:r>
+            <a:endParaRPr lang="en-US" sz="3600" dirty="0"/>
+          </a:p>
+        </p:txBody>
+      </p:sp>
+      <p:sp>
+        <p:nvSpPr>
+          <p:cNvPr id="5" name="Text 2"/>
+          <p:cNvSpPr/>
+          <p:nvPr/>
+        </p:nvSpPr>
+        <p:spPr>
+          <a:xfrm>
+            <a:off x="4069080" y="1783080"/>
+            <a:ext cx="7802575" cy="4663440"/>
+          </a:xfrm>
+          <a:prstGeom prst="rect">
+            <a:avLst/>
+          </a:prstGeom>
+          <a:noFill/>
+          <a:ln/>
+        </p:spPr>
+        <p:txBody>
+          <a:bodyPr wrap="square" lIns="0" tIns="0" rIns="0" bIns="0" rtlCol="0" anchor="t"/>
+          <a:lstStyle/>
+          <a:p>
+            <a:pPr algn="l" indent="0" marL="0">
+              <a:spcAft>
+                <a:spcPts val="800"/>
+              </a:spcAft>
+              <a:buNone/>
+            </a:pPr>
+            <a:r>
+              <a:rPr lang="en-US" sz="4000" i="1" dirty="0">
+                <a:solidFill>
+                  <a:srgbClr val="111111"/>
+                </a:solidFill>
+                <a:latin typeface="Times New Roman" pitchFamily="34" charset="0"/>
+                <a:ea typeface="Times New Roman" pitchFamily="34" charset="-122"/>
+                <a:cs typeface="Times New Roman" pitchFamily="34" charset="-120"/>
+              </a:rPr>
+              <a:t>The key terms of this lesson are defined as follows:</a:t>
+            </a:r>
+            <a:endParaRPr lang="en-US" sz="4000" dirty="0"/>
+          </a:p>
+          <a:p>
+            <a:pPr algn="l" indent="0" marL="0">
+              <a:spcAft>
+                <a:spcPts val="800"/>
+              </a:spcAft>
+              <a:buNone/>
+            </a:pPr>
+            <a:r>
+              <a:rPr lang="en-US" sz="4000" b="1" dirty="0">
+                <a:solidFill>
+                  <a:srgbClr val="111111"/>
+                </a:solidFill>
+                <a:latin typeface="Times New Roman" pitchFamily="34" charset="0"/>
+                <a:ea typeface="Times New Roman" pitchFamily="34" charset="-122"/>
+                <a:cs typeface="Times New Roman" pitchFamily="34" charset="-120"/>
+              </a:rPr>
+              <a:t>Carrying capacity (K): </a:t>
+            </a:r>
+            <a:pPr algn="l" indent="0" marL="0">
+              <a:spcAft>
+                <a:spcPts val="800"/>
+              </a:spcAft>
+              <a:buNone/>
+            </a:pPr>
+            <a:r>
+              <a:rPr lang="en-US" sz="4000" dirty="0">
+                <a:solidFill>
+                  <a:srgbClr val="111111"/>
+                </a:solidFill>
+                <a:latin typeface="Times New Roman" pitchFamily="34" charset="0"/>
+                <a:ea typeface="Times New Roman" pitchFamily="34" charset="-122"/>
+                <a:cs typeface="Times New Roman" pitchFamily="34" charset="-120"/>
+              </a:rPr>
+              <a:t>It is the maximum number of individuals that an environment can support for a long time without being damaged.</a:t>
+            </a:r>
+            <a:endParaRPr lang="en-US" sz="4000" dirty="0"/>
           </a:p>
         </p:txBody>
       </p:sp>
@@ -14180,7 +14475,7 @@
         <p:spPr>
           <a:xfrm>
             <a:off x="0" y="658368"/>
-            <a:ext cx="2468880" cy="5833872"/>
+            <a:ext cx="3840480" cy="5833872"/>
           </a:xfrm>
           <a:prstGeom prst="rect">
             <a:avLst/>
@@ -14195,8 +14490,8 @@
         </p:nvSpPr>
         <p:spPr>
           <a:xfrm>
-            <a:off x="2697480" y="1005840"/>
-            <a:ext cx="9174175" cy="731520"/>
+            <a:off x="4069080" y="1005840"/>
+            <a:ext cx="7802575" cy="731520"/>
           </a:xfrm>
           <a:prstGeom prst="rect">
             <a:avLst/>
@@ -14222,7 +14517,7 @@
                 <a:ea typeface="Times New Roman" pitchFamily="34" charset="-122"/>
                 <a:cs typeface="Times New Roman" pitchFamily="34" charset="-120"/>
               </a:rPr>
-              <a:t>2. Ways of Adjusting Resources to Carrying Capacity</a:t>
+              <a:t>DEFINITIONS (continued)</a:t>
             </a:r>
             <a:endParaRPr lang="en-US" sz="3600" dirty="0"/>
           </a:p>
@@ -14236,8 +14531,8 @@
         </p:nvSpPr>
         <p:spPr>
           <a:xfrm>
-            <a:off x="2697480" y="1783080"/>
-            <a:ext cx="9174175" cy="4663440"/>
+            <a:off x="4069080" y="1783080"/>
+            <a:ext cx="7802575" cy="4663440"/>
           </a:xfrm>
           <a:prstGeom prst="rect">
             <a:avLst/>
@@ -14256,7 +14551,7 @@
               <a:buNone/>
             </a:pPr>
             <a:r>
-              <a:rPr lang="en-US" sz="4000" i="1" dirty="0">
+              <a:rPr lang="en-US" sz="4000" b="1" dirty="0">
                 <a:solidFill>
                   <a:srgbClr val="111111"/>
                 </a:solidFill>
@@ -14264,11 +14559,8 @@
                 <a:ea typeface="Times New Roman" pitchFamily="34" charset="-122"/>
                 <a:cs typeface="Times New Roman" pitchFamily="34" charset="-120"/>
               </a:rPr>
-              <a:t>People adjust to carrying capacity in the following ways:</a:t>
-            </a:r>
-            <a:endParaRPr lang="en-US" sz="4000" dirty="0"/>
-          </a:p>
-          <a:p>
+              <a:t>Overshoot: </a:t>
+            </a:r>
             <a:pPr algn="l" indent="0" marL="0">
               <a:spcAft>
                 <a:spcPts val="800"/>
@@ -14276,7 +14568,7 @@
               <a:buNone/>
             </a:pPr>
             <a:r>
-              <a:rPr lang="en-US" sz="4000" b="1" dirty="0">
+              <a:rPr lang="en-US" sz="4000" dirty="0">
                 <a:solidFill>
                   <a:srgbClr val="111111"/>
                 </a:solidFill>
@@ -14284,8 +14576,11 @@
                 <a:ea typeface="Times New Roman" pitchFamily="34" charset="-122"/>
                 <a:cs typeface="Times New Roman" pitchFamily="34" charset="-120"/>
               </a:rPr>
-              <a:t>Raising resources: </a:t>
-            </a:r>
+              <a:t>It is the situation where a population grows beyond the carrying capacity.</a:t>
+            </a:r>
+            <a:endParaRPr lang="en-US" sz="4000" dirty="0"/>
+          </a:p>
+          <a:p>
             <a:pPr algn="l" indent="0" marL="0">
               <a:spcAft>
                 <a:spcPts val="800"/>
@@ -14293,7 +14588,7 @@
               <a:buNone/>
             </a:pPr>
             <a:r>
-              <a:rPr lang="en-US" sz="4000" dirty="0">
+              <a:rPr lang="en-US" sz="4000" b="1" dirty="0">
                 <a:solidFill>
                   <a:srgbClr val="111111"/>
                 </a:solidFill>
@@ -14301,7 +14596,24 @@
                 <a:ea typeface="Times New Roman" pitchFamily="34" charset="-122"/>
                 <a:cs typeface="Times New Roman" pitchFamily="34" charset="-120"/>
               </a:rPr>
-              <a:t>Irrigation, fertilisers, improved seeds and new technology increase production. Irrigation schemes at Maga and Lagdo raise the capacity of the North.</a:t>
+              <a:t>Oscillation: </a:t>
+            </a:r>
+            <a:pPr algn="l" indent="0" marL="0">
+              <a:spcAft>
+                <a:spcPts val="800"/>
+              </a:spcAft>
+              <a:buNone/>
+            </a:pPr>
+            <a:r>
+              <a:rPr lang="en-US" sz="4000" dirty="0">
+                <a:solidFill>
+                  <a:srgbClr val="111111"/>
+                </a:solidFill>
+                <a:latin typeface="Times New Roman" pitchFamily="34" charset="0"/>
+                <a:ea typeface="Times New Roman" pitchFamily="34" charset="-122"/>
+                <a:cs typeface="Times New Roman" pitchFamily="34" charset="-120"/>
+              </a:rPr>
+              <a:t>It is the repeated rise and fall of a population around the carrying capacity.</a:t>
             </a:r>
             <a:endParaRPr lang="en-US" sz="4000" dirty="0"/>
           </a:p>
@@ -14419,9 +14731,129 @@
           </a:p>
         </p:txBody>
       </p:sp>
+      <p:sp>
+        <p:nvSpPr>
+          <p:cNvPr id="3" name="Text 1"/>
+          <p:cNvSpPr/>
+          <p:nvPr/>
+        </p:nvSpPr>
+        <p:spPr>
+          <a:xfrm>
+            <a:off x="365760" y="1005840"/>
+            <a:ext cx="11460175" cy="731520"/>
+          </a:xfrm>
+          <a:prstGeom prst="rect">
+            <a:avLst/>
+          </a:prstGeom>
+          <a:noFill/>
+          <a:ln/>
+        </p:spPr>
+        <p:txBody>
+          <a:bodyPr wrap="square" lIns="0" tIns="0" rIns="0" bIns="0" rtlCol="0" anchor="ctr">
+            <a:normAutofit/>
+          </a:bodyPr>
+          <a:lstStyle/>
+          <a:p>
+            <a:pPr algn="ctr" indent="0" marL="0">
+              <a:buNone/>
+            </a:pPr>
+            <a:r>
+              <a:rPr lang="en-US" sz="3600" b="1" dirty="0">
+                <a:solidFill>
+                  <a:srgbClr val="990011"/>
+                </a:solidFill>
+                <a:latin typeface="Times New Roman" pitchFamily="34" charset="0"/>
+                <a:ea typeface="Times New Roman" pitchFamily="34" charset="-122"/>
+                <a:cs typeface="Times New Roman" pitchFamily="34" charset="-120"/>
+              </a:rPr>
+              <a:t>1. Meaning of Carrying Capacity</a:t>
+            </a:r>
+            <a:endParaRPr lang="en-US" sz="3600" dirty="0"/>
+          </a:p>
+        </p:txBody>
+      </p:sp>
+      <p:sp>
+        <p:nvSpPr>
+          <p:cNvPr id="4" name="Text 2"/>
+          <p:cNvSpPr/>
+          <p:nvPr/>
+        </p:nvSpPr>
+        <p:spPr>
+          <a:xfrm>
+            <a:off x="365760" y="1783080"/>
+            <a:ext cx="4846320" cy="4617720"/>
+          </a:xfrm>
+          <a:prstGeom prst="rect">
+            <a:avLst/>
+          </a:prstGeom>
+          <a:noFill/>
+          <a:ln/>
+        </p:spPr>
+        <p:txBody>
+          <a:bodyPr wrap="square" lIns="0" tIns="0" rIns="0" bIns="0" rtlCol="0" anchor="t"/>
+          <a:lstStyle/>
+          <a:p>
+            <a:pPr algn="l" indent="0" marL="0">
+              <a:spcAft>
+                <a:spcPts val="800"/>
+              </a:spcAft>
+              <a:buNone/>
+            </a:pPr>
+            <a:r>
+              <a:rPr lang="en-US" sz="3600" i="1" dirty="0">
+                <a:solidFill>
+                  <a:srgbClr val="111111"/>
+                </a:solidFill>
+                <a:latin typeface="Times New Roman" pitchFamily="34" charset="0"/>
+                <a:ea typeface="Times New Roman" pitchFamily="34" charset="-122"/>
+                <a:cs typeface="Times New Roman" pitchFamily="34" charset="-120"/>
+              </a:rPr>
+              <a:t>Carrying capacity is presented as follows:</a:t>
+            </a:r>
+            <a:endParaRPr lang="en-US" sz="3600" dirty="0"/>
+          </a:p>
+          <a:p>
+            <a:pPr algn="l" indent="0" marL="0">
+              <a:spcAft>
+                <a:spcPts val="800"/>
+              </a:spcAft>
+              <a:buNone/>
+            </a:pPr>
+            <a:r>
+              <a:rPr lang="en-US" sz="3600" b="1" dirty="0">
+                <a:solidFill>
+                  <a:srgbClr val="111111"/>
+                </a:solidFill>
+                <a:latin typeface="Times New Roman" pitchFamily="34" charset="0"/>
+                <a:ea typeface="Times New Roman" pitchFamily="34" charset="-122"/>
+                <a:cs typeface="Times New Roman" pitchFamily="34" charset="-120"/>
+              </a:rPr>
+              <a:t>Limit: </a:t>
+            </a:r>
+            <a:pPr algn="l" indent="0" marL="0">
+              <a:spcAft>
+                <a:spcPts val="800"/>
+              </a:spcAft>
+              <a:buNone/>
+            </a:pPr>
+            <a:r>
+              <a:rPr lang="en-US" sz="3600" dirty="0">
+                <a:solidFill>
+                  <a:srgbClr val="111111"/>
+                </a:solidFill>
+                <a:latin typeface="Times New Roman" pitchFamily="34" charset="0"/>
+                <a:ea typeface="Times New Roman" pitchFamily="34" charset="-122"/>
+                <a:cs typeface="Times New Roman" pitchFamily="34" charset="-120"/>
+              </a:rPr>
+              <a:t>It depends on the food, water and space available.</a:t>
+            </a:r>
+            <a:endParaRPr lang="en-US" sz="3600" dirty="0"/>
+          </a:p>
+        </p:txBody>
+      </p:sp>
       <p:pic>
         <p:nvPicPr>
-          <p:cNvPr id="3" name="Image 0" descr="/home/claude/f4/img/minesec_sheet.png">    </p:cNvPr>
+          <p:cNvPr id="5" name="Image 0" descr="/home/claude/f4/img/v2/overgrazing_big.png">    </p:cNvPr>
           <p:cNvPicPr>
             <a:picLocks noChangeAspect="1"/>
           </p:cNvPicPr>
@@ -14435,8 +14867,8 @@
         </p:blipFill>
         <p:spPr>
           <a:xfrm>
-            <a:off x="0" y="658368"/>
-            <a:ext cx="1463040" cy="5833872"/>
+            <a:off x="5349240" y="2617506"/>
+            <a:ext cx="6659575" cy="2601397"/>
           </a:xfrm>
           <a:prstGeom prst="rect">
             <a:avLst/>
@@ -14445,14 +14877,14 @@
       </p:pic>
       <p:sp>
         <p:nvSpPr>
-          <p:cNvPr id="4" name="Text 1"/>
+          <p:cNvPr id="6" name="Text 3"/>
           <p:cNvSpPr/>
           <p:nvPr/>
         </p:nvSpPr>
         <p:spPr>
           <a:xfrm>
-            <a:off x="1691640" y="1005840"/>
-            <a:ext cx="10180015" cy="731520"/>
+            <a:off x="5349240" y="6089904"/>
+            <a:ext cx="6659575" cy="347472"/>
           </a:xfrm>
           <a:prstGeom prst="rect">
             <a:avLst/>
@@ -14461,122 +14893,24 @@
           <a:ln/>
         </p:spPr>
         <p:txBody>
-          <a:bodyPr wrap="square" lIns="0" tIns="0" rIns="0" bIns="0" rtlCol="0" anchor="ctr">
-            <a:normAutofit/>
-          </a:bodyPr>
+          <a:bodyPr wrap="square" lIns="0" tIns="0" rIns="0" bIns="0" rtlCol="0" anchor="ctr"/>
           <a:lstStyle/>
           <a:p>
             <a:pPr algn="ctr" indent="0" marL="0">
               <a:buNone/>
             </a:pPr>
             <a:r>
-              <a:rPr lang="en-US" sz="3600" b="1" dirty="0">
-                <a:solidFill>
-                  <a:srgbClr val="990011"/>
+              <a:rPr lang="en-US" sz="1600" i="1" dirty="0">
+                <a:solidFill>
+                  <a:srgbClr val="555555"/>
                 </a:solidFill>
                 <a:latin typeface="Times New Roman" pitchFamily="34" charset="0"/>
                 <a:ea typeface="Times New Roman" pitchFamily="34" charset="-122"/>
                 <a:cs typeface="Times New Roman" pitchFamily="34" charset="-120"/>
               </a:rPr>
-              <a:t>2. Ways of Adjusting Resources to Carrying Capacity (continued)</a:t>
-            </a:r>
-            <a:endParaRPr lang="en-US" sz="3600" dirty="0"/>
-          </a:p>
-        </p:txBody>
-      </p:sp>
-      <p:sp>
-        <p:nvSpPr>
-          <p:cNvPr id="5" name="Text 2"/>
-          <p:cNvSpPr/>
-          <p:nvPr/>
-        </p:nvSpPr>
-        <p:spPr>
-          <a:xfrm>
-            <a:off x="1691640" y="1783080"/>
-            <a:ext cx="10180015" cy="4663440"/>
-          </a:xfrm>
-          <a:prstGeom prst="rect">
-            <a:avLst/>
-          </a:prstGeom>
-          <a:noFill/>
-          <a:ln/>
-        </p:spPr>
-        <p:txBody>
-          <a:bodyPr wrap="square" lIns="0" tIns="0" rIns="0" bIns="0" rtlCol="0" anchor="t"/>
-          <a:lstStyle/>
-          <a:p>
-            <a:pPr algn="l" indent="0" marL="0">
-              <a:spcAft>
-                <a:spcPts val="800"/>
-              </a:spcAft>
-              <a:buNone/>
-            </a:pPr>
-            <a:r>
-              <a:rPr lang="en-US" sz="4000" b="1" dirty="0">
-                <a:solidFill>
-                  <a:srgbClr val="111111"/>
-                </a:solidFill>
-                <a:latin typeface="Times New Roman" pitchFamily="34" charset="0"/>
-                <a:ea typeface="Times New Roman" pitchFamily="34" charset="-122"/>
-                <a:cs typeface="Times New Roman" pitchFamily="34" charset="-120"/>
-              </a:rPr>
-              <a:t>Reducing demand: </a:t>
-            </a:r>
-            <a:pPr algn="l" indent="0" marL="0">
-              <a:spcAft>
-                <a:spcPts val="800"/>
-              </a:spcAft>
-              <a:buNone/>
-            </a:pPr>
-            <a:r>
-              <a:rPr lang="en-US" sz="4000" dirty="0">
-                <a:solidFill>
-                  <a:srgbClr val="111111"/>
-                </a:solidFill>
-                <a:latin typeface="Times New Roman" pitchFamily="34" charset="0"/>
-                <a:ea typeface="Times New Roman" pitchFamily="34" charset="-122"/>
-                <a:cs typeface="Times New Roman" pitchFamily="34" charset="-120"/>
-              </a:rPr>
-              <a:t>Family planning, migration and controlled grazing reduce pressure on land. People move to less crowded areas.</a:t>
-            </a:r>
-            <a:endParaRPr lang="en-US" sz="4000" dirty="0"/>
-          </a:p>
-          <a:p>
-            <a:pPr algn="l" indent="0" marL="0">
-              <a:spcAft>
-                <a:spcPts val="800"/>
-              </a:spcAft>
-              <a:buNone/>
-            </a:pPr>
-            <a:r>
-              <a:rPr lang="en-US" sz="4000" b="1" dirty="0">
-                <a:solidFill>
-                  <a:srgbClr val="111111"/>
-                </a:solidFill>
-                <a:latin typeface="Times New Roman" pitchFamily="34" charset="0"/>
-                <a:ea typeface="Times New Roman" pitchFamily="34" charset="-122"/>
-                <a:cs typeface="Times New Roman" pitchFamily="34" charset="-120"/>
-              </a:rPr>
-              <a:t>Trade and conservation: </a:t>
-            </a:r>
-            <a:pPr algn="l" indent="0" marL="0">
-              <a:spcAft>
-                <a:spcPts val="800"/>
-              </a:spcAft>
-              <a:buNone/>
-            </a:pPr>
-            <a:r>
-              <a:rPr lang="en-US" sz="4000" dirty="0">
-                <a:solidFill>
-                  <a:srgbClr val="111111"/>
-                </a:solidFill>
-                <a:latin typeface="Times New Roman" pitchFamily="34" charset="0"/>
-                <a:ea typeface="Times New Roman" pitchFamily="34" charset="-122"/>
-                <a:cs typeface="Times New Roman" pitchFamily="34" charset="-120"/>
-              </a:rPr>
-              <a:t>Importing food and protecting resources extend carrying capacity. Soil conservation keeps land productive.</a:t>
-            </a:r>
-            <a:endParaRPr lang="en-US" sz="4000" dirty="0"/>
+              <a:t>Illustration: too many animals</a:t>
+            </a:r>
+            <a:endParaRPr lang="en-US" sz="1600" dirty="0"/>
           </a:p>
         </p:txBody>
       </p:sp>
@@ -14751,7 +15085,7 @@
                 <a:ea typeface="Times New Roman" pitchFamily="34" charset="-122"/>
                 <a:cs typeface="Times New Roman" pitchFamily="34" charset="-120"/>
               </a:rPr>
-              <a:t>3. Population–Resources Regimes</a:t>
+              <a:t>1. Meaning of Carrying Capacity</a:t>
             </a:r>
             <a:endParaRPr lang="en-US" sz="3600" dirty="0"/>
           </a:p>
@@ -14785,7 +15119,7 @@
               <a:buNone/>
             </a:pPr>
             <a:r>
-              <a:rPr lang="en-US" sz="4000" i="1" dirty="0">
+              <a:rPr lang="en-US" sz="4000" b="1" dirty="0">
                 <a:solidFill>
                   <a:srgbClr val="111111"/>
                 </a:solidFill>
@@ -14793,11 +15127,8 @@
                 <a:ea typeface="Times New Roman" pitchFamily="34" charset="-122"/>
                 <a:cs typeface="Times New Roman" pitchFamily="34" charset="-120"/>
               </a:rPr>
-              <a:t>Zelinsky identified the following regimes:</a:t>
-            </a:r>
-            <a:endParaRPr lang="en-US" sz="4000" dirty="0"/>
-          </a:p>
-          <a:p>
+              <a:t>Example: </a:t>
+            </a:r>
             <a:pPr algn="l" indent="0" marL="0">
               <a:spcAft>
                 <a:spcPts val="800"/>
@@ -14805,7 +15136,7 @@
               <a:buNone/>
             </a:pPr>
             <a:r>
-              <a:rPr lang="en-US" sz="4000" b="1" dirty="0">
+              <a:rPr lang="en-US" sz="4000" dirty="0">
                 <a:solidFill>
                   <a:srgbClr val="111111"/>
                 </a:solidFill>
@@ -14813,8 +15144,11 @@
                 <a:ea typeface="Times New Roman" pitchFamily="34" charset="-122"/>
                 <a:cs typeface="Times New Roman" pitchFamily="34" charset="-120"/>
               </a:rPr>
-              <a:t>U.S. type (technological source area): </a:t>
-            </a:r>
+              <a:t>A pasture near Garoua that can feed 50 cattle is destroyed if 100 graze on it.</a:t>
+            </a:r>
+            <a:endParaRPr lang="en-US" sz="4000" dirty="0"/>
+          </a:p>
+          <a:p>
             <a:pPr algn="l" indent="0" marL="0">
               <a:spcAft>
                 <a:spcPts val="800"/>
@@ -14822,7 +15156,7 @@
               <a:buNone/>
             </a:pPr>
             <a:r>
-              <a:rPr lang="en-US" sz="4000" dirty="0">
+              <a:rPr lang="en-US" sz="4000" b="1" dirty="0">
                 <a:solidFill>
                   <a:srgbClr val="111111"/>
                 </a:solidFill>
@@ -14830,7 +15164,24 @@
                 <a:ea typeface="Times New Roman" pitchFamily="34" charset="-122"/>
                 <a:cs typeface="Times New Roman" pitchFamily="34" charset="-120"/>
               </a:rPr>
-              <a:t>Few people, rich resources and high technology give high living standards. The USA and Australia are examples.</a:t>
+              <a:t>Human populations: </a:t>
+            </a:r>
+            <a:pPr algn="l" indent="0" marL="0">
+              <a:spcAft>
+                <a:spcPts val="800"/>
+              </a:spcAft>
+              <a:buNone/>
+            </a:pPr>
+            <a:r>
+              <a:rPr lang="en-US" sz="4000" dirty="0">
+                <a:solidFill>
+                  <a:srgbClr val="111111"/>
+                </a:solidFill>
+                <a:latin typeface="Times New Roman" pitchFamily="34" charset="0"/>
+                <a:ea typeface="Times New Roman" pitchFamily="34" charset="-122"/>
+                <a:cs typeface="Times New Roman" pitchFamily="34" charset="-120"/>
+              </a:rPr>
+              <a:t>Technology and trade can raise the carrying capacity of an area.</a:t>
             </a:r>
             <a:endParaRPr lang="en-US" sz="4000" dirty="0"/>
           </a:p>
@@ -15069,7 +15420,7 @@
                 <a:ea typeface="Times New Roman" pitchFamily="34" charset="-122"/>
                 <a:cs typeface="Times New Roman" pitchFamily="34" charset="-120"/>
               </a:rPr>
-              <a:t>Make a table of push and pull factors for a migrant from your village to a town.</a:t>
+              <a:t>Define carrying capacity.</a:t>
             </a:r>
             <a:endParaRPr lang="en-US" sz="4000" dirty="0"/>
           </a:p>
@@ -15187,9 +15538,129 @@
           </a:p>
         </p:txBody>
       </p:sp>
+      <p:sp>
+        <p:nvSpPr>
+          <p:cNvPr id="3" name="Text 1"/>
+          <p:cNvSpPr/>
+          <p:nvPr/>
+        </p:nvSpPr>
+        <p:spPr>
+          <a:xfrm>
+            <a:off x="365760" y="1005840"/>
+            <a:ext cx="11460175" cy="731520"/>
+          </a:xfrm>
+          <a:prstGeom prst="rect">
+            <a:avLst/>
+          </a:prstGeom>
+          <a:noFill/>
+          <a:ln/>
+        </p:spPr>
+        <p:txBody>
+          <a:bodyPr wrap="square" lIns="0" tIns="0" rIns="0" bIns="0" rtlCol="0" anchor="ctr">
+            <a:normAutofit/>
+          </a:bodyPr>
+          <a:lstStyle/>
+          <a:p>
+            <a:pPr algn="ctr" indent="0" marL="0">
+              <a:buNone/>
+            </a:pPr>
+            <a:r>
+              <a:rPr lang="en-US" sz="3600" b="1" dirty="0">
+                <a:solidFill>
+                  <a:srgbClr val="990011"/>
+                </a:solidFill>
+                <a:latin typeface="Times New Roman" pitchFamily="34" charset="0"/>
+                <a:ea typeface="Times New Roman" pitchFamily="34" charset="-122"/>
+                <a:cs typeface="Times New Roman" pitchFamily="34" charset="-120"/>
+              </a:rPr>
+              <a:t>2. Ways of Adjusting to Carrying Capacity</a:t>
+            </a:r>
+            <a:endParaRPr lang="en-US" sz="3600" dirty="0"/>
+          </a:p>
+        </p:txBody>
+      </p:sp>
+      <p:sp>
+        <p:nvSpPr>
+          <p:cNvPr id="4" name="Text 2"/>
+          <p:cNvSpPr/>
+          <p:nvPr/>
+        </p:nvSpPr>
+        <p:spPr>
+          <a:xfrm>
+            <a:off x="365760" y="1783080"/>
+            <a:ext cx="4846320" cy="4617720"/>
+          </a:xfrm>
+          <a:prstGeom prst="rect">
+            <a:avLst/>
+          </a:prstGeom>
+          <a:noFill/>
+          <a:ln/>
+        </p:spPr>
+        <p:txBody>
+          <a:bodyPr wrap="square" lIns="0" tIns="0" rIns="0" bIns="0" rtlCol="0" anchor="t"/>
+          <a:lstStyle/>
+          <a:p>
+            <a:pPr algn="l" indent="0" marL="0">
+              <a:spcAft>
+                <a:spcPts val="800"/>
+              </a:spcAft>
+              <a:buNone/>
+            </a:pPr>
+            <a:r>
+              <a:rPr lang="en-US" sz="2800" i="1" dirty="0">
+                <a:solidFill>
+                  <a:srgbClr val="111111"/>
+                </a:solidFill>
+                <a:latin typeface="Times New Roman" pitchFamily="34" charset="0"/>
+                <a:ea typeface="Times New Roman" pitchFamily="34" charset="-122"/>
+                <a:cs typeface="Times New Roman" pitchFamily="34" charset="-120"/>
+              </a:rPr>
+              <a:t>Populations adjust to carrying capacity in the following ways:</a:t>
+            </a:r>
+            <a:endParaRPr lang="en-US" sz="2800" dirty="0"/>
+          </a:p>
+          <a:p>
+            <a:pPr algn="l" indent="0" marL="0">
+              <a:spcAft>
+                <a:spcPts val="800"/>
+              </a:spcAft>
+              <a:buNone/>
+            </a:pPr>
+            <a:r>
+              <a:rPr lang="en-US" sz="2800" b="1" dirty="0">
+                <a:solidFill>
+                  <a:srgbClr val="111111"/>
+                </a:solidFill>
+                <a:latin typeface="Times New Roman" pitchFamily="34" charset="0"/>
+                <a:ea typeface="Times New Roman" pitchFamily="34" charset="-122"/>
+                <a:cs typeface="Times New Roman" pitchFamily="34" charset="-120"/>
+              </a:rPr>
+              <a:t>Progressive adjustment (S-curve): </a:t>
+            </a:r>
+            <a:pPr algn="l" indent="0" marL="0">
+              <a:spcAft>
+                <a:spcPts val="800"/>
+              </a:spcAft>
+              <a:buNone/>
+            </a:pPr>
+            <a:r>
+              <a:rPr lang="en-US" sz="2800" dirty="0">
+                <a:solidFill>
+                  <a:srgbClr val="111111"/>
+                </a:solidFill>
+                <a:latin typeface="Times New Roman" pitchFamily="34" charset="0"/>
+                <a:ea typeface="Times New Roman" pitchFamily="34" charset="-122"/>
+                <a:cs typeface="Times New Roman" pitchFamily="34" charset="-120"/>
+              </a:rPr>
+              <a:t>Growth is slow, then fast, then slows down near the carrying capacity and stabilises, like fish introduced into a large lake.</a:t>
+            </a:r>
+            <a:endParaRPr lang="en-US" sz="2800" dirty="0"/>
+          </a:p>
+        </p:txBody>
+      </p:sp>
       <p:pic>
         <p:nvPicPr>
-          <p:cNvPr id="3" name="Image 0" descr="/home/claude/f4/img/minesec_sheet.png">    </p:cNvPr>
+          <p:cNvPr id="5" name="Image 0" descr="/home/claude/f4/img/v2/pop2_curves.png">    </p:cNvPr>
           <p:cNvPicPr>
             <a:picLocks noChangeAspect="1"/>
           </p:cNvPicPr>
@@ -15203,8 +15674,8 @@
         </p:blipFill>
         <p:spPr>
           <a:xfrm>
-            <a:off x="0" y="658368"/>
-            <a:ext cx="3840480" cy="5833872"/>
+            <a:off x="5349240" y="2617506"/>
+            <a:ext cx="6659575" cy="2601397"/>
           </a:xfrm>
           <a:prstGeom prst="rect">
             <a:avLst/>
@@ -15213,14 +15684,14 @@
       </p:pic>
       <p:sp>
         <p:nvSpPr>
-          <p:cNvPr id="4" name="Text 1"/>
+          <p:cNvPr id="6" name="Text 3"/>
           <p:cNvSpPr/>
           <p:nvPr/>
         </p:nvSpPr>
         <p:spPr>
           <a:xfrm>
-            <a:off x="4069080" y="1005840"/>
-            <a:ext cx="7802575" cy="731520"/>
+            <a:off x="5349240" y="6089904"/>
+            <a:ext cx="6659575" cy="347472"/>
           </a:xfrm>
           <a:prstGeom prst="rect">
             <a:avLst/>
@@ -15229,85 +15700,24 @@
           <a:ln/>
         </p:spPr>
         <p:txBody>
-          <a:bodyPr wrap="square" lIns="0" tIns="0" rIns="0" bIns="0" rtlCol="0" anchor="ctr">
-            <a:normAutofit/>
-          </a:bodyPr>
+          <a:bodyPr wrap="square" lIns="0" tIns="0" rIns="0" bIns="0" rtlCol="0" anchor="ctr"/>
           <a:lstStyle/>
           <a:p>
             <a:pPr algn="ctr" indent="0" marL="0">
               <a:buNone/>
             </a:pPr>
             <a:r>
-              <a:rPr lang="en-US" sz="3600" b="1" dirty="0">
-                <a:solidFill>
-                  <a:srgbClr val="990011"/>
+              <a:rPr lang="en-US" sz="1600" i="1" dirty="0">
+                <a:solidFill>
+                  <a:srgbClr val="555555"/>
                 </a:solidFill>
                 <a:latin typeface="Times New Roman" pitchFamily="34" charset="0"/>
                 <a:ea typeface="Times New Roman" pitchFamily="34" charset="-122"/>
                 <a:cs typeface="Times New Roman" pitchFamily="34" charset="-120"/>
               </a:rPr>
-              <a:t>3. Population–Resources Regimes (continued)</a:t>
-            </a:r>
-            <a:endParaRPr lang="en-US" sz="3600" dirty="0"/>
-          </a:p>
-        </p:txBody>
-      </p:sp>
-      <p:sp>
-        <p:nvSpPr>
-          <p:cNvPr id="5" name="Text 2"/>
-          <p:cNvSpPr/>
-          <p:nvPr/>
-        </p:nvSpPr>
-        <p:spPr>
-          <a:xfrm>
-            <a:off x="4069080" y="1783080"/>
-            <a:ext cx="7802575" cy="4663440"/>
-          </a:xfrm>
-          <a:prstGeom prst="rect">
-            <a:avLst/>
-          </a:prstGeom>
-          <a:noFill/>
-          <a:ln/>
-        </p:spPr>
-        <p:txBody>
-          <a:bodyPr wrap="square" lIns="0" tIns="0" rIns="0" bIns="0" rtlCol="0" anchor="t"/>
-          <a:lstStyle/>
-          <a:p>
-            <a:pPr algn="l" indent="0" marL="0">
-              <a:spcAft>
-                <a:spcPts val="800"/>
-              </a:spcAft>
-              <a:buNone/>
-            </a:pPr>
-            <a:r>
-              <a:rPr lang="en-US" sz="4000" b="1" dirty="0">
-                <a:solidFill>
-                  <a:srgbClr val="111111"/>
-                </a:solidFill>
-                <a:latin typeface="Times New Roman" pitchFamily="34" charset="0"/>
-                <a:ea typeface="Times New Roman" pitchFamily="34" charset="-122"/>
-                <a:cs typeface="Times New Roman" pitchFamily="34" charset="-120"/>
-              </a:rPr>
-              <a:t>European and Egyptian types: </a:t>
-            </a:r>
-            <a:pPr algn="l" indent="0" marL="0">
-              <a:spcAft>
-                <a:spcPts val="800"/>
-              </a:spcAft>
-              <a:buNone/>
-            </a:pPr>
-            <a:r>
-              <a:rPr lang="en-US" sz="4000" dirty="0">
-                <a:solidFill>
-                  <a:srgbClr val="111111"/>
-                </a:solidFill>
-                <a:latin typeface="Times New Roman" pitchFamily="34" charset="0"/>
-                <a:ea typeface="Times New Roman" pitchFamily="34" charset="-122"/>
-                <a:cs typeface="Times New Roman" pitchFamily="34" charset="-120"/>
-              </a:rPr>
-              <a:t>In the European type, many people and limited resources are balanced by technology and trade. In the Egyptian type, many people and limited resources with low technology give poverty.</a:t>
-            </a:r>
-            <a:endParaRPr lang="en-US" sz="4000" dirty="0"/>
+              <a:t>Illustration: three ways of adjusting</a:t>
+            </a:r>
+            <a:endParaRPr lang="en-US" sz="1600" dirty="0"/>
           </a:p>
         </p:txBody>
       </p:sp>
@@ -15423,9 +15833,109 @@
           </a:p>
         </p:txBody>
       </p:sp>
+      <p:sp>
+        <p:nvSpPr>
+          <p:cNvPr id="3" name="Text 1"/>
+          <p:cNvSpPr/>
+          <p:nvPr/>
+        </p:nvSpPr>
+        <p:spPr>
+          <a:xfrm>
+            <a:off x="365760" y="1005840"/>
+            <a:ext cx="11460175" cy="731520"/>
+          </a:xfrm>
+          <a:prstGeom prst="rect">
+            <a:avLst/>
+          </a:prstGeom>
+          <a:noFill/>
+          <a:ln/>
+        </p:spPr>
+        <p:txBody>
+          <a:bodyPr wrap="square" lIns="0" tIns="0" rIns="0" bIns="0" rtlCol="0" anchor="ctr">
+            <a:normAutofit/>
+          </a:bodyPr>
+          <a:lstStyle/>
+          <a:p>
+            <a:pPr algn="ctr" indent="0" marL="0">
+              <a:buNone/>
+            </a:pPr>
+            <a:r>
+              <a:rPr lang="en-US" sz="3600" b="1" dirty="0">
+                <a:solidFill>
+                  <a:srgbClr val="990011"/>
+                </a:solidFill>
+                <a:latin typeface="Times New Roman" pitchFamily="34" charset="0"/>
+                <a:ea typeface="Times New Roman" pitchFamily="34" charset="-122"/>
+                <a:cs typeface="Times New Roman" pitchFamily="34" charset="-120"/>
+              </a:rPr>
+              <a:t>2. Ways of Adjusting to Carrying Capacity</a:t>
+            </a:r>
+            <a:endParaRPr lang="en-US" sz="3600" dirty="0"/>
+          </a:p>
+        </p:txBody>
+      </p:sp>
+      <p:sp>
+        <p:nvSpPr>
+          <p:cNvPr id="4" name="Text 2"/>
+          <p:cNvSpPr/>
+          <p:nvPr/>
+        </p:nvSpPr>
+        <p:spPr>
+          <a:xfrm>
+            <a:off x="365760" y="1783080"/>
+            <a:ext cx="4846320" cy="4617720"/>
+          </a:xfrm>
+          <a:prstGeom prst="rect">
+            <a:avLst/>
+          </a:prstGeom>
+          <a:noFill/>
+          <a:ln/>
+        </p:spPr>
+        <p:txBody>
+          <a:bodyPr wrap="square" lIns="0" tIns="0" rIns="0" bIns="0" rtlCol="0" anchor="t"/>
+          <a:lstStyle/>
+          <a:p>
+            <a:pPr algn="l" indent="0" marL="0">
+              <a:spcAft>
+                <a:spcPts val="800"/>
+              </a:spcAft>
+              <a:buNone/>
+            </a:pPr>
+            <a:r>
+              <a:rPr lang="en-US" sz="3200" b="1" dirty="0">
+                <a:solidFill>
+                  <a:srgbClr val="111111"/>
+                </a:solidFill>
+                <a:latin typeface="Times New Roman" pitchFamily="34" charset="0"/>
+                <a:ea typeface="Times New Roman" pitchFamily="34" charset="-122"/>
+                <a:cs typeface="Times New Roman" pitchFamily="34" charset="-120"/>
+              </a:rPr>
+              <a:t>Overshoot and oscillation (J-curve): </a:t>
+            </a:r>
+            <a:pPr algn="l" indent="0" marL="0">
+              <a:spcAft>
+                <a:spcPts val="800"/>
+              </a:spcAft>
+              <a:buNone/>
+            </a:pPr>
+            <a:r>
+              <a:rPr lang="en-US" sz="3200" dirty="0">
+                <a:solidFill>
+                  <a:srgbClr val="111111"/>
+                </a:solidFill>
+                <a:latin typeface="Times New Roman" pitchFamily="34" charset="0"/>
+                <a:ea typeface="Times New Roman" pitchFamily="34" charset="-122"/>
+                <a:cs typeface="Times New Roman" pitchFamily="34" charset="-120"/>
+              </a:rPr>
+              <a:t>Growth is exponential, passes the carrying capacity, then crashes through starvation or disease, like insects or algae after a favourable season.</a:t>
+            </a:r>
+            <a:endParaRPr lang="en-US" sz="3200" dirty="0"/>
+          </a:p>
+        </p:txBody>
+      </p:sp>
       <p:pic>
         <p:nvPicPr>
-          <p:cNvPr id="3" name="Image 0" descr="/home/claude/f4/img/minesec_sheet.png">    </p:cNvPr>
+          <p:cNvPr id="5" name="Image 0" descr="/home/claude/f4/img/v2/carrying_big.png">    </p:cNvPr>
           <p:cNvPicPr>
             <a:picLocks noChangeAspect="1"/>
           </p:cNvPicPr>
@@ -15439,8 +15949,8 @@
         </p:blipFill>
         <p:spPr>
           <a:xfrm>
-            <a:off x="0" y="658368"/>
-            <a:ext cx="5120640" cy="5833872"/>
+            <a:off x="5349240" y="2461422"/>
+            <a:ext cx="6659575" cy="2913564"/>
           </a:xfrm>
           <a:prstGeom prst="rect">
             <a:avLst/>
@@ -15449,14 +15959,14 @@
       </p:pic>
       <p:sp>
         <p:nvSpPr>
-          <p:cNvPr id="4" name="Text 1"/>
+          <p:cNvPr id="6" name="Text 3"/>
           <p:cNvSpPr/>
           <p:nvPr/>
         </p:nvSpPr>
         <p:spPr>
           <a:xfrm>
-            <a:off x="5349240" y="1005840"/>
-            <a:ext cx="6522415" cy="731520"/>
+            <a:off x="5349240" y="6089904"/>
+            <a:ext cx="6659575" cy="347472"/>
           </a:xfrm>
           <a:prstGeom prst="rect">
             <a:avLst/>
@@ -15465,85 +15975,24 @@
           <a:ln/>
         </p:spPr>
         <p:txBody>
-          <a:bodyPr wrap="square" lIns="0" tIns="0" rIns="0" bIns="0" rtlCol="0" anchor="ctr">
-            <a:normAutofit/>
-          </a:bodyPr>
+          <a:bodyPr wrap="square" lIns="0" tIns="0" rIns="0" bIns="0" rtlCol="0" anchor="ctr"/>
           <a:lstStyle/>
           <a:p>
             <a:pPr algn="ctr" indent="0" marL="0">
               <a:buNone/>
             </a:pPr>
             <a:r>
-              <a:rPr lang="en-US" sz="3600" b="1" dirty="0">
-                <a:solidFill>
-                  <a:srgbClr val="990011"/>
+              <a:rPr lang="en-US" sz="1600" i="1" dirty="0">
+                <a:solidFill>
+                  <a:srgbClr val="555555"/>
                 </a:solidFill>
                 <a:latin typeface="Times New Roman" pitchFamily="34" charset="0"/>
                 <a:ea typeface="Times New Roman" pitchFamily="34" charset="-122"/>
                 <a:cs typeface="Times New Roman" pitchFamily="34" charset="-120"/>
               </a:rPr>
-              <a:t>3. Population–Resources Regimes (continued)</a:t>
-            </a:r>
-            <a:endParaRPr lang="en-US" sz="3600" dirty="0"/>
-          </a:p>
-        </p:txBody>
-      </p:sp>
-      <p:sp>
-        <p:nvSpPr>
-          <p:cNvPr id="5" name="Text 2"/>
-          <p:cNvSpPr/>
-          <p:nvPr/>
-        </p:nvSpPr>
-        <p:spPr>
-          <a:xfrm>
-            <a:off x="5349240" y="1783080"/>
-            <a:ext cx="6522415" cy="4663440"/>
-          </a:xfrm>
-          <a:prstGeom prst="rect">
-            <a:avLst/>
-          </a:prstGeom>
-          <a:noFill/>
-          <a:ln/>
-        </p:spPr>
-        <p:txBody>
-          <a:bodyPr wrap="square" lIns="0" tIns="0" rIns="0" bIns="0" rtlCol="0" anchor="t"/>
-          <a:lstStyle/>
-          <a:p>
-            <a:pPr algn="l" indent="0" marL="0">
-              <a:spcAft>
-                <a:spcPts val="800"/>
-              </a:spcAft>
-              <a:buNone/>
-            </a:pPr>
-            <a:r>
-              <a:rPr lang="en-US" sz="4000" b="1" dirty="0">
-                <a:solidFill>
-                  <a:srgbClr val="111111"/>
-                </a:solidFill>
-                <a:latin typeface="Times New Roman" pitchFamily="34" charset="0"/>
-                <a:ea typeface="Times New Roman" pitchFamily="34" charset="-122"/>
-                <a:cs typeface="Times New Roman" pitchFamily="34" charset="-120"/>
-              </a:rPr>
-              <a:t>Brazilian and Arctic-desert types: </a:t>
-            </a:r>
-            <a:pPr algn="l" indent="0" marL="0">
-              <a:spcAft>
-                <a:spcPts val="800"/>
-              </a:spcAft>
-              <a:buNone/>
-            </a:pPr>
-            <a:r>
-              <a:rPr lang="en-US" sz="4000" dirty="0">
-                <a:solidFill>
-                  <a:srgbClr val="111111"/>
-                </a:solidFill>
-                <a:latin typeface="Times New Roman" pitchFamily="34" charset="0"/>
-                <a:ea typeface="Times New Roman" pitchFamily="34" charset="-122"/>
-                <a:cs typeface="Times New Roman" pitchFamily="34" charset="-120"/>
-              </a:rPr>
-              <a:t>The Brazilian type has few people, rich resources but low technology. The Arctic-desert type has few people and poor resources.</a:t>
-            </a:r>
-            <a:endParaRPr lang="en-US" sz="4000" dirty="0"/>
+              <a:t>Illustration: the S-curve and the J-curve</a:t>
+            </a:r>
+            <a:endParaRPr lang="en-US" sz="1600" dirty="0"/>
           </a:p>
         </p:txBody>
       </p:sp>
@@ -15659,48 +16108,9 @@
           </a:p>
         </p:txBody>
       </p:sp>
-      <p:sp>
-        <p:nvSpPr>
-          <p:cNvPr id="3" name="Text 1"/>
-          <p:cNvSpPr/>
-          <p:nvPr/>
-        </p:nvSpPr>
-        <p:spPr>
-          <a:xfrm>
-            <a:off x="457200" y="1005840"/>
-            <a:ext cx="11277295" cy="731520"/>
-          </a:xfrm>
-          <a:prstGeom prst="rect">
-            <a:avLst/>
-          </a:prstGeom>
-          <a:noFill/>
-          <a:ln/>
-        </p:spPr>
-        <p:txBody>
-          <a:bodyPr wrap="square" lIns="0" tIns="0" rIns="0" bIns="0" rtlCol="0" anchor="ctr"/>
-          <a:lstStyle/>
-          <a:p>
-            <a:pPr algn="ctr" indent="0" marL="0">
-              <a:buNone/>
-            </a:pPr>
-            <a:r>
-              <a:rPr lang="en-US" sz="3600" b="1" dirty="0">
-                <a:solidFill>
-                  <a:srgbClr val="990011"/>
-                </a:solidFill>
-                <a:latin typeface="Times New Roman" pitchFamily="34" charset="0"/>
-                <a:ea typeface="Times New Roman" pitchFamily="34" charset="-122"/>
-                <a:cs typeface="Times New Roman" pitchFamily="34" charset="-120"/>
-              </a:rPr>
-              <a:t>3. Population–Resources Regimes</a:t>
-            </a:r>
-            <a:endParaRPr lang="en-US" sz="3600" dirty="0"/>
-          </a:p>
-        </p:txBody>
-      </p:sp>
       <p:pic>
         <p:nvPicPr>
-          <p:cNvPr id="4" name="Image 0" descr="/home/claude/f4/img/v2/regimes_big.png">    </p:cNvPr>
+          <p:cNvPr id="3" name="Image 0" descr="/home/claude/f4/img/minesec_sheet.png">    </p:cNvPr>
           <p:cNvPicPr>
             <a:picLocks noChangeAspect="1"/>
           </p:cNvPicPr>
@@ -15714,8 +16124,8 @@
         </p:blipFill>
         <p:spPr>
           <a:xfrm>
-            <a:off x="629930" y="1783080"/>
-            <a:ext cx="10931835" cy="4270248"/>
+            <a:off x="0" y="658368"/>
+            <a:ext cx="1463040" cy="5833872"/>
           </a:xfrm>
           <a:prstGeom prst="rect">
             <a:avLst/>
@@ -15724,14 +16134,14 @@
       </p:pic>
       <p:sp>
         <p:nvSpPr>
-          <p:cNvPr id="5" name="Text 2"/>
+          <p:cNvPr id="4" name="Text 1"/>
           <p:cNvSpPr/>
           <p:nvPr/>
         </p:nvSpPr>
         <p:spPr>
           <a:xfrm>
-            <a:off x="457200" y="6089904"/>
-            <a:ext cx="11277295" cy="347472"/>
+            <a:off x="1691640" y="1005840"/>
+            <a:ext cx="10180015" cy="731520"/>
           </a:xfrm>
           <a:prstGeom prst="rect">
             <a:avLst/>
@@ -15740,24 +16150,122 @@
           <a:ln/>
         </p:spPr>
         <p:txBody>
-          <a:bodyPr wrap="square" lIns="0" tIns="0" rIns="0" bIns="0" rtlCol="0" anchor="ctr"/>
+          <a:bodyPr wrap="square" lIns="0" tIns="0" rIns="0" bIns="0" rtlCol="0" anchor="ctr">
+            <a:normAutofit/>
+          </a:bodyPr>
           <a:lstStyle/>
           <a:p>
             <a:pPr algn="ctr" indent="0" marL="0">
               <a:buNone/>
             </a:pPr>
             <a:r>
-              <a:rPr lang="en-US" sz="1800" i="1" dirty="0">
-                <a:solidFill>
-                  <a:srgbClr val="555555"/>
+              <a:rPr lang="en-US" sz="3600" b="1" dirty="0">
+                <a:solidFill>
+                  <a:srgbClr val="990011"/>
                 </a:solidFill>
                 <a:latin typeface="Times New Roman" pitchFamily="34" charset="0"/>
                 <a:ea typeface="Times New Roman" pitchFamily="34" charset="-122"/>
                 <a:cs typeface="Times New Roman" pitchFamily="34" charset="-120"/>
               </a:rPr>
-              <a:t>Illustration: population–resources regimes</a:t>
-            </a:r>
-            <a:endParaRPr lang="en-US" sz="1800" dirty="0"/>
+              <a:t>2. Ways of Adjusting to Carrying Capacity</a:t>
+            </a:r>
+            <a:endParaRPr lang="en-US" sz="3600" dirty="0"/>
+          </a:p>
+        </p:txBody>
+      </p:sp>
+      <p:sp>
+        <p:nvSpPr>
+          <p:cNvPr id="5" name="Text 2"/>
+          <p:cNvSpPr/>
+          <p:nvPr/>
+        </p:nvSpPr>
+        <p:spPr>
+          <a:xfrm>
+            <a:off x="1691640" y="1783080"/>
+            <a:ext cx="10180015" cy="4663440"/>
+          </a:xfrm>
+          <a:prstGeom prst="rect">
+            <a:avLst/>
+          </a:prstGeom>
+          <a:noFill/>
+          <a:ln/>
+        </p:spPr>
+        <p:txBody>
+          <a:bodyPr wrap="square" lIns="0" tIns="0" rIns="0" bIns="0" rtlCol="0" anchor="t"/>
+          <a:lstStyle/>
+          <a:p>
+            <a:pPr algn="l" indent="0" marL="0">
+              <a:spcAft>
+                <a:spcPts val="800"/>
+              </a:spcAft>
+              <a:buNone/>
+            </a:pPr>
+            <a:r>
+              <a:rPr lang="en-US" sz="4000" b="1" dirty="0">
+                <a:solidFill>
+                  <a:srgbClr val="111111"/>
+                </a:solidFill>
+                <a:latin typeface="Times New Roman" pitchFamily="34" charset="0"/>
+                <a:ea typeface="Times New Roman" pitchFamily="34" charset="-122"/>
+                <a:cs typeface="Times New Roman" pitchFamily="34" charset="-120"/>
+              </a:rPr>
+              <a:t>Boom and bust: </a:t>
+            </a:r>
+            <a:pPr algn="l" indent="0" marL="0">
+              <a:spcAft>
+                <a:spcPts val="800"/>
+              </a:spcAft>
+              <a:buNone/>
+            </a:pPr>
+            <a:r>
+              <a:rPr lang="en-US" sz="4000" dirty="0">
+                <a:solidFill>
+                  <a:srgbClr val="111111"/>
+                </a:solidFill>
+                <a:latin typeface="Times New Roman" pitchFamily="34" charset="0"/>
+                <a:ea typeface="Times New Roman" pitchFamily="34" charset="-122"/>
+                <a:cs typeface="Times New Roman" pitchFamily="34" charset="-120"/>
+              </a:rPr>
+              <a:t>After a crash, the population may recover and repeat the cycle.</a:t>
+            </a:r>
+            <a:endParaRPr lang="en-US" sz="4000" dirty="0"/>
+          </a:p>
+          <a:p>
+            <a:pPr algn="l" indent="0" marL="0">
+              <a:spcAft>
+                <a:spcPts val="800"/>
+              </a:spcAft>
+              <a:buNone/>
+            </a:pPr>
+            <a:r>
+              <a:rPr lang="en-US" sz="4000" b="1" dirty="0">
+                <a:solidFill>
+                  <a:srgbClr val="111111"/>
+                </a:solidFill>
+                <a:latin typeface="Times New Roman" pitchFamily="34" charset="0"/>
+                <a:ea typeface="Times New Roman" pitchFamily="34" charset="-122"/>
+                <a:cs typeface="Times New Roman" pitchFamily="34" charset="-120"/>
+              </a:rPr>
+              <a:t>Instantaneous adjustment: </a:t>
+            </a:r>
+            <a:pPr algn="l" indent="0" marL="0">
+              <a:spcAft>
+                <a:spcPts val="800"/>
+              </a:spcAft>
+              <a:buNone/>
+            </a:pPr>
+            <a:r>
+              <a:rPr lang="en-US" sz="4000" dirty="0">
+                <a:solidFill>
+                  <a:srgbClr val="111111"/>
+                </a:solidFill>
+                <a:latin typeface="Times New Roman" pitchFamily="34" charset="0"/>
+                <a:ea typeface="Times New Roman" pitchFamily="34" charset="-122"/>
+                <a:cs typeface="Times New Roman" pitchFamily="34" charset="-120"/>
+              </a:rPr>
+              <a:t>The population stops abruptly at the carrying capacity; this is rare, for example after a volcanic eruption destroys the food of island birds.</a:t>
+            </a:r>
+            <a:endParaRPr lang="en-US" sz="4000" dirty="0"/>
           </a:p>
         </p:txBody>
       </p:sp>
@@ -15867,15 +16375,135 @@
                 <a:ea typeface="Calibri" pitchFamily="34" charset="-122"/>
                 <a:cs typeface="Calibri" pitchFamily="34" charset="-120"/>
               </a:rPr>
-              <a:t>FORMATIVE EVALUATION</a:t>
+              <a:t>BOARD SUMMARY</a:t>
             </a:r>
             <a:endParaRPr lang="en-US" sz="1400" dirty="0"/>
+          </a:p>
+        </p:txBody>
+      </p:sp>
+      <p:sp>
+        <p:nvSpPr>
+          <p:cNvPr id="3" name="Text 1"/>
+          <p:cNvSpPr/>
+          <p:nvPr/>
+        </p:nvSpPr>
+        <p:spPr>
+          <a:xfrm>
+            <a:off x="365760" y="1005840"/>
+            <a:ext cx="11460175" cy="731520"/>
+          </a:xfrm>
+          <a:prstGeom prst="rect">
+            <a:avLst/>
+          </a:prstGeom>
+          <a:noFill/>
+          <a:ln/>
+        </p:spPr>
+        <p:txBody>
+          <a:bodyPr wrap="square" lIns="0" tIns="0" rIns="0" bIns="0" rtlCol="0" anchor="ctr">
+            <a:normAutofit/>
+          </a:bodyPr>
+          <a:lstStyle/>
+          <a:p>
+            <a:pPr algn="ctr" indent="0" marL="0">
+              <a:buNone/>
+            </a:pPr>
+            <a:r>
+              <a:rPr lang="en-US" sz="3600" b="1" dirty="0">
+                <a:solidFill>
+                  <a:srgbClr val="990011"/>
+                </a:solidFill>
+                <a:latin typeface="Times New Roman" pitchFamily="34" charset="0"/>
+                <a:ea typeface="Times New Roman" pitchFamily="34" charset="-122"/>
+                <a:cs typeface="Times New Roman" pitchFamily="34" charset="-120"/>
+              </a:rPr>
+              <a:t>3. Population-Resource Regimes</a:t>
+            </a:r>
+            <a:endParaRPr lang="en-US" sz="3600" dirty="0"/>
+          </a:p>
+        </p:txBody>
+      </p:sp>
+      <p:sp>
+        <p:nvSpPr>
+          <p:cNvPr id="4" name="Text 2"/>
+          <p:cNvSpPr/>
+          <p:nvPr/>
+        </p:nvSpPr>
+        <p:spPr>
+          <a:xfrm>
+            <a:off x="365760" y="1783080"/>
+            <a:ext cx="4846320" cy="4617720"/>
+          </a:xfrm>
+          <a:prstGeom prst="rect">
+            <a:avLst/>
+          </a:prstGeom>
+          <a:noFill/>
+          <a:ln/>
+        </p:spPr>
+        <p:txBody>
+          <a:bodyPr wrap="square" lIns="0" tIns="0" rIns="0" bIns="0" rtlCol="0" anchor="t"/>
+          <a:lstStyle/>
+          <a:p>
+            <a:pPr algn="l" indent="0" marL="0">
+              <a:spcAft>
+                <a:spcPts val="800"/>
+              </a:spcAft>
+              <a:buNone/>
+            </a:pPr>
+            <a:r>
+              <a:rPr lang="en-US" sz="3200" i="1" dirty="0">
+                <a:solidFill>
+                  <a:srgbClr val="111111"/>
+                </a:solidFill>
+                <a:latin typeface="Times New Roman" pitchFamily="34" charset="0"/>
+                <a:ea typeface="Times New Roman" pitchFamily="34" charset="-122"/>
+                <a:cs typeface="Times New Roman" pitchFamily="34" charset="-120"/>
+              </a:rPr>
+              <a:t>The population-resource regimes are the following:</a:t>
+            </a:r>
+            <a:endParaRPr lang="en-US" sz="3200" dirty="0"/>
+          </a:p>
+          <a:p>
+            <a:pPr algn="l" indent="0" marL="0">
+              <a:spcAft>
+                <a:spcPts val="800"/>
+              </a:spcAft>
+              <a:buNone/>
+            </a:pPr>
+            <a:r>
+              <a:rPr lang="en-US" sz="3200" b="1" dirty="0">
+                <a:solidFill>
+                  <a:srgbClr val="111111"/>
+                </a:solidFill>
+                <a:latin typeface="Times New Roman" pitchFamily="34" charset="0"/>
+                <a:ea typeface="Times New Roman" pitchFamily="34" charset="-122"/>
+                <a:cs typeface="Times New Roman" pitchFamily="34" charset="-120"/>
+              </a:rPr>
+              <a:t>Overpopulation regime: </a:t>
+            </a:r>
+            <a:pPr algn="l" indent="0" marL="0">
+              <a:spcAft>
+                <a:spcPts val="800"/>
+              </a:spcAft>
+              <a:buNone/>
+            </a:pPr>
+            <a:r>
+              <a:rPr lang="en-US" sz="3200" dirty="0">
+                <a:solidFill>
+                  <a:srgbClr val="111111"/>
+                </a:solidFill>
+                <a:latin typeface="Times New Roman" pitchFamily="34" charset="0"/>
+                <a:ea typeface="Times New Roman" pitchFamily="34" charset="-122"/>
+                <a:cs typeface="Times New Roman" pitchFamily="34" charset="-120"/>
+              </a:rPr>
+              <a:t>Population exceeds carrying capacity, causing deforestation, overgrazing, water shortages and poverty, as in parts of the Sahel.</a:t>
+            </a:r>
+            <a:endParaRPr lang="en-US" sz="3200" dirty="0"/>
           </a:p>
         </p:txBody>
       </p:sp>
       <p:pic>
         <p:nvPicPr>
-          <p:cNvPr id="3" name="Image 0" descr="/home/claude/f4/img/minesec_sheet.png">    </p:cNvPr>
+          <p:cNvPr id="5" name="Image 0" descr="/home/claude/f4/img/v2/pop2_regimes3.png">    </p:cNvPr>
           <p:cNvPicPr>
             <a:picLocks noChangeAspect="1"/>
           </p:cNvPicPr>
@@ -15889,8 +16517,8 @@
         </p:blipFill>
         <p:spPr>
           <a:xfrm>
-            <a:off x="0" y="658368"/>
-            <a:ext cx="5120640" cy="5833872"/>
+            <a:off x="5349240" y="2617506"/>
+            <a:ext cx="6659575" cy="2601397"/>
           </a:xfrm>
           <a:prstGeom prst="rect">
             <a:avLst/>
@@ -15899,14 +16527,14 @@
       </p:pic>
       <p:sp>
         <p:nvSpPr>
-          <p:cNvPr id="4" name="Text 1"/>
+          <p:cNvPr id="6" name="Text 3"/>
           <p:cNvSpPr/>
           <p:nvPr/>
         </p:nvSpPr>
         <p:spPr>
           <a:xfrm>
-            <a:off x="5349240" y="1005840"/>
-            <a:ext cx="6522415" cy="731520"/>
+            <a:off x="5349240" y="6089904"/>
+            <a:ext cx="6659575" cy="347472"/>
           </a:xfrm>
           <a:prstGeom prst="rect">
             <a:avLst/>
@@ -15915,68 +16543,24 @@
           <a:ln/>
         </p:spPr>
         <p:txBody>
-          <a:bodyPr wrap="square" lIns="0" tIns="0" rIns="0" bIns="0" rtlCol="0" anchor="ctr">
-            <a:normAutofit/>
-          </a:bodyPr>
+          <a:bodyPr wrap="square" lIns="0" tIns="0" rIns="0" bIns="0" rtlCol="0" anchor="ctr"/>
           <a:lstStyle/>
           <a:p>
             <a:pPr algn="ctr" indent="0" marL="0">
               <a:buNone/>
             </a:pPr>
             <a:r>
-              <a:rPr lang="en-US" sz="3600" b="1" dirty="0">
-                <a:solidFill>
-                  <a:srgbClr val="990011"/>
+              <a:rPr lang="en-US" sz="1600" i="1" dirty="0">
+                <a:solidFill>
+                  <a:srgbClr val="555555"/>
                 </a:solidFill>
                 <a:latin typeface="Times New Roman" pitchFamily="34" charset="0"/>
                 <a:ea typeface="Times New Roman" pitchFamily="34" charset="-122"/>
                 <a:cs typeface="Times New Roman" pitchFamily="34" charset="-120"/>
               </a:rPr>
-              <a:t>Evaluation 1</a:t>
-            </a:r>
-            <a:endParaRPr lang="en-US" sz="3600" dirty="0"/>
-          </a:p>
-        </p:txBody>
-      </p:sp>
-      <p:sp>
-        <p:nvSpPr>
-          <p:cNvPr id="5" name="Text 2"/>
-          <p:cNvSpPr/>
-          <p:nvPr/>
-        </p:nvSpPr>
-        <p:spPr>
-          <a:xfrm>
-            <a:off x="5349240" y="1783080"/>
-            <a:ext cx="6522415" cy="4663440"/>
-          </a:xfrm>
-          <a:prstGeom prst="rect">
-            <a:avLst/>
-          </a:prstGeom>
-          <a:noFill/>
-          <a:ln/>
-        </p:spPr>
-        <p:txBody>
-          <a:bodyPr wrap="square" lIns="0" tIns="0" rIns="0" bIns="0" rtlCol="0" anchor="t"/>
-          <a:lstStyle/>
-          <a:p>
-            <a:pPr algn="l" indent="0" marL="0">
-              <a:spcAft>
-                <a:spcPts val="800"/>
-              </a:spcAft>
-              <a:buNone/>
-            </a:pPr>
-            <a:r>
-              <a:rPr lang="en-US" sz="4000" dirty="0">
-                <a:solidFill>
-                  <a:srgbClr val="111111"/>
-                </a:solidFill>
-                <a:latin typeface="Times New Roman" pitchFamily="34" charset="0"/>
-                <a:ea typeface="Times New Roman" pitchFamily="34" charset="-122"/>
-                <a:cs typeface="Times New Roman" pitchFamily="34" charset="-120"/>
-              </a:rPr>
-              <a:t>Define carrying capacity.</a:t>
-            </a:r>
-            <a:endParaRPr lang="en-US" sz="4000" dirty="0"/>
+              <a:t>Illustration: three regimes</a:t>
+            </a:r>
+            <a:endParaRPr lang="en-US" sz="1600" dirty="0"/>
           </a:p>
         </p:txBody>
       </p:sp>
@@ -16086,15 +16670,115 @@
                 <a:ea typeface="Calibri" pitchFamily="34" charset="-122"/>
                 <a:cs typeface="Calibri" pitchFamily="34" charset="-120"/>
               </a:rPr>
-              <a:t>FORMATIVE EVALUATION</a:t>
+              <a:t>BOARD SUMMARY</a:t>
             </a:r>
             <a:endParaRPr lang="en-US" sz="1400" dirty="0"/>
+          </a:p>
+        </p:txBody>
+      </p:sp>
+      <p:sp>
+        <p:nvSpPr>
+          <p:cNvPr id="3" name="Text 1"/>
+          <p:cNvSpPr/>
+          <p:nvPr/>
+        </p:nvSpPr>
+        <p:spPr>
+          <a:xfrm>
+            <a:off x="365760" y="1005840"/>
+            <a:ext cx="11460175" cy="731520"/>
+          </a:xfrm>
+          <a:prstGeom prst="rect">
+            <a:avLst/>
+          </a:prstGeom>
+          <a:noFill/>
+          <a:ln/>
+        </p:spPr>
+        <p:txBody>
+          <a:bodyPr wrap="square" lIns="0" tIns="0" rIns="0" bIns="0" rtlCol="0" anchor="ctr">
+            <a:normAutofit/>
+          </a:bodyPr>
+          <a:lstStyle/>
+          <a:p>
+            <a:pPr algn="ctr" indent="0" marL="0">
+              <a:buNone/>
+            </a:pPr>
+            <a:r>
+              <a:rPr lang="en-US" sz="3600" b="1" dirty="0">
+                <a:solidFill>
+                  <a:srgbClr val="990011"/>
+                </a:solidFill>
+                <a:latin typeface="Times New Roman" pitchFamily="34" charset="0"/>
+                <a:ea typeface="Times New Roman" pitchFamily="34" charset="-122"/>
+                <a:cs typeface="Times New Roman" pitchFamily="34" charset="-120"/>
+              </a:rPr>
+              <a:t>3. Population-Resource Regimes</a:t>
+            </a:r>
+            <a:endParaRPr lang="en-US" sz="3600" dirty="0"/>
+          </a:p>
+        </p:txBody>
+      </p:sp>
+      <p:sp>
+        <p:nvSpPr>
+          <p:cNvPr id="4" name="Text 2"/>
+          <p:cNvSpPr/>
+          <p:nvPr/>
+        </p:nvSpPr>
+        <p:spPr>
+          <a:xfrm>
+            <a:off x="365760" y="1783080"/>
+            <a:ext cx="4846320" cy="4617720"/>
+          </a:xfrm>
+          <a:prstGeom prst="rect">
+            <a:avLst/>
+          </a:prstGeom>
+          <a:noFill/>
+          <a:ln/>
+        </p:spPr>
+        <p:txBody>
+          <a:bodyPr wrap="square" lIns="0" tIns="0" rIns="0" bIns="0" rtlCol="0" anchor="t"/>
+          <a:lstStyle/>
+          <a:p>
+            <a:pPr algn="l" indent="0" marL="0">
+              <a:spcAft>
+                <a:spcPts val="800"/>
+              </a:spcAft>
+              <a:buNone/>
+            </a:pPr>
+            <a:r>
+              <a:rPr lang="en-US" sz="3600" b="1" dirty="0">
+                <a:solidFill>
+                  <a:srgbClr val="111111"/>
+                </a:solidFill>
+                <a:latin typeface="Times New Roman" pitchFamily="34" charset="0"/>
+                <a:ea typeface="Times New Roman" pitchFamily="34" charset="-122"/>
+                <a:cs typeface="Times New Roman" pitchFamily="34" charset="-120"/>
+              </a:rPr>
+              <a:t>Sustainable regime: </a:t>
+            </a:r>
+            <a:pPr algn="l" indent="0" marL="0">
+              <a:spcAft>
+                <a:spcPts val="800"/>
+              </a:spcAft>
+              <a:buNone/>
+            </a:pPr>
+            <a:r>
+              <a:rPr lang="en-US" sz="3600" dirty="0">
+                <a:solidFill>
+                  <a:srgbClr val="111111"/>
+                </a:solidFill>
+                <a:latin typeface="Times New Roman" pitchFamily="34" charset="0"/>
+                <a:ea typeface="Times New Roman" pitchFamily="34" charset="-122"/>
+                <a:cs typeface="Times New Roman" pitchFamily="34" charset="-120"/>
+              </a:rPr>
+              <a:t>Population is at or below carrying capacity and resources are managed carefully, as in Norway and Sweden.</a:t>
+            </a:r>
+            <a:endParaRPr lang="en-US" sz="3600" dirty="0"/>
           </a:p>
         </p:txBody>
       </p:sp>
       <p:pic>
         <p:nvPicPr>
-          <p:cNvPr id="3" name="Image 0" descr="/home/claude/f4/img/minesec_sheet.png">    </p:cNvPr>
+          <p:cNvPr id="5" name="Image 0" descr="/home/claude/f4/img/v2/f2t_drought.jpg">    </p:cNvPr>
           <p:cNvPicPr>
             <a:picLocks noChangeAspect="1"/>
           </p:cNvPicPr>
@@ -16108,8 +16792,8 @@
         </p:blipFill>
         <p:spPr>
           <a:xfrm>
-            <a:off x="0" y="658368"/>
-            <a:ext cx="5120640" cy="5833872"/>
+            <a:off x="5349240" y="2071212"/>
+            <a:ext cx="6659575" cy="3693983"/>
           </a:xfrm>
           <a:prstGeom prst="rect">
             <a:avLst/>
@@ -16118,14 +16802,14 @@
       </p:pic>
       <p:sp>
         <p:nvSpPr>
-          <p:cNvPr id="4" name="Text 1"/>
+          <p:cNvPr id="6" name="Text 3"/>
           <p:cNvSpPr/>
           <p:nvPr/>
         </p:nvSpPr>
         <p:spPr>
           <a:xfrm>
-            <a:off x="5349240" y="1005840"/>
-            <a:ext cx="6522415" cy="731520"/>
+            <a:off x="5349240" y="6089904"/>
+            <a:ext cx="6659575" cy="347472"/>
           </a:xfrm>
           <a:prstGeom prst="rect">
             <a:avLst/>
@@ -16134,68 +16818,24 @@
           <a:ln/>
         </p:spPr>
         <p:txBody>
-          <a:bodyPr wrap="square" lIns="0" tIns="0" rIns="0" bIns="0" rtlCol="0" anchor="ctr">
-            <a:normAutofit/>
-          </a:bodyPr>
+          <a:bodyPr wrap="square" lIns="0" tIns="0" rIns="0" bIns="0" rtlCol="0" anchor="ctr"/>
           <a:lstStyle/>
           <a:p>
             <a:pPr algn="ctr" indent="0" marL="0">
               <a:buNone/>
             </a:pPr>
             <a:r>
-              <a:rPr lang="en-US" sz="3600" b="1" dirty="0">
-                <a:solidFill>
-                  <a:srgbClr val="990011"/>
+              <a:rPr lang="en-US" sz="1600" i="1" dirty="0">
+                <a:solidFill>
+                  <a:srgbClr val="555555"/>
                 </a:solidFill>
                 <a:latin typeface="Times New Roman" pitchFamily="34" charset="0"/>
                 <a:ea typeface="Times New Roman" pitchFamily="34" charset="-122"/>
                 <a:cs typeface="Times New Roman" pitchFamily="34" charset="-120"/>
               </a:rPr>
-              <a:t>Expected Answer</a:t>
-            </a:r>
-            <a:endParaRPr lang="en-US" sz="3600" dirty="0"/>
-          </a:p>
-        </p:txBody>
-      </p:sp>
-      <p:sp>
-        <p:nvSpPr>
-          <p:cNvPr id="5" name="Text 2"/>
-          <p:cNvSpPr/>
-          <p:nvPr/>
-        </p:nvSpPr>
-        <p:spPr>
-          <a:xfrm>
-            <a:off x="5349240" y="1783080"/>
-            <a:ext cx="6522415" cy="4663440"/>
-          </a:xfrm>
-          <a:prstGeom prst="rect">
-            <a:avLst/>
-          </a:prstGeom>
-          <a:noFill/>
-          <a:ln/>
-        </p:spPr>
-        <p:txBody>
-          <a:bodyPr wrap="square" lIns="0" tIns="0" rIns="0" bIns="0" rtlCol="0" anchor="t"/>
-          <a:lstStyle/>
-          <a:p>
-            <a:pPr algn="l" indent="0" marL="0">
-              <a:spcAft>
-                <a:spcPts val="800"/>
-              </a:spcAft>
-              <a:buNone/>
-            </a:pPr>
-            <a:r>
-              <a:rPr lang="en-US" sz="4000" dirty="0">
-                <a:solidFill>
-                  <a:srgbClr val="111111"/>
-                </a:solidFill>
-                <a:latin typeface="Times New Roman" pitchFamily="34" charset="0"/>
-                <a:ea typeface="Times New Roman" pitchFamily="34" charset="-122"/>
-                <a:cs typeface="Times New Roman" pitchFamily="34" charset="-120"/>
-              </a:rPr>
-              <a:t>The largest population an area can support without damage.</a:t>
-            </a:r>
-            <a:endParaRPr lang="en-US" sz="4000" dirty="0"/>
+              <a:t>Illustration: drought in the Sahel</a:t>
+            </a:r>
+            <a:endParaRPr lang="en-US" sz="1600" dirty="0"/>
           </a:p>
         </p:txBody>
       </p:sp>
@@ -16305,7 +16945,7 @@
                 <a:ea typeface="Calibri" pitchFamily="34" charset="-122"/>
                 <a:cs typeface="Calibri" pitchFamily="34" charset="-120"/>
               </a:rPr>
-              <a:t>FORMATIVE EVALUATION</a:t>
+              <a:t>BOARD SUMMARY</a:t>
             </a:r>
             <a:endParaRPr lang="en-US" sz="1400" dirty="0"/>
           </a:p>
@@ -16370,7 +17010,7 @@
                 <a:ea typeface="Times New Roman" pitchFamily="34" charset="-122"/>
                 <a:cs typeface="Times New Roman" pitchFamily="34" charset="-120"/>
               </a:rPr>
-              <a:t>Evaluation 2</a:t>
+              <a:t>3. Population-Resource Regimes</a:t>
             </a:r>
             <a:endParaRPr lang="en-US" sz="3600" dirty="0"/>
           </a:p>
@@ -16404,7 +17044,7 @@
               <a:buNone/>
             </a:pPr>
             <a:r>
-              <a:rPr lang="en-US" sz="4000" dirty="0">
+              <a:rPr lang="en-US" sz="4000" b="1" dirty="0">
                 <a:solidFill>
                   <a:srgbClr val="111111"/>
                 </a:solidFill>
@@ -16412,7 +17052,24 @@
                 <a:ea typeface="Times New Roman" pitchFamily="34" charset="-122"/>
                 <a:cs typeface="Times New Roman" pitchFamily="34" charset="-120"/>
               </a:rPr>
-              <a:t>Give two ways to raise carrying capacity.</a:t>
+              <a:t>Underpopulation regime: </a:t>
+            </a:r>
+            <a:pPr algn="l" indent="0" marL="0">
+              <a:spcAft>
+                <a:spcPts val="800"/>
+              </a:spcAft>
+              <a:buNone/>
+            </a:pPr>
+            <a:r>
+              <a:rPr lang="en-US" sz="4000" dirty="0">
+                <a:solidFill>
+                  <a:srgbClr val="111111"/>
+                </a:solidFill>
+                <a:latin typeface="Times New Roman" pitchFamily="34" charset="0"/>
+                <a:ea typeface="Times New Roman" pitchFamily="34" charset="-122"/>
+                <a:cs typeface="Times New Roman" pitchFamily="34" charset="-120"/>
+              </a:rPr>
+              <a:t>Population is far below carrying capacity, with rich resources, labour shortages and small markets, as in northern Canada and Siberia.</a:t>
             </a:r>
             <a:endParaRPr lang="en-US" sz="4000" dirty="0"/>
           </a:p>
@@ -16589,7 +17246,7 @@
                 <a:ea typeface="Times New Roman" pitchFamily="34" charset="-122"/>
                 <a:cs typeface="Times New Roman" pitchFamily="34" charset="-120"/>
               </a:rPr>
-              <a:t>Expected Answer</a:t>
+              <a:t>Evaluation 1</a:t>
             </a:r>
             <a:endParaRPr lang="en-US" sz="3600" dirty="0"/>
           </a:p>
@@ -16631,7 +17288,7 @@
                 <a:ea typeface="Times New Roman" pitchFamily="34" charset="-122"/>
                 <a:cs typeface="Times New Roman" pitchFamily="34" charset="-120"/>
               </a:rPr>
-              <a:t>Irrigation and fertiliser (also new crops, technology, trade).</a:t>
+              <a:t>Distinguish between the S-curve and the J-curve.</a:t>
             </a:r>
             <a:endParaRPr lang="en-US" sz="4000" dirty="0"/>
           </a:p>
@@ -16743,7 +17400,7 @@
                 <a:ea typeface="Calibri" pitchFamily="34" charset="-122"/>
                 <a:cs typeface="Calibri" pitchFamily="34" charset="-120"/>
               </a:rPr>
-              <a:t>REMEDIATION</a:t>
+              <a:t>FORMATIVE EVALUATION</a:t>
             </a:r>
             <a:endParaRPr lang="en-US" sz="1400" dirty="0"/>
           </a:p>
@@ -16766,7 +17423,7 @@
         <p:spPr>
           <a:xfrm>
             <a:off x="0" y="658368"/>
-            <a:ext cx="2468880" cy="5833872"/>
+            <a:ext cx="5120640" cy="5833872"/>
           </a:xfrm>
           <a:prstGeom prst="rect">
             <a:avLst/>
@@ -16781,8 +17438,8 @@
         </p:nvSpPr>
         <p:spPr>
           <a:xfrm>
-            <a:off x="2697480" y="1005840"/>
-            <a:ext cx="9174175" cy="731520"/>
+            <a:off x="5349240" y="1005840"/>
+            <a:ext cx="6522415" cy="731520"/>
           </a:xfrm>
           <a:prstGeom prst="rect">
             <a:avLst/>
@@ -16808,7 +17465,7 @@
                 <a:ea typeface="Times New Roman" pitchFamily="34" charset="-122"/>
                 <a:cs typeface="Times New Roman" pitchFamily="34" charset="-120"/>
               </a:rPr>
-              <a:t>Remediation</a:t>
+              <a:t>Expected Answer</a:t>
             </a:r>
             <a:endParaRPr lang="en-US" sz="3600" dirty="0"/>
           </a:p>
@@ -16822,8 +17479,8 @@
         </p:nvSpPr>
         <p:spPr>
           <a:xfrm>
-            <a:off x="2697480" y="1783080"/>
-            <a:ext cx="9174175" cy="4663440"/>
+            <a:off x="5349240" y="1783080"/>
+            <a:ext cx="6522415" cy="4663440"/>
           </a:xfrm>
           <a:prstGeom prst="rect">
             <a:avLst/>
@@ -16842,7 +17499,7 @@
               <a:buNone/>
             </a:pPr>
             <a:r>
-              <a:rPr lang="en-US" sz="4000" b="1" dirty="0">
+              <a:rPr lang="en-US" sz="4000" dirty="0">
                 <a:solidFill>
                   <a:srgbClr val="111111"/>
                 </a:solidFill>
@@ -16850,73 +17507,7 @@
                 <a:ea typeface="Times New Roman" pitchFamily="34" charset="-122"/>
                 <a:cs typeface="Times New Roman" pitchFamily="34" charset="-120"/>
               </a:rPr>
-              <a:t>Fill in the blanks:</a:t>
-            </a:r>
-            <a:endParaRPr lang="en-US" sz="4000" dirty="0"/>
-          </a:p>
-          <a:p>
-            <a:pPr algn="l" marL="342900" indent="-342900">
-              <a:spcAft>
-                <a:spcPts val="800"/>
-              </a:spcAft>
-              <a:buSzPct val="100000"/>
-              <a:buFont typeface="+mj-lt"/>
-              <a:buAutoNum type="arabicPeriod" startAt="1"/>
-            </a:pPr>
-            <a:r>
-              <a:rPr lang="en-US" sz="4000" dirty="0">
-                <a:solidFill>
-                  <a:srgbClr val="111111"/>
-                </a:solidFill>
-                <a:latin typeface="Times New Roman" pitchFamily="34" charset="0"/>
-                <a:ea typeface="Times New Roman" pitchFamily="34" charset="-122"/>
-                <a:cs typeface="Times New Roman" pitchFamily="34" charset="-120"/>
-              </a:rPr>
-              <a:t>Going beyond the carrying capacity is ______.</a:t>
-            </a:r>
-            <a:endParaRPr lang="en-US" sz="4000" dirty="0"/>
-          </a:p>
-          <a:p>
-            <a:pPr algn="l" marL="342900" indent="-342900">
-              <a:spcAft>
-                <a:spcPts val="800"/>
-              </a:spcAft>
-              <a:buSzPct val="100000"/>
-              <a:buFont typeface="+mj-lt"/>
-              <a:buAutoNum type="arabicPeriod" startAt="1"/>
-            </a:pPr>
-            <a:r>
-              <a:rPr lang="en-US" sz="4000" dirty="0">
-                <a:solidFill>
-                  <a:srgbClr val="111111"/>
-                </a:solidFill>
-                <a:latin typeface="Times New Roman" pitchFamily="34" charset="0"/>
-                <a:ea typeface="Times New Roman" pitchFamily="34" charset="-122"/>
-                <a:cs typeface="Times New Roman" pitchFamily="34" charset="-120"/>
-              </a:rPr>
-              <a:t>Irrigation ______ carrying capacity.</a:t>
-            </a:r>
-            <a:endParaRPr lang="en-US" sz="4000" dirty="0"/>
-          </a:p>
-          <a:p>
-            <a:pPr algn="l" marL="342900" indent="-342900">
-              <a:spcAft>
-                <a:spcPts val="800"/>
-              </a:spcAft>
-              <a:buSzPct val="100000"/>
-              <a:buFont typeface="+mj-lt"/>
-              <a:buAutoNum type="arabicPeriod" startAt="1"/>
-            </a:pPr>
-            <a:r>
-              <a:rPr lang="en-US" sz="4000" dirty="0">
-                <a:solidFill>
-                  <a:srgbClr val="111111"/>
-                </a:solidFill>
-                <a:latin typeface="Times New Roman" pitchFamily="34" charset="0"/>
-                <a:ea typeface="Times New Roman" pitchFamily="34" charset="-122"/>
-                <a:cs typeface="Times New Roman" pitchFamily="34" charset="-120"/>
-              </a:rPr>
-              <a:t>Many people, few resources, low technology is the ______ type.</a:t>
+              <a:t>On the S-curve growth slows and stabilises at the carrying capacity; on the J-curve growth overshoots it and then crashes.</a:t>
             </a:r>
             <a:endParaRPr lang="en-US" sz="4000" dirty="0"/>
           </a:p>
@@ -17028,7 +17619,7 @@
                 <a:ea typeface="Calibri" pitchFamily="34" charset="-122"/>
                 <a:cs typeface="Calibri" pitchFamily="34" charset="-120"/>
               </a:rPr>
-              <a:t>HOMEWORK</a:t>
+              <a:t>FORMATIVE EVALUATION</a:t>
             </a:r>
             <a:endParaRPr lang="en-US" sz="1400" dirty="0"/>
           </a:p>
@@ -17093,7 +17684,7 @@
                 <a:ea typeface="Times New Roman" pitchFamily="34" charset="-122"/>
                 <a:cs typeface="Times New Roman" pitchFamily="34" charset="-120"/>
               </a:rPr>
-              <a:t>Homework</a:t>
+              <a:t>Evaluation 2</a:t>
             </a:r>
             <a:endParaRPr lang="en-US" sz="3600" dirty="0"/>
           </a:p>
@@ -17135,7 +17726,7 @@
                 <a:ea typeface="Times New Roman" pitchFamily="34" charset="-122"/>
                 <a:cs typeface="Times New Roman" pitchFamily="34" charset="-120"/>
               </a:rPr>
-              <a:t>Explain how carrying capacity could be raised in your area.</a:t>
+              <a:t>Which curve is more stable, and why?</a:t>
             </a:r>
             <a:endParaRPr lang="en-US" sz="4000" dirty="0"/>
           </a:p>
@@ -17247,7 +17838,7 @@
                 <a:ea typeface="Calibri" pitchFamily="34" charset="-122"/>
                 <a:cs typeface="Calibri" pitchFamily="34" charset="-120"/>
               </a:rPr>
-              <a:t>NEXT LESSON</a:t>
+              <a:t>FORMATIVE EVALUATION</a:t>
             </a:r>
             <a:endParaRPr lang="en-US" sz="1400" dirty="0"/>
           </a:p>
@@ -17312,7 +17903,7 @@
                 <a:ea typeface="Times New Roman" pitchFamily="34" charset="-122"/>
                 <a:cs typeface="Times New Roman" pitchFamily="34" charset="-120"/>
               </a:rPr>
-              <a:t>Next Lesson</a:t>
+              <a:t>Expected Answer</a:t>
             </a:r>
             <a:endParaRPr lang="en-US" sz="3600" dirty="0"/>
           </a:p>
@@ -17336,17 +17927,17 @@
           <a:ln/>
         </p:spPr>
         <p:txBody>
-          <a:bodyPr wrap="square" lIns="0" tIns="0" rIns="0" bIns="0" rtlCol="0" anchor="ctr"/>
-          <a:lstStyle/>
-          <a:p>
-            <a:pPr algn="ctr" indent="0" marL="0">
+          <a:bodyPr wrap="square" lIns="0" tIns="0" rIns="0" bIns="0" rtlCol="0" anchor="t"/>
+          <a:lstStyle/>
+          <a:p>
+            <a:pPr algn="l" indent="0" marL="0">
               <a:spcAft>
                 <a:spcPts val="800"/>
               </a:spcAft>
               <a:buNone/>
             </a:pPr>
             <a:r>
-              <a:rPr lang="en-US" sz="4000" b="1" dirty="0">
+              <a:rPr lang="en-US" sz="4000" dirty="0">
                 <a:solidFill>
                   <a:srgbClr val="111111"/>
                 </a:solidFill>
@@ -17354,27 +17945,7 @@
                 <a:ea typeface="Times New Roman" pitchFamily="34" charset="-122"/>
                 <a:cs typeface="Times New Roman" pitchFamily="34" charset="-120"/>
               </a:rPr>
-              <a:t>Our next lesson will be on:</a:t>
-            </a:r>
-            <a:endParaRPr lang="en-US" sz="4000" dirty="0"/>
-          </a:p>
-          <a:p>
-            <a:pPr algn="ctr" indent="0" marL="0">
-              <a:spcAft>
-                <a:spcPts val="800"/>
-              </a:spcAft>
-              <a:buNone/>
-            </a:pPr>
-            <a:r>
-              <a:rPr lang="en-US" sz="4000" b="1" dirty="0">
-                <a:solidFill>
-                  <a:srgbClr val="990011"/>
-                </a:solidFill>
-                <a:latin typeface="Times New Roman" pitchFamily="34" charset="0"/>
-                <a:ea typeface="Times New Roman" pitchFamily="34" charset="-122"/>
-                <a:cs typeface="Times New Roman" pitchFamily="34" charset="-120"/>
-              </a:rPr>
-              <a:t>Lesson 17: Overpopulation, Underpopulation and Optimum Population</a:t>
+              <a:t>The S-curve, because the population adjusts to its resources without destroying them.</a:t>
             </a:r>
             <a:endParaRPr lang="en-US" sz="4000" dirty="0"/>
           </a:p>
@@ -17593,7 +18164,7 @@
                 <a:ea typeface="Times New Roman" pitchFamily="34" charset="-122"/>
                 <a:cs typeface="Times New Roman" pitchFamily="34" charset="-120"/>
               </a:rPr>
-              <a:t>Push factors (village): poverty, lack of jobs, poor schools and hospitals, small farms. Pull factors (town): jobs, schools, hospitals, electricity, entertainment.</a:t>
+              <a:t>Carrying capacity is the maximum number of people (or animals) an environment can support for a long time without being damaged.</a:t>
             </a:r>
             <a:endParaRPr lang="en-US" sz="4000" dirty="0"/>
           </a:p>
@@ -17705,6 +18276,749 @@
                 <a:ea typeface="Calibri" pitchFamily="34" charset="-122"/>
                 <a:cs typeface="Calibri" pitchFamily="34" charset="-120"/>
               </a:rPr>
+              <a:t>REMEDIATION</a:t>
+            </a:r>
+            <a:endParaRPr lang="en-US" sz="1400" dirty="0"/>
+          </a:p>
+        </p:txBody>
+      </p:sp>
+      <p:pic>
+        <p:nvPicPr>
+          <p:cNvPr id="3" name="Image 0" descr="/home/claude/f4/img/minesec_sheet.png">    </p:cNvPr>
+          <p:cNvPicPr>
+            <a:picLocks noChangeAspect="1"/>
+          </p:cNvPicPr>
+          <p:nvPr/>
+        </p:nvPicPr>
+        <p:blipFill>
+          <a:blip r:embed="rId1"/>
+          <a:stretch>
+            <a:fillRect/>
+          </a:stretch>
+        </p:blipFill>
+        <p:spPr>
+          <a:xfrm>
+            <a:off x="0" y="658368"/>
+            <a:ext cx="1463040" cy="5833872"/>
+          </a:xfrm>
+          <a:prstGeom prst="rect">
+            <a:avLst/>
+          </a:prstGeom>
+        </p:spPr>
+      </p:pic>
+      <p:sp>
+        <p:nvSpPr>
+          <p:cNvPr id="4" name="Text 1"/>
+          <p:cNvSpPr/>
+          <p:nvPr/>
+        </p:nvSpPr>
+        <p:spPr>
+          <a:xfrm>
+            <a:off x="1691640" y="1005840"/>
+            <a:ext cx="10180015" cy="731520"/>
+          </a:xfrm>
+          <a:prstGeom prst="rect">
+            <a:avLst/>
+          </a:prstGeom>
+          <a:noFill/>
+          <a:ln/>
+        </p:spPr>
+        <p:txBody>
+          <a:bodyPr wrap="square" lIns="0" tIns="0" rIns="0" bIns="0" rtlCol="0" anchor="ctr">
+            <a:normAutofit/>
+          </a:bodyPr>
+          <a:lstStyle/>
+          <a:p>
+            <a:pPr algn="ctr" indent="0" marL="0">
+              <a:buNone/>
+            </a:pPr>
+            <a:r>
+              <a:rPr lang="en-US" sz="3600" b="1" dirty="0">
+                <a:solidFill>
+                  <a:srgbClr val="990011"/>
+                </a:solidFill>
+                <a:latin typeface="Times New Roman" pitchFamily="34" charset="0"/>
+                <a:ea typeface="Times New Roman" pitchFamily="34" charset="-122"/>
+                <a:cs typeface="Times New Roman" pitchFamily="34" charset="-120"/>
+              </a:rPr>
+              <a:t>Remediation</a:t>
+            </a:r>
+            <a:endParaRPr lang="en-US" sz="3600" dirty="0"/>
+          </a:p>
+        </p:txBody>
+      </p:sp>
+      <p:sp>
+        <p:nvSpPr>
+          <p:cNvPr id="5" name="Text 2"/>
+          <p:cNvSpPr/>
+          <p:nvPr/>
+        </p:nvSpPr>
+        <p:spPr>
+          <a:xfrm>
+            <a:off x="1691640" y="1783080"/>
+            <a:ext cx="10180015" cy="4663440"/>
+          </a:xfrm>
+          <a:prstGeom prst="rect">
+            <a:avLst/>
+          </a:prstGeom>
+          <a:noFill/>
+          <a:ln/>
+        </p:spPr>
+        <p:txBody>
+          <a:bodyPr wrap="square" lIns="0" tIns="0" rIns="0" bIns="0" rtlCol="0" anchor="t"/>
+          <a:lstStyle/>
+          <a:p>
+            <a:pPr algn="l" indent="0" marL="0">
+              <a:spcAft>
+                <a:spcPts val="800"/>
+              </a:spcAft>
+              <a:buNone/>
+            </a:pPr>
+            <a:r>
+              <a:rPr lang="en-US" sz="4000" b="1" dirty="0">
+                <a:solidFill>
+                  <a:srgbClr val="111111"/>
+                </a:solidFill>
+                <a:latin typeface="Times New Roman" pitchFamily="34" charset="0"/>
+                <a:ea typeface="Times New Roman" pitchFamily="34" charset="-122"/>
+                <a:cs typeface="Times New Roman" pitchFamily="34" charset="-120"/>
+              </a:rPr>
+              <a:t>Fill in the blanks:</a:t>
+            </a:r>
+            <a:endParaRPr lang="en-US" sz="4000" dirty="0"/>
+          </a:p>
+          <a:p>
+            <a:pPr algn="l" marL="342900" indent="-342900">
+              <a:spcAft>
+                <a:spcPts val="800"/>
+              </a:spcAft>
+              <a:buSzPct val="100000"/>
+              <a:buFont typeface="+mj-lt"/>
+              <a:buAutoNum type="arabicPeriod" startAt="1"/>
+            </a:pPr>
+            <a:r>
+              <a:rPr lang="en-US" sz="4000" dirty="0">
+                <a:solidFill>
+                  <a:srgbClr val="111111"/>
+                </a:solidFill>
+                <a:latin typeface="Times New Roman" pitchFamily="34" charset="0"/>
+                <a:ea typeface="Times New Roman" pitchFamily="34" charset="-122"/>
+                <a:cs typeface="Times New Roman" pitchFamily="34" charset="-120"/>
+              </a:rPr>
+              <a:t>The maximum population an environment can support is its ______ capacity.</a:t>
+            </a:r>
+            <a:endParaRPr lang="en-US" sz="4000" dirty="0"/>
+          </a:p>
+          <a:p>
+            <a:pPr algn="l" marL="342900" indent="-342900">
+              <a:spcAft>
+                <a:spcPts val="800"/>
+              </a:spcAft>
+              <a:buSzPct val="100000"/>
+              <a:buFont typeface="+mj-lt"/>
+              <a:buAutoNum type="arabicPeriod" startAt="1"/>
+            </a:pPr>
+            <a:r>
+              <a:rPr lang="en-US" sz="4000" dirty="0">
+                <a:solidFill>
+                  <a:srgbClr val="111111"/>
+                </a:solidFill>
+                <a:latin typeface="Times New Roman" pitchFamily="34" charset="0"/>
+                <a:ea typeface="Times New Roman" pitchFamily="34" charset="-122"/>
+                <a:cs typeface="Times New Roman" pitchFamily="34" charset="-120"/>
+              </a:rPr>
+              <a:t>Logistic growth has the shape of the letter ______.</a:t>
+            </a:r>
+            <a:endParaRPr lang="en-US" sz="4000" dirty="0"/>
+          </a:p>
+          <a:p>
+            <a:pPr algn="l" marL="342900" indent="-342900">
+              <a:spcAft>
+                <a:spcPts val="800"/>
+              </a:spcAft>
+              <a:buSzPct val="100000"/>
+              <a:buFont typeface="+mj-lt"/>
+              <a:buAutoNum type="arabicPeriod" startAt="1"/>
+            </a:pPr>
+            <a:r>
+              <a:rPr lang="en-US" sz="4000" dirty="0">
+                <a:solidFill>
+                  <a:srgbClr val="111111"/>
+                </a:solidFill>
+                <a:latin typeface="Times New Roman" pitchFamily="34" charset="0"/>
+                <a:ea typeface="Times New Roman" pitchFamily="34" charset="-122"/>
+                <a:cs typeface="Times New Roman" pitchFamily="34" charset="-120"/>
+              </a:rPr>
+              <a:t>Norway is an example of a ______ regime.</a:t>
+            </a:r>
+            <a:endParaRPr lang="en-US" sz="4000" dirty="0"/>
+          </a:p>
+        </p:txBody>
+      </p:sp>
+      <p:sp>
+        <p:nvSpPr>
+          <p:cNvPr id="25" name="Slide Number Placeholder 0"/>
+          <p:cNvSpPr>
+            <a:spLocks noGrp="1"/>
+          </p:cNvSpPr>
+          <p:nvPr>
+            <p:ph type="sldNum" sz="quarter" idx="4294967295"/>
+          </p:nvPr>
+        </p:nvSpPr>
+        <p:spPr>
+          <a:xfrm>
+            <a:off x="27432" y="91440"/>
+            <a:ext cx="585216" cy="475488"/>
+          </a:xfrm>
+          <a:prstGeom prst="rect">
+            <a:avLst/>
+          </a:prstGeom>
+          <a:extLst>
+            <a:ext uri="{C572A759-6A51-4108-AA02-DFA0A04FC94B}">
+              <ma14:wrappingTextBoxFlag xmlns:ma14="http://schemas.microsoft.com/office/mac/drawingml/2011/main" val="0"/>
+            </a:ext>
+          </a:extLst>
+        </p:spPr>
+        <p:txBody>
+          <a:bodyPr/>
+          <a:lstStyle>
+            <a:lvl1pPr>
+              <a:defRPr sz="2000">
+                <a:solidFill>
+                  <a:srgbClr val="FFFFFF"/>
+                </a:solidFill>
+                <a:latin typeface="Calibri"/>
+                <a:ea typeface="Calibri"/>
+                <a:cs typeface="Calibri"/>
+              </a:defRPr>
+            </a:lvl1pPr>
+          </a:lstStyle>
+          <a:p>
+            <a:pPr algn="ctr"/>
+            <a:fld id="{F7021451-1387-4CA6-816F-3879F97B5CBC}" type="slidenum">
+              <a:rPr b="1" lang="en-US"/>
+              <a:t>50</a:t>
+            </a:fld>
+            <a:endParaRPr lang="en-US"/>
+          </a:p>
+        </p:txBody>
+      </p:sp>
+    </p:spTree>
+  </p:cSld>
+  <p:clrMapOvr>
+    <a:masterClrMapping/>
+  </p:clrMapOvr>
+</p:sld>
+</file>
+
+<file path=ppt/slides/slide51.xml><?xml version="1.0" encoding="utf-8"?>
+<p:sld xmlns:a="http://schemas.openxmlformats.org/drawingml/2006/main" xmlns:r="http://schemas.openxmlformats.org/officeDocument/2006/relationships" xmlns:p="http://schemas.openxmlformats.org/presentationml/2006/main">
+  <p:cSld name="Slide 51">
+    <p:spTree>
+      <p:nvGrpSpPr>
+        <p:cNvPr id="1" name=""/>
+        <p:cNvGrpSpPr/>
+        <p:nvPr/>
+      </p:nvGrpSpPr>
+      <p:grpSpPr>
+        <a:xfrm>
+          <a:off x="0" y="0"/>
+          <a:ext cx="0" cy="0"/>
+          <a:chOff x="0" y="0"/>
+          <a:chExt cx="0" cy="0"/>
+        </a:xfrm>
+      </p:grpSpPr>
+      <p:sp>
+        <p:nvSpPr>
+          <p:cNvPr id="2" name="Text 0"/>
+          <p:cNvSpPr/>
+          <p:nvPr/>
+        </p:nvSpPr>
+        <p:spPr>
+          <a:xfrm>
+            <a:off x="457200" y="713232"/>
+            <a:ext cx="11368735" cy="274320"/>
+          </a:xfrm>
+          <a:prstGeom prst="rect">
+            <a:avLst/>
+          </a:prstGeom>
+          <a:noFill/>
+          <a:ln/>
+        </p:spPr>
+        <p:txBody>
+          <a:bodyPr wrap="square" lIns="0" tIns="0" rIns="0" bIns="0" rtlCol="0" anchor="ctr"/>
+          <a:lstStyle/>
+          <a:p>
+            <a:pPr algn="r" indent="0" marL="0">
+              <a:buNone/>
+            </a:pPr>
+            <a:r>
+              <a:rPr lang="en-US" sz="1400" b="1" dirty="0">
+                <a:solidFill>
+                  <a:srgbClr val="1C3F6E"/>
+                </a:solidFill>
+                <a:latin typeface="Calibri" pitchFamily="34" charset="0"/>
+                <a:ea typeface="Calibri" pitchFamily="34" charset="-122"/>
+                <a:cs typeface="Calibri" pitchFamily="34" charset="-120"/>
+              </a:rPr>
+              <a:t>HOMEWORK</a:t>
+            </a:r>
+            <a:endParaRPr lang="en-US" sz="1400" dirty="0"/>
+          </a:p>
+        </p:txBody>
+      </p:sp>
+      <p:pic>
+        <p:nvPicPr>
+          <p:cNvPr id="3" name="Image 0" descr="/home/claude/f4/img/minesec_sheet.png">    </p:cNvPr>
+          <p:cNvPicPr>
+            <a:picLocks noChangeAspect="1"/>
+          </p:cNvPicPr>
+          <p:nvPr/>
+        </p:nvPicPr>
+        <p:blipFill>
+          <a:blip r:embed="rId1"/>
+          <a:stretch>
+            <a:fillRect/>
+          </a:stretch>
+        </p:blipFill>
+        <p:spPr>
+          <a:xfrm>
+            <a:off x="0" y="658368"/>
+            <a:ext cx="5120640" cy="5833872"/>
+          </a:xfrm>
+          <a:prstGeom prst="rect">
+            <a:avLst/>
+          </a:prstGeom>
+        </p:spPr>
+      </p:pic>
+      <p:sp>
+        <p:nvSpPr>
+          <p:cNvPr id="4" name="Text 1"/>
+          <p:cNvSpPr/>
+          <p:nvPr/>
+        </p:nvSpPr>
+        <p:spPr>
+          <a:xfrm>
+            <a:off x="5349240" y="1005840"/>
+            <a:ext cx="6522415" cy="731520"/>
+          </a:xfrm>
+          <a:prstGeom prst="rect">
+            <a:avLst/>
+          </a:prstGeom>
+          <a:noFill/>
+          <a:ln/>
+        </p:spPr>
+        <p:txBody>
+          <a:bodyPr wrap="square" lIns="0" tIns="0" rIns="0" bIns="0" rtlCol="0" anchor="ctr">
+            <a:normAutofit/>
+          </a:bodyPr>
+          <a:lstStyle/>
+          <a:p>
+            <a:pPr algn="ctr" indent="0" marL="0">
+              <a:buNone/>
+            </a:pPr>
+            <a:r>
+              <a:rPr lang="en-US" sz="3600" b="1" dirty="0">
+                <a:solidFill>
+                  <a:srgbClr val="990011"/>
+                </a:solidFill>
+                <a:latin typeface="Times New Roman" pitchFamily="34" charset="0"/>
+                <a:ea typeface="Times New Roman" pitchFamily="34" charset="-122"/>
+                <a:cs typeface="Times New Roman" pitchFamily="34" charset="-120"/>
+              </a:rPr>
+              <a:t>Homework</a:t>
+            </a:r>
+            <a:endParaRPr lang="en-US" sz="3600" dirty="0"/>
+          </a:p>
+        </p:txBody>
+      </p:sp>
+      <p:sp>
+        <p:nvSpPr>
+          <p:cNvPr id="5" name="Text 2"/>
+          <p:cNvSpPr/>
+          <p:nvPr/>
+        </p:nvSpPr>
+        <p:spPr>
+          <a:xfrm>
+            <a:off x="5349240" y="1783080"/>
+            <a:ext cx="6522415" cy="4663440"/>
+          </a:xfrm>
+          <a:prstGeom prst="rect">
+            <a:avLst/>
+          </a:prstGeom>
+          <a:noFill/>
+          <a:ln/>
+        </p:spPr>
+        <p:txBody>
+          <a:bodyPr wrap="square" lIns="0" tIns="0" rIns="0" bIns="0" rtlCol="0" anchor="t"/>
+          <a:lstStyle/>
+          <a:p>
+            <a:pPr algn="l" indent="0" marL="0">
+              <a:spcAft>
+                <a:spcPts val="800"/>
+              </a:spcAft>
+              <a:buNone/>
+            </a:pPr>
+            <a:r>
+              <a:rPr lang="en-US" sz="4000" dirty="0">
+                <a:solidFill>
+                  <a:srgbClr val="111111"/>
+                </a:solidFill>
+                <a:latin typeface="Times New Roman" pitchFamily="34" charset="0"/>
+                <a:ea typeface="Times New Roman" pitchFamily="34" charset="-122"/>
+                <a:cs typeface="Times New Roman" pitchFamily="34" charset="-120"/>
+              </a:rPr>
+              <a:t>Give one indicator of overpopulation.</a:t>
+            </a:r>
+            <a:endParaRPr lang="en-US" sz="4000" dirty="0"/>
+          </a:p>
+        </p:txBody>
+      </p:sp>
+      <p:sp>
+        <p:nvSpPr>
+          <p:cNvPr id="25" name="Slide Number Placeholder 0"/>
+          <p:cNvSpPr>
+            <a:spLocks noGrp="1"/>
+          </p:cNvSpPr>
+          <p:nvPr>
+            <p:ph type="sldNum" sz="quarter" idx="4294967295"/>
+          </p:nvPr>
+        </p:nvSpPr>
+        <p:spPr>
+          <a:xfrm>
+            <a:off x="27432" y="91440"/>
+            <a:ext cx="585216" cy="475488"/>
+          </a:xfrm>
+          <a:prstGeom prst="rect">
+            <a:avLst/>
+          </a:prstGeom>
+          <a:extLst>
+            <a:ext uri="{C572A759-6A51-4108-AA02-DFA0A04FC94B}">
+              <ma14:wrappingTextBoxFlag xmlns:ma14="http://schemas.microsoft.com/office/mac/drawingml/2011/main" val="0"/>
+            </a:ext>
+          </a:extLst>
+        </p:spPr>
+        <p:txBody>
+          <a:bodyPr/>
+          <a:lstStyle>
+            <a:lvl1pPr>
+              <a:defRPr sz="2000">
+                <a:solidFill>
+                  <a:srgbClr val="FFFFFF"/>
+                </a:solidFill>
+                <a:latin typeface="Calibri"/>
+                <a:ea typeface="Calibri"/>
+                <a:cs typeface="Calibri"/>
+              </a:defRPr>
+            </a:lvl1pPr>
+          </a:lstStyle>
+          <a:p>
+            <a:pPr algn="ctr"/>
+            <a:fld id="{F7021451-1387-4CA6-816F-3879F97B5CBC}" type="slidenum">
+              <a:rPr b="1" lang="en-US"/>
+              <a:t>51</a:t>
+            </a:fld>
+            <a:endParaRPr lang="en-US"/>
+          </a:p>
+        </p:txBody>
+      </p:sp>
+    </p:spTree>
+  </p:cSld>
+  <p:clrMapOvr>
+    <a:masterClrMapping/>
+  </p:clrMapOvr>
+</p:sld>
+</file>
+
+<file path=ppt/slides/slide52.xml><?xml version="1.0" encoding="utf-8"?>
+<p:sld xmlns:a="http://schemas.openxmlformats.org/drawingml/2006/main" xmlns:r="http://schemas.openxmlformats.org/officeDocument/2006/relationships" xmlns:p="http://schemas.openxmlformats.org/presentationml/2006/main">
+  <p:cSld name="Slide 52">
+    <p:spTree>
+      <p:nvGrpSpPr>
+        <p:cNvPr id="1" name=""/>
+        <p:cNvGrpSpPr/>
+        <p:nvPr/>
+      </p:nvGrpSpPr>
+      <p:grpSpPr>
+        <a:xfrm>
+          <a:off x="0" y="0"/>
+          <a:ext cx="0" cy="0"/>
+          <a:chOff x="0" y="0"/>
+          <a:chExt cx="0" cy="0"/>
+        </a:xfrm>
+      </p:grpSpPr>
+      <p:sp>
+        <p:nvSpPr>
+          <p:cNvPr id="2" name="Text 0"/>
+          <p:cNvSpPr/>
+          <p:nvPr/>
+        </p:nvSpPr>
+        <p:spPr>
+          <a:xfrm>
+            <a:off x="457200" y="713232"/>
+            <a:ext cx="11368735" cy="274320"/>
+          </a:xfrm>
+          <a:prstGeom prst="rect">
+            <a:avLst/>
+          </a:prstGeom>
+          <a:noFill/>
+          <a:ln/>
+        </p:spPr>
+        <p:txBody>
+          <a:bodyPr wrap="square" lIns="0" tIns="0" rIns="0" bIns="0" rtlCol="0" anchor="ctr"/>
+          <a:lstStyle/>
+          <a:p>
+            <a:pPr algn="r" indent="0" marL="0">
+              <a:buNone/>
+            </a:pPr>
+            <a:r>
+              <a:rPr lang="en-US" sz="1400" b="1" dirty="0">
+                <a:solidFill>
+                  <a:srgbClr val="1C3F6E"/>
+                </a:solidFill>
+                <a:latin typeface="Calibri" pitchFamily="34" charset="0"/>
+                <a:ea typeface="Calibri" pitchFamily="34" charset="-122"/>
+                <a:cs typeface="Calibri" pitchFamily="34" charset="-120"/>
+              </a:rPr>
+              <a:t>NEXT LESSON</a:t>
+            </a:r>
+            <a:endParaRPr lang="en-US" sz="1400" dirty="0"/>
+          </a:p>
+        </p:txBody>
+      </p:sp>
+      <p:pic>
+        <p:nvPicPr>
+          <p:cNvPr id="3" name="Image 0" descr="/home/claude/f4/img/minesec_sheet.png">    </p:cNvPr>
+          <p:cNvPicPr>
+            <a:picLocks noChangeAspect="1"/>
+          </p:cNvPicPr>
+          <p:nvPr/>
+        </p:nvPicPr>
+        <p:blipFill>
+          <a:blip r:embed="rId1"/>
+          <a:stretch>
+            <a:fillRect/>
+          </a:stretch>
+        </p:blipFill>
+        <p:spPr>
+          <a:xfrm>
+            <a:off x="0" y="658368"/>
+            <a:ext cx="5120640" cy="5833872"/>
+          </a:xfrm>
+          <a:prstGeom prst="rect">
+            <a:avLst/>
+          </a:prstGeom>
+        </p:spPr>
+      </p:pic>
+      <p:sp>
+        <p:nvSpPr>
+          <p:cNvPr id="4" name="Text 1"/>
+          <p:cNvSpPr/>
+          <p:nvPr/>
+        </p:nvSpPr>
+        <p:spPr>
+          <a:xfrm>
+            <a:off x="5349240" y="1005840"/>
+            <a:ext cx="6522415" cy="731520"/>
+          </a:xfrm>
+          <a:prstGeom prst="rect">
+            <a:avLst/>
+          </a:prstGeom>
+          <a:noFill/>
+          <a:ln/>
+        </p:spPr>
+        <p:txBody>
+          <a:bodyPr wrap="square" lIns="0" tIns="0" rIns="0" bIns="0" rtlCol="0" anchor="ctr">
+            <a:normAutofit/>
+          </a:bodyPr>
+          <a:lstStyle/>
+          <a:p>
+            <a:pPr algn="ctr" indent="0" marL="0">
+              <a:buNone/>
+            </a:pPr>
+            <a:r>
+              <a:rPr lang="en-US" sz="3600" b="1" dirty="0">
+                <a:solidFill>
+                  <a:srgbClr val="990011"/>
+                </a:solidFill>
+                <a:latin typeface="Times New Roman" pitchFamily="34" charset="0"/>
+                <a:ea typeface="Times New Roman" pitchFamily="34" charset="-122"/>
+                <a:cs typeface="Times New Roman" pitchFamily="34" charset="-120"/>
+              </a:rPr>
+              <a:t>Next Lesson</a:t>
+            </a:r>
+            <a:endParaRPr lang="en-US" sz="3600" dirty="0"/>
+          </a:p>
+        </p:txBody>
+      </p:sp>
+      <p:sp>
+        <p:nvSpPr>
+          <p:cNvPr id="5" name="Text 2"/>
+          <p:cNvSpPr/>
+          <p:nvPr/>
+        </p:nvSpPr>
+        <p:spPr>
+          <a:xfrm>
+            <a:off x="5349240" y="1783080"/>
+            <a:ext cx="6522415" cy="4663440"/>
+          </a:xfrm>
+          <a:prstGeom prst="rect">
+            <a:avLst/>
+          </a:prstGeom>
+          <a:noFill/>
+          <a:ln/>
+        </p:spPr>
+        <p:txBody>
+          <a:bodyPr wrap="square" lIns="0" tIns="0" rIns="0" bIns="0" rtlCol="0" anchor="ctr"/>
+          <a:lstStyle/>
+          <a:p>
+            <a:pPr algn="ctr" indent="0" marL="0">
+              <a:spcAft>
+                <a:spcPts val="800"/>
+              </a:spcAft>
+              <a:buNone/>
+            </a:pPr>
+            <a:r>
+              <a:rPr lang="en-US" sz="4000" b="1" dirty="0">
+                <a:solidFill>
+                  <a:srgbClr val="111111"/>
+                </a:solidFill>
+                <a:latin typeface="Times New Roman" pitchFamily="34" charset="0"/>
+                <a:ea typeface="Times New Roman" pitchFamily="34" charset="-122"/>
+                <a:cs typeface="Times New Roman" pitchFamily="34" charset="-120"/>
+              </a:rPr>
+              <a:t>Our next lesson will be on:</a:t>
+            </a:r>
+            <a:endParaRPr lang="en-US" sz="4000" dirty="0"/>
+          </a:p>
+          <a:p>
+            <a:pPr algn="ctr" indent="0" marL="0">
+              <a:spcAft>
+                <a:spcPts val="800"/>
+              </a:spcAft>
+              <a:buNone/>
+            </a:pPr>
+            <a:r>
+              <a:rPr lang="en-US" sz="4000" b="1" dirty="0">
+                <a:solidFill>
+                  <a:srgbClr val="990011"/>
+                </a:solidFill>
+                <a:latin typeface="Times New Roman" pitchFamily="34" charset="0"/>
+                <a:ea typeface="Times New Roman" pitchFamily="34" charset="-122"/>
+                <a:cs typeface="Times New Roman" pitchFamily="34" charset="-120"/>
+              </a:rPr>
+              <a:t>Lesson 17: Overpopulation, Underpopulation and Optimum Population</a:t>
+            </a:r>
+            <a:endParaRPr lang="en-US" sz="4000" dirty="0"/>
+          </a:p>
+        </p:txBody>
+      </p:sp>
+      <p:sp>
+        <p:nvSpPr>
+          <p:cNvPr id="25" name="Slide Number Placeholder 0"/>
+          <p:cNvSpPr>
+            <a:spLocks noGrp="1"/>
+          </p:cNvSpPr>
+          <p:nvPr>
+            <p:ph type="sldNum" sz="quarter" idx="4294967295"/>
+          </p:nvPr>
+        </p:nvSpPr>
+        <p:spPr>
+          <a:xfrm>
+            <a:off x="27432" y="91440"/>
+            <a:ext cx="585216" cy="475488"/>
+          </a:xfrm>
+          <a:prstGeom prst="rect">
+            <a:avLst/>
+          </a:prstGeom>
+          <a:extLst>
+            <a:ext uri="{C572A759-6A51-4108-AA02-DFA0A04FC94B}">
+              <ma14:wrappingTextBoxFlag xmlns:ma14="http://schemas.microsoft.com/office/mac/drawingml/2011/main" val="0"/>
+            </a:ext>
+          </a:extLst>
+        </p:spPr>
+        <p:txBody>
+          <a:bodyPr/>
+          <a:lstStyle>
+            <a:lvl1pPr>
+              <a:defRPr sz="2000">
+                <a:solidFill>
+                  <a:srgbClr val="FFFFFF"/>
+                </a:solidFill>
+                <a:latin typeface="Calibri"/>
+                <a:ea typeface="Calibri"/>
+                <a:cs typeface="Calibri"/>
+              </a:defRPr>
+            </a:lvl1pPr>
+          </a:lstStyle>
+          <a:p>
+            <a:pPr algn="ctr"/>
+            <a:fld id="{F7021451-1387-4CA6-816F-3879F97B5CBC}" type="slidenum">
+              <a:rPr b="1" lang="en-US"/>
+              <a:t>52</a:t>
+            </a:fld>
+            <a:endParaRPr lang="en-US"/>
+          </a:p>
+        </p:txBody>
+      </p:sp>
+    </p:spTree>
+  </p:cSld>
+  <p:clrMapOvr>
+    <a:masterClrMapping/>
+  </p:clrMapOvr>
+</p:sld>
+</file>
+
+<file path=ppt/slides/slide53.xml><?xml version="1.0" encoding="utf-8"?>
+<p:sld xmlns:a="http://schemas.openxmlformats.org/drawingml/2006/main" xmlns:r="http://schemas.openxmlformats.org/officeDocument/2006/relationships" xmlns:p="http://schemas.openxmlformats.org/presentationml/2006/main">
+  <p:cSld name="Slide 53">
+    <p:spTree>
+      <p:nvGrpSpPr>
+        <p:cNvPr id="1" name=""/>
+        <p:cNvGrpSpPr/>
+        <p:nvPr/>
+      </p:nvGrpSpPr>
+      <p:grpSpPr>
+        <a:xfrm>
+          <a:off x="0" y="0"/>
+          <a:ext cx="0" cy="0"/>
+          <a:chOff x="0" y="0"/>
+          <a:chExt cx="0" cy="0"/>
+        </a:xfrm>
+      </p:grpSpPr>
+      <p:sp>
+        <p:nvSpPr>
+          <p:cNvPr id="2" name="Text 0"/>
+          <p:cNvSpPr/>
+          <p:nvPr/>
+        </p:nvSpPr>
+        <p:spPr>
+          <a:xfrm>
+            <a:off x="457200" y="713232"/>
+            <a:ext cx="11368735" cy="274320"/>
+          </a:xfrm>
+          <a:prstGeom prst="rect">
+            <a:avLst/>
+          </a:prstGeom>
+          <a:noFill/>
+          <a:ln/>
+        </p:spPr>
+        <p:txBody>
+          <a:bodyPr wrap="square" lIns="0" tIns="0" rIns="0" bIns="0" rtlCol="0" anchor="ctr"/>
+          <a:lstStyle/>
+          <a:p>
+            <a:pPr algn="r" indent="0" marL="0">
+              <a:buNone/>
+            </a:pPr>
+            <a:r>
+              <a:rPr lang="en-US" sz="1400" b="1" dirty="0">
+                <a:solidFill>
+                  <a:srgbClr val="1C3F6E"/>
+                </a:solidFill>
+                <a:latin typeface="Calibri" pitchFamily="34" charset="0"/>
+                <a:ea typeface="Calibri" pitchFamily="34" charset="-122"/>
+                <a:cs typeface="Calibri" pitchFamily="34" charset="-120"/>
+              </a:rPr>
               <a:t>BILINGUAL GAME</a:t>
             </a:r>
             <a:endParaRPr lang="en-US" sz="1400" dirty="0"/>
@@ -17752,7 +19066,7 @@
       </p:sp>
       <p:graphicFrame>
         <p:nvGraphicFramePr>
-          <p:cNvPr id="51" name="Table 0"/>
+          <p:cNvPr id="54" name="Table 0"/>
           <p:cNvGraphicFramePr>
             <a:graphicFrameLocks noGrp="1"/>
           </p:cNvGraphicFramePr>
@@ -18070,7 +19384,7 @@
                           <a:ea typeface="Calibri" pitchFamily="34" charset="-122"/>
                           <a:cs typeface="Calibri" pitchFamily="34" charset="-120"/>
                         </a:rPr>
-                        <a:t>Resource</a:t>
+                        <a:t>Overpopulation</a:t>
                       </a:r>
                       <a:endParaRPr lang="en-US" sz="2200" dirty="0">
                         <a:latin typeface="Calibri" charset="0"/>
@@ -18138,7 +19452,7 @@
                           <a:ea typeface="Calibri" pitchFamily="34" charset="-122"/>
                           <a:cs typeface="Calibri" pitchFamily="34" charset="-120"/>
                         </a:rPr>
-                        <a:t>La ressource</a:t>
+                        <a:t>La surpopulation</a:t>
                       </a:r>
                       <a:endParaRPr lang="en-US" sz="2200" dirty="0">
                         <a:latin typeface="Calibri" charset="0"/>
@@ -18208,7 +19522,7 @@
                           <a:ea typeface="Calibri" pitchFamily="34" charset="-122"/>
                           <a:cs typeface="Calibri" pitchFamily="34" charset="-120"/>
                         </a:rPr>
-                        <a:t>Technology</a:t>
+                        <a:t>Sustainable</a:t>
                       </a:r>
                       <a:endParaRPr lang="en-US" sz="2200" dirty="0">
                         <a:latin typeface="Calibri" charset="0"/>
@@ -18276,7 +19590,283 @@
                           <a:ea typeface="Calibri" pitchFamily="34" charset="-122"/>
                           <a:cs typeface="Calibri" pitchFamily="34" charset="-120"/>
                         </a:rPr>
-                        <a:t>La technologie</a:t>
+                        <a:t>Durable</a:t>
+                      </a:r>
+                      <a:endParaRPr lang="en-US" sz="2200" dirty="0">
+                        <a:latin typeface="Calibri" charset="0"/>
+                        <a:ea typeface="Calibri" charset="0"/>
+                        <a:cs typeface="Calibri" charset="0"/>
+                      </a:endParaRPr>
+                    </a:p>
+                  </a:txBody>
+                  <a:tcPr marL="73152" marR="73152" marT="73152" marB="73152" anchor="ctr">
+                    <a:lnL w="12700" cap="flat" cmpd="sng" algn="ctr">
+                      <a:solidFill>
+                        <a:srgbClr val="BBBBBB"/>
+                      </a:solidFill>
+                      <a:prstDash val="solid"/>
+                      <a:round/>
+                      <a:headEnd type="none" w="med" len="med"/>
+                      <a:tailEnd type="none" w="med" len="med"/>
+                    </a:lnL>
+                    <a:lnR w="12700" cap="flat" cmpd="sng" algn="ctr">
+                      <a:solidFill>
+                        <a:srgbClr val="BBBBBB"/>
+                      </a:solidFill>
+                      <a:prstDash val="solid"/>
+                      <a:round/>
+                      <a:headEnd type="none" w="med" len="med"/>
+                      <a:tailEnd type="none" w="med" len="med"/>
+                    </a:lnR>
+                    <a:lnT w="12700" cap="flat" cmpd="sng" algn="ctr">
+                      <a:solidFill>
+                        <a:srgbClr val="BBBBBB"/>
+                      </a:solidFill>
+                      <a:prstDash val="solid"/>
+                      <a:round/>
+                      <a:headEnd type="none" w="med" len="med"/>
+                      <a:tailEnd type="none" w="med" len="med"/>
+                    </a:lnT>
+                    <a:lnB w="12700" cap="flat" cmpd="sng" algn="ctr">
+                      <a:solidFill>
+                        <a:srgbClr val="BBBBBB"/>
+                      </a:solidFill>
+                      <a:prstDash val="solid"/>
+                      <a:round/>
+                      <a:headEnd type="none" w="med" len="med"/>
+                      <a:tailEnd type="none" w="med" len="med"/>
+                    </a:lnB>
+                    <a:solidFill>
+                      <a:srgbClr val="FFFFFF"/>
+                    </a:solidFill>
+                  </a:tcPr>
+                </a:tc>
+              </a:tr>
+              <a:tr h="0">
+                <a:tc>
+                  <a:txBody>
+                    <a:bodyPr/>
+                    <a:lstStyle/>
+                    <a:p>
+                      <a:pPr algn="ctr" indent="0" marL="0">
+                        <a:buNone/>
+                      </a:pPr>
+                      <a:r>
+                        <a:rPr lang="en-US" sz="2200" dirty="0">
+                          <a:solidFill>
+                            <a:srgbClr val="111111"/>
+                          </a:solidFill>
+                          <a:latin typeface="Calibri" pitchFamily="34" charset="0"/>
+                          <a:ea typeface="Calibri" pitchFamily="34" charset="-122"/>
+                          <a:cs typeface="Calibri" pitchFamily="34" charset="-120"/>
+                        </a:rPr>
+                        <a:t>Resources</a:t>
+                      </a:r>
+                      <a:endParaRPr lang="en-US" sz="2200" dirty="0">
+                        <a:latin typeface="Calibri" charset="0"/>
+                        <a:ea typeface="Calibri" charset="0"/>
+                        <a:cs typeface="Calibri" charset="0"/>
+                      </a:endParaRPr>
+                    </a:p>
+                  </a:txBody>
+                  <a:tcPr marL="73152" marR="73152" marT="73152" marB="73152" anchor="ctr">
+                    <a:lnL w="12700" cap="flat" cmpd="sng" algn="ctr">
+                      <a:solidFill>
+                        <a:srgbClr val="BBBBBB"/>
+                      </a:solidFill>
+                      <a:prstDash val="solid"/>
+                      <a:round/>
+                      <a:headEnd type="none" w="med" len="med"/>
+                      <a:tailEnd type="none" w="med" len="med"/>
+                    </a:lnL>
+                    <a:lnR w="12700" cap="flat" cmpd="sng" algn="ctr">
+                      <a:solidFill>
+                        <a:srgbClr val="BBBBBB"/>
+                      </a:solidFill>
+                      <a:prstDash val="solid"/>
+                      <a:round/>
+                      <a:headEnd type="none" w="med" len="med"/>
+                      <a:tailEnd type="none" w="med" len="med"/>
+                    </a:lnR>
+                    <a:lnT w="12700" cap="flat" cmpd="sng" algn="ctr">
+                      <a:solidFill>
+                        <a:srgbClr val="BBBBBB"/>
+                      </a:solidFill>
+                      <a:prstDash val="solid"/>
+                      <a:round/>
+                      <a:headEnd type="none" w="med" len="med"/>
+                      <a:tailEnd type="none" w="med" len="med"/>
+                    </a:lnT>
+                    <a:lnB w="12700" cap="flat" cmpd="sng" algn="ctr">
+                      <a:solidFill>
+                        <a:srgbClr val="BBBBBB"/>
+                      </a:solidFill>
+                      <a:prstDash val="solid"/>
+                      <a:round/>
+                      <a:headEnd type="none" w="med" len="med"/>
+                      <a:tailEnd type="none" w="med" len="med"/>
+                    </a:lnB>
+                    <a:solidFill>
+                      <a:srgbClr val="F2F4F8"/>
+                    </a:solidFill>
+                  </a:tcPr>
+                </a:tc>
+                <a:tc>
+                  <a:txBody>
+                    <a:bodyPr/>
+                    <a:lstStyle/>
+                    <a:p>
+                      <a:pPr algn="ctr" indent="0" marL="0">
+                        <a:buNone/>
+                      </a:pPr>
+                      <a:r>
+                        <a:rPr lang="en-US" sz="2200" dirty="0">
+                          <a:solidFill>
+                            <a:srgbClr val="111111"/>
+                          </a:solidFill>
+                          <a:latin typeface="Calibri" pitchFamily="34" charset="0"/>
+                          <a:ea typeface="Calibri" pitchFamily="34" charset="-122"/>
+                          <a:cs typeface="Calibri" pitchFamily="34" charset="-120"/>
+                        </a:rPr>
+                        <a:t>Les ressources</a:t>
+                      </a:r>
+                      <a:endParaRPr lang="en-US" sz="2200" dirty="0">
+                        <a:latin typeface="Calibri" charset="0"/>
+                        <a:ea typeface="Calibri" charset="0"/>
+                        <a:cs typeface="Calibri" charset="0"/>
+                      </a:endParaRPr>
+                    </a:p>
+                  </a:txBody>
+                  <a:tcPr marL="73152" marR="73152" marT="73152" marB="73152" anchor="ctr">
+                    <a:lnL w="12700" cap="flat" cmpd="sng" algn="ctr">
+                      <a:solidFill>
+                        <a:srgbClr val="BBBBBB"/>
+                      </a:solidFill>
+                      <a:prstDash val="solid"/>
+                      <a:round/>
+                      <a:headEnd type="none" w="med" len="med"/>
+                      <a:tailEnd type="none" w="med" len="med"/>
+                    </a:lnL>
+                    <a:lnR w="12700" cap="flat" cmpd="sng" algn="ctr">
+                      <a:solidFill>
+                        <a:srgbClr val="BBBBBB"/>
+                      </a:solidFill>
+                      <a:prstDash val="solid"/>
+                      <a:round/>
+                      <a:headEnd type="none" w="med" len="med"/>
+                      <a:tailEnd type="none" w="med" len="med"/>
+                    </a:lnR>
+                    <a:lnT w="12700" cap="flat" cmpd="sng" algn="ctr">
+                      <a:solidFill>
+                        <a:srgbClr val="BBBBBB"/>
+                      </a:solidFill>
+                      <a:prstDash val="solid"/>
+                      <a:round/>
+                      <a:headEnd type="none" w="med" len="med"/>
+                      <a:tailEnd type="none" w="med" len="med"/>
+                    </a:lnT>
+                    <a:lnB w="12700" cap="flat" cmpd="sng" algn="ctr">
+                      <a:solidFill>
+                        <a:srgbClr val="BBBBBB"/>
+                      </a:solidFill>
+                      <a:prstDash val="solid"/>
+                      <a:round/>
+                      <a:headEnd type="none" w="med" len="med"/>
+                      <a:tailEnd type="none" w="med" len="med"/>
+                    </a:lnB>
+                    <a:solidFill>
+                      <a:srgbClr val="F2F4F8"/>
+                    </a:solidFill>
+                  </a:tcPr>
+                </a:tc>
+              </a:tr>
+              <a:tr h="0">
+                <a:tc>
+                  <a:txBody>
+                    <a:bodyPr/>
+                    <a:lstStyle/>
+                    <a:p>
+                      <a:pPr algn="ctr" indent="0" marL="0">
+                        <a:buNone/>
+                      </a:pPr>
+                      <a:r>
+                        <a:rPr lang="en-US" sz="2200" dirty="0">
+                          <a:solidFill>
+                            <a:srgbClr val="111111"/>
+                          </a:solidFill>
+                          <a:latin typeface="Calibri" pitchFamily="34" charset="0"/>
+                          <a:ea typeface="Calibri" pitchFamily="34" charset="-122"/>
+                          <a:cs typeface="Calibri" pitchFamily="34" charset="-120"/>
+                        </a:rPr>
+                        <a:t>Underpopulation</a:t>
+                      </a:r>
+                      <a:endParaRPr lang="en-US" sz="2200" dirty="0">
+                        <a:latin typeface="Calibri" charset="0"/>
+                        <a:ea typeface="Calibri" charset="0"/>
+                        <a:cs typeface="Calibri" charset="0"/>
+                      </a:endParaRPr>
+                    </a:p>
+                  </a:txBody>
+                  <a:tcPr marL="73152" marR="73152" marT="73152" marB="73152" anchor="ctr">
+                    <a:lnL w="12700" cap="flat" cmpd="sng" algn="ctr">
+                      <a:solidFill>
+                        <a:srgbClr val="BBBBBB"/>
+                      </a:solidFill>
+                      <a:prstDash val="solid"/>
+                      <a:round/>
+                      <a:headEnd type="none" w="med" len="med"/>
+                      <a:tailEnd type="none" w="med" len="med"/>
+                    </a:lnL>
+                    <a:lnR w="12700" cap="flat" cmpd="sng" algn="ctr">
+                      <a:solidFill>
+                        <a:srgbClr val="BBBBBB"/>
+                      </a:solidFill>
+                      <a:prstDash val="solid"/>
+                      <a:round/>
+                      <a:headEnd type="none" w="med" len="med"/>
+                      <a:tailEnd type="none" w="med" len="med"/>
+                    </a:lnR>
+                    <a:lnT w="12700" cap="flat" cmpd="sng" algn="ctr">
+                      <a:solidFill>
+                        <a:srgbClr val="BBBBBB"/>
+                      </a:solidFill>
+                      <a:prstDash val="solid"/>
+                      <a:round/>
+                      <a:headEnd type="none" w="med" len="med"/>
+                      <a:tailEnd type="none" w="med" len="med"/>
+                    </a:lnT>
+                    <a:lnB w="12700" cap="flat" cmpd="sng" algn="ctr">
+                      <a:solidFill>
+                        <a:srgbClr val="BBBBBB"/>
+                      </a:solidFill>
+                      <a:prstDash val="solid"/>
+                      <a:round/>
+                      <a:headEnd type="none" w="med" len="med"/>
+                      <a:tailEnd type="none" w="med" len="med"/>
+                    </a:lnB>
+                    <a:solidFill>
+                      <a:srgbClr val="FFFFFF"/>
+                    </a:solidFill>
+                  </a:tcPr>
+                </a:tc>
+                <a:tc>
+                  <a:txBody>
+                    <a:bodyPr/>
+                    <a:lstStyle/>
+                    <a:p>
+                      <a:pPr algn="ctr" indent="0" marL="0">
+                        <a:buNone/>
+                      </a:pPr>
+                      <a:r>
+                        <a:rPr lang="en-US" sz="2200" dirty="0">
+                          <a:solidFill>
+                            <a:srgbClr val="111111"/>
+                          </a:solidFill>
+                          <a:latin typeface="Calibri" pitchFamily="34" charset="0"/>
+                          <a:ea typeface="Calibri" pitchFamily="34" charset="-122"/>
+                          <a:cs typeface="Calibri" pitchFamily="34" charset="-120"/>
+                        </a:rPr>
+                        <a:t>La sous-population</a:t>
                       </a:r>
                       <a:endParaRPr lang="en-US" sz="2200" dirty="0">
                         <a:latin typeface="Calibri" charset="0"/>
@@ -18466,282 +20056,6 @@
                   </a:tcPr>
                 </a:tc>
               </a:tr>
-              <a:tr h="0">
-                <a:tc>
-                  <a:txBody>
-                    <a:bodyPr/>
-                    <a:lstStyle/>
-                    <a:p>
-                      <a:pPr algn="ctr" indent="0" marL="0">
-                        <a:buNone/>
-                      </a:pPr>
-                      <a:r>
-                        <a:rPr lang="en-US" sz="2200" dirty="0">
-                          <a:solidFill>
-                            <a:srgbClr val="111111"/>
-                          </a:solidFill>
-                          <a:latin typeface="Calibri" pitchFamily="34" charset="0"/>
-                          <a:ea typeface="Calibri" pitchFamily="34" charset="-122"/>
-                          <a:cs typeface="Calibri" pitchFamily="34" charset="-120"/>
-                        </a:rPr>
-                        <a:t>Famine</a:t>
-                      </a:r>
-                      <a:endParaRPr lang="en-US" sz="2200" dirty="0">
-                        <a:latin typeface="Calibri" charset="0"/>
-                        <a:ea typeface="Calibri" charset="0"/>
-                        <a:cs typeface="Calibri" charset="0"/>
-                      </a:endParaRPr>
-                    </a:p>
-                  </a:txBody>
-                  <a:tcPr marL="73152" marR="73152" marT="73152" marB="73152" anchor="ctr">
-                    <a:lnL w="12700" cap="flat" cmpd="sng" algn="ctr">
-                      <a:solidFill>
-                        <a:srgbClr val="BBBBBB"/>
-                      </a:solidFill>
-                      <a:prstDash val="solid"/>
-                      <a:round/>
-                      <a:headEnd type="none" w="med" len="med"/>
-                      <a:tailEnd type="none" w="med" len="med"/>
-                    </a:lnL>
-                    <a:lnR w="12700" cap="flat" cmpd="sng" algn="ctr">
-                      <a:solidFill>
-                        <a:srgbClr val="BBBBBB"/>
-                      </a:solidFill>
-                      <a:prstDash val="solid"/>
-                      <a:round/>
-                      <a:headEnd type="none" w="med" len="med"/>
-                      <a:tailEnd type="none" w="med" len="med"/>
-                    </a:lnR>
-                    <a:lnT w="12700" cap="flat" cmpd="sng" algn="ctr">
-                      <a:solidFill>
-                        <a:srgbClr val="BBBBBB"/>
-                      </a:solidFill>
-                      <a:prstDash val="solid"/>
-                      <a:round/>
-                      <a:headEnd type="none" w="med" len="med"/>
-                      <a:tailEnd type="none" w="med" len="med"/>
-                    </a:lnT>
-                    <a:lnB w="12700" cap="flat" cmpd="sng" algn="ctr">
-                      <a:solidFill>
-                        <a:srgbClr val="BBBBBB"/>
-                      </a:solidFill>
-                      <a:prstDash val="solid"/>
-                      <a:round/>
-                      <a:headEnd type="none" w="med" len="med"/>
-                      <a:tailEnd type="none" w="med" len="med"/>
-                    </a:lnB>
-                    <a:solidFill>
-                      <a:srgbClr val="FFFFFF"/>
-                    </a:solidFill>
-                  </a:tcPr>
-                </a:tc>
-                <a:tc>
-                  <a:txBody>
-                    <a:bodyPr/>
-                    <a:lstStyle/>
-                    <a:p>
-                      <a:pPr algn="ctr" indent="0" marL="0">
-                        <a:buNone/>
-                      </a:pPr>
-                      <a:r>
-                        <a:rPr lang="en-US" sz="2200" dirty="0">
-                          <a:solidFill>
-                            <a:srgbClr val="111111"/>
-                          </a:solidFill>
-                          <a:latin typeface="Calibri" pitchFamily="34" charset="0"/>
-                          <a:ea typeface="Calibri" pitchFamily="34" charset="-122"/>
-                          <a:cs typeface="Calibri" pitchFamily="34" charset="-120"/>
-                        </a:rPr>
-                        <a:t>La famine</a:t>
-                      </a:r>
-                      <a:endParaRPr lang="en-US" sz="2200" dirty="0">
-                        <a:latin typeface="Calibri" charset="0"/>
-                        <a:ea typeface="Calibri" charset="0"/>
-                        <a:cs typeface="Calibri" charset="0"/>
-                      </a:endParaRPr>
-                    </a:p>
-                  </a:txBody>
-                  <a:tcPr marL="73152" marR="73152" marT="73152" marB="73152" anchor="ctr">
-                    <a:lnL w="12700" cap="flat" cmpd="sng" algn="ctr">
-                      <a:solidFill>
-                        <a:srgbClr val="BBBBBB"/>
-                      </a:solidFill>
-                      <a:prstDash val="solid"/>
-                      <a:round/>
-                      <a:headEnd type="none" w="med" len="med"/>
-                      <a:tailEnd type="none" w="med" len="med"/>
-                    </a:lnL>
-                    <a:lnR w="12700" cap="flat" cmpd="sng" algn="ctr">
-                      <a:solidFill>
-                        <a:srgbClr val="BBBBBB"/>
-                      </a:solidFill>
-                      <a:prstDash val="solid"/>
-                      <a:round/>
-                      <a:headEnd type="none" w="med" len="med"/>
-                      <a:tailEnd type="none" w="med" len="med"/>
-                    </a:lnR>
-                    <a:lnT w="12700" cap="flat" cmpd="sng" algn="ctr">
-                      <a:solidFill>
-                        <a:srgbClr val="BBBBBB"/>
-                      </a:solidFill>
-                      <a:prstDash val="solid"/>
-                      <a:round/>
-                      <a:headEnd type="none" w="med" len="med"/>
-                      <a:tailEnd type="none" w="med" len="med"/>
-                    </a:lnT>
-                    <a:lnB w="12700" cap="flat" cmpd="sng" algn="ctr">
-                      <a:solidFill>
-                        <a:srgbClr val="BBBBBB"/>
-                      </a:solidFill>
-                      <a:prstDash val="solid"/>
-                      <a:round/>
-                      <a:headEnd type="none" w="med" len="med"/>
-                      <a:tailEnd type="none" w="med" len="med"/>
-                    </a:lnB>
-                    <a:solidFill>
-                      <a:srgbClr val="FFFFFF"/>
-                    </a:solidFill>
-                  </a:tcPr>
-                </a:tc>
-              </a:tr>
-              <a:tr h="0">
-                <a:tc>
-                  <a:txBody>
-                    <a:bodyPr/>
-                    <a:lstStyle/>
-                    <a:p>
-                      <a:pPr algn="ctr" indent="0" marL="0">
-                        <a:buNone/>
-                      </a:pPr>
-                      <a:r>
-                        <a:rPr lang="en-US" sz="2200" dirty="0">
-                          <a:solidFill>
-                            <a:srgbClr val="111111"/>
-                          </a:solidFill>
-                          <a:latin typeface="Calibri" pitchFamily="34" charset="0"/>
-                          <a:ea typeface="Calibri" pitchFamily="34" charset="-122"/>
-                          <a:cs typeface="Calibri" pitchFamily="34" charset="-120"/>
-                        </a:rPr>
-                        <a:t>Trade</a:t>
-                      </a:r>
-                      <a:endParaRPr lang="en-US" sz="2200" dirty="0">
-                        <a:latin typeface="Calibri" charset="0"/>
-                        <a:ea typeface="Calibri" charset="0"/>
-                        <a:cs typeface="Calibri" charset="0"/>
-                      </a:endParaRPr>
-                    </a:p>
-                  </a:txBody>
-                  <a:tcPr marL="73152" marR="73152" marT="73152" marB="73152" anchor="ctr">
-                    <a:lnL w="12700" cap="flat" cmpd="sng" algn="ctr">
-                      <a:solidFill>
-                        <a:srgbClr val="BBBBBB"/>
-                      </a:solidFill>
-                      <a:prstDash val="solid"/>
-                      <a:round/>
-                      <a:headEnd type="none" w="med" len="med"/>
-                      <a:tailEnd type="none" w="med" len="med"/>
-                    </a:lnL>
-                    <a:lnR w="12700" cap="flat" cmpd="sng" algn="ctr">
-                      <a:solidFill>
-                        <a:srgbClr val="BBBBBB"/>
-                      </a:solidFill>
-                      <a:prstDash val="solid"/>
-                      <a:round/>
-                      <a:headEnd type="none" w="med" len="med"/>
-                      <a:tailEnd type="none" w="med" len="med"/>
-                    </a:lnR>
-                    <a:lnT w="12700" cap="flat" cmpd="sng" algn="ctr">
-                      <a:solidFill>
-                        <a:srgbClr val="BBBBBB"/>
-                      </a:solidFill>
-                      <a:prstDash val="solid"/>
-                      <a:round/>
-                      <a:headEnd type="none" w="med" len="med"/>
-                      <a:tailEnd type="none" w="med" len="med"/>
-                    </a:lnT>
-                    <a:lnB w="12700" cap="flat" cmpd="sng" algn="ctr">
-                      <a:solidFill>
-                        <a:srgbClr val="BBBBBB"/>
-                      </a:solidFill>
-                      <a:prstDash val="solid"/>
-                      <a:round/>
-                      <a:headEnd type="none" w="med" len="med"/>
-                      <a:tailEnd type="none" w="med" len="med"/>
-                    </a:lnB>
-                    <a:solidFill>
-                      <a:srgbClr val="F2F4F8"/>
-                    </a:solidFill>
-                  </a:tcPr>
-                </a:tc>
-                <a:tc>
-                  <a:txBody>
-                    <a:bodyPr/>
-                    <a:lstStyle/>
-                    <a:p>
-                      <a:pPr algn="ctr" indent="0" marL="0">
-                        <a:buNone/>
-                      </a:pPr>
-                      <a:r>
-                        <a:rPr lang="en-US" sz="2200" dirty="0">
-                          <a:solidFill>
-                            <a:srgbClr val="111111"/>
-                          </a:solidFill>
-                          <a:latin typeface="Calibri" pitchFamily="34" charset="0"/>
-                          <a:ea typeface="Calibri" pitchFamily="34" charset="-122"/>
-                          <a:cs typeface="Calibri" pitchFamily="34" charset="-120"/>
-                        </a:rPr>
-                        <a:t>Le commerce</a:t>
-                      </a:r>
-                      <a:endParaRPr lang="en-US" sz="2200" dirty="0">
-                        <a:latin typeface="Calibri" charset="0"/>
-                        <a:ea typeface="Calibri" charset="0"/>
-                        <a:cs typeface="Calibri" charset="0"/>
-                      </a:endParaRPr>
-                    </a:p>
-                  </a:txBody>
-                  <a:tcPr marL="73152" marR="73152" marT="73152" marB="73152" anchor="ctr">
-                    <a:lnL w="12700" cap="flat" cmpd="sng" algn="ctr">
-                      <a:solidFill>
-                        <a:srgbClr val="BBBBBB"/>
-                      </a:solidFill>
-                      <a:prstDash val="solid"/>
-                      <a:round/>
-                      <a:headEnd type="none" w="med" len="med"/>
-                      <a:tailEnd type="none" w="med" len="med"/>
-                    </a:lnL>
-                    <a:lnR w="12700" cap="flat" cmpd="sng" algn="ctr">
-                      <a:solidFill>
-                        <a:srgbClr val="BBBBBB"/>
-                      </a:solidFill>
-                      <a:prstDash val="solid"/>
-                      <a:round/>
-                      <a:headEnd type="none" w="med" len="med"/>
-                      <a:tailEnd type="none" w="med" len="med"/>
-                    </a:lnR>
-                    <a:lnT w="12700" cap="flat" cmpd="sng" algn="ctr">
-                      <a:solidFill>
-                        <a:srgbClr val="BBBBBB"/>
-                      </a:solidFill>
-                      <a:prstDash val="solid"/>
-                      <a:round/>
-                      <a:headEnd type="none" w="med" len="med"/>
-                      <a:tailEnd type="none" w="med" len="med"/>
-                    </a:lnT>
-                    <a:lnB w="12700" cap="flat" cmpd="sng" algn="ctr">
-                      <a:solidFill>
-                        <a:srgbClr val="BBBBBB"/>
-                      </a:solidFill>
-                      <a:prstDash val="solid"/>
-                      <a:round/>
-                      <a:headEnd type="none" w="med" len="med"/>
-                      <a:tailEnd type="none" w="med" len="med"/>
-                    </a:lnB>
-                    <a:solidFill>
-                      <a:srgbClr val="F2F4F8"/>
-                    </a:solidFill>
-                  </a:tcPr>
-                </a:tc>
-              </a:tr>
             </a:tbl>
           </a:graphicData>
         </a:graphic>
@@ -18788,7 +20102,7 @@
             <a:pPr algn="ctr"/>
             <a:fld id="{F7021451-1387-4CA6-816F-3879F97B5CBC}" type="slidenum">
               <a:rPr b="1" lang="en-US"/>
-              <a:t>50</a:t>
+              <a:t>53</a:t>
             </a:fld>
             <a:endParaRPr lang="en-US"/>
           </a:p>
@@ -18802,9 +20116,9 @@
 </p:sld>
 </file>
 
-<file path=ppt/slides/slide51.xml><?xml version="1.0" encoding="utf-8"?>
+<file path=ppt/slides/slide54.xml><?xml version="1.0" encoding="utf-8"?>
 <p:sld xmlns:a="http://schemas.openxmlformats.org/drawingml/2006/main" xmlns:r="http://schemas.openxmlformats.org/officeDocument/2006/relationships" xmlns:p="http://schemas.openxmlformats.org/presentationml/2006/main">
-  <p:cSld name="Slide 51">
+  <p:cSld name="Slide 54">
     <p:spTree>
       <p:nvGrpSpPr>
         <p:cNvPr id="1" name=""/>
@@ -18899,7 +20213,7 @@
       </p:sp>
       <p:graphicFrame>
         <p:nvGraphicFramePr>
-          <p:cNvPr id="52" name="Table 0"/>
+          <p:cNvPr id="55" name="Table 0"/>
           <p:cNvGraphicFramePr>
             <a:graphicFrameLocks noGrp="1"/>
           </p:cNvGraphicFramePr>
@@ -19285,7 +20599,7 @@
                           <a:ea typeface="Calibri" pitchFamily="34" charset="-122"/>
                           <a:cs typeface="Calibri" pitchFamily="34" charset="-120"/>
                         </a:rPr>
-                        <a:t>Define carrying capacity. Explain ways of raising carrying capacity. Describe population-resource regimes.</a:t>
+                        <a:t>Define carrying capacity. Describe the S-curve of progressive adjustment. Describe the J-curve of overshoot and oscillation. Describe instantaneous adjustment. Describe the three population-resource regimes.</a:t>
                       </a:r>
                       <a:endParaRPr lang="en-US" sz="1600" dirty="0">
                         <a:latin typeface="Calibri" charset="0"/>
@@ -19423,7 +20737,7 @@
                           <a:ea typeface="Calibri" pitchFamily="34" charset="-122"/>
                           <a:cs typeface="Calibri" pitchFamily="34" charset="-120"/>
                         </a:rPr>
-                        <a:t>Learners are able to explain carrying capacity and how societies adjust to it.</a:t>
+                        <a:t>Learners are able to explain carrying capacity and the ways populations adjust to it, and apply them to overgrazing around Garoua.</a:t>
                       </a:r>
                       <a:endParaRPr lang="en-US" sz="1600" dirty="0">
                         <a:latin typeface="Calibri" charset="0"/>
@@ -19521,7 +20835,7 @@
             <a:pPr algn="ctr"/>
             <a:fld id="{F7021451-1387-4CA6-816F-3879F97B5CBC}" type="slidenum">
               <a:rPr b="1" lang="en-US"/>
-              <a:t>51</a:t>
+              <a:t>54</a:t>
             </a:fld>
             <a:endParaRPr lang="en-US"/>
           </a:p>
@@ -19535,9 +20849,9 @@
 </p:sld>
 </file>
 
-<file path=ppt/slides/slide52.xml><?xml version="1.0" encoding="utf-8"?>
+<file path=ppt/slides/slide55.xml><?xml version="1.0" encoding="utf-8"?>
 <p:sld xmlns:a="http://schemas.openxmlformats.org/drawingml/2006/main" xmlns:r="http://schemas.openxmlformats.org/officeDocument/2006/relationships" xmlns:p="http://schemas.openxmlformats.org/presentationml/2006/main">
-  <p:cSld name="Slide 52">
+  <p:cSld name="Slide 55">
     <p:spTree>
       <p:nvGrpSpPr>
         <p:cNvPr id="1" name=""/>
@@ -19632,7 +20946,7 @@
       </p:sp>
       <p:graphicFrame>
         <p:nvGraphicFramePr>
-          <p:cNvPr id="53" name="Table 0"/>
+          <p:cNvPr id="56" name="Table 0"/>
           <p:cNvGraphicFramePr>
             <a:graphicFrameLocks noGrp="1"/>
           </p:cNvGraphicFramePr>
@@ -19742,7 +21056,7 @@
                           <a:ea typeface="Calibri" pitchFamily="34" charset="-122"/>
                           <a:cs typeface="Calibri" pitchFamily="34" charset="-120"/>
                         </a:rPr>
-                        <a:t>Meaning of Carrying Capacity; Ways of Adjusting Resources to Carrying Capacity; Population–Resources Regimes.</a:t>
+                        <a:t>DEFINITIONS; Meaning of Carrying Capacity; Ways of Adjusting to Carrying Capacity; Population-Resource Regimes.</a:t>
                       </a:r>
                       <a:endParaRPr lang="en-US" sz="1600" dirty="0">
                         <a:latin typeface="Calibri" charset="0"/>
@@ -20018,7 +21332,7 @@
                           <a:ea typeface="Calibri" pitchFamily="34" charset="-122"/>
                           <a:cs typeface="Calibri" pitchFamily="34" charset="-120"/>
                         </a:rPr>
-                        <a:t>Explain how carrying capacity could be raised in your area.</a:t>
+                        <a:t>Give one indicator of overpopulation.</a:t>
                       </a:r>
                       <a:endParaRPr lang="en-US" sz="1600" dirty="0">
                         <a:latin typeface="Calibri" charset="0"/>
@@ -20392,7 +21706,7 @@
             <a:pPr algn="ctr"/>
             <a:fld id="{F7021451-1387-4CA6-816F-3879F97B5CBC}" type="slidenum">
               <a:rPr b="1" lang="en-US"/>
-              <a:t>52</a:t>
+              <a:t>55</a:t>
             </a:fld>
             <a:endParaRPr lang="en-US"/>
           </a:p>
@@ -20406,9 +21720,9 @@
 </p:sld>
 </file>
 
-<file path=ppt/slides/slide53.xml><?xml version="1.0" encoding="utf-8"?>
+<file path=ppt/slides/slide56.xml><?xml version="1.0" encoding="utf-8"?>
 <p:sld xmlns:a="http://schemas.openxmlformats.org/drawingml/2006/main" xmlns:r="http://schemas.openxmlformats.org/officeDocument/2006/relationships" xmlns:p="http://schemas.openxmlformats.org/presentationml/2006/main">
-  <p:cSld name="Slide 53">
+  <p:cSld name="Slide 56">
     <p:spTree>
       <p:nvGrpSpPr>
         <p:cNvPr id="1" name=""/>
@@ -20479,7 +21793,7 @@
         <p:spPr>
           <a:xfrm>
             <a:off x="0" y="658368"/>
-            <a:ext cx="5120640" cy="5833872"/>
+            <a:ext cx="3840480" cy="5833872"/>
           </a:xfrm>
           <a:prstGeom prst="rect">
             <a:avLst/>
@@ -20494,8 +21808,8 @@
         </p:nvSpPr>
         <p:spPr>
           <a:xfrm>
-            <a:off x="5349240" y="1005840"/>
-            <a:ext cx="6522415" cy="731520"/>
+            <a:off x="4069080" y="1005840"/>
+            <a:ext cx="7802575" cy="731520"/>
           </a:xfrm>
           <a:prstGeom prst="rect">
             <a:avLst/>
@@ -20535,8 +21849,8 @@
         </p:nvSpPr>
         <p:spPr>
           <a:xfrm>
-            <a:off x="5349240" y="1783080"/>
-            <a:ext cx="6522415" cy="4663440"/>
+            <a:off x="4069080" y="1783080"/>
+            <a:ext cx="7802575" cy="4663440"/>
           </a:xfrm>
           <a:prstGeom prst="rect">
             <a:avLst/>
@@ -20585,7 +21899,7 @@
                 <a:ea typeface="Calibri" pitchFamily="34" charset="-122"/>
                 <a:cs typeface="Calibri" pitchFamily="34" charset="-120"/>
               </a:rPr>
-              <a:t>Without the projector (Activity 1): draw the S and J curves.</a:t>
+              <a:t>Without the projector (Activity 1): describe an overgrazed pasture.</a:t>
             </a:r>
             <a:endParaRPr lang="en-US" sz="2000" dirty="0"/>
           </a:p>
@@ -20606,7 +21920,7 @@
                 <a:ea typeface="Calibri" pitchFamily="34" charset="-122"/>
                 <a:cs typeface="Calibri" pitchFamily="34" charset="-120"/>
               </a:rPr>
-              <a:t>Without the projector (Activity 2): describe dry pastures.</a:t>
+              <a:t>Without the projector (Activity 2): draw the S-curve.</a:t>
             </a:r>
             <a:endParaRPr lang="en-US" sz="2000" dirty="0"/>
           </a:p>
@@ -20627,7 +21941,7 @@
                 <a:ea typeface="Calibri" pitchFamily="34" charset="-122"/>
                 <a:cs typeface="Calibri" pitchFamily="34" charset="-120"/>
               </a:rPr>
-              <a:t>Without the projector (Activity 3): mention SEMRY and Lagdo.</a:t>
+              <a:t>Without the projector (Activity 3): draw the J-curve and the crash.</a:t>
             </a:r>
             <a:endParaRPr lang="en-US" sz="2000" dirty="0"/>
           </a:p>
@@ -20648,7 +21962,7 @@
                 <a:ea typeface="Calibri" pitchFamily="34" charset="-122"/>
                 <a:cs typeface="Calibri" pitchFamily="34" charset="-120"/>
               </a:rPr>
-              <a:t>Without the projector (Activity 4): list solutions.</a:t>
+              <a:t>Without the projector (Activity 4): write the three regimes.</a:t>
             </a:r>
             <a:endParaRPr lang="en-US" sz="2000" dirty="0"/>
           </a:p>
@@ -20669,7 +21983,7 @@
                 <a:ea typeface="Calibri" pitchFamily="34" charset="-122"/>
                 <a:cs typeface="Calibri" pitchFamily="34" charset="-120"/>
               </a:rPr>
-              <a:t>Without the projector (Activity 5): copy the table.</a:t>
+              <a:t>Without the projector (Activity 5): describe the Sahel.</a:t>
             </a:r>
             <a:endParaRPr lang="en-US" sz="2000" dirty="0"/>
           </a:p>
@@ -20717,7 +22031,7 @@
             <a:pPr algn="ctr"/>
             <a:fld id="{F7021451-1387-4CA6-816F-3879F97B5CBC}" type="slidenum">
               <a:rPr b="1" lang="en-US"/>
-              <a:t>53</a:t>
+              <a:t>56</a:t>
             </a:fld>
             <a:endParaRPr lang="en-US"/>
           </a:p>
@@ -20731,9 +22045,9 @@
 </p:sld>
 </file>
 
-<file path=ppt/slides/slide54.xml><?xml version="1.0" encoding="utf-8"?>
+<file path=ppt/slides/slide57.xml><?xml version="1.0" encoding="utf-8"?>
 <p:sld xmlns:a="http://schemas.openxmlformats.org/drawingml/2006/main" xmlns:r="http://schemas.openxmlformats.org/officeDocument/2006/relationships" xmlns:p="http://schemas.openxmlformats.org/presentationml/2006/main">
-  <p:cSld name="Slide 54">
+  <p:cSld name="Slide 57">
     <p:spTree>
       <p:nvGrpSpPr>
         <p:cNvPr id="1" name=""/>
@@ -20889,7 +22203,7 @@
                 <a:ea typeface="Calibri" pitchFamily="34" charset="-122"/>
                 <a:cs typeface="Calibri" pitchFamily="34" charset="-120"/>
               </a:rPr>
-              <a:t>National Geography Syllabus, MINESEC/IGE/IP-SS, 2019 — Module 4 (Population Geography).</a:t>
+              <a:t>Geography Syllabus for Sixth Forms (Lower and Upper Sixth), MINESEC, 2019 — Module 4 (Population Geography).</a:t>
             </a:r>
             <a:endParaRPr lang="en-US" sz="1800" dirty="0"/>
           </a:p>
@@ -20910,7 +22224,7 @@
                 <a:ea typeface="Calibri" pitchFamily="34" charset="-122"/>
                 <a:cs typeface="Calibri" pitchFamily="34" charset="-120"/>
               </a:rPr>
-              <a:t>Photo, Activity 2: “Fulani cattle breed of West Africa” by International Livestock Research Institute, CC BY-NC-SA 2.0, via Flickr (https://www.flickr.com/photos/7155605@N03/48125675226)</a:t>
+              <a:t>Teacher's course notes: Mr KAMDEM E., Population Geography (USA), GBHS Garoua, 2026.</a:t>
             </a:r>
             <a:endParaRPr lang="en-US" sz="1800" dirty="0"/>
           </a:p>
@@ -20931,7 +22245,7 @@
                 <a:ea typeface="Calibri" pitchFamily="34" charset="-122"/>
                 <a:cs typeface="Calibri" pitchFamily="34" charset="-120"/>
               </a:rPr>
-              <a:t>Photo, Activity 3: “Mid-West Agriculture” by Djof, CC BY-NC-SA 2.0, via Flickr (https://www.flickr.com/photos/10787942@N00/147222315)</a:t>
+              <a:t>United Nations, World Population Prospects 2024.</a:t>
             </a:r>
             <a:endParaRPr lang="en-US" sz="1800" dirty="0"/>
           </a:p>
@@ -20952,6 +22266,27 @@
                 <a:ea typeface="Calibri" pitchFamily="34" charset="-122"/>
                 <a:cs typeface="Calibri" pitchFamily="34" charset="-120"/>
               </a:rPr>
+              <a:t>Photo, Activity 5: “Imagine a world without trees” by aloshbennett, CC BY 2.0, via Flickr (https://www.flickr.com/photos/13203757@N00/3480223314)</a:t>
+            </a:r>
+            <a:endParaRPr lang="en-US" sz="1800" dirty="0"/>
+          </a:p>
+          <a:p>
+            <a:pPr algn="l" marL="342900" indent="-342900">
+              <a:spcAft>
+                <a:spcPts val="800"/>
+              </a:spcAft>
+              <a:buSzPct val="100000"/>
+              <a:buChar char="•"/>
+            </a:pPr>
+            <a:r>
+              <a:rPr lang="en-US" sz="1800" dirty="0">
+                <a:solidFill>
+                  <a:srgbClr val="111111"/>
+                </a:solidFill>
+                <a:latin typeface="Calibri" pitchFamily="34" charset="0"/>
+                <a:ea typeface="Calibri" pitchFamily="34" charset="-122"/>
+                <a:cs typeface="Calibri" pitchFamily="34" charset="-120"/>
+              </a:rPr>
               <a:t>Diagrams and animations: drawn for this lesson (Geography Department).</a:t>
             </a:r>
             <a:endParaRPr lang="en-US" sz="1800" dirty="0"/>
@@ -21000,7 +22335,7 @@
             <a:pPr algn="ctr"/>
             <a:fld id="{F7021451-1387-4CA6-816F-3879F97B5CBC}" type="slidenum">
               <a:rPr b="1" lang="en-US"/>
-              <a:t>54</a:t>
+              <a:t>57</a:t>
             </a:fld>
             <a:endParaRPr lang="en-US"/>
           </a:p>
@@ -21418,7 +22753,7 @@
         <p:spPr>
           <a:xfrm>
             <a:off x="0" y="658368"/>
-            <a:ext cx="2468880" cy="5833872"/>
+            <a:ext cx="5120640" cy="5833872"/>
           </a:xfrm>
           <a:prstGeom prst="rect">
             <a:avLst/>
@@ -21433,8 +22768,8 @@
         </p:nvSpPr>
         <p:spPr>
           <a:xfrm>
-            <a:off x="2697480" y="1005840"/>
-            <a:ext cx="9174175" cy="731520"/>
+            <a:off x="5349240" y="1005840"/>
+            <a:ext cx="6522415" cy="731520"/>
           </a:xfrm>
           <a:prstGeom prst="rect">
             <a:avLst/>
@@ -21474,8 +22809,8 @@
         </p:nvSpPr>
         <p:spPr>
           <a:xfrm>
-            <a:off x="2697480" y="1783080"/>
-            <a:ext cx="9174175" cy="4663440"/>
+            <a:off x="5349240" y="1783080"/>
+            <a:ext cx="6522415" cy="4663440"/>
           </a:xfrm>
           <a:prstGeom prst="rect">
             <a:avLst/>
@@ -21546,29 +22881,7 @@
                 <a:ea typeface="Times New Roman" pitchFamily="34" charset="-122"/>
                 <a:cs typeface="Times New Roman" pitchFamily="34" charset="-120"/>
               </a:rPr>
-              <a:t>Explain ways of raising carrying capacity.</a:t>
-            </a:r>
-            <a:endParaRPr lang="en-US" sz="4000" dirty="0"/>
-          </a:p>
-          <a:p>
-            <a:pPr algn="l" marL="342900" indent="-342900">
-              <a:spcAft>
-                <a:spcPts val="800"/>
-              </a:spcAft>
-              <a:buSzPct val="100000"/>
-              <a:buFont typeface="+mj-lt"/>
-              <a:buAutoNum type="arabicPeriod" startAt="1"/>
-            </a:pPr>
-            <a:r>
-              <a:rPr lang="en-US" sz="4000" dirty="0">
-                <a:solidFill>
-                  <a:srgbClr val="111111"/>
-                </a:solidFill>
-                <a:latin typeface="Times New Roman" pitchFamily="34" charset="0"/>
-                <a:ea typeface="Times New Roman" pitchFamily="34" charset="-122"/>
-                <a:cs typeface="Times New Roman" pitchFamily="34" charset="-120"/>
-              </a:rPr>
-              <a:t>Describe population-resource regimes.</a:t>
+              <a:t>Describe the S-curve of progressive adjustment.</a:t>
             </a:r>
             <a:endParaRPr lang="en-US" sz="4000" dirty="0"/>
           </a:p>
@@ -21680,7 +22993,7 @@
                 <a:ea typeface="Calibri" pitchFamily="34" charset="-122"/>
                 <a:cs typeface="Calibri" pitchFamily="34" charset="-120"/>
               </a:rPr>
-              <a:t>PREVIOUS KNOWLEDGE</a:t>
+              <a:t>OBJECTIVES</a:t>
             </a:r>
             <a:endParaRPr lang="en-US" sz="1400" dirty="0"/>
           </a:p>
@@ -21745,7 +23058,7 @@
                 <a:ea typeface="Times New Roman" pitchFamily="34" charset="-122"/>
                 <a:cs typeface="Times New Roman" pitchFamily="34" charset="-120"/>
               </a:rPr>
-              <a:t>Previous Knowledge</a:t>
+              <a:t>Objectives (continued)</a:t>
             </a:r>
             <a:endParaRPr lang="en-US" sz="3600" dirty="0"/>
           </a:p>
@@ -21777,7 +23090,8 @@
                 <a:spcPts val="800"/>
               </a:spcAft>
               <a:buSzPct val="100000"/>
-              <a:buChar char="•"/>
+              <a:buFont typeface="+mj-lt"/>
+              <a:buAutoNum type="arabicPeriod" startAt="1"/>
             </a:pPr>
             <a:r>
               <a:rPr lang="en-US" sz="4000" dirty="0">
@@ -21788,7 +23102,7 @@
                 <a:ea typeface="Times New Roman" pitchFamily="34" charset="-122"/>
                 <a:cs typeface="Times New Roman" pitchFamily="34" charset="-120"/>
               </a:rPr>
-              <a:t>Population is growing fast in LEDCs.</a:t>
+              <a:t>Describe the J-curve of overshoot and oscillation.</a:t>
             </a:r>
             <a:endParaRPr lang="en-US" sz="4000" dirty="0"/>
           </a:p>
@@ -21798,7 +23112,8 @@
                 <a:spcPts val="800"/>
               </a:spcAft>
               <a:buSzPct val="100000"/>
-              <a:buChar char="•"/>
+              <a:buFont typeface="+mj-lt"/>
+              <a:buAutoNum type="arabicPeriod" startAt="1"/>
             </a:pPr>
             <a:r>
               <a:rPr lang="en-US" sz="4000" dirty="0">
@@ -21809,7 +23124,29 @@
                 <a:ea typeface="Times New Roman" pitchFamily="34" charset="-122"/>
                 <a:cs typeface="Times New Roman" pitchFamily="34" charset="-120"/>
               </a:rPr>
-              <a:t>Overgrazing damages land.</a:t>
+              <a:t>Describe instantaneous adjustment.</a:t>
+            </a:r>
+            <a:endParaRPr lang="en-US" sz="4000" dirty="0"/>
+          </a:p>
+          <a:p>
+            <a:pPr algn="l" marL="342900" indent="-342900">
+              <a:spcAft>
+                <a:spcPts val="800"/>
+              </a:spcAft>
+              <a:buSzPct val="100000"/>
+              <a:buFont typeface="+mj-lt"/>
+              <a:buAutoNum type="arabicPeriod" startAt="1"/>
+            </a:pPr>
+            <a:r>
+              <a:rPr lang="en-US" sz="4000" dirty="0">
+                <a:solidFill>
+                  <a:srgbClr val="111111"/>
+                </a:solidFill>
+                <a:latin typeface="Times New Roman" pitchFamily="34" charset="0"/>
+                <a:ea typeface="Times New Roman" pitchFamily="34" charset="-122"/>
+                <a:cs typeface="Times New Roman" pitchFamily="34" charset="-120"/>
+              </a:rPr>
+              <a:t>Describe the three population-resource regimes.</a:t>
             </a:r>
             <a:endParaRPr lang="en-US" sz="4000" dirty="0"/>
           </a:p>
@@ -21921,7 +23258,7 @@
                 <a:ea typeface="Calibri" pitchFamily="34" charset="-122"/>
                 <a:cs typeface="Calibri" pitchFamily="34" charset="-120"/>
               </a:rPr>
-              <a:t>REAL-LIFE SITUATION</a:t>
+              <a:t>PREVIOUS KNOWLEDGE</a:t>
             </a:r>
             <a:endParaRPr lang="en-US" sz="1400" dirty="0"/>
           </a:p>
@@ -21986,7 +23323,7 @@
                 <a:ea typeface="Times New Roman" pitchFamily="34" charset="-122"/>
                 <a:cs typeface="Times New Roman" pitchFamily="34" charset="-120"/>
               </a:rPr>
-              <a:t>Situation in Real Life</a:t>
+              <a:t>Previous Knowledge</a:t>
             </a:r>
             <a:endParaRPr lang="en-US" sz="3600" dirty="0"/>
           </a:p>
@@ -22013,11 +23350,12 @@
           <a:bodyPr wrap="square" lIns="0" tIns="0" rIns="0" bIns="0" rtlCol="0" anchor="t"/>
           <a:lstStyle/>
           <a:p>
-            <a:pPr algn="l" indent="0" marL="0">
+            <a:pPr algn="l" marL="342900" indent="-342900">
               <a:spcAft>
                 <a:spcPts val="800"/>
               </a:spcAft>
-              <a:buNone/>
+              <a:buSzPct val="100000"/>
+              <a:buChar char="•"/>
             </a:pPr>
             <a:r>
               <a:rPr lang="en-US" sz="4000" dirty="0">
@@ -22028,7 +23366,49 @@
                 <a:ea typeface="Times New Roman" pitchFamily="34" charset="-122"/>
                 <a:cs typeface="Times New Roman" pitchFamily="34" charset="-120"/>
               </a:rPr>
-              <a:t>In parts of the Far North, herds and families have increased, but the grass and water have not. After a dry year, cattle die and some families leave for the south.</a:t>
+              <a:t>Rural-rural migration moves herders to new pastures.</a:t>
+            </a:r>
+            <a:endParaRPr lang="en-US" sz="4000" dirty="0"/>
+          </a:p>
+          <a:p>
+            <a:pPr algn="l" marL="342900" indent="-342900">
+              <a:spcAft>
+                <a:spcPts val="800"/>
+              </a:spcAft>
+              <a:buSzPct val="100000"/>
+              <a:buChar char="•"/>
+            </a:pPr>
+            <a:r>
+              <a:rPr lang="en-US" sz="4000" dirty="0">
+                <a:solidFill>
+                  <a:srgbClr val="111111"/>
+                </a:solidFill>
+                <a:latin typeface="Times New Roman" pitchFamily="34" charset="0"/>
+                <a:ea typeface="Times New Roman" pitchFamily="34" charset="-122"/>
+                <a:cs typeface="Times New Roman" pitchFamily="34" charset="-120"/>
+              </a:rPr>
+              <a:t>Overgrazing destroys grass.</a:t>
+            </a:r>
+            <a:endParaRPr lang="en-US" sz="4000" dirty="0"/>
+          </a:p>
+          <a:p>
+            <a:pPr algn="l" marL="342900" indent="-342900">
+              <a:spcAft>
+                <a:spcPts val="800"/>
+              </a:spcAft>
+              <a:buSzPct val="100000"/>
+              <a:buChar char="•"/>
+            </a:pPr>
+            <a:r>
+              <a:rPr lang="en-US" sz="4000" dirty="0">
+                <a:solidFill>
+                  <a:srgbClr val="111111"/>
+                </a:solidFill>
+                <a:latin typeface="Times New Roman" pitchFamily="34" charset="0"/>
+                <a:ea typeface="Times New Roman" pitchFamily="34" charset="-122"/>
+                <a:cs typeface="Times New Roman" pitchFamily="34" charset="-120"/>
+              </a:rPr>
+              <a:t>Resources are limited.</a:t>
             </a:r>
             <a:endParaRPr lang="en-US" sz="4000" dirty="0"/>
           </a:p>

--- a/lecons/USA/Population Geography/20_USA_POP_L16_Carrying_Capacity.pptx
+++ b/lecons/USA/Population Geography/20_USA_POP_L16_Carrying_Capacity.pptx
@@ -62,9 +62,12 @@
     <p:sldId id="310" r:id="rId56"/>
     <p:sldId id="311" r:id="rId57"/>
     <p:sldId id="312" r:id="rId58"/>
+    <p:sldId id="313" r:id="rId59"/>
+    <p:sldId id="314" r:id="rId60"/>
+    <p:sldId id="315" r:id="rId61"/>
   </p:sldIdLst>
   <p:notesMasterIdLst>
-    <p:notesMasterId r:id="rId59"/>
+    <p:notesMasterId r:id="rId62"/>
   </p:notesMasterIdLst>
   <p:sldSz cx="12192000" cy="6858000"/>
   <p:notesSz cx="6858000" cy="12192000"/>
@@ -3198,7 +3201,7 @@
           <a:p>
             <a:r>
               <a:rPr lang="en-US" dirty="0"/>
-              <a:t>We continue with the definitions. On this slide we have Overshoot and Oscillation. Write each point on a new line, with the key term first, and explain it in your own words when we revise.</a:t>
+              <a:t>We continue with the definitions. On this slide we have Overshoot and Oscillation. Write each point on a new line, with the key term first, and explain it in your own words when we revise. When you finish, we go to the next slide.</a:t>
             </a:r>
             <a:endParaRPr lang="en-US" dirty="0"/>
           </a:p>
@@ -3286,7 +3289,7 @@
           <a:p>
             <a:r>
               <a:rPr lang="en-US" dirty="0"/>
-              <a:t>Let us copy Meaning of Carrying Capacity. Carrying capacity is presented as follows. Copy the point on Limit on the left, then draw the diagram on the right: too many animals. Give it a title and label it clearly.</a:t>
+              <a:t>We continue with the definitions. On this slide we have Population-resource regime. Write each point on a new line, with the key term first, and explain it in your own words when we revise.</a:t>
             </a:r>
             <a:endParaRPr lang="en-US" dirty="0"/>
           </a:p>
@@ -3374,7 +3377,7 @@
           <a:p>
             <a:r>
               <a:rPr lang="en-US" dirty="0"/>
-              <a:t>We continue with Meaning of Carrying Capacity. On this slide we have Example and Human populations. Write each point on a new line, with the key term first, and explain it in your own words when we revise.</a:t>
+              <a:t>Let us copy Meaning of Carrying Capacity. Carrying capacity is explained as follows. Copy the point on A limit on the left, then draw the diagram on the right: overgrazing. Give it a title and label it clearly.</a:t>
             </a:r>
             <a:endParaRPr lang="en-US" dirty="0"/>
           </a:p>
@@ -3550,7 +3553,7 @@
           <a:p>
             <a:r>
               <a:rPr lang="en-US" dirty="0"/>
-              <a:t>Let us copy Ways of Adjusting to Carrying Capacity. Populations adjust to carrying capacity in the following ways. Copy the point on Progressive adjustment (S-curve) on the left, then draw the diagram on the right: three ways of adjusting. Give it a title and label it clearly.</a:t>
+              <a:t>We continue with Meaning of Carrying Capacity. Copy the point on Example: write the key term first, then its explanation.</a:t>
             </a:r>
             <a:endParaRPr lang="en-US" dirty="0"/>
           </a:p>
@@ -3638,7 +3641,7 @@
           <a:p>
             <a:r>
               <a:rPr lang="en-US" dirty="0"/>
-              <a:t>Copy the point on Overshoot and oscillation (J-curve) on the left, then draw the diagram on the right: the S-curve and the J-curve. Give it a title and label it clearly.</a:t>
+              <a:t>We continue with Meaning of Carrying Capacity. Copy the point on Human populations: write the key term first, then its explanation.</a:t>
             </a:r>
             <a:endParaRPr lang="en-US" dirty="0"/>
           </a:p>
@@ -3726,7 +3729,7 @@
           <a:p>
             <a:r>
               <a:rPr lang="en-US" dirty="0"/>
-              <a:t>We continue with Ways of Adjusting to Carrying Capacity. On this slide we have Boom and bust and Instantaneous adjustment. Write each point on a new line, with the key term first, and explain it in your own words when we revise.</a:t>
+              <a:t>Let us copy Ways of Adjusting to Carrying Capacity. Populations adjust to carrying capacity in the following ways. Copy the point on Progressive adjustment (S-curve) on the left, then draw the diagram on the right: growth curves. Give it a title and label it clearly.</a:t>
             </a:r>
             <a:endParaRPr lang="en-US" dirty="0"/>
           </a:p>
@@ -3814,7 +3817,7 @@
           <a:p>
             <a:r>
               <a:rPr lang="en-US" dirty="0"/>
-              <a:t>Let us copy Population-Resource Regimes. The population-resource regimes are the following. Copy the point on Overpopulation regime on the left, then draw the diagram on the right: three regimes. Give it a title and label it clearly.</a:t>
+              <a:t>Copy the point on Overshoot and oscillation (J-curve) on the left, then draw the diagram on the right: carrying capacity. Give it a title and label it clearly.</a:t>
             </a:r>
             <a:endParaRPr lang="en-US" dirty="0"/>
           </a:p>
@@ -3902,7 +3905,7 @@
           <a:p>
             <a:r>
               <a:rPr lang="en-US" dirty="0"/>
-              <a:t>Copy the point on Sustainable regime on the left, then draw the diagram on the right: drought in the Sahel. Give it a title and label it clearly.</a:t>
+              <a:t>We continue with Ways of Adjusting to Carrying Capacity. Copy the point on Boom and bust: write the key term first, then its explanation.</a:t>
             </a:r>
             <a:endParaRPr lang="en-US" dirty="0"/>
           </a:p>
@@ -3990,7 +3993,7 @@
           <a:p>
             <a:r>
               <a:rPr lang="en-US" dirty="0"/>
-              <a:t>We continue with Population-Resource Regimes. On this slide we have Underpopulation regime. Write each point on a new line, with the key term first, and explain it in your own words when we revise.</a:t>
+              <a:t>We continue with Ways of Adjusting to Carrying Capacity. Copy the point on Instantaneous adjustment: write the key term first, then its explanation.</a:t>
             </a:r>
             <a:endParaRPr lang="en-US" dirty="0"/>
           </a:p>
@@ -4078,7 +4081,7 @@
           <a:p>
             <a:r>
               <a:rPr lang="en-US" dirty="0"/>
-              <a:t>Now let us check what you have understood. Question 1: Distinguish between the S-curve and the J-curve. Answer in your exercise book.</a:t>
+              <a:t>Let us copy Population-Resource Regimes. The relationship between population and resources gives the following regimes. Copy the point on Overpopulation regime on the left, then draw the diagram on the right: population-resource regimes. Give it a title and label it clearly.</a:t>
             </a:r>
             <a:endParaRPr lang="en-US" dirty="0"/>
           </a:p>
@@ -4166,7 +4169,7 @@
           <a:p>
             <a:r>
               <a:rPr lang="en-US" dirty="0"/>
-              <a:t>The expected answer is: on the S-curve growth slows and stabilises at the carrying capacity; on the J-curve growth overshoots it and then crashes. If you got it right, well done.</a:t>
+              <a:t>We continue with Population-Resource Regimes. Copy the point on Sustainable (optimum) regime: write the key term first, then its explanation.</a:t>
             </a:r>
             <a:endParaRPr lang="en-US" dirty="0"/>
           </a:p>
@@ -4254,7 +4257,7 @@
           <a:p>
             <a:r>
               <a:rPr lang="en-US" dirty="0"/>
-              <a:t>Now let us check what you have understood. Question 2: Which curve is more stable, and why? Answer in your exercise book.</a:t>
+              <a:t>We continue with Population-Resource Regimes. Copy the point on Underpopulation regime: write the key term first, then its explanation.</a:t>
             </a:r>
             <a:endParaRPr lang="en-US" dirty="0"/>
           </a:p>
@@ -4342,7 +4345,7 @@
           <a:p>
             <a:r>
               <a:rPr lang="en-US" dirty="0"/>
-              <a:t>The expected answer is: the S-curve, because the population adjusts to its resources without destroying them. If you got it right, well done.</a:t>
+              <a:t>Now let us check what you have understood. Question 1: Distinguish between the S-curve and the J-curve. Answer in your exercise book.</a:t>
             </a:r>
             <a:endParaRPr lang="en-US" dirty="0"/>
           </a:p>
@@ -4518,7 +4521,7 @@
           <a:p>
             <a:r>
               <a:rPr lang="en-US" dirty="0"/>
-              <a:t>For those who need more practice, fill in the blanks in your exercise book. The answers are: number 1, carrying; number 2, S; number 3, sustainable.</a:t>
+              <a:t>The expected answer is: on the S-curve growth slows and stabilises at the carrying capacity; on the J-curve growth overshoots it and then crashes. If you got it right, well done.</a:t>
             </a:r>
             <a:endParaRPr lang="en-US" dirty="0"/>
           </a:p>
@@ -4606,7 +4609,7 @@
           <a:p>
             <a:r>
               <a:rPr lang="en-US" dirty="0"/>
-              <a:t>For your homework: Give one indicator of overpopulation. We shall correct it at the beginning of our next lesson.</a:t>
+              <a:t>Now let us check what you have understood. Question 2: Which curve is more stable, and why? Answer in your exercise book.</a:t>
             </a:r>
             <a:endParaRPr lang="en-US" dirty="0"/>
           </a:p>
@@ -4694,7 +4697,7 @@
           <a:p>
             <a:r>
               <a:rPr lang="en-US" dirty="0"/>
-              <a:t>Our next lesson will be on Lesson 17: Overpopulation, Underpopulation and Optimum Population. Thank you for your attention, and see you next time.</a:t>
+              <a:t>The expected answer is: the S-curve, because the population adjusts to its resources without destroying them. If you got it right, well done.</a:t>
             </a:r>
             <a:endParaRPr lang="en-US" dirty="0"/>
           </a:p>
@@ -4782,7 +4785,7 @@
           <a:p>
             <a:r>
               <a:rPr lang="en-US" dirty="0"/>
-              <a:t>Let us play the bilingual game. I say a word in English, and you give me the French word. Then we do the reverse.</a:t>
+              <a:t>For those who need more practice, fill in the blanks in your exercise book. The answers are: number 1, carrying; number 2, S; number 3, sustainable.</a:t>
             </a:r>
             <a:endParaRPr lang="en-US" dirty="0"/>
           </a:p>
@@ -4870,7 +4873,7 @@
           <a:p>
             <a:r>
               <a:rPr lang="en-US" dirty="0"/>
-              <a:t>I record this information in the official logbook of the class after the lesson.</a:t>
+              <a:t>For your homework: Give one indicator of overpopulation. We shall correct it at the beginning of our next lesson.</a:t>
             </a:r>
             <a:endParaRPr lang="en-US" dirty="0"/>
           </a:p>
@@ -4958,7 +4961,7 @@
           <a:p>
             <a:r>
               <a:rPr lang="en-US" dirty="0"/>
-              <a:t>I complete the second page of the logbook: the matter taught, the evaluation, the homework and the attendance.</a:t>
+              <a:t>Our next lesson will be on Lesson 17: Overpopulation, Underpopulation and Optimum Population. Thank you for your attention, and see you next time.</a:t>
             </a:r>
             <a:endParaRPr lang="en-US" dirty="0"/>
           </a:p>
@@ -5046,7 +5049,7 @@
           <a:p>
             <a:r>
               <a:rPr lang="en-US" dirty="0"/>
-              <a:t>This slide is for me, the teacher: it gives the timing of the lesson and what to do if the projector is not available.</a:t>
+              <a:t>Let us play the bilingual game. I say a word in English, and you give me the French word. Then we do the reverse.</a:t>
             </a:r>
             <a:endParaRPr lang="en-US" dirty="0"/>
           </a:p>
@@ -5134,7 +5137,7 @@
           <a:p>
             <a:r>
               <a:rPr lang="en-US" dirty="0"/>
-              <a:t>These are the references and picture credits used to prepare this lesson.</a:t>
+              <a:t>I record this information in the official logbook of the class after the lesson.</a:t>
             </a:r>
             <a:endParaRPr lang="en-US" dirty="0"/>
           </a:p>
@@ -5158,6 +5161,182 @@
             <a:fld id="{F7021451-1387-4CA6-816F-3879F97B5CBC}" type="slidenum">
               <a:rPr lang="en-US"/>
               <a:t>57</a:t>
+            </a:fld>
+            <a:endParaRPr lang="en-US"/>
+          </a:p>
+        </p:txBody>
+      </p:sp>
+    </p:spTree>
+    <p:extLst>
+      <p:ext uri="{BB962C8B-B14F-4D97-AF65-F5344CB8AC3E}">
+        <p14:creationId xmlns:p14="http://schemas.microsoft.com/office/powerpoint/2010/main" val="1024086991"/>
+      </p:ext>
+    </p:extLst>
+  </p:cSld>
+  <p:clrMapOvr>
+    <a:masterClrMapping/>
+  </p:clrMapOvr>
+</p:notes>
+</file>
+
+<file path=ppt/notesSlides/notesSlide58.xml><?xml version="1.0" encoding="utf-8"?>
+<p:notes xmlns:a="http://schemas.openxmlformats.org/drawingml/2006/main" xmlns:r="http://schemas.openxmlformats.org/officeDocument/2006/relationships" xmlns:p="http://schemas.openxmlformats.org/presentationml/2006/main">
+  <p:cSld>
+    <p:spTree>
+      <p:nvGrpSpPr>
+        <p:cNvPr id="1" name=""/>
+        <p:cNvGrpSpPr/>
+        <p:nvPr/>
+      </p:nvGrpSpPr>
+      <p:grpSpPr>
+        <a:xfrm>
+          <a:off x="0" y="0"/>
+          <a:ext cx="0" cy="0"/>
+          <a:chOff x="0" y="0"/>
+          <a:chExt cx="0" cy="0"/>
+        </a:xfrm>
+      </p:grpSpPr>
+      <p:sp>
+        <p:nvSpPr>
+          <p:cNvPr id="2" name="Slide Image Placeholder 1"/>
+          <p:cNvSpPr>
+            <a:spLocks noGrp="1" noRot="1" noChangeAspect="1"/>
+          </p:cNvSpPr>
+          <p:nvPr>
+            <p:ph type="sldImg"/>
+          </p:nvPr>
+        </p:nvSpPr>
+        <p:spPr/>
+      </p:sp>
+      <p:sp>
+        <p:nvSpPr>
+          <p:cNvPr id="3" name="Notes Placeholder 2"/>
+          <p:cNvSpPr>
+            <a:spLocks noGrp="1"/>
+          </p:cNvSpPr>
+          <p:nvPr>
+            <p:ph type="body" idx="1"/>
+          </p:nvPr>
+        </p:nvSpPr>
+        <p:spPr/>
+        <p:txBody>
+          <a:bodyPr/>
+          <a:lstStyle/>
+          <a:p>
+            <a:r>
+              <a:rPr lang="en-US" dirty="0"/>
+              <a:t>I complete the second page of the logbook: the matter taught, the evaluation, the homework and the attendance.</a:t>
+            </a:r>
+            <a:endParaRPr lang="en-US" dirty="0"/>
+          </a:p>
+        </p:txBody>
+      </p:sp>
+      <p:sp>
+        <p:nvSpPr>
+          <p:cNvPr id="4" name="Slide Number Placeholder 3"/>
+          <p:cNvSpPr>
+            <a:spLocks noGrp="1"/>
+          </p:cNvSpPr>
+          <p:nvPr>
+            <p:ph type="sldNum" sz="quarter" idx="10"/>
+          </p:nvPr>
+        </p:nvSpPr>
+        <p:spPr/>
+        <p:txBody>
+          <a:bodyPr/>
+          <a:lstStyle/>
+          <a:p>
+            <a:fld id="{F7021451-1387-4CA6-816F-3879F97B5CBC}" type="slidenum">
+              <a:rPr lang="en-US"/>
+              <a:t>58</a:t>
+            </a:fld>
+            <a:endParaRPr lang="en-US"/>
+          </a:p>
+        </p:txBody>
+      </p:sp>
+    </p:spTree>
+    <p:extLst>
+      <p:ext uri="{BB962C8B-B14F-4D97-AF65-F5344CB8AC3E}">
+        <p14:creationId xmlns:p14="http://schemas.microsoft.com/office/powerpoint/2010/main" val="1024086991"/>
+      </p:ext>
+    </p:extLst>
+  </p:cSld>
+  <p:clrMapOvr>
+    <a:masterClrMapping/>
+  </p:clrMapOvr>
+</p:notes>
+</file>
+
+<file path=ppt/notesSlides/notesSlide59.xml><?xml version="1.0" encoding="utf-8"?>
+<p:notes xmlns:a="http://schemas.openxmlformats.org/drawingml/2006/main" xmlns:r="http://schemas.openxmlformats.org/officeDocument/2006/relationships" xmlns:p="http://schemas.openxmlformats.org/presentationml/2006/main">
+  <p:cSld>
+    <p:spTree>
+      <p:nvGrpSpPr>
+        <p:cNvPr id="1" name=""/>
+        <p:cNvGrpSpPr/>
+        <p:nvPr/>
+      </p:nvGrpSpPr>
+      <p:grpSpPr>
+        <a:xfrm>
+          <a:off x="0" y="0"/>
+          <a:ext cx="0" cy="0"/>
+          <a:chOff x="0" y="0"/>
+          <a:chExt cx="0" cy="0"/>
+        </a:xfrm>
+      </p:grpSpPr>
+      <p:sp>
+        <p:nvSpPr>
+          <p:cNvPr id="2" name="Slide Image Placeholder 1"/>
+          <p:cNvSpPr>
+            <a:spLocks noGrp="1" noRot="1" noChangeAspect="1"/>
+          </p:cNvSpPr>
+          <p:nvPr>
+            <p:ph type="sldImg"/>
+          </p:nvPr>
+        </p:nvSpPr>
+        <p:spPr/>
+      </p:sp>
+      <p:sp>
+        <p:nvSpPr>
+          <p:cNvPr id="3" name="Notes Placeholder 2"/>
+          <p:cNvSpPr>
+            <a:spLocks noGrp="1"/>
+          </p:cNvSpPr>
+          <p:nvPr>
+            <p:ph type="body" idx="1"/>
+          </p:nvPr>
+        </p:nvSpPr>
+        <p:spPr/>
+        <p:txBody>
+          <a:bodyPr/>
+          <a:lstStyle/>
+          <a:p>
+            <a:r>
+              <a:rPr lang="en-US" dirty="0"/>
+              <a:t>This slide is for me, the teacher: it gives the timing of the lesson and what to do if the projector is not available.</a:t>
+            </a:r>
+            <a:endParaRPr lang="en-US" dirty="0"/>
+          </a:p>
+        </p:txBody>
+      </p:sp>
+      <p:sp>
+        <p:nvSpPr>
+          <p:cNvPr id="4" name="Slide Number Placeholder 3"/>
+          <p:cNvSpPr>
+            <a:spLocks noGrp="1"/>
+          </p:cNvSpPr>
+          <p:nvPr>
+            <p:ph type="sldNum" sz="quarter" idx="10"/>
+          </p:nvPr>
+        </p:nvSpPr>
+        <p:spPr/>
+        <p:txBody>
+          <a:bodyPr/>
+          <a:lstStyle/>
+          <a:p>
+            <a:fld id="{F7021451-1387-4CA6-816F-3879F97B5CBC}" type="slidenum">
+              <a:rPr lang="en-US"/>
+              <a:t>59</a:t>
             </a:fld>
             <a:endParaRPr lang="en-US"/>
           </a:p>
@@ -5246,6 +5425,94 @@
             <a:fld id="{F7021451-1387-4CA6-816F-3879F97B5CBC}" type="slidenum">
               <a:rPr lang="en-US"/>
               <a:t>6</a:t>
+            </a:fld>
+            <a:endParaRPr lang="en-US"/>
+          </a:p>
+        </p:txBody>
+      </p:sp>
+    </p:spTree>
+    <p:extLst>
+      <p:ext uri="{BB962C8B-B14F-4D97-AF65-F5344CB8AC3E}">
+        <p14:creationId xmlns:p14="http://schemas.microsoft.com/office/powerpoint/2010/main" val="1024086991"/>
+      </p:ext>
+    </p:extLst>
+  </p:cSld>
+  <p:clrMapOvr>
+    <a:masterClrMapping/>
+  </p:clrMapOvr>
+</p:notes>
+</file>
+
+<file path=ppt/notesSlides/notesSlide60.xml><?xml version="1.0" encoding="utf-8"?>
+<p:notes xmlns:a="http://schemas.openxmlformats.org/drawingml/2006/main" xmlns:r="http://schemas.openxmlformats.org/officeDocument/2006/relationships" xmlns:p="http://schemas.openxmlformats.org/presentationml/2006/main">
+  <p:cSld>
+    <p:spTree>
+      <p:nvGrpSpPr>
+        <p:cNvPr id="1" name=""/>
+        <p:cNvGrpSpPr/>
+        <p:nvPr/>
+      </p:nvGrpSpPr>
+      <p:grpSpPr>
+        <a:xfrm>
+          <a:off x="0" y="0"/>
+          <a:ext cx="0" cy="0"/>
+          <a:chOff x="0" y="0"/>
+          <a:chExt cx="0" cy="0"/>
+        </a:xfrm>
+      </p:grpSpPr>
+      <p:sp>
+        <p:nvSpPr>
+          <p:cNvPr id="2" name="Slide Image Placeholder 1"/>
+          <p:cNvSpPr>
+            <a:spLocks noGrp="1" noRot="1" noChangeAspect="1"/>
+          </p:cNvSpPr>
+          <p:nvPr>
+            <p:ph type="sldImg"/>
+          </p:nvPr>
+        </p:nvSpPr>
+        <p:spPr/>
+      </p:sp>
+      <p:sp>
+        <p:nvSpPr>
+          <p:cNvPr id="3" name="Notes Placeholder 2"/>
+          <p:cNvSpPr>
+            <a:spLocks noGrp="1"/>
+          </p:cNvSpPr>
+          <p:nvPr>
+            <p:ph type="body" idx="1"/>
+          </p:nvPr>
+        </p:nvSpPr>
+        <p:spPr/>
+        <p:txBody>
+          <a:bodyPr/>
+          <a:lstStyle/>
+          <a:p>
+            <a:r>
+              <a:rPr lang="en-US" dirty="0"/>
+              <a:t>These are the references and picture credits used to prepare this lesson.</a:t>
+            </a:r>
+            <a:endParaRPr lang="en-US" dirty="0"/>
+          </a:p>
+        </p:txBody>
+      </p:sp>
+      <p:sp>
+        <p:nvSpPr>
+          <p:cNvPr id="4" name="Slide Number Placeholder 3"/>
+          <p:cNvSpPr>
+            <a:spLocks noGrp="1"/>
+          </p:cNvSpPr>
+          <p:nvPr>
+            <p:ph type="sldNum" sz="quarter" idx="10"/>
+          </p:nvPr>
+        </p:nvSpPr>
+        <p:spPr/>
+        <p:txBody>
+          <a:bodyPr/>
+          <a:lstStyle/>
+          <a:p>
+            <a:fld id="{F7021451-1387-4CA6-816F-3879F97B5CBC}" type="slidenum">
+              <a:rPr lang="en-US"/>
+              <a:t>60</a:t>
             </a:fld>
             <a:endParaRPr lang="en-US"/>
           </a:p>
@@ -14731,129 +14998,9 @@
           </a:p>
         </p:txBody>
       </p:sp>
-      <p:sp>
-        <p:nvSpPr>
-          <p:cNvPr id="3" name="Text 1"/>
-          <p:cNvSpPr/>
-          <p:nvPr/>
-        </p:nvSpPr>
-        <p:spPr>
-          <a:xfrm>
-            <a:off x="365760" y="1005840"/>
-            <a:ext cx="11460175" cy="731520"/>
-          </a:xfrm>
-          <a:prstGeom prst="rect">
-            <a:avLst/>
-          </a:prstGeom>
-          <a:noFill/>
-          <a:ln/>
-        </p:spPr>
-        <p:txBody>
-          <a:bodyPr wrap="square" lIns="0" tIns="0" rIns="0" bIns="0" rtlCol="0" anchor="ctr">
-            <a:normAutofit/>
-          </a:bodyPr>
-          <a:lstStyle/>
-          <a:p>
-            <a:pPr algn="ctr" indent="0" marL="0">
-              <a:buNone/>
-            </a:pPr>
-            <a:r>
-              <a:rPr lang="en-US" sz="3600" b="1" dirty="0">
-                <a:solidFill>
-                  <a:srgbClr val="990011"/>
-                </a:solidFill>
-                <a:latin typeface="Times New Roman" pitchFamily="34" charset="0"/>
-                <a:ea typeface="Times New Roman" pitchFamily="34" charset="-122"/>
-                <a:cs typeface="Times New Roman" pitchFamily="34" charset="-120"/>
-              </a:rPr>
-              <a:t>1. Meaning of Carrying Capacity</a:t>
-            </a:r>
-            <a:endParaRPr lang="en-US" sz="3600" dirty="0"/>
-          </a:p>
-        </p:txBody>
-      </p:sp>
-      <p:sp>
-        <p:nvSpPr>
-          <p:cNvPr id="4" name="Text 2"/>
-          <p:cNvSpPr/>
-          <p:nvPr/>
-        </p:nvSpPr>
-        <p:spPr>
-          <a:xfrm>
-            <a:off x="365760" y="1783080"/>
-            <a:ext cx="4846320" cy="4617720"/>
-          </a:xfrm>
-          <a:prstGeom prst="rect">
-            <a:avLst/>
-          </a:prstGeom>
-          <a:noFill/>
-          <a:ln/>
-        </p:spPr>
-        <p:txBody>
-          <a:bodyPr wrap="square" lIns="0" tIns="0" rIns="0" bIns="0" rtlCol="0" anchor="t"/>
-          <a:lstStyle/>
-          <a:p>
-            <a:pPr algn="l" indent="0" marL="0">
-              <a:spcAft>
-                <a:spcPts val="800"/>
-              </a:spcAft>
-              <a:buNone/>
-            </a:pPr>
-            <a:r>
-              <a:rPr lang="en-US" sz="3600" i="1" dirty="0">
-                <a:solidFill>
-                  <a:srgbClr val="111111"/>
-                </a:solidFill>
-                <a:latin typeface="Times New Roman" pitchFamily="34" charset="0"/>
-                <a:ea typeface="Times New Roman" pitchFamily="34" charset="-122"/>
-                <a:cs typeface="Times New Roman" pitchFamily="34" charset="-120"/>
-              </a:rPr>
-              <a:t>Carrying capacity is presented as follows:</a:t>
-            </a:r>
-            <a:endParaRPr lang="en-US" sz="3600" dirty="0"/>
-          </a:p>
-          <a:p>
-            <a:pPr algn="l" indent="0" marL="0">
-              <a:spcAft>
-                <a:spcPts val="800"/>
-              </a:spcAft>
-              <a:buNone/>
-            </a:pPr>
-            <a:r>
-              <a:rPr lang="en-US" sz="3600" b="1" dirty="0">
-                <a:solidFill>
-                  <a:srgbClr val="111111"/>
-                </a:solidFill>
-                <a:latin typeface="Times New Roman" pitchFamily="34" charset="0"/>
-                <a:ea typeface="Times New Roman" pitchFamily="34" charset="-122"/>
-                <a:cs typeface="Times New Roman" pitchFamily="34" charset="-120"/>
-              </a:rPr>
-              <a:t>Limit: </a:t>
-            </a:r>
-            <a:pPr algn="l" indent="0" marL="0">
-              <a:spcAft>
-                <a:spcPts val="800"/>
-              </a:spcAft>
-              <a:buNone/>
-            </a:pPr>
-            <a:r>
-              <a:rPr lang="en-US" sz="3600" dirty="0">
-                <a:solidFill>
-                  <a:srgbClr val="111111"/>
-                </a:solidFill>
-                <a:latin typeface="Times New Roman" pitchFamily="34" charset="0"/>
-                <a:ea typeface="Times New Roman" pitchFamily="34" charset="-122"/>
-                <a:cs typeface="Times New Roman" pitchFamily="34" charset="-120"/>
-              </a:rPr>
-              <a:t>It depends on the food, water and space available.</a:t>
-            </a:r>
-            <a:endParaRPr lang="en-US" sz="3600" dirty="0"/>
-          </a:p>
-        </p:txBody>
-      </p:sp>
       <p:pic>
         <p:nvPicPr>
-          <p:cNvPr id="5" name="Image 0" descr="/home/claude/f4/img/v2/overgrazing_big.png">    </p:cNvPr>
+          <p:cNvPr id="3" name="Image 0" descr="/home/claude/f4/img/minesec_sheet.png">    </p:cNvPr>
           <p:cNvPicPr>
             <a:picLocks noChangeAspect="1"/>
           </p:cNvPicPr>
@@ -14867,8 +15014,8 @@
         </p:blipFill>
         <p:spPr>
           <a:xfrm>
-            <a:off x="5349240" y="2617506"/>
-            <a:ext cx="6659575" cy="2601397"/>
+            <a:off x="0" y="658368"/>
+            <a:ext cx="5120640" cy="5833872"/>
           </a:xfrm>
           <a:prstGeom prst="rect">
             <a:avLst/>
@@ -14877,14 +15024,14 @@
       </p:pic>
       <p:sp>
         <p:nvSpPr>
-          <p:cNvPr id="6" name="Text 3"/>
+          <p:cNvPr id="4" name="Text 1"/>
           <p:cNvSpPr/>
           <p:nvPr/>
         </p:nvSpPr>
         <p:spPr>
           <a:xfrm>
-            <a:off x="5349240" y="6089904"/>
-            <a:ext cx="6659575" cy="347472"/>
+            <a:off x="5349240" y="1005840"/>
+            <a:ext cx="6522415" cy="731520"/>
           </a:xfrm>
           <a:prstGeom prst="rect">
             <a:avLst/>
@@ -14893,24 +15040,85 @@
           <a:ln/>
         </p:spPr>
         <p:txBody>
-          <a:bodyPr wrap="square" lIns="0" tIns="0" rIns="0" bIns="0" rtlCol="0" anchor="ctr"/>
+          <a:bodyPr wrap="square" lIns="0" tIns="0" rIns="0" bIns="0" rtlCol="0" anchor="ctr">
+            <a:normAutofit/>
+          </a:bodyPr>
           <a:lstStyle/>
           <a:p>
             <a:pPr algn="ctr" indent="0" marL="0">
               <a:buNone/>
             </a:pPr>
             <a:r>
-              <a:rPr lang="en-US" sz="1600" i="1" dirty="0">
-                <a:solidFill>
-                  <a:srgbClr val="555555"/>
+              <a:rPr lang="en-US" sz="3600" b="1" dirty="0">
+                <a:solidFill>
+                  <a:srgbClr val="990011"/>
                 </a:solidFill>
                 <a:latin typeface="Times New Roman" pitchFamily="34" charset="0"/>
                 <a:ea typeface="Times New Roman" pitchFamily="34" charset="-122"/>
                 <a:cs typeface="Times New Roman" pitchFamily="34" charset="-120"/>
               </a:rPr>
-              <a:t>Illustration: too many animals</a:t>
-            </a:r>
-            <a:endParaRPr lang="en-US" sz="1600" dirty="0"/>
+              <a:t>DEFINITIONS (continued)</a:t>
+            </a:r>
+            <a:endParaRPr lang="en-US" sz="3600" dirty="0"/>
+          </a:p>
+        </p:txBody>
+      </p:sp>
+      <p:sp>
+        <p:nvSpPr>
+          <p:cNvPr id="5" name="Text 2"/>
+          <p:cNvSpPr/>
+          <p:nvPr/>
+        </p:nvSpPr>
+        <p:spPr>
+          <a:xfrm>
+            <a:off x="5349240" y="1783080"/>
+            <a:ext cx="6522415" cy="4663440"/>
+          </a:xfrm>
+          <a:prstGeom prst="rect">
+            <a:avLst/>
+          </a:prstGeom>
+          <a:noFill/>
+          <a:ln/>
+        </p:spPr>
+        <p:txBody>
+          <a:bodyPr wrap="square" lIns="0" tIns="0" rIns="0" bIns="0" rtlCol="0" anchor="t"/>
+          <a:lstStyle/>
+          <a:p>
+            <a:pPr algn="l" indent="0" marL="0">
+              <a:spcAft>
+                <a:spcPts val="800"/>
+              </a:spcAft>
+              <a:buNone/>
+            </a:pPr>
+            <a:r>
+              <a:rPr lang="en-US" sz="4000" b="1" dirty="0">
+                <a:solidFill>
+                  <a:srgbClr val="111111"/>
+                </a:solidFill>
+                <a:latin typeface="Times New Roman" pitchFamily="34" charset="0"/>
+                <a:ea typeface="Times New Roman" pitchFamily="34" charset="-122"/>
+                <a:cs typeface="Times New Roman" pitchFamily="34" charset="-120"/>
+              </a:rPr>
+              <a:t>Population-resource regime: </a:t>
+            </a:r>
+            <a:pPr algn="l" indent="0" marL="0">
+              <a:spcAft>
+                <a:spcPts val="800"/>
+              </a:spcAft>
+              <a:buNone/>
+            </a:pPr>
+            <a:r>
+              <a:rPr lang="en-US" sz="4000" dirty="0">
+                <a:solidFill>
+                  <a:srgbClr val="111111"/>
+                </a:solidFill>
+                <a:latin typeface="Times New Roman" pitchFamily="34" charset="0"/>
+                <a:ea typeface="Times New Roman" pitchFamily="34" charset="-122"/>
+                <a:cs typeface="Times New Roman" pitchFamily="34" charset="-120"/>
+              </a:rPr>
+              <a:t>It is the type of relationship between the size of a population and its resources.</a:t>
+            </a:r>
+            <a:endParaRPr lang="en-US" sz="4000" dirty="0"/>
           </a:p>
         </p:txBody>
       </p:sp>
@@ -15026,9 +15234,129 @@
           </a:p>
         </p:txBody>
       </p:sp>
+      <p:sp>
+        <p:nvSpPr>
+          <p:cNvPr id="3" name="Text 1"/>
+          <p:cNvSpPr/>
+          <p:nvPr/>
+        </p:nvSpPr>
+        <p:spPr>
+          <a:xfrm>
+            <a:off x="365760" y="1005840"/>
+            <a:ext cx="11460175" cy="731520"/>
+          </a:xfrm>
+          <a:prstGeom prst="rect">
+            <a:avLst/>
+          </a:prstGeom>
+          <a:noFill/>
+          <a:ln/>
+        </p:spPr>
+        <p:txBody>
+          <a:bodyPr wrap="square" lIns="0" tIns="0" rIns="0" bIns="0" rtlCol="0" anchor="ctr">
+            <a:normAutofit/>
+          </a:bodyPr>
+          <a:lstStyle/>
+          <a:p>
+            <a:pPr algn="ctr" indent="0" marL="0">
+              <a:buNone/>
+            </a:pPr>
+            <a:r>
+              <a:rPr lang="en-US" sz="3600" b="1" dirty="0">
+                <a:solidFill>
+                  <a:srgbClr val="990011"/>
+                </a:solidFill>
+                <a:latin typeface="Times New Roman" pitchFamily="34" charset="0"/>
+                <a:ea typeface="Times New Roman" pitchFamily="34" charset="-122"/>
+                <a:cs typeface="Times New Roman" pitchFamily="34" charset="-120"/>
+              </a:rPr>
+              <a:t>1. Meaning of Carrying Capacity</a:t>
+            </a:r>
+            <a:endParaRPr lang="en-US" sz="3600" dirty="0"/>
+          </a:p>
+        </p:txBody>
+      </p:sp>
+      <p:sp>
+        <p:nvSpPr>
+          <p:cNvPr id="4" name="Text 2"/>
+          <p:cNvSpPr/>
+          <p:nvPr/>
+        </p:nvSpPr>
+        <p:spPr>
+          <a:xfrm>
+            <a:off x="365760" y="1783080"/>
+            <a:ext cx="6035040" cy="4617720"/>
+          </a:xfrm>
+          <a:prstGeom prst="rect">
+            <a:avLst/>
+          </a:prstGeom>
+          <a:noFill/>
+          <a:ln/>
+        </p:spPr>
+        <p:txBody>
+          <a:bodyPr wrap="square" lIns="0" tIns="0" rIns="0" bIns="0" rtlCol="0" anchor="t"/>
+          <a:lstStyle/>
+          <a:p>
+            <a:pPr algn="l" indent="0" marL="0">
+              <a:spcAft>
+                <a:spcPts val="800"/>
+              </a:spcAft>
+              <a:buNone/>
+            </a:pPr>
+            <a:r>
+              <a:rPr lang="en-US" sz="3600" i="1" dirty="0">
+                <a:solidFill>
+                  <a:srgbClr val="111111"/>
+                </a:solidFill>
+                <a:latin typeface="Times New Roman" pitchFamily="34" charset="0"/>
+                <a:ea typeface="Times New Roman" pitchFamily="34" charset="-122"/>
+                <a:cs typeface="Times New Roman" pitchFamily="34" charset="-120"/>
+              </a:rPr>
+              <a:t>Carrying capacity is explained as follows:</a:t>
+            </a:r>
+            <a:endParaRPr lang="en-US" sz="3600" dirty="0"/>
+          </a:p>
+          <a:p>
+            <a:pPr algn="l" indent="0" marL="0">
+              <a:spcAft>
+                <a:spcPts val="800"/>
+              </a:spcAft>
+              <a:buNone/>
+            </a:pPr>
+            <a:r>
+              <a:rPr lang="en-US" sz="3600" b="1" dirty="0">
+                <a:solidFill>
+                  <a:srgbClr val="111111"/>
+                </a:solidFill>
+                <a:latin typeface="Times New Roman" pitchFamily="34" charset="0"/>
+                <a:ea typeface="Times New Roman" pitchFamily="34" charset="-122"/>
+                <a:cs typeface="Times New Roman" pitchFamily="34" charset="-120"/>
+              </a:rPr>
+              <a:t>A limit: </a:t>
+            </a:r>
+            <a:pPr algn="l" indent="0" marL="0">
+              <a:spcAft>
+                <a:spcPts val="800"/>
+              </a:spcAft>
+              <a:buNone/>
+            </a:pPr>
+            <a:r>
+              <a:rPr lang="en-US" sz="3600" dirty="0">
+                <a:solidFill>
+                  <a:srgbClr val="111111"/>
+                </a:solidFill>
+                <a:latin typeface="Times New Roman" pitchFamily="34" charset="0"/>
+                <a:ea typeface="Times New Roman" pitchFamily="34" charset="-122"/>
+                <a:cs typeface="Times New Roman" pitchFamily="34" charset="-120"/>
+              </a:rPr>
+              <a:t>Carrying capacity is the largest population that an area can feed and support without being damaged. It depends on the food, water and space available.</a:t>
+            </a:r>
+            <a:endParaRPr lang="en-US" sz="3600" dirty="0"/>
+          </a:p>
+        </p:txBody>
+      </p:sp>
       <p:pic>
         <p:nvPicPr>
-          <p:cNvPr id="3" name="Image 0" descr="/home/claude/f4/img/minesec_sheet.png">    </p:cNvPr>
+          <p:cNvPr id="5" name="Image 0" descr="/home/claude/f4/img/v2/overgrazing_big.png">    </p:cNvPr>
           <p:cNvPicPr>
             <a:picLocks noChangeAspect="1"/>
           </p:cNvPicPr>
@@ -15042,8 +15370,8 @@
         </p:blipFill>
         <p:spPr>
           <a:xfrm>
-            <a:off x="0" y="658368"/>
-            <a:ext cx="3840480" cy="5833872"/>
+            <a:off x="6537960" y="2849678"/>
+            <a:ext cx="5470855" cy="2137053"/>
           </a:xfrm>
           <a:prstGeom prst="rect">
             <a:avLst/>
@@ -15052,14 +15380,14 @@
       </p:pic>
       <p:sp>
         <p:nvSpPr>
-          <p:cNvPr id="4" name="Text 1"/>
+          <p:cNvPr id="6" name="Text 3"/>
           <p:cNvSpPr/>
           <p:nvPr/>
         </p:nvSpPr>
         <p:spPr>
           <a:xfrm>
-            <a:off x="4069080" y="1005840"/>
-            <a:ext cx="7802575" cy="731520"/>
+            <a:off x="6537960" y="6089904"/>
+            <a:ext cx="5470855" cy="347472"/>
           </a:xfrm>
           <a:prstGeom prst="rect">
             <a:avLst/>
@@ -15068,122 +15396,24 @@
           <a:ln/>
         </p:spPr>
         <p:txBody>
-          <a:bodyPr wrap="square" lIns="0" tIns="0" rIns="0" bIns="0" rtlCol="0" anchor="ctr">
-            <a:normAutofit/>
-          </a:bodyPr>
+          <a:bodyPr wrap="square" lIns="0" tIns="0" rIns="0" bIns="0" rtlCol="0" anchor="ctr"/>
           <a:lstStyle/>
           <a:p>
             <a:pPr algn="ctr" indent="0" marL="0">
               <a:buNone/>
             </a:pPr>
             <a:r>
-              <a:rPr lang="en-US" sz="3600" b="1" dirty="0">
-                <a:solidFill>
-                  <a:srgbClr val="990011"/>
+              <a:rPr lang="en-US" sz="1600" i="1" dirty="0">
+                <a:solidFill>
+                  <a:srgbClr val="555555"/>
                 </a:solidFill>
                 <a:latin typeface="Times New Roman" pitchFamily="34" charset="0"/>
                 <a:ea typeface="Times New Roman" pitchFamily="34" charset="-122"/>
                 <a:cs typeface="Times New Roman" pitchFamily="34" charset="-120"/>
               </a:rPr>
-              <a:t>1. Meaning of Carrying Capacity</a:t>
-            </a:r>
-            <a:endParaRPr lang="en-US" sz="3600" dirty="0"/>
-          </a:p>
-        </p:txBody>
-      </p:sp>
-      <p:sp>
-        <p:nvSpPr>
-          <p:cNvPr id="5" name="Text 2"/>
-          <p:cNvSpPr/>
-          <p:nvPr/>
-        </p:nvSpPr>
-        <p:spPr>
-          <a:xfrm>
-            <a:off x="4069080" y="1783080"/>
-            <a:ext cx="7802575" cy="4663440"/>
-          </a:xfrm>
-          <a:prstGeom prst="rect">
-            <a:avLst/>
-          </a:prstGeom>
-          <a:noFill/>
-          <a:ln/>
-        </p:spPr>
-        <p:txBody>
-          <a:bodyPr wrap="square" lIns="0" tIns="0" rIns="0" bIns="0" rtlCol="0" anchor="t"/>
-          <a:lstStyle/>
-          <a:p>
-            <a:pPr algn="l" indent="0" marL="0">
-              <a:spcAft>
-                <a:spcPts val="800"/>
-              </a:spcAft>
-              <a:buNone/>
-            </a:pPr>
-            <a:r>
-              <a:rPr lang="en-US" sz="4000" b="1" dirty="0">
-                <a:solidFill>
-                  <a:srgbClr val="111111"/>
-                </a:solidFill>
-                <a:latin typeface="Times New Roman" pitchFamily="34" charset="0"/>
-                <a:ea typeface="Times New Roman" pitchFamily="34" charset="-122"/>
-                <a:cs typeface="Times New Roman" pitchFamily="34" charset="-120"/>
-              </a:rPr>
-              <a:t>Example: </a:t>
-            </a:r>
-            <a:pPr algn="l" indent="0" marL="0">
-              <a:spcAft>
-                <a:spcPts val="800"/>
-              </a:spcAft>
-              <a:buNone/>
-            </a:pPr>
-            <a:r>
-              <a:rPr lang="en-US" sz="4000" dirty="0">
-                <a:solidFill>
-                  <a:srgbClr val="111111"/>
-                </a:solidFill>
-                <a:latin typeface="Times New Roman" pitchFamily="34" charset="0"/>
-                <a:ea typeface="Times New Roman" pitchFamily="34" charset="-122"/>
-                <a:cs typeface="Times New Roman" pitchFamily="34" charset="-120"/>
-              </a:rPr>
-              <a:t>A pasture near Garoua that can feed 50 cattle is destroyed if 100 graze on it.</a:t>
-            </a:r>
-            <a:endParaRPr lang="en-US" sz="4000" dirty="0"/>
-          </a:p>
-          <a:p>
-            <a:pPr algn="l" indent="0" marL="0">
-              <a:spcAft>
-                <a:spcPts val="800"/>
-              </a:spcAft>
-              <a:buNone/>
-            </a:pPr>
-            <a:r>
-              <a:rPr lang="en-US" sz="4000" b="1" dirty="0">
-                <a:solidFill>
-                  <a:srgbClr val="111111"/>
-                </a:solidFill>
-                <a:latin typeface="Times New Roman" pitchFamily="34" charset="0"/>
-                <a:ea typeface="Times New Roman" pitchFamily="34" charset="-122"/>
-                <a:cs typeface="Times New Roman" pitchFamily="34" charset="-120"/>
-              </a:rPr>
-              <a:t>Human populations: </a:t>
-            </a:r>
-            <a:pPr algn="l" indent="0" marL="0">
-              <a:spcAft>
-                <a:spcPts val="800"/>
-              </a:spcAft>
-              <a:buNone/>
-            </a:pPr>
-            <a:r>
-              <a:rPr lang="en-US" sz="4000" dirty="0">
-                <a:solidFill>
-                  <a:srgbClr val="111111"/>
-                </a:solidFill>
-                <a:latin typeface="Times New Roman" pitchFamily="34" charset="0"/>
-                <a:ea typeface="Times New Roman" pitchFamily="34" charset="-122"/>
-                <a:cs typeface="Times New Roman" pitchFamily="34" charset="-120"/>
-              </a:rPr>
-              <a:t>Technology and trade can raise the carrying capacity of an area.</a:t>
-            </a:r>
-            <a:endParaRPr lang="en-US" sz="4000" dirty="0"/>
+              <a:t>Illustration: overgrazing</a:t>
+            </a:r>
+            <a:endParaRPr lang="en-US" sz="1600" dirty="0"/>
           </a:p>
         </p:txBody>
       </p:sp>
@@ -15538,129 +15768,9 @@
           </a:p>
         </p:txBody>
       </p:sp>
-      <p:sp>
-        <p:nvSpPr>
-          <p:cNvPr id="3" name="Text 1"/>
-          <p:cNvSpPr/>
-          <p:nvPr/>
-        </p:nvSpPr>
-        <p:spPr>
-          <a:xfrm>
-            <a:off x="365760" y="1005840"/>
-            <a:ext cx="11460175" cy="731520"/>
-          </a:xfrm>
-          <a:prstGeom prst="rect">
-            <a:avLst/>
-          </a:prstGeom>
-          <a:noFill/>
-          <a:ln/>
-        </p:spPr>
-        <p:txBody>
-          <a:bodyPr wrap="square" lIns="0" tIns="0" rIns="0" bIns="0" rtlCol="0" anchor="ctr">
-            <a:normAutofit/>
-          </a:bodyPr>
-          <a:lstStyle/>
-          <a:p>
-            <a:pPr algn="ctr" indent="0" marL="0">
-              <a:buNone/>
-            </a:pPr>
-            <a:r>
-              <a:rPr lang="en-US" sz="3600" b="1" dirty="0">
-                <a:solidFill>
-                  <a:srgbClr val="990011"/>
-                </a:solidFill>
-                <a:latin typeface="Times New Roman" pitchFamily="34" charset="0"/>
-                <a:ea typeface="Times New Roman" pitchFamily="34" charset="-122"/>
-                <a:cs typeface="Times New Roman" pitchFamily="34" charset="-120"/>
-              </a:rPr>
-              <a:t>2. Ways of Adjusting to Carrying Capacity</a:t>
-            </a:r>
-            <a:endParaRPr lang="en-US" sz="3600" dirty="0"/>
-          </a:p>
-        </p:txBody>
-      </p:sp>
-      <p:sp>
-        <p:nvSpPr>
-          <p:cNvPr id="4" name="Text 2"/>
-          <p:cNvSpPr/>
-          <p:nvPr/>
-        </p:nvSpPr>
-        <p:spPr>
-          <a:xfrm>
-            <a:off x="365760" y="1783080"/>
-            <a:ext cx="4846320" cy="4617720"/>
-          </a:xfrm>
-          <a:prstGeom prst="rect">
-            <a:avLst/>
-          </a:prstGeom>
-          <a:noFill/>
-          <a:ln/>
-        </p:spPr>
-        <p:txBody>
-          <a:bodyPr wrap="square" lIns="0" tIns="0" rIns="0" bIns="0" rtlCol="0" anchor="t"/>
-          <a:lstStyle/>
-          <a:p>
-            <a:pPr algn="l" indent="0" marL="0">
-              <a:spcAft>
-                <a:spcPts val="800"/>
-              </a:spcAft>
-              <a:buNone/>
-            </a:pPr>
-            <a:r>
-              <a:rPr lang="en-US" sz="2800" i="1" dirty="0">
-                <a:solidFill>
-                  <a:srgbClr val="111111"/>
-                </a:solidFill>
-                <a:latin typeface="Times New Roman" pitchFamily="34" charset="0"/>
-                <a:ea typeface="Times New Roman" pitchFamily="34" charset="-122"/>
-                <a:cs typeface="Times New Roman" pitchFamily="34" charset="-120"/>
-              </a:rPr>
-              <a:t>Populations adjust to carrying capacity in the following ways:</a:t>
-            </a:r>
-            <a:endParaRPr lang="en-US" sz="2800" dirty="0"/>
-          </a:p>
-          <a:p>
-            <a:pPr algn="l" indent="0" marL="0">
-              <a:spcAft>
-                <a:spcPts val="800"/>
-              </a:spcAft>
-              <a:buNone/>
-            </a:pPr>
-            <a:r>
-              <a:rPr lang="en-US" sz="2800" b="1" dirty="0">
-                <a:solidFill>
-                  <a:srgbClr val="111111"/>
-                </a:solidFill>
-                <a:latin typeface="Times New Roman" pitchFamily="34" charset="0"/>
-                <a:ea typeface="Times New Roman" pitchFamily="34" charset="-122"/>
-                <a:cs typeface="Times New Roman" pitchFamily="34" charset="-120"/>
-              </a:rPr>
-              <a:t>Progressive adjustment (S-curve): </a:t>
-            </a:r>
-            <a:pPr algn="l" indent="0" marL="0">
-              <a:spcAft>
-                <a:spcPts val="800"/>
-              </a:spcAft>
-              <a:buNone/>
-            </a:pPr>
-            <a:r>
-              <a:rPr lang="en-US" sz="2800" dirty="0">
-                <a:solidFill>
-                  <a:srgbClr val="111111"/>
-                </a:solidFill>
-                <a:latin typeface="Times New Roman" pitchFamily="34" charset="0"/>
-                <a:ea typeface="Times New Roman" pitchFamily="34" charset="-122"/>
-                <a:cs typeface="Times New Roman" pitchFamily="34" charset="-120"/>
-              </a:rPr>
-              <a:t>Growth is slow, then fast, then slows down near the carrying capacity and stabilises, like fish introduced into a large lake.</a:t>
-            </a:r>
-            <a:endParaRPr lang="en-US" sz="2800" dirty="0"/>
-          </a:p>
-        </p:txBody>
-      </p:sp>
       <p:pic>
         <p:nvPicPr>
-          <p:cNvPr id="5" name="Image 0" descr="/home/claude/f4/img/v2/pop2_curves.png">    </p:cNvPr>
+          <p:cNvPr id="3" name="Image 0" descr="/home/claude/f4/img/minesec_sheet.png">    </p:cNvPr>
           <p:cNvPicPr>
             <a:picLocks noChangeAspect="1"/>
           </p:cNvPicPr>
@@ -15674,8 +15784,8 @@
         </p:blipFill>
         <p:spPr>
           <a:xfrm>
-            <a:off x="5349240" y="2617506"/>
-            <a:ext cx="6659575" cy="2601397"/>
+            <a:off x="0" y="658368"/>
+            <a:ext cx="5120640" cy="5833872"/>
           </a:xfrm>
           <a:prstGeom prst="rect">
             <a:avLst/>
@@ -15684,14 +15794,14 @@
       </p:pic>
       <p:sp>
         <p:nvSpPr>
-          <p:cNvPr id="6" name="Text 3"/>
+          <p:cNvPr id="4" name="Text 1"/>
           <p:cNvSpPr/>
           <p:nvPr/>
         </p:nvSpPr>
         <p:spPr>
           <a:xfrm>
-            <a:off x="5349240" y="6089904"/>
-            <a:ext cx="6659575" cy="347472"/>
+            <a:off x="5349240" y="1005840"/>
+            <a:ext cx="6522415" cy="731520"/>
           </a:xfrm>
           <a:prstGeom prst="rect">
             <a:avLst/>
@@ -15700,24 +15810,85 @@
           <a:ln/>
         </p:spPr>
         <p:txBody>
-          <a:bodyPr wrap="square" lIns="0" tIns="0" rIns="0" bIns="0" rtlCol="0" anchor="ctr"/>
+          <a:bodyPr wrap="square" lIns="0" tIns="0" rIns="0" bIns="0" rtlCol="0" anchor="ctr">
+            <a:normAutofit/>
+          </a:bodyPr>
           <a:lstStyle/>
           <a:p>
             <a:pPr algn="ctr" indent="0" marL="0">
               <a:buNone/>
             </a:pPr>
             <a:r>
-              <a:rPr lang="en-US" sz="1600" i="1" dirty="0">
-                <a:solidFill>
-                  <a:srgbClr val="555555"/>
+              <a:rPr lang="en-US" sz="3600" b="1" dirty="0">
+                <a:solidFill>
+                  <a:srgbClr val="990011"/>
                 </a:solidFill>
                 <a:latin typeface="Times New Roman" pitchFamily="34" charset="0"/>
                 <a:ea typeface="Times New Roman" pitchFamily="34" charset="-122"/>
                 <a:cs typeface="Times New Roman" pitchFamily="34" charset="-120"/>
               </a:rPr>
-              <a:t>Illustration: three ways of adjusting</a:t>
-            </a:r>
-            <a:endParaRPr lang="en-US" sz="1600" dirty="0"/>
+              <a:t>1. Meaning of Carrying Capacity</a:t>
+            </a:r>
+            <a:endParaRPr lang="en-US" sz="3600" dirty="0"/>
+          </a:p>
+        </p:txBody>
+      </p:sp>
+      <p:sp>
+        <p:nvSpPr>
+          <p:cNvPr id="5" name="Text 2"/>
+          <p:cNvSpPr/>
+          <p:nvPr/>
+        </p:nvSpPr>
+        <p:spPr>
+          <a:xfrm>
+            <a:off x="5349240" y="1783080"/>
+            <a:ext cx="6522415" cy="4663440"/>
+          </a:xfrm>
+          <a:prstGeom prst="rect">
+            <a:avLst/>
+          </a:prstGeom>
+          <a:noFill/>
+          <a:ln/>
+        </p:spPr>
+        <p:txBody>
+          <a:bodyPr wrap="square" lIns="0" tIns="0" rIns="0" bIns="0" rtlCol="0" anchor="t"/>
+          <a:lstStyle/>
+          <a:p>
+            <a:pPr algn="l" indent="0" marL="0">
+              <a:spcAft>
+                <a:spcPts val="800"/>
+              </a:spcAft>
+              <a:buNone/>
+            </a:pPr>
+            <a:r>
+              <a:rPr lang="en-US" sz="4000" b="1" dirty="0">
+                <a:solidFill>
+                  <a:srgbClr val="111111"/>
+                </a:solidFill>
+                <a:latin typeface="Times New Roman" pitchFamily="34" charset="0"/>
+                <a:ea typeface="Times New Roman" pitchFamily="34" charset="-122"/>
+                <a:cs typeface="Times New Roman" pitchFamily="34" charset="-120"/>
+              </a:rPr>
+              <a:t>Example: </a:t>
+            </a:r>
+            <a:pPr algn="l" indent="0" marL="0">
+              <a:spcAft>
+                <a:spcPts val="800"/>
+              </a:spcAft>
+              <a:buNone/>
+            </a:pPr>
+            <a:r>
+              <a:rPr lang="en-US" sz="4000" dirty="0">
+                <a:solidFill>
+                  <a:srgbClr val="111111"/>
+                </a:solidFill>
+                <a:latin typeface="Times New Roman" pitchFamily="34" charset="0"/>
+                <a:ea typeface="Times New Roman" pitchFamily="34" charset="-122"/>
+                <a:cs typeface="Times New Roman" pitchFamily="34" charset="-120"/>
+              </a:rPr>
+              <a:t>A pasture near Garoua that can feed 50 cattle is destroyed if 100 graze on it. The grass disappears and the soil is eroded.</a:t>
+            </a:r>
+            <a:endParaRPr lang="en-US" sz="4000" dirty="0"/>
           </a:p>
         </p:txBody>
       </p:sp>
@@ -15833,109 +16004,9 @@
           </a:p>
         </p:txBody>
       </p:sp>
-      <p:sp>
-        <p:nvSpPr>
-          <p:cNvPr id="3" name="Text 1"/>
-          <p:cNvSpPr/>
-          <p:nvPr/>
-        </p:nvSpPr>
-        <p:spPr>
-          <a:xfrm>
-            <a:off x="365760" y="1005840"/>
-            <a:ext cx="11460175" cy="731520"/>
-          </a:xfrm>
-          <a:prstGeom prst="rect">
-            <a:avLst/>
-          </a:prstGeom>
-          <a:noFill/>
-          <a:ln/>
-        </p:spPr>
-        <p:txBody>
-          <a:bodyPr wrap="square" lIns="0" tIns="0" rIns="0" bIns="0" rtlCol="0" anchor="ctr">
-            <a:normAutofit/>
-          </a:bodyPr>
-          <a:lstStyle/>
-          <a:p>
-            <a:pPr algn="ctr" indent="0" marL="0">
-              <a:buNone/>
-            </a:pPr>
-            <a:r>
-              <a:rPr lang="en-US" sz="3600" b="1" dirty="0">
-                <a:solidFill>
-                  <a:srgbClr val="990011"/>
-                </a:solidFill>
-                <a:latin typeface="Times New Roman" pitchFamily="34" charset="0"/>
-                <a:ea typeface="Times New Roman" pitchFamily="34" charset="-122"/>
-                <a:cs typeface="Times New Roman" pitchFamily="34" charset="-120"/>
-              </a:rPr>
-              <a:t>2. Ways of Adjusting to Carrying Capacity</a:t>
-            </a:r>
-            <a:endParaRPr lang="en-US" sz="3600" dirty="0"/>
-          </a:p>
-        </p:txBody>
-      </p:sp>
-      <p:sp>
-        <p:nvSpPr>
-          <p:cNvPr id="4" name="Text 2"/>
-          <p:cNvSpPr/>
-          <p:nvPr/>
-        </p:nvSpPr>
-        <p:spPr>
-          <a:xfrm>
-            <a:off x="365760" y="1783080"/>
-            <a:ext cx="4846320" cy="4617720"/>
-          </a:xfrm>
-          <a:prstGeom prst="rect">
-            <a:avLst/>
-          </a:prstGeom>
-          <a:noFill/>
-          <a:ln/>
-        </p:spPr>
-        <p:txBody>
-          <a:bodyPr wrap="square" lIns="0" tIns="0" rIns="0" bIns="0" rtlCol="0" anchor="t"/>
-          <a:lstStyle/>
-          <a:p>
-            <a:pPr algn="l" indent="0" marL="0">
-              <a:spcAft>
-                <a:spcPts val="800"/>
-              </a:spcAft>
-              <a:buNone/>
-            </a:pPr>
-            <a:r>
-              <a:rPr lang="en-US" sz="3200" b="1" dirty="0">
-                <a:solidFill>
-                  <a:srgbClr val="111111"/>
-                </a:solidFill>
-                <a:latin typeface="Times New Roman" pitchFamily="34" charset="0"/>
-                <a:ea typeface="Times New Roman" pitchFamily="34" charset="-122"/>
-                <a:cs typeface="Times New Roman" pitchFamily="34" charset="-120"/>
-              </a:rPr>
-              <a:t>Overshoot and oscillation (J-curve): </a:t>
-            </a:r>
-            <a:pPr algn="l" indent="0" marL="0">
-              <a:spcAft>
-                <a:spcPts val="800"/>
-              </a:spcAft>
-              <a:buNone/>
-            </a:pPr>
-            <a:r>
-              <a:rPr lang="en-US" sz="3200" dirty="0">
-                <a:solidFill>
-                  <a:srgbClr val="111111"/>
-                </a:solidFill>
-                <a:latin typeface="Times New Roman" pitchFamily="34" charset="0"/>
-                <a:ea typeface="Times New Roman" pitchFamily="34" charset="-122"/>
-                <a:cs typeface="Times New Roman" pitchFamily="34" charset="-120"/>
-              </a:rPr>
-              <a:t>Growth is exponential, passes the carrying capacity, then crashes through starvation or disease, like insects or algae after a favourable season.</a:t>
-            </a:r>
-            <a:endParaRPr lang="en-US" sz="3200" dirty="0"/>
-          </a:p>
-        </p:txBody>
-      </p:sp>
       <p:pic>
         <p:nvPicPr>
-          <p:cNvPr id="5" name="Image 0" descr="/home/claude/f4/img/v2/carrying_big.png">    </p:cNvPr>
+          <p:cNvPr id="3" name="Image 0" descr="/home/claude/f4/img/minesec_sheet.png">    </p:cNvPr>
           <p:cNvPicPr>
             <a:picLocks noChangeAspect="1"/>
           </p:cNvPicPr>
@@ -15949,8 +16020,8 @@
         </p:blipFill>
         <p:spPr>
           <a:xfrm>
-            <a:off x="5349240" y="2461422"/>
-            <a:ext cx="6659575" cy="2913564"/>
+            <a:off x="0" y="658368"/>
+            <a:ext cx="5120640" cy="5833872"/>
           </a:xfrm>
           <a:prstGeom prst="rect">
             <a:avLst/>
@@ -15959,14 +16030,14 @@
       </p:pic>
       <p:sp>
         <p:nvSpPr>
-          <p:cNvPr id="6" name="Text 3"/>
+          <p:cNvPr id="4" name="Text 1"/>
           <p:cNvSpPr/>
           <p:nvPr/>
         </p:nvSpPr>
         <p:spPr>
           <a:xfrm>
-            <a:off x="5349240" y="6089904"/>
-            <a:ext cx="6659575" cy="347472"/>
+            <a:off x="5349240" y="1005840"/>
+            <a:ext cx="6522415" cy="731520"/>
           </a:xfrm>
           <a:prstGeom prst="rect">
             <a:avLst/>
@@ -15975,24 +16046,85 @@
           <a:ln/>
         </p:spPr>
         <p:txBody>
-          <a:bodyPr wrap="square" lIns="0" tIns="0" rIns="0" bIns="0" rtlCol="0" anchor="ctr"/>
+          <a:bodyPr wrap="square" lIns="0" tIns="0" rIns="0" bIns="0" rtlCol="0" anchor="ctr">
+            <a:normAutofit/>
+          </a:bodyPr>
           <a:lstStyle/>
           <a:p>
             <a:pPr algn="ctr" indent="0" marL="0">
               <a:buNone/>
             </a:pPr>
             <a:r>
-              <a:rPr lang="en-US" sz="1600" i="1" dirty="0">
-                <a:solidFill>
-                  <a:srgbClr val="555555"/>
+              <a:rPr lang="en-US" sz="3600" b="1" dirty="0">
+                <a:solidFill>
+                  <a:srgbClr val="990011"/>
                 </a:solidFill>
                 <a:latin typeface="Times New Roman" pitchFamily="34" charset="0"/>
                 <a:ea typeface="Times New Roman" pitchFamily="34" charset="-122"/>
                 <a:cs typeface="Times New Roman" pitchFamily="34" charset="-120"/>
               </a:rPr>
-              <a:t>Illustration: the S-curve and the J-curve</a:t>
-            </a:r>
-            <a:endParaRPr lang="en-US" sz="1600" dirty="0"/>
+              <a:t>1. Meaning of Carrying Capacity</a:t>
+            </a:r>
+            <a:endParaRPr lang="en-US" sz="3600" dirty="0"/>
+          </a:p>
+        </p:txBody>
+      </p:sp>
+      <p:sp>
+        <p:nvSpPr>
+          <p:cNvPr id="5" name="Text 2"/>
+          <p:cNvSpPr/>
+          <p:nvPr/>
+        </p:nvSpPr>
+        <p:spPr>
+          <a:xfrm>
+            <a:off x="5349240" y="1783080"/>
+            <a:ext cx="6522415" cy="4663440"/>
+          </a:xfrm>
+          <a:prstGeom prst="rect">
+            <a:avLst/>
+          </a:prstGeom>
+          <a:noFill/>
+          <a:ln/>
+        </p:spPr>
+        <p:txBody>
+          <a:bodyPr wrap="square" lIns="0" tIns="0" rIns="0" bIns="0" rtlCol="0" anchor="t"/>
+          <a:lstStyle/>
+          <a:p>
+            <a:pPr algn="l" indent="0" marL="0">
+              <a:spcAft>
+                <a:spcPts val="800"/>
+              </a:spcAft>
+              <a:buNone/>
+            </a:pPr>
+            <a:r>
+              <a:rPr lang="en-US" sz="4000" b="1" dirty="0">
+                <a:solidFill>
+                  <a:srgbClr val="111111"/>
+                </a:solidFill>
+                <a:latin typeface="Times New Roman" pitchFamily="34" charset="0"/>
+                <a:ea typeface="Times New Roman" pitchFamily="34" charset="-122"/>
+                <a:cs typeface="Times New Roman" pitchFamily="34" charset="-120"/>
+              </a:rPr>
+              <a:t>Human populations: </a:t>
+            </a:r>
+            <a:pPr algn="l" indent="0" marL="0">
+              <a:spcAft>
+                <a:spcPts val="800"/>
+              </a:spcAft>
+              <a:buNone/>
+            </a:pPr>
+            <a:r>
+              <a:rPr lang="en-US" sz="4000" dirty="0">
+                <a:solidFill>
+                  <a:srgbClr val="111111"/>
+                </a:solidFill>
+                <a:latin typeface="Times New Roman" pitchFamily="34" charset="0"/>
+                <a:ea typeface="Times New Roman" pitchFamily="34" charset="-122"/>
+                <a:cs typeface="Times New Roman" pitchFamily="34" charset="-120"/>
+              </a:rPr>
+              <a:t>For people, carrying capacity is not fixed. Technology, such as irrigation and fertilisers, and trade can raise it.</a:t>
+            </a:r>
+            <a:endParaRPr lang="en-US" sz="4000" dirty="0"/>
           </a:p>
         </p:txBody>
       </p:sp>
@@ -16108,9 +16240,129 @@
           </a:p>
         </p:txBody>
       </p:sp>
+      <p:sp>
+        <p:nvSpPr>
+          <p:cNvPr id="3" name="Text 1"/>
+          <p:cNvSpPr/>
+          <p:nvPr/>
+        </p:nvSpPr>
+        <p:spPr>
+          <a:xfrm>
+            <a:off x="365760" y="1005840"/>
+            <a:ext cx="11460175" cy="731520"/>
+          </a:xfrm>
+          <a:prstGeom prst="rect">
+            <a:avLst/>
+          </a:prstGeom>
+          <a:noFill/>
+          <a:ln/>
+        </p:spPr>
+        <p:txBody>
+          <a:bodyPr wrap="square" lIns="0" tIns="0" rIns="0" bIns="0" rtlCol="0" anchor="ctr">
+            <a:normAutofit/>
+          </a:bodyPr>
+          <a:lstStyle/>
+          <a:p>
+            <a:pPr algn="ctr" indent="0" marL="0">
+              <a:buNone/>
+            </a:pPr>
+            <a:r>
+              <a:rPr lang="en-US" sz="3600" b="1" dirty="0">
+                <a:solidFill>
+                  <a:srgbClr val="990011"/>
+                </a:solidFill>
+                <a:latin typeface="Times New Roman" pitchFamily="34" charset="0"/>
+                <a:ea typeface="Times New Roman" pitchFamily="34" charset="-122"/>
+                <a:cs typeface="Times New Roman" pitchFamily="34" charset="-120"/>
+              </a:rPr>
+              <a:t>2. Ways of Adjusting to Carrying Capacity</a:t>
+            </a:r>
+            <a:endParaRPr lang="en-US" sz="3600" dirty="0"/>
+          </a:p>
+        </p:txBody>
+      </p:sp>
+      <p:sp>
+        <p:nvSpPr>
+          <p:cNvPr id="4" name="Text 2"/>
+          <p:cNvSpPr/>
+          <p:nvPr/>
+        </p:nvSpPr>
+        <p:spPr>
+          <a:xfrm>
+            <a:off x="365760" y="1783080"/>
+            <a:ext cx="6035040" cy="4617720"/>
+          </a:xfrm>
+          <a:prstGeom prst="rect">
+            <a:avLst/>
+          </a:prstGeom>
+          <a:noFill/>
+          <a:ln/>
+        </p:spPr>
+        <p:txBody>
+          <a:bodyPr wrap="square" lIns="0" tIns="0" rIns="0" bIns="0" rtlCol="0" anchor="t"/>
+          <a:lstStyle/>
+          <a:p>
+            <a:pPr algn="l" indent="0" marL="0">
+              <a:spcAft>
+                <a:spcPts val="800"/>
+              </a:spcAft>
+              <a:buNone/>
+            </a:pPr>
+            <a:r>
+              <a:rPr lang="en-US" sz="3200" i="1" dirty="0">
+                <a:solidFill>
+                  <a:srgbClr val="111111"/>
+                </a:solidFill>
+                <a:latin typeface="Times New Roman" pitchFamily="34" charset="0"/>
+                <a:ea typeface="Times New Roman" pitchFamily="34" charset="-122"/>
+                <a:cs typeface="Times New Roman" pitchFamily="34" charset="-120"/>
+              </a:rPr>
+              <a:t>Populations adjust to carrying capacity in the following ways:</a:t>
+            </a:r>
+            <a:endParaRPr lang="en-US" sz="3200" dirty="0"/>
+          </a:p>
+          <a:p>
+            <a:pPr algn="l" indent="0" marL="0">
+              <a:spcAft>
+                <a:spcPts val="800"/>
+              </a:spcAft>
+              <a:buNone/>
+            </a:pPr>
+            <a:r>
+              <a:rPr lang="en-US" sz="3200" b="1" dirty="0">
+                <a:solidFill>
+                  <a:srgbClr val="111111"/>
+                </a:solidFill>
+                <a:latin typeface="Times New Roman" pitchFamily="34" charset="0"/>
+                <a:ea typeface="Times New Roman" pitchFamily="34" charset="-122"/>
+                <a:cs typeface="Times New Roman" pitchFamily="34" charset="-120"/>
+              </a:rPr>
+              <a:t>Progressive adjustment (S-curve): </a:t>
+            </a:r>
+            <a:pPr algn="l" indent="0" marL="0">
+              <a:spcAft>
+                <a:spcPts val="800"/>
+              </a:spcAft>
+              <a:buNone/>
+            </a:pPr>
+            <a:r>
+              <a:rPr lang="en-US" sz="3200" dirty="0">
+                <a:solidFill>
+                  <a:srgbClr val="111111"/>
+                </a:solidFill>
+                <a:latin typeface="Times New Roman" pitchFamily="34" charset="0"/>
+                <a:ea typeface="Times New Roman" pitchFamily="34" charset="-122"/>
+                <a:cs typeface="Times New Roman" pitchFamily="34" charset="-120"/>
+              </a:rPr>
+              <a:t>Growth is slow at first, then fast, then slows down near the carrying capacity and stabilises. Fish introduced into a large lake grow in this way.</a:t>
+            </a:r>
+            <a:endParaRPr lang="en-US" sz="3200" dirty="0"/>
+          </a:p>
+        </p:txBody>
+      </p:sp>
       <p:pic>
         <p:nvPicPr>
-          <p:cNvPr id="3" name="Image 0" descr="/home/claude/f4/img/minesec_sheet.png">    </p:cNvPr>
+          <p:cNvPr id="5" name="Image 0" descr="/home/claude/f4/img/v2/pop2_curves.png">    </p:cNvPr>
           <p:cNvPicPr>
             <a:picLocks noChangeAspect="1"/>
           </p:cNvPicPr>
@@ -16124,8 +16376,8 @@
         </p:blipFill>
         <p:spPr>
           <a:xfrm>
-            <a:off x="0" y="658368"/>
-            <a:ext cx="1463040" cy="5833872"/>
+            <a:off x="6537960" y="2849678"/>
+            <a:ext cx="5470855" cy="2137053"/>
           </a:xfrm>
           <a:prstGeom prst="rect">
             <a:avLst/>
@@ -16134,14 +16386,14 @@
       </p:pic>
       <p:sp>
         <p:nvSpPr>
-          <p:cNvPr id="4" name="Text 1"/>
+          <p:cNvPr id="6" name="Text 3"/>
           <p:cNvSpPr/>
           <p:nvPr/>
         </p:nvSpPr>
         <p:spPr>
           <a:xfrm>
-            <a:off x="1691640" y="1005840"/>
-            <a:ext cx="10180015" cy="731520"/>
+            <a:off x="6537960" y="6089904"/>
+            <a:ext cx="5470855" cy="347472"/>
           </a:xfrm>
           <a:prstGeom prst="rect">
             <a:avLst/>
@@ -16150,122 +16402,24 @@
           <a:ln/>
         </p:spPr>
         <p:txBody>
-          <a:bodyPr wrap="square" lIns="0" tIns="0" rIns="0" bIns="0" rtlCol="0" anchor="ctr">
-            <a:normAutofit/>
-          </a:bodyPr>
+          <a:bodyPr wrap="square" lIns="0" tIns="0" rIns="0" bIns="0" rtlCol="0" anchor="ctr"/>
           <a:lstStyle/>
           <a:p>
             <a:pPr algn="ctr" indent="0" marL="0">
               <a:buNone/>
             </a:pPr>
             <a:r>
-              <a:rPr lang="en-US" sz="3600" b="1" dirty="0">
-                <a:solidFill>
-                  <a:srgbClr val="990011"/>
+              <a:rPr lang="en-US" sz="1600" i="1" dirty="0">
+                <a:solidFill>
+                  <a:srgbClr val="555555"/>
                 </a:solidFill>
                 <a:latin typeface="Times New Roman" pitchFamily="34" charset="0"/>
                 <a:ea typeface="Times New Roman" pitchFamily="34" charset="-122"/>
                 <a:cs typeface="Times New Roman" pitchFamily="34" charset="-120"/>
               </a:rPr>
-              <a:t>2. Ways of Adjusting to Carrying Capacity</a:t>
-            </a:r>
-            <a:endParaRPr lang="en-US" sz="3600" dirty="0"/>
-          </a:p>
-        </p:txBody>
-      </p:sp>
-      <p:sp>
-        <p:nvSpPr>
-          <p:cNvPr id="5" name="Text 2"/>
-          <p:cNvSpPr/>
-          <p:nvPr/>
-        </p:nvSpPr>
-        <p:spPr>
-          <a:xfrm>
-            <a:off x="1691640" y="1783080"/>
-            <a:ext cx="10180015" cy="4663440"/>
-          </a:xfrm>
-          <a:prstGeom prst="rect">
-            <a:avLst/>
-          </a:prstGeom>
-          <a:noFill/>
-          <a:ln/>
-        </p:spPr>
-        <p:txBody>
-          <a:bodyPr wrap="square" lIns="0" tIns="0" rIns="0" bIns="0" rtlCol="0" anchor="t"/>
-          <a:lstStyle/>
-          <a:p>
-            <a:pPr algn="l" indent="0" marL="0">
-              <a:spcAft>
-                <a:spcPts val="800"/>
-              </a:spcAft>
-              <a:buNone/>
-            </a:pPr>
-            <a:r>
-              <a:rPr lang="en-US" sz="4000" b="1" dirty="0">
-                <a:solidFill>
-                  <a:srgbClr val="111111"/>
-                </a:solidFill>
-                <a:latin typeface="Times New Roman" pitchFamily="34" charset="0"/>
-                <a:ea typeface="Times New Roman" pitchFamily="34" charset="-122"/>
-                <a:cs typeface="Times New Roman" pitchFamily="34" charset="-120"/>
-              </a:rPr>
-              <a:t>Boom and bust: </a:t>
-            </a:r>
-            <a:pPr algn="l" indent="0" marL="0">
-              <a:spcAft>
-                <a:spcPts val="800"/>
-              </a:spcAft>
-              <a:buNone/>
-            </a:pPr>
-            <a:r>
-              <a:rPr lang="en-US" sz="4000" dirty="0">
-                <a:solidFill>
-                  <a:srgbClr val="111111"/>
-                </a:solidFill>
-                <a:latin typeface="Times New Roman" pitchFamily="34" charset="0"/>
-                <a:ea typeface="Times New Roman" pitchFamily="34" charset="-122"/>
-                <a:cs typeface="Times New Roman" pitchFamily="34" charset="-120"/>
-              </a:rPr>
-              <a:t>After a crash, the population may recover and repeat the cycle.</a:t>
-            </a:r>
-            <a:endParaRPr lang="en-US" sz="4000" dirty="0"/>
-          </a:p>
-          <a:p>
-            <a:pPr algn="l" indent="0" marL="0">
-              <a:spcAft>
-                <a:spcPts val="800"/>
-              </a:spcAft>
-              <a:buNone/>
-            </a:pPr>
-            <a:r>
-              <a:rPr lang="en-US" sz="4000" b="1" dirty="0">
-                <a:solidFill>
-                  <a:srgbClr val="111111"/>
-                </a:solidFill>
-                <a:latin typeface="Times New Roman" pitchFamily="34" charset="0"/>
-                <a:ea typeface="Times New Roman" pitchFamily="34" charset="-122"/>
-                <a:cs typeface="Times New Roman" pitchFamily="34" charset="-120"/>
-              </a:rPr>
-              <a:t>Instantaneous adjustment: </a:t>
-            </a:r>
-            <a:pPr algn="l" indent="0" marL="0">
-              <a:spcAft>
-                <a:spcPts val="800"/>
-              </a:spcAft>
-              <a:buNone/>
-            </a:pPr>
-            <a:r>
-              <a:rPr lang="en-US" sz="4000" dirty="0">
-                <a:solidFill>
-                  <a:srgbClr val="111111"/>
-                </a:solidFill>
-                <a:latin typeface="Times New Roman" pitchFamily="34" charset="0"/>
-                <a:ea typeface="Times New Roman" pitchFamily="34" charset="-122"/>
-                <a:cs typeface="Times New Roman" pitchFamily="34" charset="-120"/>
-              </a:rPr>
-              <a:t>The population stops abruptly at the carrying capacity; this is rare, for example after a volcanic eruption destroys the food of island birds.</a:t>
-            </a:r>
-            <a:endParaRPr lang="en-US" sz="4000" dirty="0"/>
+              <a:t>Illustration: growth curves</a:t>
+            </a:r>
+            <a:endParaRPr lang="en-US" sz="1600" dirty="0"/>
           </a:p>
         </p:txBody>
       </p:sp>
@@ -16416,7 +16570,7 @@
                 <a:ea typeface="Times New Roman" pitchFamily="34" charset="-122"/>
                 <a:cs typeface="Times New Roman" pitchFamily="34" charset="-120"/>
               </a:rPr>
-              <a:t>3. Population-Resource Regimes</a:t>
+              <a:t>2. Ways of Adjusting to Carrying Capacity</a:t>
             </a:r>
             <a:endParaRPr lang="en-US" sz="3600" dirty="0"/>
           </a:p>
@@ -16431,7 +16585,7 @@
         <p:spPr>
           <a:xfrm>
             <a:off x="365760" y="1783080"/>
-            <a:ext cx="4846320" cy="4617720"/>
+            <a:ext cx="6035040" cy="4617720"/>
           </a:xfrm>
           <a:prstGeom prst="rect">
             <a:avLst/>
@@ -16450,7 +16604,7 @@
               <a:buNone/>
             </a:pPr>
             <a:r>
-              <a:rPr lang="en-US" sz="3200" i="1" dirty="0">
+              <a:rPr lang="en-US" sz="3400" b="1" dirty="0">
                 <a:solidFill>
                   <a:srgbClr val="111111"/>
                 </a:solidFill>
@@ -16458,11 +16612,8 @@
                 <a:ea typeface="Times New Roman" pitchFamily="34" charset="-122"/>
                 <a:cs typeface="Times New Roman" pitchFamily="34" charset="-120"/>
               </a:rPr>
-              <a:t>The population-resource regimes are the following:</a:t>
-            </a:r>
-            <a:endParaRPr lang="en-US" sz="3200" dirty="0"/>
-          </a:p>
-          <a:p>
+              <a:t>Overshoot and oscillation (J-curve): </a:t>
+            </a:r>
             <a:pPr algn="l" indent="0" marL="0">
               <a:spcAft>
                 <a:spcPts val="800"/>
@@ -16470,7 +16621,7 @@
               <a:buNone/>
             </a:pPr>
             <a:r>
-              <a:rPr lang="en-US" sz="3200" b="1" dirty="0">
+              <a:rPr lang="en-US" sz="3400" dirty="0">
                 <a:solidFill>
                   <a:srgbClr val="111111"/>
                 </a:solidFill>
@@ -16478,32 +16629,15 @@
                 <a:ea typeface="Times New Roman" pitchFamily="34" charset="-122"/>
                 <a:cs typeface="Times New Roman" pitchFamily="34" charset="-120"/>
               </a:rPr>
-              <a:t>Overpopulation regime: </a:t>
-            </a:r>
-            <a:pPr algn="l" indent="0" marL="0">
-              <a:spcAft>
-                <a:spcPts val="800"/>
-              </a:spcAft>
-              <a:buNone/>
-            </a:pPr>
-            <a:r>
-              <a:rPr lang="en-US" sz="3200" dirty="0">
-                <a:solidFill>
-                  <a:srgbClr val="111111"/>
-                </a:solidFill>
-                <a:latin typeface="Times New Roman" pitchFamily="34" charset="0"/>
-                <a:ea typeface="Times New Roman" pitchFamily="34" charset="-122"/>
-                <a:cs typeface="Times New Roman" pitchFamily="34" charset="-120"/>
-              </a:rPr>
-              <a:t>Population exceeds carrying capacity, causing deforestation, overgrazing, water shortages and poverty, as in parts of the Sahel.</a:t>
-            </a:r>
-            <a:endParaRPr lang="en-US" sz="3200" dirty="0"/>
+              <a:t>Growth is exponential and passes the carrying capacity, then the population crashes through starvation or disease. Insects and algae behave in this way after a favourable season.</a:t>
+            </a:r>
+            <a:endParaRPr lang="en-US" sz="3400" dirty="0"/>
           </a:p>
         </p:txBody>
       </p:sp>
       <p:pic>
         <p:nvPicPr>
-          <p:cNvPr id="5" name="Image 0" descr="/home/claude/f4/img/v2/pop2_regimes3.png">    </p:cNvPr>
+          <p:cNvPr id="5" name="Image 0" descr="/home/claude/f4/img/v2/carrying_big.png">    </p:cNvPr>
           <p:cNvPicPr>
             <a:picLocks noChangeAspect="1"/>
           </p:cNvPicPr>
@@ -16517,8 +16651,8 @@
         </p:blipFill>
         <p:spPr>
           <a:xfrm>
-            <a:off x="5349240" y="2617506"/>
-            <a:ext cx="6659575" cy="2601397"/>
+            <a:off x="6537960" y="2721454"/>
+            <a:ext cx="5470855" cy="2393499"/>
           </a:xfrm>
           <a:prstGeom prst="rect">
             <a:avLst/>
@@ -16533,8 +16667,8 @@
         </p:nvSpPr>
         <p:spPr>
           <a:xfrm>
-            <a:off x="5349240" y="6089904"/>
-            <a:ext cx="6659575" cy="347472"/>
+            <a:off x="6537960" y="6089904"/>
+            <a:ext cx="5470855" cy="347472"/>
           </a:xfrm>
           <a:prstGeom prst="rect">
             <a:avLst/>
@@ -16558,7 +16692,7 @@
                 <a:ea typeface="Times New Roman" pitchFamily="34" charset="-122"/>
                 <a:cs typeface="Times New Roman" pitchFamily="34" charset="-120"/>
               </a:rPr>
-              <a:t>Illustration: three regimes</a:t>
+              <a:t>Illustration: carrying capacity</a:t>
             </a:r>
             <a:endParaRPr lang="en-US" sz="1600" dirty="0"/>
           </a:p>
@@ -16676,109 +16810,9 @@
           </a:p>
         </p:txBody>
       </p:sp>
-      <p:sp>
-        <p:nvSpPr>
-          <p:cNvPr id="3" name="Text 1"/>
-          <p:cNvSpPr/>
-          <p:nvPr/>
-        </p:nvSpPr>
-        <p:spPr>
-          <a:xfrm>
-            <a:off x="365760" y="1005840"/>
-            <a:ext cx="11460175" cy="731520"/>
-          </a:xfrm>
-          <a:prstGeom prst="rect">
-            <a:avLst/>
-          </a:prstGeom>
-          <a:noFill/>
-          <a:ln/>
-        </p:spPr>
-        <p:txBody>
-          <a:bodyPr wrap="square" lIns="0" tIns="0" rIns="0" bIns="0" rtlCol="0" anchor="ctr">
-            <a:normAutofit/>
-          </a:bodyPr>
-          <a:lstStyle/>
-          <a:p>
-            <a:pPr algn="ctr" indent="0" marL="0">
-              <a:buNone/>
-            </a:pPr>
-            <a:r>
-              <a:rPr lang="en-US" sz="3600" b="1" dirty="0">
-                <a:solidFill>
-                  <a:srgbClr val="990011"/>
-                </a:solidFill>
-                <a:latin typeface="Times New Roman" pitchFamily="34" charset="0"/>
-                <a:ea typeface="Times New Roman" pitchFamily="34" charset="-122"/>
-                <a:cs typeface="Times New Roman" pitchFamily="34" charset="-120"/>
-              </a:rPr>
-              <a:t>3. Population-Resource Regimes</a:t>
-            </a:r>
-            <a:endParaRPr lang="en-US" sz="3600" dirty="0"/>
-          </a:p>
-        </p:txBody>
-      </p:sp>
-      <p:sp>
-        <p:nvSpPr>
-          <p:cNvPr id="4" name="Text 2"/>
-          <p:cNvSpPr/>
-          <p:nvPr/>
-        </p:nvSpPr>
-        <p:spPr>
-          <a:xfrm>
-            <a:off x="365760" y="1783080"/>
-            <a:ext cx="4846320" cy="4617720"/>
-          </a:xfrm>
-          <a:prstGeom prst="rect">
-            <a:avLst/>
-          </a:prstGeom>
-          <a:noFill/>
-          <a:ln/>
-        </p:spPr>
-        <p:txBody>
-          <a:bodyPr wrap="square" lIns="0" tIns="0" rIns="0" bIns="0" rtlCol="0" anchor="t"/>
-          <a:lstStyle/>
-          <a:p>
-            <a:pPr algn="l" indent="0" marL="0">
-              <a:spcAft>
-                <a:spcPts val="800"/>
-              </a:spcAft>
-              <a:buNone/>
-            </a:pPr>
-            <a:r>
-              <a:rPr lang="en-US" sz="3600" b="1" dirty="0">
-                <a:solidFill>
-                  <a:srgbClr val="111111"/>
-                </a:solidFill>
-                <a:latin typeface="Times New Roman" pitchFamily="34" charset="0"/>
-                <a:ea typeface="Times New Roman" pitchFamily="34" charset="-122"/>
-                <a:cs typeface="Times New Roman" pitchFamily="34" charset="-120"/>
-              </a:rPr>
-              <a:t>Sustainable regime: </a:t>
-            </a:r>
-            <a:pPr algn="l" indent="0" marL="0">
-              <a:spcAft>
-                <a:spcPts val="800"/>
-              </a:spcAft>
-              <a:buNone/>
-            </a:pPr>
-            <a:r>
-              <a:rPr lang="en-US" sz="3600" dirty="0">
-                <a:solidFill>
-                  <a:srgbClr val="111111"/>
-                </a:solidFill>
-                <a:latin typeface="Times New Roman" pitchFamily="34" charset="0"/>
-                <a:ea typeface="Times New Roman" pitchFamily="34" charset="-122"/>
-                <a:cs typeface="Times New Roman" pitchFamily="34" charset="-120"/>
-              </a:rPr>
-              <a:t>Population is at or below carrying capacity and resources are managed carefully, as in Norway and Sweden.</a:t>
-            </a:r>
-            <a:endParaRPr lang="en-US" sz="3600" dirty="0"/>
-          </a:p>
-        </p:txBody>
-      </p:sp>
       <p:pic>
         <p:nvPicPr>
-          <p:cNvPr id="5" name="Image 0" descr="/home/claude/f4/img/v2/f2t_drought.jpg">    </p:cNvPr>
+          <p:cNvPr id="3" name="Image 0" descr="/home/claude/f4/img/minesec_sheet.png">    </p:cNvPr>
           <p:cNvPicPr>
             <a:picLocks noChangeAspect="1"/>
           </p:cNvPicPr>
@@ -16792,8 +16826,8 @@
         </p:blipFill>
         <p:spPr>
           <a:xfrm>
-            <a:off x="5349240" y="2071212"/>
-            <a:ext cx="6659575" cy="3693983"/>
+            <a:off x="0" y="658368"/>
+            <a:ext cx="5120640" cy="5833872"/>
           </a:xfrm>
           <a:prstGeom prst="rect">
             <a:avLst/>
@@ -16802,14 +16836,14 @@
       </p:pic>
       <p:sp>
         <p:nvSpPr>
-          <p:cNvPr id="6" name="Text 3"/>
+          <p:cNvPr id="4" name="Text 1"/>
           <p:cNvSpPr/>
           <p:nvPr/>
         </p:nvSpPr>
         <p:spPr>
           <a:xfrm>
-            <a:off x="5349240" y="6089904"/>
-            <a:ext cx="6659575" cy="347472"/>
+            <a:off x="5349240" y="1005840"/>
+            <a:ext cx="6522415" cy="731520"/>
           </a:xfrm>
           <a:prstGeom prst="rect">
             <a:avLst/>
@@ -16818,24 +16852,85 @@
           <a:ln/>
         </p:spPr>
         <p:txBody>
-          <a:bodyPr wrap="square" lIns="0" tIns="0" rIns="0" bIns="0" rtlCol="0" anchor="ctr"/>
+          <a:bodyPr wrap="square" lIns="0" tIns="0" rIns="0" bIns="0" rtlCol="0" anchor="ctr">
+            <a:normAutofit/>
+          </a:bodyPr>
           <a:lstStyle/>
           <a:p>
             <a:pPr algn="ctr" indent="0" marL="0">
               <a:buNone/>
             </a:pPr>
             <a:r>
-              <a:rPr lang="en-US" sz="1600" i="1" dirty="0">
-                <a:solidFill>
-                  <a:srgbClr val="555555"/>
+              <a:rPr lang="en-US" sz="3600" b="1" dirty="0">
+                <a:solidFill>
+                  <a:srgbClr val="990011"/>
                 </a:solidFill>
                 <a:latin typeface="Times New Roman" pitchFamily="34" charset="0"/>
                 <a:ea typeface="Times New Roman" pitchFamily="34" charset="-122"/>
                 <a:cs typeface="Times New Roman" pitchFamily="34" charset="-120"/>
               </a:rPr>
-              <a:t>Illustration: drought in the Sahel</a:t>
-            </a:r>
-            <a:endParaRPr lang="en-US" sz="1600" dirty="0"/>
+              <a:t>2. Ways of Adjusting to Carrying Capacity</a:t>
+            </a:r>
+            <a:endParaRPr lang="en-US" sz="3600" dirty="0"/>
+          </a:p>
+        </p:txBody>
+      </p:sp>
+      <p:sp>
+        <p:nvSpPr>
+          <p:cNvPr id="5" name="Text 2"/>
+          <p:cNvSpPr/>
+          <p:nvPr/>
+        </p:nvSpPr>
+        <p:spPr>
+          <a:xfrm>
+            <a:off x="5349240" y="1783080"/>
+            <a:ext cx="6522415" cy="4663440"/>
+          </a:xfrm>
+          <a:prstGeom prst="rect">
+            <a:avLst/>
+          </a:prstGeom>
+          <a:noFill/>
+          <a:ln/>
+        </p:spPr>
+        <p:txBody>
+          <a:bodyPr wrap="square" lIns="0" tIns="0" rIns="0" bIns="0" rtlCol="0" anchor="t"/>
+          <a:lstStyle/>
+          <a:p>
+            <a:pPr algn="l" indent="0" marL="0">
+              <a:spcAft>
+                <a:spcPts val="800"/>
+              </a:spcAft>
+              <a:buNone/>
+            </a:pPr>
+            <a:r>
+              <a:rPr lang="en-US" sz="4000" b="1" dirty="0">
+                <a:solidFill>
+                  <a:srgbClr val="111111"/>
+                </a:solidFill>
+                <a:latin typeface="Times New Roman" pitchFamily="34" charset="0"/>
+                <a:ea typeface="Times New Roman" pitchFamily="34" charset="-122"/>
+                <a:cs typeface="Times New Roman" pitchFamily="34" charset="-120"/>
+              </a:rPr>
+              <a:t>Boom and bust: </a:t>
+            </a:r>
+            <a:pPr algn="l" indent="0" marL="0">
+              <a:spcAft>
+                <a:spcPts val="800"/>
+              </a:spcAft>
+              <a:buNone/>
+            </a:pPr>
+            <a:r>
+              <a:rPr lang="en-US" sz="4000" dirty="0">
+                <a:solidFill>
+                  <a:srgbClr val="111111"/>
+                </a:solidFill>
+                <a:latin typeface="Times New Roman" pitchFamily="34" charset="0"/>
+                <a:ea typeface="Times New Roman" pitchFamily="34" charset="-122"/>
+                <a:cs typeface="Times New Roman" pitchFamily="34" charset="-120"/>
+              </a:rPr>
+              <a:t>After a crash, the population may recover and grow again. It then repeats the cycle of rises and falls around the carrying capacity.</a:t>
+            </a:r>
+            <a:endParaRPr lang="en-US" sz="4000" dirty="0"/>
           </a:p>
         </p:txBody>
       </p:sp>
@@ -16968,7 +17063,7 @@
         <p:spPr>
           <a:xfrm>
             <a:off x="0" y="658368"/>
-            <a:ext cx="5120640" cy="5833872"/>
+            <a:ext cx="3840480" cy="5833872"/>
           </a:xfrm>
           <a:prstGeom prst="rect">
             <a:avLst/>
@@ -16983,8 +17078,8 @@
         </p:nvSpPr>
         <p:spPr>
           <a:xfrm>
-            <a:off x="5349240" y="1005840"/>
-            <a:ext cx="6522415" cy="731520"/>
+            <a:off x="4069080" y="1005840"/>
+            <a:ext cx="7802575" cy="731520"/>
           </a:xfrm>
           <a:prstGeom prst="rect">
             <a:avLst/>
@@ -17010,7 +17105,7 @@
                 <a:ea typeface="Times New Roman" pitchFamily="34" charset="-122"/>
                 <a:cs typeface="Times New Roman" pitchFamily="34" charset="-120"/>
               </a:rPr>
-              <a:t>3. Population-Resource Regimes</a:t>
+              <a:t>2. Ways of Adjusting to Carrying Capacity</a:t>
             </a:r>
             <a:endParaRPr lang="en-US" sz="3600" dirty="0"/>
           </a:p>
@@ -17024,8 +17119,8 @@
         </p:nvSpPr>
         <p:spPr>
           <a:xfrm>
-            <a:off x="5349240" y="1783080"/>
-            <a:ext cx="6522415" cy="4663440"/>
+            <a:off x="4069080" y="1783080"/>
+            <a:ext cx="7802575" cy="4663440"/>
           </a:xfrm>
           <a:prstGeom prst="rect">
             <a:avLst/>
@@ -17052,7 +17147,7 @@
                 <a:ea typeface="Times New Roman" pitchFamily="34" charset="-122"/>
                 <a:cs typeface="Times New Roman" pitchFamily="34" charset="-120"/>
               </a:rPr>
-              <a:t>Underpopulation regime: </a:t>
+              <a:t>Instantaneous adjustment: </a:t>
             </a:r>
             <a:pPr algn="l" indent="0" marL="0">
               <a:spcAft>
@@ -17069,7 +17164,7 @@
                 <a:ea typeface="Times New Roman" pitchFamily="34" charset="-122"/>
                 <a:cs typeface="Times New Roman" pitchFamily="34" charset="-120"/>
               </a:rPr>
-              <a:t>Population is far below carrying capacity, with rich resources, labour shortages and small markets, as in northern Canada and Siberia.</a:t>
+              <a:t>The population stops abruptly at the carrying capacity without passing it. This is rare, for example when a volcanic eruption suddenly destroys the food of island birds.</a:t>
             </a:r>
             <a:endParaRPr lang="en-US" sz="4000" dirty="0"/>
           </a:p>
@@ -17181,15 +17276,135 @@
                 <a:ea typeface="Calibri" pitchFamily="34" charset="-122"/>
                 <a:cs typeface="Calibri" pitchFamily="34" charset="-120"/>
               </a:rPr>
-              <a:t>FORMATIVE EVALUATION</a:t>
+              <a:t>BOARD SUMMARY</a:t>
             </a:r>
             <a:endParaRPr lang="en-US" sz="1400" dirty="0"/>
+          </a:p>
+        </p:txBody>
+      </p:sp>
+      <p:sp>
+        <p:nvSpPr>
+          <p:cNvPr id="3" name="Text 1"/>
+          <p:cNvSpPr/>
+          <p:nvPr/>
+        </p:nvSpPr>
+        <p:spPr>
+          <a:xfrm>
+            <a:off x="365760" y="1005840"/>
+            <a:ext cx="11460175" cy="731520"/>
+          </a:xfrm>
+          <a:prstGeom prst="rect">
+            <a:avLst/>
+          </a:prstGeom>
+          <a:noFill/>
+          <a:ln/>
+        </p:spPr>
+        <p:txBody>
+          <a:bodyPr wrap="square" lIns="0" tIns="0" rIns="0" bIns="0" rtlCol="0" anchor="ctr">
+            <a:normAutofit/>
+          </a:bodyPr>
+          <a:lstStyle/>
+          <a:p>
+            <a:pPr algn="ctr" indent="0" marL="0">
+              <a:buNone/>
+            </a:pPr>
+            <a:r>
+              <a:rPr lang="en-US" sz="3600" b="1" dirty="0">
+                <a:solidFill>
+                  <a:srgbClr val="990011"/>
+                </a:solidFill>
+                <a:latin typeface="Times New Roman" pitchFamily="34" charset="0"/>
+                <a:ea typeface="Times New Roman" pitchFamily="34" charset="-122"/>
+                <a:cs typeface="Times New Roman" pitchFamily="34" charset="-120"/>
+              </a:rPr>
+              <a:t>3. Population-Resource Regimes</a:t>
+            </a:r>
+            <a:endParaRPr lang="en-US" sz="3600" dirty="0"/>
+          </a:p>
+        </p:txBody>
+      </p:sp>
+      <p:sp>
+        <p:nvSpPr>
+          <p:cNvPr id="4" name="Text 2"/>
+          <p:cNvSpPr/>
+          <p:nvPr/>
+        </p:nvSpPr>
+        <p:spPr>
+          <a:xfrm>
+            <a:off x="365760" y="1783080"/>
+            <a:ext cx="6035040" cy="4617720"/>
+          </a:xfrm>
+          <a:prstGeom prst="rect">
+            <a:avLst/>
+          </a:prstGeom>
+          <a:noFill/>
+          <a:ln/>
+        </p:spPr>
+        <p:txBody>
+          <a:bodyPr wrap="square" lIns="0" tIns="0" rIns="0" bIns="0" rtlCol="0" anchor="t"/>
+          <a:lstStyle/>
+          <a:p>
+            <a:pPr algn="l" indent="0" marL="0">
+              <a:spcAft>
+                <a:spcPts val="800"/>
+              </a:spcAft>
+              <a:buNone/>
+            </a:pPr>
+            <a:r>
+              <a:rPr lang="en-US" sz="3200" i="1" dirty="0">
+                <a:solidFill>
+                  <a:srgbClr val="111111"/>
+                </a:solidFill>
+                <a:latin typeface="Times New Roman" pitchFamily="34" charset="0"/>
+                <a:ea typeface="Times New Roman" pitchFamily="34" charset="-122"/>
+                <a:cs typeface="Times New Roman" pitchFamily="34" charset="-120"/>
+              </a:rPr>
+              <a:t>The relationship between population and resources gives the following regimes:</a:t>
+            </a:r>
+            <a:endParaRPr lang="en-US" sz="3200" dirty="0"/>
+          </a:p>
+          <a:p>
+            <a:pPr algn="l" indent="0" marL="0">
+              <a:spcAft>
+                <a:spcPts val="800"/>
+              </a:spcAft>
+              <a:buNone/>
+            </a:pPr>
+            <a:r>
+              <a:rPr lang="en-US" sz="3200" b="1" dirty="0">
+                <a:solidFill>
+                  <a:srgbClr val="111111"/>
+                </a:solidFill>
+                <a:latin typeface="Times New Roman" pitchFamily="34" charset="0"/>
+                <a:ea typeface="Times New Roman" pitchFamily="34" charset="-122"/>
+                <a:cs typeface="Times New Roman" pitchFamily="34" charset="-120"/>
+              </a:rPr>
+              <a:t>Overpopulation regime: </a:t>
+            </a:r>
+            <a:pPr algn="l" indent="0" marL="0">
+              <a:spcAft>
+                <a:spcPts val="800"/>
+              </a:spcAft>
+              <a:buNone/>
+            </a:pPr>
+            <a:r>
+              <a:rPr lang="en-US" sz="3200" dirty="0">
+                <a:solidFill>
+                  <a:srgbClr val="111111"/>
+                </a:solidFill>
+                <a:latin typeface="Times New Roman" pitchFamily="34" charset="0"/>
+                <a:ea typeface="Times New Roman" pitchFamily="34" charset="-122"/>
+                <a:cs typeface="Times New Roman" pitchFamily="34" charset="-120"/>
+              </a:rPr>
+              <a:t>The population exceeds the carrying capacity, causing deforestation, overgrazing, water shortages and poverty. Parts of the Sahel are in this situation.</a:t>
+            </a:r>
+            <a:endParaRPr lang="en-US" sz="3200" dirty="0"/>
           </a:p>
         </p:txBody>
       </p:sp>
       <p:pic>
         <p:nvPicPr>
-          <p:cNvPr id="3" name="Image 0" descr="/home/claude/f4/img/minesec_sheet.png">    </p:cNvPr>
+          <p:cNvPr id="5" name="Image 0" descr="/home/claude/f4/img/v2/pop2_regimes3.png">    </p:cNvPr>
           <p:cNvPicPr>
             <a:picLocks noChangeAspect="1"/>
           </p:cNvPicPr>
@@ -17203,8 +17418,8 @@
         </p:blipFill>
         <p:spPr>
           <a:xfrm>
-            <a:off x="0" y="658368"/>
-            <a:ext cx="5120640" cy="5833872"/>
+            <a:off x="6537960" y="2849678"/>
+            <a:ext cx="5470855" cy="2137053"/>
           </a:xfrm>
           <a:prstGeom prst="rect">
             <a:avLst/>
@@ -17213,14 +17428,14 @@
       </p:pic>
       <p:sp>
         <p:nvSpPr>
-          <p:cNvPr id="4" name="Text 1"/>
+          <p:cNvPr id="6" name="Text 3"/>
           <p:cNvSpPr/>
           <p:nvPr/>
         </p:nvSpPr>
         <p:spPr>
           <a:xfrm>
-            <a:off x="5349240" y="1005840"/>
-            <a:ext cx="6522415" cy="731520"/>
+            <a:off x="6537960" y="6089904"/>
+            <a:ext cx="5470855" cy="347472"/>
           </a:xfrm>
           <a:prstGeom prst="rect">
             <a:avLst/>
@@ -17229,68 +17444,24 @@
           <a:ln/>
         </p:spPr>
         <p:txBody>
-          <a:bodyPr wrap="square" lIns="0" tIns="0" rIns="0" bIns="0" rtlCol="0" anchor="ctr">
-            <a:normAutofit/>
-          </a:bodyPr>
+          <a:bodyPr wrap="square" lIns="0" tIns="0" rIns="0" bIns="0" rtlCol="0" anchor="ctr"/>
           <a:lstStyle/>
           <a:p>
             <a:pPr algn="ctr" indent="0" marL="0">
               <a:buNone/>
             </a:pPr>
             <a:r>
-              <a:rPr lang="en-US" sz="3600" b="1" dirty="0">
-                <a:solidFill>
-                  <a:srgbClr val="990011"/>
+              <a:rPr lang="en-US" sz="1600" i="1" dirty="0">
+                <a:solidFill>
+                  <a:srgbClr val="555555"/>
                 </a:solidFill>
                 <a:latin typeface="Times New Roman" pitchFamily="34" charset="0"/>
                 <a:ea typeface="Times New Roman" pitchFamily="34" charset="-122"/>
                 <a:cs typeface="Times New Roman" pitchFamily="34" charset="-120"/>
               </a:rPr>
-              <a:t>Evaluation 1</a:t>
-            </a:r>
-            <a:endParaRPr lang="en-US" sz="3600" dirty="0"/>
-          </a:p>
-        </p:txBody>
-      </p:sp>
-      <p:sp>
-        <p:nvSpPr>
-          <p:cNvPr id="5" name="Text 2"/>
-          <p:cNvSpPr/>
-          <p:nvPr/>
-        </p:nvSpPr>
-        <p:spPr>
-          <a:xfrm>
-            <a:off x="5349240" y="1783080"/>
-            <a:ext cx="6522415" cy="4663440"/>
-          </a:xfrm>
-          <a:prstGeom prst="rect">
-            <a:avLst/>
-          </a:prstGeom>
-          <a:noFill/>
-          <a:ln/>
-        </p:spPr>
-        <p:txBody>
-          <a:bodyPr wrap="square" lIns="0" tIns="0" rIns="0" bIns="0" rtlCol="0" anchor="t"/>
-          <a:lstStyle/>
-          <a:p>
-            <a:pPr algn="l" indent="0" marL="0">
-              <a:spcAft>
-                <a:spcPts val="800"/>
-              </a:spcAft>
-              <a:buNone/>
-            </a:pPr>
-            <a:r>
-              <a:rPr lang="en-US" sz="4000" dirty="0">
-                <a:solidFill>
-                  <a:srgbClr val="111111"/>
-                </a:solidFill>
-                <a:latin typeface="Times New Roman" pitchFamily="34" charset="0"/>
-                <a:ea typeface="Times New Roman" pitchFamily="34" charset="-122"/>
-                <a:cs typeface="Times New Roman" pitchFamily="34" charset="-120"/>
-              </a:rPr>
-              <a:t>Distinguish between the S-curve and the J-curve.</a:t>
-            </a:r>
-            <a:endParaRPr lang="en-US" sz="4000" dirty="0"/>
+              <a:t>Illustration: population-resource regimes</a:t>
+            </a:r>
+            <a:endParaRPr lang="en-US" sz="1600" dirty="0"/>
           </a:p>
         </p:txBody>
       </p:sp>
@@ -17400,7 +17571,7 @@
                 <a:ea typeface="Calibri" pitchFamily="34" charset="-122"/>
                 <a:cs typeface="Calibri" pitchFamily="34" charset="-120"/>
               </a:rPr>
-              <a:t>FORMATIVE EVALUATION</a:t>
+              <a:t>BOARD SUMMARY</a:t>
             </a:r>
             <a:endParaRPr lang="en-US" sz="1400" dirty="0"/>
           </a:p>
@@ -17465,7 +17636,7 @@
                 <a:ea typeface="Times New Roman" pitchFamily="34" charset="-122"/>
                 <a:cs typeface="Times New Roman" pitchFamily="34" charset="-120"/>
               </a:rPr>
-              <a:t>Expected Answer</a:t>
+              <a:t>3. Population-Resource Regimes</a:t>
             </a:r>
             <a:endParaRPr lang="en-US" sz="3600" dirty="0"/>
           </a:p>
@@ -17499,7 +17670,7 @@
               <a:buNone/>
             </a:pPr>
             <a:r>
-              <a:rPr lang="en-US" sz="4000" dirty="0">
+              <a:rPr lang="en-US" sz="4000" b="1" dirty="0">
                 <a:solidFill>
                   <a:srgbClr val="111111"/>
                 </a:solidFill>
@@ -17507,7 +17678,24 @@
                 <a:ea typeface="Times New Roman" pitchFamily="34" charset="-122"/>
                 <a:cs typeface="Times New Roman" pitchFamily="34" charset="-120"/>
               </a:rPr>
-              <a:t>On the S-curve growth slows and stabilises at the carrying capacity; on the J-curve growth overshoots it and then crashes.</a:t>
+              <a:t>Sustainable (optimum) regime: </a:t>
+            </a:r>
+            <a:pPr algn="l" indent="0" marL="0">
+              <a:spcAft>
+                <a:spcPts val="800"/>
+              </a:spcAft>
+              <a:buNone/>
+            </a:pPr>
+            <a:r>
+              <a:rPr lang="en-US" sz="4000" dirty="0">
+                <a:solidFill>
+                  <a:srgbClr val="111111"/>
+                </a:solidFill>
+                <a:latin typeface="Times New Roman" pitchFamily="34" charset="0"/>
+                <a:ea typeface="Times New Roman" pitchFamily="34" charset="-122"/>
+                <a:cs typeface="Times New Roman" pitchFamily="34" charset="-120"/>
+              </a:rPr>
+              <a:t>The population is at or below the carrying capacity, and resources are managed carefully. Norway and Sweden are examples.</a:t>
             </a:r>
             <a:endParaRPr lang="en-US" sz="4000" dirty="0"/>
           </a:p>
@@ -17619,7 +17807,7 @@
                 <a:ea typeface="Calibri" pitchFamily="34" charset="-122"/>
                 <a:cs typeface="Calibri" pitchFamily="34" charset="-120"/>
               </a:rPr>
-              <a:t>FORMATIVE EVALUATION</a:t>
+              <a:t>BOARD SUMMARY</a:t>
             </a:r>
             <a:endParaRPr lang="en-US" sz="1400" dirty="0"/>
           </a:p>
@@ -17684,7 +17872,7 @@
                 <a:ea typeface="Times New Roman" pitchFamily="34" charset="-122"/>
                 <a:cs typeface="Times New Roman" pitchFamily="34" charset="-120"/>
               </a:rPr>
-              <a:t>Evaluation 2</a:t>
+              <a:t>3. Population-Resource Regimes</a:t>
             </a:r>
             <a:endParaRPr lang="en-US" sz="3600" dirty="0"/>
           </a:p>
@@ -17718,7 +17906,7 @@
               <a:buNone/>
             </a:pPr>
             <a:r>
-              <a:rPr lang="en-US" sz="4000" dirty="0">
+              <a:rPr lang="en-US" sz="4000" b="1" dirty="0">
                 <a:solidFill>
                   <a:srgbClr val="111111"/>
                 </a:solidFill>
@@ -17726,7 +17914,24 @@
                 <a:ea typeface="Times New Roman" pitchFamily="34" charset="-122"/>
                 <a:cs typeface="Times New Roman" pitchFamily="34" charset="-120"/>
               </a:rPr>
-              <a:t>Which curve is more stable, and why?</a:t>
+              <a:t>Underpopulation regime: </a:t>
+            </a:r>
+            <a:pPr algn="l" indent="0" marL="0">
+              <a:spcAft>
+                <a:spcPts val="800"/>
+              </a:spcAft>
+              <a:buNone/>
+            </a:pPr>
+            <a:r>
+              <a:rPr lang="en-US" sz="4000" dirty="0">
+                <a:solidFill>
+                  <a:srgbClr val="111111"/>
+                </a:solidFill>
+                <a:latin typeface="Times New Roman" pitchFamily="34" charset="0"/>
+                <a:ea typeface="Times New Roman" pitchFamily="34" charset="-122"/>
+                <a:cs typeface="Times New Roman" pitchFamily="34" charset="-120"/>
+              </a:rPr>
+              <a:t>The population is far below the carrying capacity, with rich resources, labour shortages and small markets. Northern Canada and Siberia are examples.</a:t>
             </a:r>
             <a:endParaRPr lang="en-US" sz="4000" dirty="0"/>
           </a:p>
@@ -17903,7 +18108,7 @@
                 <a:ea typeface="Times New Roman" pitchFamily="34" charset="-122"/>
                 <a:cs typeface="Times New Roman" pitchFamily="34" charset="-120"/>
               </a:rPr>
-              <a:t>Expected Answer</a:t>
+              <a:t>Evaluation 1</a:t>
             </a:r>
             <a:endParaRPr lang="en-US" sz="3600" dirty="0"/>
           </a:p>
@@ -17945,7 +18150,7 @@
                 <a:ea typeface="Times New Roman" pitchFamily="34" charset="-122"/>
                 <a:cs typeface="Times New Roman" pitchFamily="34" charset="-120"/>
               </a:rPr>
-              <a:t>The S-curve, because the population adjusts to its resources without destroying them.</a:t>
+              <a:t>Distinguish between the S-curve and the J-curve.</a:t>
             </a:r>
             <a:endParaRPr lang="en-US" sz="4000" dirty="0"/>
           </a:p>
@@ -18276,7 +18481,7 @@
                 <a:ea typeface="Calibri" pitchFamily="34" charset="-122"/>
                 <a:cs typeface="Calibri" pitchFamily="34" charset="-120"/>
               </a:rPr>
-              <a:t>REMEDIATION</a:t>
+              <a:t>FORMATIVE EVALUATION</a:t>
             </a:r>
             <a:endParaRPr lang="en-US" sz="1400" dirty="0"/>
           </a:p>
@@ -18299,7 +18504,7 @@
         <p:spPr>
           <a:xfrm>
             <a:off x="0" y="658368"/>
-            <a:ext cx="1463040" cy="5833872"/>
+            <a:ext cx="5120640" cy="5833872"/>
           </a:xfrm>
           <a:prstGeom prst="rect">
             <a:avLst/>
@@ -18314,8 +18519,8 @@
         </p:nvSpPr>
         <p:spPr>
           <a:xfrm>
-            <a:off x="1691640" y="1005840"/>
-            <a:ext cx="10180015" cy="731520"/>
+            <a:off x="5349240" y="1005840"/>
+            <a:ext cx="6522415" cy="731520"/>
           </a:xfrm>
           <a:prstGeom prst="rect">
             <a:avLst/>
@@ -18341,7 +18546,7 @@
                 <a:ea typeface="Times New Roman" pitchFamily="34" charset="-122"/>
                 <a:cs typeface="Times New Roman" pitchFamily="34" charset="-120"/>
               </a:rPr>
-              <a:t>Remediation</a:t>
+              <a:t>Expected Answer</a:t>
             </a:r>
             <a:endParaRPr lang="en-US" sz="3600" dirty="0"/>
           </a:p>
@@ -18355,8 +18560,8 @@
         </p:nvSpPr>
         <p:spPr>
           <a:xfrm>
-            <a:off x="1691640" y="1783080"/>
-            <a:ext cx="10180015" cy="4663440"/>
+            <a:off x="5349240" y="1783080"/>
+            <a:ext cx="6522415" cy="4663440"/>
           </a:xfrm>
           <a:prstGeom prst="rect">
             <a:avLst/>
@@ -18375,7 +18580,7 @@
               <a:buNone/>
             </a:pPr>
             <a:r>
-              <a:rPr lang="en-US" sz="4000" b="1" dirty="0">
+              <a:rPr lang="en-US" sz="4000" dirty="0">
                 <a:solidFill>
                   <a:srgbClr val="111111"/>
                 </a:solidFill>
@@ -18383,73 +18588,7 @@
                 <a:ea typeface="Times New Roman" pitchFamily="34" charset="-122"/>
                 <a:cs typeface="Times New Roman" pitchFamily="34" charset="-120"/>
               </a:rPr>
-              <a:t>Fill in the blanks:</a:t>
-            </a:r>
-            <a:endParaRPr lang="en-US" sz="4000" dirty="0"/>
-          </a:p>
-          <a:p>
-            <a:pPr algn="l" marL="342900" indent="-342900">
-              <a:spcAft>
-                <a:spcPts val="800"/>
-              </a:spcAft>
-              <a:buSzPct val="100000"/>
-              <a:buFont typeface="+mj-lt"/>
-              <a:buAutoNum type="arabicPeriod" startAt="1"/>
-            </a:pPr>
-            <a:r>
-              <a:rPr lang="en-US" sz="4000" dirty="0">
-                <a:solidFill>
-                  <a:srgbClr val="111111"/>
-                </a:solidFill>
-                <a:latin typeface="Times New Roman" pitchFamily="34" charset="0"/>
-                <a:ea typeface="Times New Roman" pitchFamily="34" charset="-122"/>
-                <a:cs typeface="Times New Roman" pitchFamily="34" charset="-120"/>
-              </a:rPr>
-              <a:t>The maximum population an environment can support is its ______ capacity.</a:t>
-            </a:r>
-            <a:endParaRPr lang="en-US" sz="4000" dirty="0"/>
-          </a:p>
-          <a:p>
-            <a:pPr algn="l" marL="342900" indent="-342900">
-              <a:spcAft>
-                <a:spcPts val="800"/>
-              </a:spcAft>
-              <a:buSzPct val="100000"/>
-              <a:buFont typeface="+mj-lt"/>
-              <a:buAutoNum type="arabicPeriod" startAt="1"/>
-            </a:pPr>
-            <a:r>
-              <a:rPr lang="en-US" sz="4000" dirty="0">
-                <a:solidFill>
-                  <a:srgbClr val="111111"/>
-                </a:solidFill>
-                <a:latin typeface="Times New Roman" pitchFamily="34" charset="0"/>
-                <a:ea typeface="Times New Roman" pitchFamily="34" charset="-122"/>
-                <a:cs typeface="Times New Roman" pitchFamily="34" charset="-120"/>
-              </a:rPr>
-              <a:t>Logistic growth has the shape of the letter ______.</a:t>
-            </a:r>
-            <a:endParaRPr lang="en-US" sz="4000" dirty="0"/>
-          </a:p>
-          <a:p>
-            <a:pPr algn="l" marL="342900" indent="-342900">
-              <a:spcAft>
-                <a:spcPts val="800"/>
-              </a:spcAft>
-              <a:buSzPct val="100000"/>
-              <a:buFont typeface="+mj-lt"/>
-              <a:buAutoNum type="arabicPeriod" startAt="1"/>
-            </a:pPr>
-            <a:r>
-              <a:rPr lang="en-US" sz="4000" dirty="0">
-                <a:solidFill>
-                  <a:srgbClr val="111111"/>
-                </a:solidFill>
-                <a:latin typeface="Times New Roman" pitchFamily="34" charset="0"/>
-                <a:ea typeface="Times New Roman" pitchFamily="34" charset="-122"/>
-                <a:cs typeface="Times New Roman" pitchFamily="34" charset="-120"/>
-              </a:rPr>
-              <a:t>Norway is an example of a ______ regime.</a:t>
+              <a:t>On the S-curve growth slows and stabilises at the carrying capacity; on the J-curve growth overshoots it and then crashes.</a:t>
             </a:r>
             <a:endParaRPr lang="en-US" sz="4000" dirty="0"/>
           </a:p>
@@ -18561,7 +18700,7 @@
                 <a:ea typeface="Calibri" pitchFamily="34" charset="-122"/>
                 <a:cs typeface="Calibri" pitchFamily="34" charset="-120"/>
               </a:rPr>
-              <a:t>HOMEWORK</a:t>
+              <a:t>FORMATIVE EVALUATION</a:t>
             </a:r>
             <a:endParaRPr lang="en-US" sz="1400" dirty="0"/>
           </a:p>
@@ -18626,7 +18765,7 @@
                 <a:ea typeface="Times New Roman" pitchFamily="34" charset="-122"/>
                 <a:cs typeface="Times New Roman" pitchFamily="34" charset="-120"/>
               </a:rPr>
-              <a:t>Homework</a:t>
+              <a:t>Evaluation 2</a:t>
             </a:r>
             <a:endParaRPr lang="en-US" sz="3600" dirty="0"/>
           </a:p>
@@ -18668,7 +18807,7 @@
                 <a:ea typeface="Times New Roman" pitchFamily="34" charset="-122"/>
                 <a:cs typeface="Times New Roman" pitchFamily="34" charset="-120"/>
               </a:rPr>
-              <a:t>Give one indicator of overpopulation.</a:t>
+              <a:t>Which curve is more stable, and why?</a:t>
             </a:r>
             <a:endParaRPr lang="en-US" sz="4000" dirty="0"/>
           </a:p>
@@ -18780,7 +18919,7 @@
                 <a:ea typeface="Calibri" pitchFamily="34" charset="-122"/>
                 <a:cs typeface="Calibri" pitchFamily="34" charset="-120"/>
               </a:rPr>
-              <a:t>NEXT LESSON</a:t>
+              <a:t>FORMATIVE EVALUATION</a:t>
             </a:r>
             <a:endParaRPr lang="en-US" sz="1400" dirty="0"/>
           </a:p>
@@ -18845,7 +18984,7 @@
                 <a:ea typeface="Times New Roman" pitchFamily="34" charset="-122"/>
                 <a:cs typeface="Times New Roman" pitchFamily="34" charset="-120"/>
               </a:rPr>
-              <a:t>Next Lesson</a:t>
+              <a:t>Expected Answer</a:t>
             </a:r>
             <a:endParaRPr lang="en-US" sz="3600" dirty="0"/>
           </a:p>
@@ -18869,17 +19008,17 @@
           <a:ln/>
         </p:spPr>
         <p:txBody>
-          <a:bodyPr wrap="square" lIns="0" tIns="0" rIns="0" bIns="0" rtlCol="0" anchor="ctr"/>
-          <a:lstStyle/>
-          <a:p>
-            <a:pPr algn="ctr" indent="0" marL="0">
+          <a:bodyPr wrap="square" lIns="0" tIns="0" rIns="0" bIns="0" rtlCol="0" anchor="t"/>
+          <a:lstStyle/>
+          <a:p>
+            <a:pPr algn="l" indent="0" marL="0">
               <a:spcAft>
                 <a:spcPts val="800"/>
               </a:spcAft>
               <a:buNone/>
             </a:pPr>
             <a:r>
-              <a:rPr lang="en-US" sz="4000" b="1" dirty="0">
+              <a:rPr lang="en-US" sz="4000" dirty="0">
                 <a:solidFill>
                   <a:srgbClr val="111111"/>
                 </a:solidFill>
@@ -18887,27 +19026,7 @@
                 <a:ea typeface="Times New Roman" pitchFamily="34" charset="-122"/>
                 <a:cs typeface="Times New Roman" pitchFamily="34" charset="-120"/>
               </a:rPr>
-              <a:t>Our next lesson will be on:</a:t>
-            </a:r>
-            <a:endParaRPr lang="en-US" sz="4000" dirty="0"/>
-          </a:p>
-          <a:p>
-            <a:pPr algn="ctr" indent="0" marL="0">
-              <a:spcAft>
-                <a:spcPts val="800"/>
-              </a:spcAft>
-              <a:buNone/>
-            </a:pPr>
-            <a:r>
-              <a:rPr lang="en-US" sz="4000" b="1" dirty="0">
-                <a:solidFill>
-                  <a:srgbClr val="990011"/>
-                </a:solidFill>
-                <a:latin typeface="Times New Roman" pitchFamily="34" charset="0"/>
-                <a:ea typeface="Times New Roman" pitchFamily="34" charset="-122"/>
-                <a:cs typeface="Times New Roman" pitchFamily="34" charset="-120"/>
-              </a:rPr>
-              <a:t>Lesson 17: Overpopulation, Underpopulation and Optimum Population</a:t>
+              <a:t>The S-curve, because the population adjusts to its resources without destroying them.</a:t>
             </a:r>
             <a:endParaRPr lang="en-US" sz="4000" dirty="0"/>
           </a:p>
@@ -19019,6 +19138,749 @@
                 <a:ea typeface="Calibri" pitchFamily="34" charset="-122"/>
                 <a:cs typeface="Calibri" pitchFamily="34" charset="-120"/>
               </a:rPr>
+              <a:t>REMEDIATION</a:t>
+            </a:r>
+            <a:endParaRPr lang="en-US" sz="1400" dirty="0"/>
+          </a:p>
+        </p:txBody>
+      </p:sp>
+      <p:pic>
+        <p:nvPicPr>
+          <p:cNvPr id="3" name="Image 0" descr="/home/claude/f4/img/minesec_sheet.png">    </p:cNvPr>
+          <p:cNvPicPr>
+            <a:picLocks noChangeAspect="1"/>
+          </p:cNvPicPr>
+          <p:nvPr/>
+        </p:nvPicPr>
+        <p:blipFill>
+          <a:blip r:embed="rId1"/>
+          <a:stretch>
+            <a:fillRect/>
+          </a:stretch>
+        </p:blipFill>
+        <p:spPr>
+          <a:xfrm>
+            <a:off x="0" y="658368"/>
+            <a:ext cx="1463040" cy="5833872"/>
+          </a:xfrm>
+          <a:prstGeom prst="rect">
+            <a:avLst/>
+          </a:prstGeom>
+        </p:spPr>
+      </p:pic>
+      <p:sp>
+        <p:nvSpPr>
+          <p:cNvPr id="4" name="Text 1"/>
+          <p:cNvSpPr/>
+          <p:nvPr/>
+        </p:nvSpPr>
+        <p:spPr>
+          <a:xfrm>
+            <a:off x="1691640" y="1005840"/>
+            <a:ext cx="10180015" cy="731520"/>
+          </a:xfrm>
+          <a:prstGeom prst="rect">
+            <a:avLst/>
+          </a:prstGeom>
+          <a:noFill/>
+          <a:ln/>
+        </p:spPr>
+        <p:txBody>
+          <a:bodyPr wrap="square" lIns="0" tIns="0" rIns="0" bIns="0" rtlCol="0" anchor="ctr">
+            <a:normAutofit/>
+          </a:bodyPr>
+          <a:lstStyle/>
+          <a:p>
+            <a:pPr algn="ctr" indent="0" marL="0">
+              <a:buNone/>
+            </a:pPr>
+            <a:r>
+              <a:rPr lang="en-US" sz="3600" b="1" dirty="0">
+                <a:solidFill>
+                  <a:srgbClr val="990011"/>
+                </a:solidFill>
+                <a:latin typeface="Times New Roman" pitchFamily="34" charset="0"/>
+                <a:ea typeface="Times New Roman" pitchFamily="34" charset="-122"/>
+                <a:cs typeface="Times New Roman" pitchFamily="34" charset="-120"/>
+              </a:rPr>
+              <a:t>Remediation</a:t>
+            </a:r>
+            <a:endParaRPr lang="en-US" sz="3600" dirty="0"/>
+          </a:p>
+        </p:txBody>
+      </p:sp>
+      <p:sp>
+        <p:nvSpPr>
+          <p:cNvPr id="5" name="Text 2"/>
+          <p:cNvSpPr/>
+          <p:nvPr/>
+        </p:nvSpPr>
+        <p:spPr>
+          <a:xfrm>
+            <a:off x="1691640" y="1783080"/>
+            <a:ext cx="10180015" cy="4663440"/>
+          </a:xfrm>
+          <a:prstGeom prst="rect">
+            <a:avLst/>
+          </a:prstGeom>
+          <a:noFill/>
+          <a:ln/>
+        </p:spPr>
+        <p:txBody>
+          <a:bodyPr wrap="square" lIns="0" tIns="0" rIns="0" bIns="0" rtlCol="0" anchor="t"/>
+          <a:lstStyle/>
+          <a:p>
+            <a:pPr algn="l" indent="0" marL="0">
+              <a:spcAft>
+                <a:spcPts val="800"/>
+              </a:spcAft>
+              <a:buNone/>
+            </a:pPr>
+            <a:r>
+              <a:rPr lang="en-US" sz="4000" b="1" dirty="0">
+                <a:solidFill>
+                  <a:srgbClr val="111111"/>
+                </a:solidFill>
+                <a:latin typeface="Times New Roman" pitchFamily="34" charset="0"/>
+                <a:ea typeface="Times New Roman" pitchFamily="34" charset="-122"/>
+                <a:cs typeface="Times New Roman" pitchFamily="34" charset="-120"/>
+              </a:rPr>
+              <a:t>Fill in the blanks:</a:t>
+            </a:r>
+            <a:endParaRPr lang="en-US" sz="4000" dirty="0"/>
+          </a:p>
+          <a:p>
+            <a:pPr algn="l" marL="342900" indent="-342900">
+              <a:spcAft>
+                <a:spcPts val="800"/>
+              </a:spcAft>
+              <a:buSzPct val="100000"/>
+              <a:buFont typeface="+mj-lt"/>
+              <a:buAutoNum type="arabicPeriod" startAt="1"/>
+            </a:pPr>
+            <a:r>
+              <a:rPr lang="en-US" sz="4000" dirty="0">
+                <a:solidFill>
+                  <a:srgbClr val="111111"/>
+                </a:solidFill>
+                <a:latin typeface="Times New Roman" pitchFamily="34" charset="0"/>
+                <a:ea typeface="Times New Roman" pitchFamily="34" charset="-122"/>
+                <a:cs typeface="Times New Roman" pitchFamily="34" charset="-120"/>
+              </a:rPr>
+              <a:t>The maximum population an environment can support is its ______ capacity.</a:t>
+            </a:r>
+            <a:endParaRPr lang="en-US" sz="4000" dirty="0"/>
+          </a:p>
+          <a:p>
+            <a:pPr algn="l" marL="342900" indent="-342900">
+              <a:spcAft>
+                <a:spcPts val="800"/>
+              </a:spcAft>
+              <a:buSzPct val="100000"/>
+              <a:buFont typeface="+mj-lt"/>
+              <a:buAutoNum type="arabicPeriod" startAt="1"/>
+            </a:pPr>
+            <a:r>
+              <a:rPr lang="en-US" sz="4000" dirty="0">
+                <a:solidFill>
+                  <a:srgbClr val="111111"/>
+                </a:solidFill>
+                <a:latin typeface="Times New Roman" pitchFamily="34" charset="0"/>
+                <a:ea typeface="Times New Roman" pitchFamily="34" charset="-122"/>
+                <a:cs typeface="Times New Roman" pitchFamily="34" charset="-120"/>
+              </a:rPr>
+              <a:t>Logistic growth has the shape of the letter ______.</a:t>
+            </a:r>
+            <a:endParaRPr lang="en-US" sz="4000" dirty="0"/>
+          </a:p>
+          <a:p>
+            <a:pPr algn="l" marL="342900" indent="-342900">
+              <a:spcAft>
+                <a:spcPts val="800"/>
+              </a:spcAft>
+              <a:buSzPct val="100000"/>
+              <a:buFont typeface="+mj-lt"/>
+              <a:buAutoNum type="arabicPeriod" startAt="1"/>
+            </a:pPr>
+            <a:r>
+              <a:rPr lang="en-US" sz="4000" dirty="0">
+                <a:solidFill>
+                  <a:srgbClr val="111111"/>
+                </a:solidFill>
+                <a:latin typeface="Times New Roman" pitchFamily="34" charset="0"/>
+                <a:ea typeface="Times New Roman" pitchFamily="34" charset="-122"/>
+                <a:cs typeface="Times New Roman" pitchFamily="34" charset="-120"/>
+              </a:rPr>
+              <a:t>Norway is an example of a ______ regime.</a:t>
+            </a:r>
+            <a:endParaRPr lang="en-US" sz="4000" dirty="0"/>
+          </a:p>
+        </p:txBody>
+      </p:sp>
+      <p:sp>
+        <p:nvSpPr>
+          <p:cNvPr id="25" name="Slide Number Placeholder 0"/>
+          <p:cNvSpPr>
+            <a:spLocks noGrp="1"/>
+          </p:cNvSpPr>
+          <p:nvPr>
+            <p:ph type="sldNum" sz="quarter" idx="4294967295"/>
+          </p:nvPr>
+        </p:nvSpPr>
+        <p:spPr>
+          <a:xfrm>
+            <a:off x="27432" y="91440"/>
+            <a:ext cx="585216" cy="475488"/>
+          </a:xfrm>
+          <a:prstGeom prst="rect">
+            <a:avLst/>
+          </a:prstGeom>
+          <a:extLst>
+            <a:ext uri="{C572A759-6A51-4108-AA02-DFA0A04FC94B}">
+              <ma14:wrappingTextBoxFlag xmlns:ma14="http://schemas.microsoft.com/office/mac/drawingml/2011/main" val="0"/>
+            </a:ext>
+          </a:extLst>
+        </p:spPr>
+        <p:txBody>
+          <a:bodyPr/>
+          <a:lstStyle>
+            <a:lvl1pPr>
+              <a:defRPr sz="2000">
+                <a:solidFill>
+                  <a:srgbClr val="FFFFFF"/>
+                </a:solidFill>
+                <a:latin typeface="Calibri"/>
+                <a:ea typeface="Calibri"/>
+                <a:cs typeface="Calibri"/>
+              </a:defRPr>
+            </a:lvl1pPr>
+          </a:lstStyle>
+          <a:p>
+            <a:pPr algn="ctr"/>
+            <a:fld id="{F7021451-1387-4CA6-816F-3879F97B5CBC}" type="slidenum">
+              <a:rPr b="1" lang="en-US"/>
+              <a:t>53</a:t>
+            </a:fld>
+            <a:endParaRPr lang="en-US"/>
+          </a:p>
+        </p:txBody>
+      </p:sp>
+    </p:spTree>
+  </p:cSld>
+  <p:clrMapOvr>
+    <a:masterClrMapping/>
+  </p:clrMapOvr>
+</p:sld>
+</file>
+
+<file path=ppt/slides/slide54.xml><?xml version="1.0" encoding="utf-8"?>
+<p:sld xmlns:a="http://schemas.openxmlformats.org/drawingml/2006/main" xmlns:r="http://schemas.openxmlformats.org/officeDocument/2006/relationships" xmlns:p="http://schemas.openxmlformats.org/presentationml/2006/main">
+  <p:cSld name="Slide 54">
+    <p:spTree>
+      <p:nvGrpSpPr>
+        <p:cNvPr id="1" name=""/>
+        <p:cNvGrpSpPr/>
+        <p:nvPr/>
+      </p:nvGrpSpPr>
+      <p:grpSpPr>
+        <a:xfrm>
+          <a:off x="0" y="0"/>
+          <a:ext cx="0" cy="0"/>
+          <a:chOff x="0" y="0"/>
+          <a:chExt cx="0" cy="0"/>
+        </a:xfrm>
+      </p:grpSpPr>
+      <p:sp>
+        <p:nvSpPr>
+          <p:cNvPr id="2" name="Text 0"/>
+          <p:cNvSpPr/>
+          <p:nvPr/>
+        </p:nvSpPr>
+        <p:spPr>
+          <a:xfrm>
+            <a:off x="457200" y="713232"/>
+            <a:ext cx="11368735" cy="274320"/>
+          </a:xfrm>
+          <a:prstGeom prst="rect">
+            <a:avLst/>
+          </a:prstGeom>
+          <a:noFill/>
+          <a:ln/>
+        </p:spPr>
+        <p:txBody>
+          <a:bodyPr wrap="square" lIns="0" tIns="0" rIns="0" bIns="0" rtlCol="0" anchor="ctr"/>
+          <a:lstStyle/>
+          <a:p>
+            <a:pPr algn="r" indent="0" marL="0">
+              <a:buNone/>
+            </a:pPr>
+            <a:r>
+              <a:rPr lang="en-US" sz="1400" b="1" dirty="0">
+                <a:solidFill>
+                  <a:srgbClr val="1C3F6E"/>
+                </a:solidFill>
+                <a:latin typeface="Calibri" pitchFamily="34" charset="0"/>
+                <a:ea typeface="Calibri" pitchFamily="34" charset="-122"/>
+                <a:cs typeface="Calibri" pitchFamily="34" charset="-120"/>
+              </a:rPr>
+              <a:t>HOMEWORK</a:t>
+            </a:r>
+            <a:endParaRPr lang="en-US" sz="1400" dirty="0"/>
+          </a:p>
+        </p:txBody>
+      </p:sp>
+      <p:pic>
+        <p:nvPicPr>
+          <p:cNvPr id="3" name="Image 0" descr="/home/claude/f4/img/minesec_sheet.png">    </p:cNvPr>
+          <p:cNvPicPr>
+            <a:picLocks noChangeAspect="1"/>
+          </p:cNvPicPr>
+          <p:nvPr/>
+        </p:nvPicPr>
+        <p:blipFill>
+          <a:blip r:embed="rId1"/>
+          <a:stretch>
+            <a:fillRect/>
+          </a:stretch>
+        </p:blipFill>
+        <p:spPr>
+          <a:xfrm>
+            <a:off x="0" y="658368"/>
+            <a:ext cx="5120640" cy="5833872"/>
+          </a:xfrm>
+          <a:prstGeom prst="rect">
+            <a:avLst/>
+          </a:prstGeom>
+        </p:spPr>
+      </p:pic>
+      <p:sp>
+        <p:nvSpPr>
+          <p:cNvPr id="4" name="Text 1"/>
+          <p:cNvSpPr/>
+          <p:nvPr/>
+        </p:nvSpPr>
+        <p:spPr>
+          <a:xfrm>
+            <a:off x="5349240" y="1005840"/>
+            <a:ext cx="6522415" cy="731520"/>
+          </a:xfrm>
+          <a:prstGeom prst="rect">
+            <a:avLst/>
+          </a:prstGeom>
+          <a:noFill/>
+          <a:ln/>
+        </p:spPr>
+        <p:txBody>
+          <a:bodyPr wrap="square" lIns="0" tIns="0" rIns="0" bIns="0" rtlCol="0" anchor="ctr">
+            <a:normAutofit/>
+          </a:bodyPr>
+          <a:lstStyle/>
+          <a:p>
+            <a:pPr algn="ctr" indent="0" marL="0">
+              <a:buNone/>
+            </a:pPr>
+            <a:r>
+              <a:rPr lang="en-US" sz="3600" b="1" dirty="0">
+                <a:solidFill>
+                  <a:srgbClr val="990011"/>
+                </a:solidFill>
+                <a:latin typeface="Times New Roman" pitchFamily="34" charset="0"/>
+                <a:ea typeface="Times New Roman" pitchFamily="34" charset="-122"/>
+                <a:cs typeface="Times New Roman" pitchFamily="34" charset="-120"/>
+              </a:rPr>
+              <a:t>Homework</a:t>
+            </a:r>
+            <a:endParaRPr lang="en-US" sz="3600" dirty="0"/>
+          </a:p>
+        </p:txBody>
+      </p:sp>
+      <p:sp>
+        <p:nvSpPr>
+          <p:cNvPr id="5" name="Text 2"/>
+          <p:cNvSpPr/>
+          <p:nvPr/>
+        </p:nvSpPr>
+        <p:spPr>
+          <a:xfrm>
+            <a:off x="5349240" y="1783080"/>
+            <a:ext cx="6522415" cy="4663440"/>
+          </a:xfrm>
+          <a:prstGeom prst="rect">
+            <a:avLst/>
+          </a:prstGeom>
+          <a:noFill/>
+          <a:ln/>
+        </p:spPr>
+        <p:txBody>
+          <a:bodyPr wrap="square" lIns="0" tIns="0" rIns="0" bIns="0" rtlCol="0" anchor="t"/>
+          <a:lstStyle/>
+          <a:p>
+            <a:pPr algn="l" indent="0" marL="0">
+              <a:spcAft>
+                <a:spcPts val="800"/>
+              </a:spcAft>
+              <a:buNone/>
+            </a:pPr>
+            <a:r>
+              <a:rPr lang="en-US" sz="4000" dirty="0">
+                <a:solidFill>
+                  <a:srgbClr val="111111"/>
+                </a:solidFill>
+                <a:latin typeface="Times New Roman" pitchFamily="34" charset="0"/>
+                <a:ea typeface="Times New Roman" pitchFamily="34" charset="-122"/>
+                <a:cs typeface="Times New Roman" pitchFamily="34" charset="-120"/>
+              </a:rPr>
+              <a:t>Give one indicator of overpopulation.</a:t>
+            </a:r>
+            <a:endParaRPr lang="en-US" sz="4000" dirty="0"/>
+          </a:p>
+        </p:txBody>
+      </p:sp>
+      <p:sp>
+        <p:nvSpPr>
+          <p:cNvPr id="25" name="Slide Number Placeholder 0"/>
+          <p:cNvSpPr>
+            <a:spLocks noGrp="1"/>
+          </p:cNvSpPr>
+          <p:nvPr>
+            <p:ph type="sldNum" sz="quarter" idx="4294967295"/>
+          </p:nvPr>
+        </p:nvSpPr>
+        <p:spPr>
+          <a:xfrm>
+            <a:off x="27432" y="91440"/>
+            <a:ext cx="585216" cy="475488"/>
+          </a:xfrm>
+          <a:prstGeom prst="rect">
+            <a:avLst/>
+          </a:prstGeom>
+          <a:extLst>
+            <a:ext uri="{C572A759-6A51-4108-AA02-DFA0A04FC94B}">
+              <ma14:wrappingTextBoxFlag xmlns:ma14="http://schemas.microsoft.com/office/mac/drawingml/2011/main" val="0"/>
+            </a:ext>
+          </a:extLst>
+        </p:spPr>
+        <p:txBody>
+          <a:bodyPr/>
+          <a:lstStyle>
+            <a:lvl1pPr>
+              <a:defRPr sz="2000">
+                <a:solidFill>
+                  <a:srgbClr val="FFFFFF"/>
+                </a:solidFill>
+                <a:latin typeface="Calibri"/>
+                <a:ea typeface="Calibri"/>
+                <a:cs typeface="Calibri"/>
+              </a:defRPr>
+            </a:lvl1pPr>
+          </a:lstStyle>
+          <a:p>
+            <a:pPr algn="ctr"/>
+            <a:fld id="{F7021451-1387-4CA6-816F-3879F97B5CBC}" type="slidenum">
+              <a:rPr b="1" lang="en-US"/>
+              <a:t>54</a:t>
+            </a:fld>
+            <a:endParaRPr lang="en-US"/>
+          </a:p>
+        </p:txBody>
+      </p:sp>
+    </p:spTree>
+  </p:cSld>
+  <p:clrMapOvr>
+    <a:masterClrMapping/>
+  </p:clrMapOvr>
+</p:sld>
+</file>
+
+<file path=ppt/slides/slide55.xml><?xml version="1.0" encoding="utf-8"?>
+<p:sld xmlns:a="http://schemas.openxmlformats.org/drawingml/2006/main" xmlns:r="http://schemas.openxmlformats.org/officeDocument/2006/relationships" xmlns:p="http://schemas.openxmlformats.org/presentationml/2006/main">
+  <p:cSld name="Slide 55">
+    <p:spTree>
+      <p:nvGrpSpPr>
+        <p:cNvPr id="1" name=""/>
+        <p:cNvGrpSpPr/>
+        <p:nvPr/>
+      </p:nvGrpSpPr>
+      <p:grpSpPr>
+        <a:xfrm>
+          <a:off x="0" y="0"/>
+          <a:ext cx="0" cy="0"/>
+          <a:chOff x="0" y="0"/>
+          <a:chExt cx="0" cy="0"/>
+        </a:xfrm>
+      </p:grpSpPr>
+      <p:sp>
+        <p:nvSpPr>
+          <p:cNvPr id="2" name="Text 0"/>
+          <p:cNvSpPr/>
+          <p:nvPr/>
+        </p:nvSpPr>
+        <p:spPr>
+          <a:xfrm>
+            <a:off x="457200" y="713232"/>
+            <a:ext cx="11368735" cy="274320"/>
+          </a:xfrm>
+          <a:prstGeom prst="rect">
+            <a:avLst/>
+          </a:prstGeom>
+          <a:noFill/>
+          <a:ln/>
+        </p:spPr>
+        <p:txBody>
+          <a:bodyPr wrap="square" lIns="0" tIns="0" rIns="0" bIns="0" rtlCol="0" anchor="ctr"/>
+          <a:lstStyle/>
+          <a:p>
+            <a:pPr algn="r" indent="0" marL="0">
+              <a:buNone/>
+            </a:pPr>
+            <a:r>
+              <a:rPr lang="en-US" sz="1400" b="1" dirty="0">
+                <a:solidFill>
+                  <a:srgbClr val="1C3F6E"/>
+                </a:solidFill>
+                <a:latin typeface="Calibri" pitchFamily="34" charset="0"/>
+                <a:ea typeface="Calibri" pitchFamily="34" charset="-122"/>
+                <a:cs typeface="Calibri" pitchFamily="34" charset="-120"/>
+              </a:rPr>
+              <a:t>NEXT LESSON</a:t>
+            </a:r>
+            <a:endParaRPr lang="en-US" sz="1400" dirty="0"/>
+          </a:p>
+        </p:txBody>
+      </p:sp>
+      <p:pic>
+        <p:nvPicPr>
+          <p:cNvPr id="3" name="Image 0" descr="/home/claude/f4/img/minesec_sheet.png">    </p:cNvPr>
+          <p:cNvPicPr>
+            <a:picLocks noChangeAspect="1"/>
+          </p:cNvPicPr>
+          <p:nvPr/>
+        </p:nvPicPr>
+        <p:blipFill>
+          <a:blip r:embed="rId1"/>
+          <a:stretch>
+            <a:fillRect/>
+          </a:stretch>
+        </p:blipFill>
+        <p:spPr>
+          <a:xfrm>
+            <a:off x="0" y="658368"/>
+            <a:ext cx="5120640" cy="5833872"/>
+          </a:xfrm>
+          <a:prstGeom prst="rect">
+            <a:avLst/>
+          </a:prstGeom>
+        </p:spPr>
+      </p:pic>
+      <p:sp>
+        <p:nvSpPr>
+          <p:cNvPr id="4" name="Text 1"/>
+          <p:cNvSpPr/>
+          <p:nvPr/>
+        </p:nvSpPr>
+        <p:spPr>
+          <a:xfrm>
+            <a:off x="5349240" y="1005840"/>
+            <a:ext cx="6522415" cy="731520"/>
+          </a:xfrm>
+          <a:prstGeom prst="rect">
+            <a:avLst/>
+          </a:prstGeom>
+          <a:noFill/>
+          <a:ln/>
+        </p:spPr>
+        <p:txBody>
+          <a:bodyPr wrap="square" lIns="0" tIns="0" rIns="0" bIns="0" rtlCol="0" anchor="ctr">
+            <a:normAutofit/>
+          </a:bodyPr>
+          <a:lstStyle/>
+          <a:p>
+            <a:pPr algn="ctr" indent="0" marL="0">
+              <a:buNone/>
+            </a:pPr>
+            <a:r>
+              <a:rPr lang="en-US" sz="3600" b="1" dirty="0">
+                <a:solidFill>
+                  <a:srgbClr val="990011"/>
+                </a:solidFill>
+                <a:latin typeface="Times New Roman" pitchFamily="34" charset="0"/>
+                <a:ea typeface="Times New Roman" pitchFamily="34" charset="-122"/>
+                <a:cs typeface="Times New Roman" pitchFamily="34" charset="-120"/>
+              </a:rPr>
+              <a:t>Next Lesson</a:t>
+            </a:r>
+            <a:endParaRPr lang="en-US" sz="3600" dirty="0"/>
+          </a:p>
+        </p:txBody>
+      </p:sp>
+      <p:sp>
+        <p:nvSpPr>
+          <p:cNvPr id="5" name="Text 2"/>
+          <p:cNvSpPr/>
+          <p:nvPr/>
+        </p:nvSpPr>
+        <p:spPr>
+          <a:xfrm>
+            <a:off x="5349240" y="1783080"/>
+            <a:ext cx="6522415" cy="4663440"/>
+          </a:xfrm>
+          <a:prstGeom prst="rect">
+            <a:avLst/>
+          </a:prstGeom>
+          <a:noFill/>
+          <a:ln/>
+        </p:spPr>
+        <p:txBody>
+          <a:bodyPr wrap="square" lIns="0" tIns="0" rIns="0" bIns="0" rtlCol="0" anchor="ctr"/>
+          <a:lstStyle/>
+          <a:p>
+            <a:pPr algn="ctr" indent="0" marL="0">
+              <a:spcAft>
+                <a:spcPts val="800"/>
+              </a:spcAft>
+              <a:buNone/>
+            </a:pPr>
+            <a:r>
+              <a:rPr lang="en-US" sz="4000" b="1" dirty="0">
+                <a:solidFill>
+                  <a:srgbClr val="111111"/>
+                </a:solidFill>
+                <a:latin typeface="Times New Roman" pitchFamily="34" charset="0"/>
+                <a:ea typeface="Times New Roman" pitchFamily="34" charset="-122"/>
+                <a:cs typeface="Times New Roman" pitchFamily="34" charset="-120"/>
+              </a:rPr>
+              <a:t>Our next lesson will be on:</a:t>
+            </a:r>
+            <a:endParaRPr lang="en-US" sz="4000" dirty="0"/>
+          </a:p>
+          <a:p>
+            <a:pPr algn="ctr" indent="0" marL="0">
+              <a:spcAft>
+                <a:spcPts val="800"/>
+              </a:spcAft>
+              <a:buNone/>
+            </a:pPr>
+            <a:r>
+              <a:rPr lang="en-US" sz="4000" b="1" dirty="0">
+                <a:solidFill>
+                  <a:srgbClr val="990011"/>
+                </a:solidFill>
+                <a:latin typeface="Times New Roman" pitchFamily="34" charset="0"/>
+                <a:ea typeface="Times New Roman" pitchFamily="34" charset="-122"/>
+                <a:cs typeface="Times New Roman" pitchFamily="34" charset="-120"/>
+              </a:rPr>
+              <a:t>Lesson 17: Overpopulation, Underpopulation and Optimum Population</a:t>
+            </a:r>
+            <a:endParaRPr lang="en-US" sz="4000" dirty="0"/>
+          </a:p>
+        </p:txBody>
+      </p:sp>
+      <p:sp>
+        <p:nvSpPr>
+          <p:cNvPr id="25" name="Slide Number Placeholder 0"/>
+          <p:cNvSpPr>
+            <a:spLocks noGrp="1"/>
+          </p:cNvSpPr>
+          <p:nvPr>
+            <p:ph type="sldNum" sz="quarter" idx="4294967295"/>
+          </p:nvPr>
+        </p:nvSpPr>
+        <p:spPr>
+          <a:xfrm>
+            <a:off x="27432" y="91440"/>
+            <a:ext cx="585216" cy="475488"/>
+          </a:xfrm>
+          <a:prstGeom prst="rect">
+            <a:avLst/>
+          </a:prstGeom>
+          <a:extLst>
+            <a:ext uri="{C572A759-6A51-4108-AA02-DFA0A04FC94B}">
+              <ma14:wrappingTextBoxFlag xmlns:ma14="http://schemas.microsoft.com/office/mac/drawingml/2011/main" val="0"/>
+            </a:ext>
+          </a:extLst>
+        </p:spPr>
+        <p:txBody>
+          <a:bodyPr/>
+          <a:lstStyle>
+            <a:lvl1pPr>
+              <a:defRPr sz="2000">
+                <a:solidFill>
+                  <a:srgbClr val="FFFFFF"/>
+                </a:solidFill>
+                <a:latin typeface="Calibri"/>
+                <a:ea typeface="Calibri"/>
+                <a:cs typeface="Calibri"/>
+              </a:defRPr>
+            </a:lvl1pPr>
+          </a:lstStyle>
+          <a:p>
+            <a:pPr algn="ctr"/>
+            <a:fld id="{F7021451-1387-4CA6-816F-3879F97B5CBC}" type="slidenum">
+              <a:rPr b="1" lang="en-US"/>
+              <a:t>55</a:t>
+            </a:fld>
+            <a:endParaRPr lang="en-US"/>
+          </a:p>
+        </p:txBody>
+      </p:sp>
+    </p:spTree>
+  </p:cSld>
+  <p:clrMapOvr>
+    <a:masterClrMapping/>
+  </p:clrMapOvr>
+</p:sld>
+</file>
+
+<file path=ppt/slides/slide56.xml><?xml version="1.0" encoding="utf-8"?>
+<p:sld xmlns:a="http://schemas.openxmlformats.org/drawingml/2006/main" xmlns:r="http://schemas.openxmlformats.org/officeDocument/2006/relationships" xmlns:p="http://schemas.openxmlformats.org/presentationml/2006/main">
+  <p:cSld name="Slide 56">
+    <p:spTree>
+      <p:nvGrpSpPr>
+        <p:cNvPr id="1" name=""/>
+        <p:cNvGrpSpPr/>
+        <p:nvPr/>
+      </p:nvGrpSpPr>
+      <p:grpSpPr>
+        <a:xfrm>
+          <a:off x="0" y="0"/>
+          <a:ext cx="0" cy="0"/>
+          <a:chOff x="0" y="0"/>
+          <a:chExt cx="0" cy="0"/>
+        </a:xfrm>
+      </p:grpSpPr>
+      <p:sp>
+        <p:nvSpPr>
+          <p:cNvPr id="2" name="Text 0"/>
+          <p:cNvSpPr/>
+          <p:nvPr/>
+        </p:nvSpPr>
+        <p:spPr>
+          <a:xfrm>
+            <a:off x="457200" y="713232"/>
+            <a:ext cx="11368735" cy="274320"/>
+          </a:xfrm>
+          <a:prstGeom prst="rect">
+            <a:avLst/>
+          </a:prstGeom>
+          <a:noFill/>
+          <a:ln/>
+        </p:spPr>
+        <p:txBody>
+          <a:bodyPr wrap="square" lIns="0" tIns="0" rIns="0" bIns="0" rtlCol="0" anchor="ctr"/>
+          <a:lstStyle/>
+          <a:p>
+            <a:pPr algn="r" indent="0" marL="0">
+              <a:buNone/>
+            </a:pPr>
+            <a:r>
+              <a:rPr lang="en-US" sz="1400" b="1" dirty="0">
+                <a:solidFill>
+                  <a:srgbClr val="1C3F6E"/>
+                </a:solidFill>
+                <a:latin typeface="Calibri" pitchFamily="34" charset="0"/>
+                <a:ea typeface="Calibri" pitchFamily="34" charset="-122"/>
+                <a:cs typeface="Calibri" pitchFamily="34" charset="-120"/>
+              </a:rPr>
               <a:t>BILINGUAL GAME</a:t>
             </a:r>
             <a:endParaRPr lang="en-US" sz="1400" dirty="0"/>
@@ -19066,7 +19928,7 @@
       </p:sp>
       <p:graphicFrame>
         <p:nvGraphicFramePr>
-          <p:cNvPr id="54" name="Table 0"/>
+          <p:cNvPr id="57" name="Table 0"/>
           <p:cNvGraphicFramePr>
             <a:graphicFrameLocks noGrp="1"/>
           </p:cNvGraphicFramePr>
@@ -20102,7 +20964,7 @@
             <a:pPr algn="ctr"/>
             <a:fld id="{F7021451-1387-4CA6-816F-3879F97B5CBC}" type="slidenum">
               <a:rPr b="1" lang="en-US"/>
-              <a:t>53</a:t>
+              <a:t>56</a:t>
             </a:fld>
             <a:endParaRPr lang="en-US"/>
           </a:p>
@@ -20116,9 +20978,9 @@
 </p:sld>
 </file>
 
-<file path=ppt/slides/slide54.xml><?xml version="1.0" encoding="utf-8"?>
+<file path=ppt/slides/slide57.xml><?xml version="1.0" encoding="utf-8"?>
 <p:sld xmlns:a="http://schemas.openxmlformats.org/drawingml/2006/main" xmlns:r="http://schemas.openxmlformats.org/officeDocument/2006/relationships" xmlns:p="http://schemas.openxmlformats.org/presentationml/2006/main">
-  <p:cSld name="Slide 54">
+  <p:cSld name="Slide 57">
     <p:spTree>
       <p:nvGrpSpPr>
         <p:cNvPr id="1" name=""/>
@@ -20213,7 +21075,7 @@
       </p:sp>
       <p:graphicFrame>
         <p:nvGraphicFramePr>
-          <p:cNvPr id="55" name="Table 0"/>
+          <p:cNvPr id="58" name="Table 0"/>
           <p:cNvGraphicFramePr>
             <a:graphicFrameLocks noGrp="1"/>
           </p:cNvGraphicFramePr>
@@ -20835,7 +21697,7 @@
             <a:pPr algn="ctr"/>
             <a:fld id="{F7021451-1387-4CA6-816F-3879F97B5CBC}" type="slidenum">
               <a:rPr b="1" lang="en-US"/>
-              <a:t>54</a:t>
+              <a:t>57</a:t>
             </a:fld>
             <a:endParaRPr lang="en-US"/>
           </a:p>
@@ -20849,9 +21711,9 @@
 </p:sld>
 </file>
 
-<file path=ppt/slides/slide55.xml><?xml version="1.0" encoding="utf-8"?>
+<file path=ppt/slides/slide58.xml><?xml version="1.0" encoding="utf-8"?>
 <p:sld xmlns:a="http://schemas.openxmlformats.org/drawingml/2006/main" xmlns:r="http://schemas.openxmlformats.org/officeDocument/2006/relationships" xmlns:p="http://schemas.openxmlformats.org/presentationml/2006/main">
-  <p:cSld name="Slide 55">
+  <p:cSld name="Slide 58">
     <p:spTree>
       <p:nvGrpSpPr>
         <p:cNvPr id="1" name=""/>
@@ -20946,7 +21808,7 @@
       </p:sp>
       <p:graphicFrame>
         <p:nvGraphicFramePr>
-          <p:cNvPr id="56" name="Table 0"/>
+          <p:cNvPr id="59" name="Table 0"/>
           <p:cNvGraphicFramePr>
             <a:graphicFrameLocks noGrp="1"/>
           </p:cNvGraphicFramePr>
@@ -21706,7 +22568,7 @@
             <a:pPr algn="ctr"/>
             <a:fld id="{F7021451-1387-4CA6-816F-3879F97B5CBC}" type="slidenum">
               <a:rPr b="1" lang="en-US"/>
-              <a:t>55</a:t>
+              <a:t>58</a:t>
             </a:fld>
             <a:endParaRPr lang="en-US"/>
           </a:p>
@@ -21720,9 +22582,9 @@
 </p:sld>
 </file>
 
-<file path=ppt/slides/slide56.xml><?xml version="1.0" encoding="utf-8"?>
+<file path=ppt/slides/slide59.xml><?xml version="1.0" encoding="utf-8"?>
 <p:sld xmlns:a="http://schemas.openxmlformats.org/drawingml/2006/main" xmlns:r="http://schemas.openxmlformats.org/officeDocument/2006/relationships" xmlns:p="http://schemas.openxmlformats.org/presentationml/2006/main">
-  <p:cSld name="Slide 56">
+  <p:cSld name="Slide 59">
     <p:spTree>
       <p:nvGrpSpPr>
         <p:cNvPr id="1" name=""/>
@@ -22031,311 +22893,7 @@
             <a:pPr algn="ctr"/>
             <a:fld id="{F7021451-1387-4CA6-816F-3879F97B5CBC}" type="slidenum">
               <a:rPr b="1" lang="en-US"/>
-              <a:t>56</a:t>
-            </a:fld>
-            <a:endParaRPr lang="en-US"/>
-          </a:p>
-        </p:txBody>
-      </p:sp>
-    </p:spTree>
-  </p:cSld>
-  <p:clrMapOvr>
-    <a:masterClrMapping/>
-  </p:clrMapOvr>
-</p:sld>
-</file>
-
-<file path=ppt/slides/slide57.xml><?xml version="1.0" encoding="utf-8"?>
-<p:sld xmlns:a="http://schemas.openxmlformats.org/drawingml/2006/main" xmlns:r="http://schemas.openxmlformats.org/officeDocument/2006/relationships" xmlns:p="http://schemas.openxmlformats.org/presentationml/2006/main">
-  <p:cSld name="Slide 57">
-    <p:spTree>
-      <p:nvGrpSpPr>
-        <p:cNvPr id="1" name=""/>
-        <p:cNvGrpSpPr/>
-        <p:nvPr/>
-      </p:nvGrpSpPr>
-      <p:grpSpPr>
-        <a:xfrm>
-          <a:off x="0" y="0"/>
-          <a:ext cx="0" cy="0"/>
-          <a:chOff x="0" y="0"/>
-          <a:chExt cx="0" cy="0"/>
-        </a:xfrm>
-      </p:grpSpPr>
-      <p:sp>
-        <p:nvSpPr>
-          <p:cNvPr id="2" name="Text 0"/>
-          <p:cNvSpPr/>
-          <p:nvPr/>
-        </p:nvSpPr>
-        <p:spPr>
-          <a:xfrm>
-            <a:off x="457200" y="713232"/>
-            <a:ext cx="11368735" cy="274320"/>
-          </a:xfrm>
-          <a:prstGeom prst="rect">
-            <a:avLst/>
-          </a:prstGeom>
-          <a:noFill/>
-          <a:ln/>
-        </p:spPr>
-        <p:txBody>
-          <a:bodyPr wrap="square" lIns="0" tIns="0" rIns="0" bIns="0" rtlCol="0" anchor="ctr"/>
-          <a:lstStyle/>
-          <a:p>
-            <a:pPr algn="r" indent="0" marL="0">
-              <a:buNone/>
-            </a:pPr>
-            <a:r>
-              <a:rPr lang="en-US" sz="1400" b="1" dirty="0">
-                <a:solidFill>
-                  <a:srgbClr val="1C3F6E"/>
-                </a:solidFill>
-                <a:latin typeface="Calibri" pitchFamily="34" charset="0"/>
-                <a:ea typeface="Calibri" pitchFamily="34" charset="-122"/>
-                <a:cs typeface="Calibri" pitchFamily="34" charset="-120"/>
-              </a:rPr>
-              <a:t>REFERENCES</a:t>
-            </a:r>
-            <a:endParaRPr lang="en-US" sz="1400" dirty="0"/>
-          </a:p>
-        </p:txBody>
-      </p:sp>
-      <p:pic>
-        <p:nvPicPr>
-          <p:cNvPr id="3" name="Image 0" descr="/home/claude/f4/img/minesec_sheet.png">    </p:cNvPr>
-          <p:cNvPicPr>
-            <a:picLocks noChangeAspect="1"/>
-          </p:cNvPicPr>
-          <p:nvPr/>
-        </p:nvPicPr>
-        <p:blipFill>
-          <a:blip r:embed="rId1"/>
-          <a:stretch>
-            <a:fillRect/>
-          </a:stretch>
-        </p:blipFill>
-        <p:spPr>
-          <a:xfrm>
-            <a:off x="0" y="658368"/>
-            <a:ext cx="5120640" cy="5833872"/>
-          </a:xfrm>
-          <a:prstGeom prst="rect">
-            <a:avLst/>
-          </a:prstGeom>
-        </p:spPr>
-      </p:pic>
-      <p:sp>
-        <p:nvSpPr>
-          <p:cNvPr id="4" name="Text 1"/>
-          <p:cNvSpPr/>
-          <p:nvPr/>
-        </p:nvSpPr>
-        <p:spPr>
-          <a:xfrm>
-            <a:off x="5349240" y="1005840"/>
-            <a:ext cx="6522415" cy="731520"/>
-          </a:xfrm>
-          <a:prstGeom prst="rect">
-            <a:avLst/>
-          </a:prstGeom>
-          <a:noFill/>
-          <a:ln/>
-        </p:spPr>
-        <p:txBody>
-          <a:bodyPr wrap="square" lIns="0" tIns="0" rIns="0" bIns="0" rtlCol="0" anchor="ctr">
-            <a:normAutofit/>
-          </a:bodyPr>
-          <a:lstStyle/>
-          <a:p>
-            <a:pPr algn="ctr" indent="0" marL="0">
-              <a:buNone/>
-            </a:pPr>
-            <a:r>
-              <a:rPr lang="en-US" sz="3600" b="1" dirty="0">
-                <a:solidFill>
-                  <a:srgbClr val="990011"/>
-                </a:solidFill>
-                <a:latin typeface="Times New Roman" pitchFamily="34" charset="0"/>
-                <a:ea typeface="Times New Roman" pitchFamily="34" charset="-122"/>
-                <a:cs typeface="Times New Roman" pitchFamily="34" charset="-120"/>
-              </a:rPr>
-              <a:t>References</a:t>
-            </a:r>
-            <a:endParaRPr lang="en-US" sz="3600" dirty="0"/>
-          </a:p>
-        </p:txBody>
-      </p:sp>
-      <p:sp>
-        <p:nvSpPr>
-          <p:cNvPr id="5" name="Text 2"/>
-          <p:cNvSpPr/>
-          <p:nvPr/>
-        </p:nvSpPr>
-        <p:spPr>
-          <a:xfrm>
-            <a:off x="5349240" y="1783080"/>
-            <a:ext cx="6522415" cy="4663440"/>
-          </a:xfrm>
-          <a:prstGeom prst="rect">
-            <a:avLst/>
-          </a:prstGeom>
-          <a:noFill/>
-          <a:ln/>
-        </p:spPr>
-        <p:txBody>
-          <a:bodyPr wrap="square" lIns="0" tIns="0" rIns="0" bIns="0" rtlCol="0" anchor="t"/>
-          <a:lstStyle/>
-          <a:p>
-            <a:pPr algn="l" marL="342900" indent="-342900">
-              <a:spcAft>
-                <a:spcPts val="800"/>
-              </a:spcAft>
-              <a:buSzPct val="100000"/>
-              <a:buChar char="•"/>
-            </a:pPr>
-            <a:r>
-              <a:rPr lang="en-US" sz="1800" dirty="0">
-                <a:solidFill>
-                  <a:srgbClr val="111111"/>
-                </a:solidFill>
-                <a:latin typeface="Calibri" pitchFamily="34" charset="0"/>
-                <a:ea typeface="Calibri" pitchFamily="34" charset="-122"/>
-                <a:cs typeface="Calibri" pitchFamily="34" charset="-120"/>
-              </a:rPr>
-              <a:t>Geography Syllabus for Sixth Forms (Lower and Upper Sixth), MINESEC, 2019 — Module 4 (Population Geography).</a:t>
-            </a:r>
-            <a:endParaRPr lang="en-US" sz="1800" dirty="0"/>
-          </a:p>
-          <a:p>
-            <a:pPr algn="l" marL="342900" indent="-342900">
-              <a:spcAft>
-                <a:spcPts val="800"/>
-              </a:spcAft>
-              <a:buSzPct val="100000"/>
-              <a:buChar char="•"/>
-            </a:pPr>
-            <a:r>
-              <a:rPr lang="en-US" sz="1800" dirty="0">
-                <a:solidFill>
-                  <a:srgbClr val="111111"/>
-                </a:solidFill>
-                <a:latin typeface="Calibri" pitchFamily="34" charset="0"/>
-                <a:ea typeface="Calibri" pitchFamily="34" charset="-122"/>
-                <a:cs typeface="Calibri" pitchFamily="34" charset="-120"/>
-              </a:rPr>
-              <a:t>Teacher's course notes: Mr KAMDEM E., Population Geography (USA), GBHS Garoua, 2026.</a:t>
-            </a:r>
-            <a:endParaRPr lang="en-US" sz="1800" dirty="0"/>
-          </a:p>
-          <a:p>
-            <a:pPr algn="l" marL="342900" indent="-342900">
-              <a:spcAft>
-                <a:spcPts val="800"/>
-              </a:spcAft>
-              <a:buSzPct val="100000"/>
-              <a:buChar char="•"/>
-            </a:pPr>
-            <a:r>
-              <a:rPr lang="en-US" sz="1800" dirty="0">
-                <a:solidFill>
-                  <a:srgbClr val="111111"/>
-                </a:solidFill>
-                <a:latin typeface="Calibri" pitchFamily="34" charset="0"/>
-                <a:ea typeface="Calibri" pitchFamily="34" charset="-122"/>
-                <a:cs typeface="Calibri" pitchFamily="34" charset="-120"/>
-              </a:rPr>
-              <a:t>United Nations, World Population Prospects 2024.</a:t>
-            </a:r>
-            <a:endParaRPr lang="en-US" sz="1800" dirty="0"/>
-          </a:p>
-          <a:p>
-            <a:pPr algn="l" marL="342900" indent="-342900">
-              <a:spcAft>
-                <a:spcPts val="800"/>
-              </a:spcAft>
-              <a:buSzPct val="100000"/>
-              <a:buChar char="•"/>
-            </a:pPr>
-            <a:r>
-              <a:rPr lang="en-US" sz="1800" dirty="0">
-                <a:solidFill>
-                  <a:srgbClr val="111111"/>
-                </a:solidFill>
-                <a:latin typeface="Calibri" pitchFamily="34" charset="0"/>
-                <a:ea typeface="Calibri" pitchFamily="34" charset="-122"/>
-                <a:cs typeface="Calibri" pitchFamily="34" charset="-120"/>
-              </a:rPr>
-              <a:t>Photo, Activity 5: “Imagine a world without trees” by aloshbennett, CC BY 2.0, via Flickr (https://www.flickr.com/photos/13203757@N00/3480223314)</a:t>
-            </a:r>
-            <a:endParaRPr lang="en-US" sz="1800" dirty="0"/>
-          </a:p>
-          <a:p>
-            <a:pPr algn="l" marL="342900" indent="-342900">
-              <a:spcAft>
-                <a:spcPts val="800"/>
-              </a:spcAft>
-              <a:buSzPct val="100000"/>
-              <a:buChar char="•"/>
-            </a:pPr>
-            <a:r>
-              <a:rPr lang="en-US" sz="1800" dirty="0">
-                <a:solidFill>
-                  <a:srgbClr val="111111"/>
-                </a:solidFill>
-                <a:latin typeface="Calibri" pitchFamily="34" charset="0"/>
-                <a:ea typeface="Calibri" pitchFamily="34" charset="-122"/>
-                <a:cs typeface="Calibri" pitchFamily="34" charset="-120"/>
-              </a:rPr>
-              <a:t>Diagrams and animations: drawn for this lesson (Geography Department).</a:t>
-            </a:r>
-            <a:endParaRPr lang="en-US" sz="1800" dirty="0"/>
-          </a:p>
-        </p:txBody>
-      </p:sp>
-      <p:sp>
-        <p:nvSpPr>
-          <p:cNvPr id="25" name="Slide Number Placeholder 0"/>
-          <p:cNvSpPr>
-            <a:spLocks noGrp="1"/>
-          </p:cNvSpPr>
-          <p:nvPr>
-            <p:ph type="sldNum" sz="quarter" idx="4294967295"/>
-          </p:nvPr>
-        </p:nvSpPr>
-        <p:spPr>
-          <a:xfrm>
-            <a:off x="27432" y="91440"/>
-            <a:ext cx="585216" cy="475488"/>
-          </a:xfrm>
-          <a:prstGeom prst="rect">
-            <a:avLst/>
-          </a:prstGeom>
-          <a:extLst>
-            <a:ext uri="{C572A759-6A51-4108-AA02-DFA0A04FC94B}">
-              <ma14:wrappingTextBoxFlag xmlns:ma14="http://schemas.microsoft.com/office/mac/drawingml/2011/main" val="0"/>
-            </a:ext>
-          </a:extLst>
-        </p:spPr>
-        <p:txBody>
-          <a:bodyPr/>
-          <a:lstStyle>
-            <a:lvl1pPr>
-              <a:defRPr sz="2000">
-                <a:solidFill>
-                  <a:srgbClr val="FFFFFF"/>
-                </a:solidFill>
-                <a:latin typeface="Calibri"/>
-                <a:ea typeface="Calibri"/>
-                <a:cs typeface="Calibri"/>
-              </a:defRPr>
-            </a:lvl1pPr>
-          </a:lstStyle>
-          <a:p>
-            <a:pPr algn="ctr"/>
-            <a:fld id="{F7021451-1387-4CA6-816F-3879F97B5CBC}" type="slidenum">
-              <a:rPr b="1" lang="en-US"/>
-              <a:t>57</a:t>
+              <a:t>59</a:t>
             </a:fld>
             <a:endParaRPr lang="en-US"/>
           </a:p>
@@ -22667,6 +23225,310 @@
             <a:fld id="{F7021451-1387-4CA6-816F-3879F97B5CBC}" type="slidenum">
               <a:rPr b="1" lang="en-US"/>
               <a:t>6</a:t>
+            </a:fld>
+            <a:endParaRPr lang="en-US"/>
+          </a:p>
+        </p:txBody>
+      </p:sp>
+    </p:spTree>
+  </p:cSld>
+  <p:clrMapOvr>
+    <a:masterClrMapping/>
+  </p:clrMapOvr>
+</p:sld>
+</file>
+
+<file path=ppt/slides/slide60.xml><?xml version="1.0" encoding="utf-8"?>
+<p:sld xmlns:a="http://schemas.openxmlformats.org/drawingml/2006/main" xmlns:r="http://schemas.openxmlformats.org/officeDocument/2006/relationships" xmlns:p="http://schemas.openxmlformats.org/presentationml/2006/main">
+  <p:cSld name="Slide 60">
+    <p:spTree>
+      <p:nvGrpSpPr>
+        <p:cNvPr id="1" name=""/>
+        <p:cNvGrpSpPr/>
+        <p:nvPr/>
+      </p:nvGrpSpPr>
+      <p:grpSpPr>
+        <a:xfrm>
+          <a:off x="0" y="0"/>
+          <a:ext cx="0" cy="0"/>
+          <a:chOff x="0" y="0"/>
+          <a:chExt cx="0" cy="0"/>
+        </a:xfrm>
+      </p:grpSpPr>
+      <p:sp>
+        <p:nvSpPr>
+          <p:cNvPr id="2" name="Text 0"/>
+          <p:cNvSpPr/>
+          <p:nvPr/>
+        </p:nvSpPr>
+        <p:spPr>
+          <a:xfrm>
+            <a:off x="457200" y="713232"/>
+            <a:ext cx="11368735" cy="274320"/>
+          </a:xfrm>
+          <a:prstGeom prst="rect">
+            <a:avLst/>
+          </a:prstGeom>
+          <a:noFill/>
+          <a:ln/>
+        </p:spPr>
+        <p:txBody>
+          <a:bodyPr wrap="square" lIns="0" tIns="0" rIns="0" bIns="0" rtlCol="0" anchor="ctr"/>
+          <a:lstStyle/>
+          <a:p>
+            <a:pPr algn="r" indent="0" marL="0">
+              <a:buNone/>
+            </a:pPr>
+            <a:r>
+              <a:rPr lang="en-US" sz="1400" b="1" dirty="0">
+                <a:solidFill>
+                  <a:srgbClr val="1C3F6E"/>
+                </a:solidFill>
+                <a:latin typeface="Calibri" pitchFamily="34" charset="0"/>
+                <a:ea typeface="Calibri" pitchFamily="34" charset="-122"/>
+                <a:cs typeface="Calibri" pitchFamily="34" charset="-120"/>
+              </a:rPr>
+              <a:t>REFERENCES</a:t>
+            </a:r>
+            <a:endParaRPr lang="en-US" sz="1400" dirty="0"/>
+          </a:p>
+        </p:txBody>
+      </p:sp>
+      <p:pic>
+        <p:nvPicPr>
+          <p:cNvPr id="3" name="Image 0" descr="/home/claude/f4/img/minesec_sheet.png">    </p:cNvPr>
+          <p:cNvPicPr>
+            <a:picLocks noChangeAspect="1"/>
+          </p:cNvPicPr>
+          <p:nvPr/>
+        </p:nvPicPr>
+        <p:blipFill>
+          <a:blip r:embed="rId1"/>
+          <a:stretch>
+            <a:fillRect/>
+          </a:stretch>
+        </p:blipFill>
+        <p:spPr>
+          <a:xfrm>
+            <a:off x="0" y="658368"/>
+            <a:ext cx="5120640" cy="5833872"/>
+          </a:xfrm>
+          <a:prstGeom prst="rect">
+            <a:avLst/>
+          </a:prstGeom>
+        </p:spPr>
+      </p:pic>
+      <p:sp>
+        <p:nvSpPr>
+          <p:cNvPr id="4" name="Text 1"/>
+          <p:cNvSpPr/>
+          <p:nvPr/>
+        </p:nvSpPr>
+        <p:spPr>
+          <a:xfrm>
+            <a:off x="5349240" y="1005840"/>
+            <a:ext cx="6522415" cy="731520"/>
+          </a:xfrm>
+          <a:prstGeom prst="rect">
+            <a:avLst/>
+          </a:prstGeom>
+          <a:noFill/>
+          <a:ln/>
+        </p:spPr>
+        <p:txBody>
+          <a:bodyPr wrap="square" lIns="0" tIns="0" rIns="0" bIns="0" rtlCol="0" anchor="ctr">
+            <a:normAutofit/>
+          </a:bodyPr>
+          <a:lstStyle/>
+          <a:p>
+            <a:pPr algn="ctr" indent="0" marL="0">
+              <a:buNone/>
+            </a:pPr>
+            <a:r>
+              <a:rPr lang="en-US" sz="3600" b="1" dirty="0">
+                <a:solidFill>
+                  <a:srgbClr val="990011"/>
+                </a:solidFill>
+                <a:latin typeface="Times New Roman" pitchFamily="34" charset="0"/>
+                <a:ea typeface="Times New Roman" pitchFamily="34" charset="-122"/>
+                <a:cs typeface="Times New Roman" pitchFamily="34" charset="-120"/>
+              </a:rPr>
+              <a:t>References</a:t>
+            </a:r>
+            <a:endParaRPr lang="en-US" sz="3600" dirty="0"/>
+          </a:p>
+        </p:txBody>
+      </p:sp>
+      <p:sp>
+        <p:nvSpPr>
+          <p:cNvPr id="5" name="Text 2"/>
+          <p:cNvSpPr/>
+          <p:nvPr/>
+        </p:nvSpPr>
+        <p:spPr>
+          <a:xfrm>
+            <a:off x="5349240" y="1783080"/>
+            <a:ext cx="6522415" cy="4663440"/>
+          </a:xfrm>
+          <a:prstGeom prst="rect">
+            <a:avLst/>
+          </a:prstGeom>
+          <a:noFill/>
+          <a:ln/>
+        </p:spPr>
+        <p:txBody>
+          <a:bodyPr wrap="square" lIns="0" tIns="0" rIns="0" bIns="0" rtlCol="0" anchor="t"/>
+          <a:lstStyle/>
+          <a:p>
+            <a:pPr algn="l" marL="342900" indent="-342900">
+              <a:spcAft>
+                <a:spcPts val="800"/>
+              </a:spcAft>
+              <a:buSzPct val="100000"/>
+              <a:buChar char="•"/>
+            </a:pPr>
+            <a:r>
+              <a:rPr lang="en-US" sz="1800" dirty="0">
+                <a:solidFill>
+                  <a:srgbClr val="111111"/>
+                </a:solidFill>
+                <a:latin typeface="Calibri" pitchFamily="34" charset="0"/>
+                <a:ea typeface="Calibri" pitchFamily="34" charset="-122"/>
+                <a:cs typeface="Calibri" pitchFamily="34" charset="-120"/>
+              </a:rPr>
+              <a:t>Geography Syllabus for Sixth Forms (Lower and Upper Sixth), MINESEC, 2019 — Module 4 (Population Geography).</a:t>
+            </a:r>
+            <a:endParaRPr lang="en-US" sz="1800" dirty="0"/>
+          </a:p>
+          <a:p>
+            <a:pPr algn="l" marL="342900" indent="-342900">
+              <a:spcAft>
+                <a:spcPts val="800"/>
+              </a:spcAft>
+              <a:buSzPct val="100000"/>
+              <a:buChar char="•"/>
+            </a:pPr>
+            <a:r>
+              <a:rPr lang="en-US" sz="1800" dirty="0">
+                <a:solidFill>
+                  <a:srgbClr val="111111"/>
+                </a:solidFill>
+                <a:latin typeface="Calibri" pitchFamily="34" charset="0"/>
+                <a:ea typeface="Calibri" pitchFamily="34" charset="-122"/>
+                <a:cs typeface="Calibri" pitchFamily="34" charset="-120"/>
+              </a:rPr>
+              <a:t>Teacher's course notes: Mr KAMDEM E., Population Geography (USA), GBHS Garoua, 2026.</a:t>
+            </a:r>
+            <a:endParaRPr lang="en-US" sz="1800" dirty="0"/>
+          </a:p>
+          <a:p>
+            <a:pPr algn="l" marL="342900" indent="-342900">
+              <a:spcAft>
+                <a:spcPts val="800"/>
+              </a:spcAft>
+              <a:buSzPct val="100000"/>
+              <a:buChar char="•"/>
+            </a:pPr>
+            <a:r>
+              <a:rPr lang="en-US" sz="1800" dirty="0">
+                <a:solidFill>
+                  <a:srgbClr val="111111"/>
+                </a:solidFill>
+                <a:latin typeface="Calibri" pitchFamily="34" charset="0"/>
+                <a:ea typeface="Calibri" pitchFamily="34" charset="-122"/>
+                <a:cs typeface="Calibri" pitchFamily="34" charset="-120"/>
+              </a:rPr>
+              <a:t>United Nations, World Population Prospects 2024.</a:t>
+            </a:r>
+            <a:endParaRPr lang="en-US" sz="1800" dirty="0"/>
+          </a:p>
+          <a:p>
+            <a:pPr algn="l" marL="342900" indent="-342900">
+              <a:spcAft>
+                <a:spcPts val="800"/>
+              </a:spcAft>
+              <a:buSzPct val="100000"/>
+              <a:buChar char="•"/>
+            </a:pPr>
+            <a:r>
+              <a:rPr lang="en-US" sz="1800" dirty="0">
+                <a:solidFill>
+                  <a:srgbClr val="111111"/>
+                </a:solidFill>
+                <a:latin typeface="Calibri" pitchFamily="34" charset="0"/>
+                <a:ea typeface="Calibri" pitchFamily="34" charset="-122"/>
+                <a:cs typeface="Calibri" pitchFamily="34" charset="-120"/>
+              </a:rPr>
+              <a:t>Photo, Activity 5: “Imagine a world without trees” by aloshbennett, CC BY 2.0, via Flickr (https://www.flickr.com/photos/13203757@N00/3480223314)</a:t>
+            </a:r>
+            <a:endParaRPr lang="en-US" sz="1800" dirty="0"/>
+          </a:p>
+          <a:p>
+            <a:pPr algn="l" marL="342900" indent="-342900">
+              <a:spcAft>
+                <a:spcPts val="800"/>
+              </a:spcAft>
+              <a:buSzPct val="100000"/>
+              <a:buChar char="•"/>
+            </a:pPr>
+            <a:r>
+              <a:rPr lang="en-US" sz="1800" dirty="0">
+                <a:solidFill>
+                  <a:srgbClr val="111111"/>
+                </a:solidFill>
+                <a:latin typeface="Calibri" pitchFamily="34" charset="0"/>
+                <a:ea typeface="Calibri" pitchFamily="34" charset="-122"/>
+                <a:cs typeface="Calibri" pitchFamily="34" charset="-120"/>
+              </a:rPr>
+              <a:t>Diagrams and animations: drawn for this lesson (Geography Department).</a:t>
+            </a:r>
+            <a:endParaRPr lang="en-US" sz="1800" dirty="0"/>
+          </a:p>
+        </p:txBody>
+      </p:sp>
+      <p:sp>
+        <p:nvSpPr>
+          <p:cNvPr id="25" name="Slide Number Placeholder 0"/>
+          <p:cNvSpPr>
+            <a:spLocks noGrp="1"/>
+          </p:cNvSpPr>
+          <p:nvPr>
+            <p:ph type="sldNum" sz="quarter" idx="4294967295"/>
+          </p:nvPr>
+        </p:nvSpPr>
+        <p:spPr>
+          <a:xfrm>
+            <a:off x="27432" y="91440"/>
+            <a:ext cx="585216" cy="475488"/>
+          </a:xfrm>
+          <a:prstGeom prst="rect">
+            <a:avLst/>
+          </a:prstGeom>
+          <a:extLst>
+            <a:ext uri="{C572A759-6A51-4108-AA02-DFA0A04FC94B}">
+              <ma14:wrappingTextBoxFlag xmlns:ma14="http://schemas.microsoft.com/office/mac/drawingml/2011/main" val="0"/>
+            </a:ext>
+          </a:extLst>
+        </p:spPr>
+        <p:txBody>
+          <a:bodyPr/>
+          <a:lstStyle>
+            <a:lvl1pPr>
+              <a:defRPr sz="2000">
+                <a:solidFill>
+                  <a:srgbClr val="FFFFFF"/>
+                </a:solidFill>
+                <a:latin typeface="Calibri"/>
+                <a:ea typeface="Calibri"/>
+                <a:cs typeface="Calibri"/>
+              </a:defRPr>
+            </a:lvl1pPr>
+          </a:lstStyle>
+          <a:p>
+            <a:pPr algn="ctr"/>
+            <a:fld id="{F7021451-1387-4CA6-816F-3879F97B5CBC}" type="slidenum">
+              <a:rPr b="1" lang="en-US"/>
+              <a:t>60</a:t>
             </a:fld>
             <a:endParaRPr lang="en-US"/>
           </a:p>
